--- a/slides/01-tour-the-app.pptx
+++ b/slides/01-tour-the-app.pptx
@@ -2121,145 +2121,9 @@
           <a:chExt cx="0" cy="0"/>
         </a:xfrm>
       </p:grpSpPr>
-      <p:sp>
-        <p:nvSpPr>
-          <p:cNvPr id="2" name="Text 0"/>
-          <p:cNvSpPr/>
-          <p:nvPr/>
-        </p:nvSpPr>
-        <p:spPr>
-          <a:xfrm>
-            <a:off x="5968901" y="0"/>
-            <a:ext cx="3174950" cy="5143500"/>
-          </a:xfrm>
-          <a:prstGeom prst="rect">
-            <a:avLst/>
-          </a:prstGeom>
-          <a:solidFill>
-            <a:srgbClr val="1A7F37"/>
-          </a:solidFill>
-          <a:ln/>
-        </p:spPr>
-        <p:txBody>
-          <a:bodyPr wrap="square" rtlCol="0" anchor="ctr"/>
-          <a:lstStyle/>
-          <a:p>
-            <a:pPr indent="0" marL="0">
-              <a:buNone/>
-            </a:pPr>
-            <a:endParaRPr lang="en-US" dirty="0"/>
-          </a:p>
-        </p:txBody>
-      </p:sp>
-      <p:sp>
-        <p:nvSpPr>
-          <p:cNvPr id="3" name="Text 1"/>
-          <p:cNvSpPr/>
-          <p:nvPr/>
-        </p:nvSpPr>
-        <p:spPr>
-          <a:xfrm>
-            <a:off x="5939692" y="1269950"/>
-            <a:ext cx="2979319" cy="2159050"/>
-          </a:xfrm>
-          <a:prstGeom prst="rect">
-            <a:avLst/>
-          </a:prstGeom>
-          <a:noFill/>
-          <a:ln/>
-        </p:spPr>
-        <p:txBody>
-          <a:bodyPr wrap="square" lIns="0" tIns="0" rIns="0" bIns="0" rtlCol="0" anchor="t"/>
-          <a:lstStyle/>
-          <a:p>
-            <a:pPr algn="ctr" indent="0" marL="0">
-              <a:lnSpc>
-                <a:spcPts val="17000"/>
-              </a:lnSpc>
-              <a:buNone/>
-            </a:pPr>
-            <a:r>
-              <a:rPr lang="en-US" sz="15000" b="1" dirty="0">
-                <a:solidFill>
-                  <a:srgbClr val="2DA44E"/>
-                </a:solidFill>
-                <a:latin typeface="Arial" pitchFamily="34" charset="0"/>
-                <a:ea typeface="Arial" pitchFamily="34" charset="-122"/>
-                <a:cs typeface="Arial" pitchFamily="34" charset="-120"/>
-              </a:rPr>
-              <a:t>01</a:t>
-            </a:r>
-            <a:endParaRPr lang="en-US" sz="15000" dirty="0"/>
-          </a:p>
-        </p:txBody>
-      </p:sp>
-      <p:sp>
-        <p:nvSpPr>
-          <p:cNvPr id="4" name="Text 2"/>
-          <p:cNvSpPr/>
-          <p:nvPr/>
-        </p:nvSpPr>
-        <p:spPr>
-          <a:xfrm>
-            <a:off x="6069330" y="3682901"/>
-            <a:ext cx="2720340" cy="431899"/>
-          </a:xfrm>
-          <a:prstGeom prst="rect">
-            <a:avLst/>
-          </a:prstGeom>
-          <a:noFill/>
-          <a:ln/>
-        </p:spPr>
-        <p:txBody>
-          <a:bodyPr wrap="square" lIns="0" tIns="0" rIns="0" bIns="0" rtlCol="0" anchor="t"/>
-          <a:lstStyle/>
-          <a:p>
-            <a:pPr algn="ctr" indent="0" marL="0">
-              <a:lnSpc>
-                <a:spcPts val="1700"/>
-              </a:lnSpc>
-              <a:buNone/>
-            </a:pPr>
-            <a:r>
-              <a:rPr lang="en-US" sz="1350" dirty="0">
-                <a:solidFill>
-                  <a:srgbClr val="FFFFFF"/>
-                </a:solidFill>
-                <a:latin typeface="Arial" pitchFamily="34" charset="0"/>
-                <a:ea typeface="Arial" pitchFamily="34" charset="-122"/>
-                <a:cs typeface="Arial" pitchFamily="34" charset="-120"/>
-              </a:rPr>
-              <a:t>GITHUB COPILOT APP</a:t>
-            </a:r>
-            <a:endParaRPr lang="en-US" sz="1350" dirty="0"/>
-          </a:p>
-          <a:p>
-            <a:pPr algn="ctr" indent="0" marL="0">
-              <a:lnSpc>
-                <a:spcPts val="1700"/>
-              </a:lnSpc>
-              <a:buNone/>
-            </a:pPr>
-            <a:r>
-              <a:rPr lang="en-US" sz="1350" dirty="0">
-                <a:solidFill>
-                  <a:srgbClr val="FFFFFF"/>
-                </a:solidFill>
-                <a:latin typeface="Arial" pitchFamily="34" charset="0"/>
-                <a:ea typeface="Arial" pitchFamily="34" charset="-122"/>
-                <a:cs typeface="Arial" pitchFamily="34" charset="-120"/>
-              </a:rPr>
-              <a:t>FOR BEGINNERS</a:t>
-            </a:r>
-            <a:endParaRPr lang="en-US" sz="1350" dirty="0"/>
-          </a:p>
-        </p:txBody>
-      </p:sp>
       <p:pic>
         <p:nvPicPr>
-          <p:cNvPr id="5" name="Image 0" descr="/Users/danwahlin/.copilot/session-state/56a7a0da-def8-48d4-b5e8-0ac3878cb8dd/files/slides-build/icons/FaGithub-FFFFFF.png">
-            <a:hlinkClick r:id="rId2" tooltip="https://github.com/github/copilot-app-for-beginners/tree/main/01-tour-the-app"/>
-          </p:cNvPr>
+          <p:cNvPr id="2" name="Image 0" descr="/Users/danwahlin/.copilot/session-state/56a7a0da-def8-48d4-b5e8-0ac3878cb8dd/files/slides-build/img/grad-title.jpg">    </p:cNvPr>
           <p:cNvPicPr>
             <a:picLocks noChangeAspect="1"/>
           </p:cNvPicPr>
@@ -2273,6 +2137,32 @@
         </p:blipFill>
         <p:spPr>
           <a:xfrm>
+            <a:off x="0" y="0"/>
+            <a:ext cx="9144000" cy="5143500"/>
+          </a:xfrm>
+          <a:prstGeom prst="rect">
+            <a:avLst/>
+          </a:prstGeom>
+        </p:spPr>
+      </p:pic>
+      <p:pic>
+        <p:nvPicPr>
+          <p:cNvPr id="3" name="Image 1" descr="/Users/danwahlin/.copilot/session-state/56a7a0da-def8-48d4-b5e8-0ac3878cb8dd/files/slides-build/icons/FaGithub-1F2328.png">
+            <a:hlinkClick r:id="rId3" tooltip="https://github.com/github/copilot-app-for-beginners/tree/main/01-tour-the-app"/>
+          </p:cNvPr>
+          <p:cNvPicPr>
+            <a:picLocks noChangeAspect="1"/>
+          </p:cNvPicPr>
+          <p:nvPr/>
+        </p:nvPicPr>
+        <p:blipFill>
+          <a:blip r:embed="rId2"/>
+          <a:stretch>
+            <a:fillRect/>
+          </a:stretch>
+        </p:blipFill>
+        <p:spPr>
+          <a:xfrm>
             <a:off x="8635901" y="203150"/>
             <a:ext cx="304800" cy="304800"/>
           </a:xfrm>
@@ -2283,14 +2173,14 @@
       </p:pic>
       <p:sp>
         <p:nvSpPr>
-          <p:cNvPr id="6" name="Text 3"/>
-          <p:cNvSpPr/>
-          <p:nvPr/>
-        </p:nvSpPr>
-        <p:spPr>
-          <a:xfrm>
-            <a:off x="609600" y="1368475"/>
-            <a:ext cx="5052060" cy="209550"/>
+          <p:cNvPr id="4" name="Text 0"/>
+          <p:cNvSpPr/>
+          <p:nvPr/>
+        </p:nvSpPr>
+        <p:spPr>
+          <a:xfrm>
+            <a:off x="1015901" y="1128713"/>
+            <a:ext cx="6088279" cy="209550"/>
           </a:xfrm>
           <a:prstGeom prst="rect">
             <a:avLst/>
@@ -2322,14 +2212,14 @@
       </p:sp>
       <p:sp>
         <p:nvSpPr>
-          <p:cNvPr id="7" name="Text 4"/>
-          <p:cNvSpPr/>
-          <p:nvPr/>
-        </p:nvSpPr>
-        <p:spPr>
-          <a:xfrm>
-            <a:off x="609600" y="1679525"/>
-            <a:ext cx="5052060" cy="584150"/>
+          <p:cNvPr id="5" name="Text 1"/>
+          <p:cNvSpPr/>
+          <p:nvPr/>
+        </p:nvSpPr>
+        <p:spPr>
+          <a:xfrm>
+            <a:off x="1015901" y="1439763"/>
+            <a:ext cx="6088279" cy="609600"/>
           </a:xfrm>
           <a:prstGeom prst="rect">
             <a:avLst/>
@@ -2343,7 +2233,7 @@
           <a:p>
             <a:pPr algn="l" indent="0" marL="0">
               <a:lnSpc>
-                <a:spcPts val="4600"/>
+                <a:spcPts val="4800"/>
               </a:lnSpc>
               <a:spcBef>
                 <a:spcPts val="800"/>
@@ -2351,7 +2241,7 @@
               <a:buNone/>
             </a:pPr>
             <a:r>
-              <a:rPr lang="en-US" sz="4000" b="1" dirty="0">
+              <a:rPr lang="en-US" sz="4200" b="1" dirty="0">
                 <a:solidFill>
                   <a:srgbClr val="1F2328"/>
                 </a:solidFill>
@@ -2361,19 +2251,19 @@
               </a:rPr>
               <a:t>Tour the App</a:t>
             </a:r>
-            <a:endParaRPr lang="en-US" sz="4000" dirty="0"/>
-          </a:p>
-        </p:txBody>
-      </p:sp>
-      <p:sp>
-        <p:nvSpPr>
-          <p:cNvPr id="8" name="Text 5"/>
-          <p:cNvSpPr/>
-          <p:nvPr/>
-        </p:nvSpPr>
-        <p:spPr>
-          <a:xfrm>
-            <a:off x="609600" y="2492276"/>
+            <a:endParaRPr lang="en-US" sz="4200" dirty="0"/>
+          </a:p>
+        </p:txBody>
+      </p:sp>
+      <p:sp>
+        <p:nvSpPr>
+          <p:cNvPr id="6" name="Text 2"/>
+          <p:cNvSpPr/>
+          <p:nvPr/>
+        </p:nvSpPr>
+        <p:spPr>
+          <a:xfrm>
+            <a:off x="1015901" y="2277963"/>
             <a:ext cx="609600" cy="63401"/>
           </a:xfrm>
           <a:prstGeom prst="roundRect">
@@ -2399,14 +2289,14 @@
       </p:sp>
       <p:sp>
         <p:nvSpPr>
-          <p:cNvPr id="9" name="Text 6"/>
-          <p:cNvSpPr/>
-          <p:nvPr/>
-        </p:nvSpPr>
-        <p:spPr>
-          <a:xfrm>
-            <a:off x="609600" y="2784277"/>
-            <a:ext cx="5052060" cy="990749"/>
+          <p:cNvPr id="7" name="Text 3"/>
+          <p:cNvSpPr/>
+          <p:nvPr/>
+        </p:nvSpPr>
+        <p:spPr>
+          <a:xfrm>
+            <a:off x="1015901" y="2569964"/>
+            <a:ext cx="6088279" cy="990749"/>
           </a:xfrm>
           <a:prstGeom prst="rect">
             <a:avLst/>
@@ -2441,21 +2331,21 @@
       </p:sp>
       <p:pic>
         <p:nvPicPr>
-          <p:cNvPr id="10" name="Image 1" descr="/Users/danwahlin/.copilot/session-state/56a7a0da-def8-48d4-b5e8-0ac3878cb8dd/files/slides-build/icons/FaGithub-0969DA.png">    </p:cNvPr>
+          <p:cNvPr id="8" name="Image 2" descr="/Users/danwahlin/.copilot/session-state/56a7a0da-def8-48d4-b5e8-0ac3878cb8dd/files/slides-build/icons/FaGithub-0969DA.png">    </p:cNvPr>
           <p:cNvPicPr>
             <a:picLocks noChangeAspect="1"/>
           </p:cNvPicPr>
           <p:nvPr/>
         </p:nvPicPr>
         <p:blipFill>
-          <a:blip r:embed="rId3"/>
+          <a:blip r:embed="rId4"/>
           <a:stretch>
             <a:fillRect/>
           </a:stretch>
         </p:blipFill>
         <p:spPr>
           <a:xfrm>
-            <a:off x="609600" y="4354562"/>
+            <a:off x="1015901" y="3825776"/>
             <a:ext cx="177701" cy="177701"/>
           </a:xfrm>
           <a:prstGeom prst="rect">
@@ -2465,13 +2355,13 @@
       </p:pic>
       <p:sp>
         <p:nvSpPr>
-          <p:cNvPr id="11" name="Text 7"/>
-          <p:cNvSpPr/>
-          <p:nvPr/>
-        </p:nvSpPr>
-        <p:spPr>
-          <a:xfrm>
-            <a:off x="876151" y="4343400"/>
+          <p:cNvPr id="9" name="Text 4"/>
+          <p:cNvSpPr/>
+          <p:nvPr/>
+        </p:nvSpPr>
+        <p:spPr>
+          <a:xfrm>
+            <a:off x="1282452" y="3814614"/>
             <a:ext cx="3373252" cy="200025"/>
           </a:xfrm>
           <a:prstGeom prst="rect">
@@ -2495,7 +2385,7 @@
                 <a:latin typeface="Arial" pitchFamily="34" charset="0"/>
                 <a:ea typeface="Arial" pitchFamily="34" charset="-122"/>
                 <a:cs typeface="Arial" pitchFamily="34" charset="-120"/>
-                <a:hlinkClick r:id="rId4" invalidUrl="" action="" tgtFrame="" tooltip="https://github.com/github/copilot-app-for-beginners/tree/main/01-tour-the-app" history="1" highlightClick="0" endSnd="0">
+                <a:hlinkClick r:id="rId5" invalidUrl="" action="" tgtFrame="" tooltip="https://github.com/github/copilot-app-for-beginners/tree/main/01-tour-the-app" history="1" highlightClick="0" endSnd="0">
                   <a:extLst>
                     <a:ext uri="{A12FA001-AC4F-418D-AE19-62706E023703}">
                       <ahyp:hlinkClr xmlns:ahyp="http://schemas.microsoft.com/office/drawing/2018/hyperlinkcolor" val="tx"/>
@@ -2643,82 +2533,9 @@
           </a:p>
         </p:txBody>
       </p:sp>
-      <p:sp>
-        <p:nvSpPr>
-          <p:cNvPr id="5" name="Text 3"/>
-          <p:cNvSpPr/>
-          <p:nvPr/>
-        </p:nvSpPr>
-        <p:spPr>
-          <a:xfrm>
-            <a:off x="7340501" y="177701"/>
-            <a:ext cx="1168301" cy="279350"/>
-          </a:xfrm>
-          <a:prstGeom prst="roundRect">
-            <a:avLst>
-              <a:gd name="adj" fmla="val 22731"/>
-            </a:avLst>
-          </a:prstGeom>
-          <a:solidFill>
-            <a:srgbClr val="1A7F37"/>
-          </a:solidFill>
-          <a:ln/>
-        </p:spPr>
-        <p:txBody>
-          <a:bodyPr wrap="square" rtlCol="0" anchor="ctr"/>
-          <a:lstStyle/>
-          <a:p>
-            <a:pPr indent="0" marL="0">
-              <a:buNone/>
-            </a:pPr>
-            <a:endParaRPr lang="en-US" dirty="0"/>
-          </a:p>
-        </p:txBody>
-      </p:sp>
-      <p:sp>
-        <p:nvSpPr>
-          <p:cNvPr id="6" name="Text 4"/>
-          <p:cNvSpPr/>
-          <p:nvPr/>
-        </p:nvSpPr>
-        <p:spPr>
-          <a:xfrm>
-            <a:off x="7461041" y="231577"/>
-            <a:ext cx="927071" cy="171450"/>
-          </a:xfrm>
-          <a:prstGeom prst="rect">
-            <a:avLst/>
-          </a:prstGeom>
-          <a:noFill/>
-          <a:ln/>
-        </p:spPr>
-        <p:txBody>
-          <a:bodyPr wrap="square" lIns="0" tIns="0" rIns="0" bIns="0" rtlCol="0" anchor="t"/>
-          <a:lstStyle/>
-          <a:p>
-            <a:pPr algn="ctr" indent="0" marL="0">
-              <a:buNone/>
-            </a:pPr>
-            <a:r>
-              <a:rPr lang="en-US" sz="1150" b="1" dirty="0">
-                <a:solidFill>
-                  <a:srgbClr val="FFFFFF"/>
-                </a:solidFill>
-                <a:latin typeface="Arial" pitchFamily="34" charset="0"/>
-                <a:ea typeface="Arial" pitchFamily="34" charset="-122"/>
-                <a:cs typeface="Arial" pitchFamily="34" charset="-120"/>
-              </a:rPr>
-              <a:t>CHAPTER 01</a:t>
-            </a:r>
-            <a:endParaRPr lang="en-US" sz="1150" dirty="0"/>
-          </a:p>
-        </p:txBody>
-      </p:sp>
       <p:pic>
         <p:nvPicPr>
-          <p:cNvPr id="7" name="Image 0" descr="/Users/danwahlin/.copilot/session-state/56a7a0da-def8-48d4-b5e8-0ac3878cb8dd/files/slides-build/icons/FaGithub-1F2328.png">
-            <a:hlinkClick r:id="rId2" tooltip="https://github.com/github/copilot-app-for-beginners/tree/main/01-tour-the-app"/>
-          </p:cNvPr>
+          <p:cNvPr id="5" name="Image 0" descr="/Users/danwahlin/.copilot/session-state/56a7a0da-def8-48d4-b5e8-0ac3878cb8dd/files/slides-build/img/grad-corner.png">    </p:cNvPr>
           <p:cNvPicPr>
             <a:picLocks noChangeAspect="1"/>
           </p:cNvPicPr>
@@ -2732,6 +2549,103 @@
         </p:blipFill>
         <p:spPr>
           <a:xfrm>
+            <a:off x="6349901" y="0"/>
+            <a:ext cx="2793950" cy="1308050"/>
+          </a:xfrm>
+          <a:prstGeom prst="rect">
+            <a:avLst/>
+          </a:prstGeom>
+        </p:spPr>
+      </p:pic>
+      <p:sp>
+        <p:nvSpPr>
+          <p:cNvPr id="6" name="Text 3"/>
+          <p:cNvSpPr/>
+          <p:nvPr/>
+        </p:nvSpPr>
+        <p:spPr>
+          <a:xfrm>
+            <a:off x="7340501" y="177701"/>
+            <a:ext cx="1168301" cy="279350"/>
+          </a:xfrm>
+          <a:prstGeom prst="roundRect">
+            <a:avLst>
+              <a:gd name="adj" fmla="val 22731"/>
+            </a:avLst>
+          </a:prstGeom>
+          <a:solidFill>
+            <a:srgbClr val="1A7F37"/>
+          </a:solidFill>
+          <a:ln/>
+        </p:spPr>
+        <p:txBody>
+          <a:bodyPr wrap="square" rtlCol="0" anchor="ctr"/>
+          <a:lstStyle/>
+          <a:p>
+            <a:pPr indent="0" marL="0">
+              <a:buNone/>
+            </a:pPr>
+            <a:endParaRPr lang="en-US" dirty="0"/>
+          </a:p>
+        </p:txBody>
+      </p:sp>
+      <p:sp>
+        <p:nvSpPr>
+          <p:cNvPr id="7" name="Text 4"/>
+          <p:cNvSpPr/>
+          <p:nvPr/>
+        </p:nvSpPr>
+        <p:spPr>
+          <a:xfrm>
+            <a:off x="7461041" y="231577"/>
+            <a:ext cx="927071" cy="171450"/>
+          </a:xfrm>
+          <a:prstGeom prst="rect">
+            <a:avLst/>
+          </a:prstGeom>
+          <a:noFill/>
+          <a:ln/>
+        </p:spPr>
+        <p:txBody>
+          <a:bodyPr wrap="square" lIns="0" tIns="0" rIns="0" bIns="0" rtlCol="0" anchor="t"/>
+          <a:lstStyle/>
+          <a:p>
+            <a:pPr algn="ctr" indent="0" marL="0">
+              <a:buNone/>
+            </a:pPr>
+            <a:r>
+              <a:rPr lang="en-US" sz="1150" b="1" dirty="0">
+                <a:solidFill>
+                  <a:srgbClr val="FFFFFF"/>
+                </a:solidFill>
+                <a:latin typeface="Arial" pitchFamily="34" charset="0"/>
+                <a:ea typeface="Arial" pitchFamily="34" charset="-122"/>
+                <a:cs typeface="Arial" pitchFamily="34" charset="-120"/>
+              </a:rPr>
+              <a:t>CHAPTER 01</a:t>
+            </a:r>
+            <a:endParaRPr lang="en-US" sz="1150" dirty="0"/>
+          </a:p>
+        </p:txBody>
+      </p:sp>
+      <p:pic>
+        <p:nvPicPr>
+          <p:cNvPr id="8" name="Image 1" descr="/Users/danwahlin/.copilot/session-state/56a7a0da-def8-48d4-b5e8-0ac3878cb8dd/files/slides-build/icons/FaGithub-1F2328.png">
+            <a:hlinkClick r:id="rId3" tooltip="https://github.com/github/copilot-app-for-beginners/tree/main/01-tour-the-app"/>
+          </p:cNvPr>
+          <p:cNvPicPr>
+            <a:picLocks noChangeAspect="1"/>
+          </p:cNvPicPr>
+          <p:nvPr/>
+        </p:nvPicPr>
+        <p:blipFill>
+          <a:blip r:embed="rId2"/>
+          <a:stretch>
+            <a:fillRect/>
+          </a:stretch>
+        </p:blipFill>
+        <p:spPr>
+          <a:xfrm>
             <a:off x="8610600" y="165050"/>
             <a:ext cx="304800" cy="304800"/>
           </a:xfrm>
@@ -2742,7 +2656,7 @@
       </p:pic>
       <p:sp>
         <p:nvSpPr>
-          <p:cNvPr id="8" name="Text 5"/>
+          <p:cNvPr id="9" name="Text 5"/>
           <p:cNvSpPr/>
           <p:nvPr/>
         </p:nvSpPr>
@@ -2781,7 +2695,7 @@
       </p:sp>
       <p:sp>
         <p:nvSpPr>
-          <p:cNvPr id="9" name="Text 6"/>
+          <p:cNvPr id="10" name="Text 6"/>
           <p:cNvSpPr/>
           <p:nvPr/>
         </p:nvSpPr>
@@ -2826,7 +2740,7 @@
       </p:sp>
       <p:sp>
         <p:nvSpPr>
-          <p:cNvPr id="10" name="Text 7"/>
+          <p:cNvPr id="11" name="Text 7"/>
           <p:cNvSpPr/>
           <p:nvPr/>
         </p:nvSpPr>
@@ -2858,7 +2772,7 @@
       </p:sp>
       <p:sp>
         <p:nvSpPr>
-          <p:cNvPr id="11" name="Text 8"/>
+          <p:cNvPr id="12" name="Text 8"/>
           <p:cNvSpPr/>
           <p:nvPr/>
         </p:nvSpPr>
@@ -2930,112 +2844,9 @@
           <a:chExt cx="0" cy="0"/>
         </a:xfrm>
       </p:grpSpPr>
-      <p:sp>
-        <p:nvSpPr>
-          <p:cNvPr id="2" name="Text 0"/>
-          <p:cNvSpPr/>
-          <p:nvPr/>
-        </p:nvSpPr>
-        <p:spPr>
-          <a:xfrm>
-            <a:off x="0" y="0"/>
-            <a:ext cx="9144000" cy="76200"/>
-          </a:xfrm>
-          <a:prstGeom prst="rect">
-            <a:avLst/>
-          </a:prstGeom>
-          <a:solidFill>
-            <a:srgbClr val="9A6700"/>
-          </a:solidFill>
-          <a:ln/>
-        </p:spPr>
-        <p:txBody>
-          <a:bodyPr wrap="square" rtlCol="0" anchor="ctr"/>
-          <a:lstStyle/>
-          <a:p>
-            <a:pPr indent="0" marL="0">
-              <a:buNone/>
-            </a:pPr>
-            <a:endParaRPr lang="en-US" dirty="0"/>
-          </a:p>
-        </p:txBody>
-      </p:sp>
-      <p:sp>
-        <p:nvSpPr>
-          <p:cNvPr id="3" name="Text 1"/>
-          <p:cNvSpPr/>
-          <p:nvPr/>
-        </p:nvSpPr>
-        <p:spPr>
-          <a:xfrm>
-            <a:off x="7340501" y="177701"/>
-            <a:ext cx="1168301" cy="279350"/>
-          </a:xfrm>
-          <a:prstGeom prst="roundRect">
-            <a:avLst>
-              <a:gd name="adj" fmla="val 22731"/>
-            </a:avLst>
-          </a:prstGeom>
-          <a:solidFill>
-            <a:srgbClr val="1A7F37"/>
-          </a:solidFill>
-          <a:ln/>
-        </p:spPr>
-        <p:txBody>
-          <a:bodyPr wrap="square" rtlCol="0" anchor="ctr"/>
-          <a:lstStyle/>
-          <a:p>
-            <a:pPr indent="0" marL="0">
-              <a:buNone/>
-            </a:pPr>
-            <a:endParaRPr lang="en-US" dirty="0"/>
-          </a:p>
-        </p:txBody>
-      </p:sp>
-      <p:sp>
-        <p:nvSpPr>
-          <p:cNvPr id="4" name="Text 2"/>
-          <p:cNvSpPr/>
-          <p:nvPr/>
-        </p:nvSpPr>
-        <p:spPr>
-          <a:xfrm>
-            <a:off x="7461041" y="231577"/>
-            <a:ext cx="927071" cy="171450"/>
-          </a:xfrm>
-          <a:prstGeom prst="rect">
-            <a:avLst/>
-          </a:prstGeom>
-          <a:noFill/>
-          <a:ln/>
-        </p:spPr>
-        <p:txBody>
-          <a:bodyPr wrap="square" lIns="0" tIns="0" rIns="0" bIns="0" rtlCol="0" anchor="t"/>
-          <a:lstStyle/>
-          <a:p>
-            <a:pPr algn="ctr" indent="0" marL="0">
-              <a:buNone/>
-            </a:pPr>
-            <a:r>
-              <a:rPr lang="en-US" sz="1150" b="1" dirty="0">
-                <a:solidFill>
-                  <a:srgbClr val="FFFFFF"/>
-                </a:solidFill>
-                <a:latin typeface="Arial" pitchFamily="34" charset="0"/>
-                <a:ea typeface="Arial" pitchFamily="34" charset="-122"/>
-                <a:cs typeface="Arial" pitchFamily="34" charset="-120"/>
-              </a:rPr>
-              <a:t>CHAPTER 01</a:t>
-            </a:r>
-            <a:endParaRPr lang="en-US" sz="1150" dirty="0"/>
-          </a:p>
-        </p:txBody>
-      </p:sp>
       <p:pic>
         <p:nvPicPr>
-          <p:cNvPr id="5" name="Image 0" descr="/Users/danwahlin/.copilot/session-state/56a7a0da-def8-48d4-b5e8-0ac3878cb8dd/files/slides-build/icons/FaGithub-1F2328.png">
-            <a:hlinkClick r:id="rId2" tooltip="https://github.com/github/copilot-app-for-beginners/tree/main/01-tour-the-app"/>
-          </p:cNvPr>
+          <p:cNvPr id="2" name="Image 0" descr="/Users/danwahlin/.copilot/session-state/56a7a0da-def8-48d4-b5e8-0ac3878cb8dd/files/slides-build/img/grad-corner.png">    </p:cNvPr>
           <p:cNvPicPr>
             <a:picLocks noChangeAspect="1"/>
           </p:cNvPicPr>
@@ -3049,6 +2860,103 @@
         </p:blipFill>
         <p:spPr>
           <a:xfrm>
+            <a:off x="6349901" y="0"/>
+            <a:ext cx="2793950" cy="1308050"/>
+          </a:xfrm>
+          <a:prstGeom prst="rect">
+            <a:avLst/>
+          </a:prstGeom>
+        </p:spPr>
+      </p:pic>
+      <p:sp>
+        <p:nvSpPr>
+          <p:cNvPr id="3" name="Text 0"/>
+          <p:cNvSpPr/>
+          <p:nvPr/>
+        </p:nvSpPr>
+        <p:spPr>
+          <a:xfrm>
+            <a:off x="7340501" y="177701"/>
+            <a:ext cx="1168301" cy="279350"/>
+          </a:xfrm>
+          <a:prstGeom prst="roundRect">
+            <a:avLst>
+              <a:gd name="adj" fmla="val 22731"/>
+            </a:avLst>
+          </a:prstGeom>
+          <a:solidFill>
+            <a:srgbClr val="1A7F37"/>
+          </a:solidFill>
+          <a:ln/>
+        </p:spPr>
+        <p:txBody>
+          <a:bodyPr wrap="square" rtlCol="0" anchor="ctr"/>
+          <a:lstStyle/>
+          <a:p>
+            <a:pPr indent="0" marL="0">
+              <a:buNone/>
+            </a:pPr>
+            <a:endParaRPr lang="en-US" dirty="0"/>
+          </a:p>
+        </p:txBody>
+      </p:sp>
+      <p:sp>
+        <p:nvSpPr>
+          <p:cNvPr id="4" name="Text 1"/>
+          <p:cNvSpPr/>
+          <p:nvPr/>
+        </p:nvSpPr>
+        <p:spPr>
+          <a:xfrm>
+            <a:off x="7461041" y="231577"/>
+            <a:ext cx="927071" cy="171450"/>
+          </a:xfrm>
+          <a:prstGeom prst="rect">
+            <a:avLst/>
+          </a:prstGeom>
+          <a:noFill/>
+          <a:ln/>
+        </p:spPr>
+        <p:txBody>
+          <a:bodyPr wrap="square" lIns="0" tIns="0" rIns="0" bIns="0" rtlCol="0" anchor="t"/>
+          <a:lstStyle/>
+          <a:p>
+            <a:pPr algn="ctr" indent="0" marL="0">
+              <a:buNone/>
+            </a:pPr>
+            <a:r>
+              <a:rPr lang="en-US" sz="1150" b="1" dirty="0">
+                <a:solidFill>
+                  <a:srgbClr val="FFFFFF"/>
+                </a:solidFill>
+                <a:latin typeface="Arial" pitchFamily="34" charset="0"/>
+                <a:ea typeface="Arial" pitchFamily="34" charset="-122"/>
+                <a:cs typeface="Arial" pitchFamily="34" charset="-120"/>
+              </a:rPr>
+              <a:t>CHAPTER 01</a:t>
+            </a:r>
+            <a:endParaRPr lang="en-US" sz="1150" dirty="0"/>
+          </a:p>
+        </p:txBody>
+      </p:sp>
+      <p:pic>
+        <p:nvPicPr>
+          <p:cNvPr id="5" name="Image 1" descr="/Users/danwahlin/.copilot/session-state/56a7a0da-def8-48d4-b5e8-0ac3878cb8dd/files/slides-build/icons/FaGithub-1F2328.png">
+            <a:hlinkClick r:id="rId3" tooltip="https://github.com/github/copilot-app-for-beginners/tree/main/01-tour-the-app"/>
+          </p:cNvPr>
+          <p:cNvPicPr>
+            <a:picLocks noChangeAspect="1"/>
+          </p:cNvPicPr>
+          <p:nvPr/>
+        </p:nvPicPr>
+        <p:blipFill>
+          <a:blip r:embed="rId2"/>
+          <a:stretch>
+            <a:fillRect/>
+          </a:stretch>
+        </p:blipFill>
+        <p:spPr>
+          <a:xfrm>
             <a:off x="8610600" y="165050"/>
             <a:ext cx="304800" cy="304800"/>
           </a:xfrm>
@@ -3059,7 +2967,7 @@
       </p:pic>
       <p:sp>
         <p:nvSpPr>
-          <p:cNvPr id="6" name="Text 3"/>
+          <p:cNvPr id="6" name="Text 2"/>
           <p:cNvSpPr/>
           <p:nvPr/>
         </p:nvSpPr>
@@ -3098,7 +3006,7 @@
       </p:sp>
       <p:sp>
         <p:nvSpPr>
-          <p:cNvPr id="7" name="Text 4"/>
+          <p:cNvPr id="7" name="Text 3"/>
           <p:cNvSpPr/>
           <p:nvPr/>
         </p:nvSpPr>
@@ -3143,7 +3051,7 @@
       </p:sp>
       <p:sp>
         <p:nvSpPr>
-          <p:cNvPr id="8" name="Text 5"/>
+          <p:cNvPr id="8" name="Text 4"/>
           <p:cNvSpPr/>
           <p:nvPr/>
         </p:nvSpPr>
@@ -3188,7 +3096,7 @@
       </p:sp>
       <p:sp>
         <p:nvSpPr>
-          <p:cNvPr id="9" name="Text 6"/>
+          <p:cNvPr id="9" name="Text 5"/>
           <p:cNvSpPr/>
           <p:nvPr/>
         </p:nvSpPr>
@@ -3231,63 +3139,7 @@
       </p:sp>
       <p:pic>
         <p:nvPicPr>
-          <p:cNvPr id="10" name="Image 1" descr="/Users/danwahlin/.copilot/session-state/56a7a0da-def8-48d4-b5e8-0ac3878cb8dd/files/slides-build/img/01-producer-control-room-modes.jpg">    </p:cNvPr>
-          <p:cNvPicPr>
-            <a:picLocks noChangeAspect="1"/>
-          </p:cNvPicPr>
-          <p:nvPr/>
-        </p:nvPicPr>
-        <p:blipFill>
-          <a:blip r:embed="rId3"/>
-          <a:stretch>
-            <a:fillRect/>
-          </a:stretch>
-        </p:blipFill>
-        <p:spPr>
-          <a:xfrm>
-            <a:off x="558701" y="1747986"/>
-            <a:ext cx="4089350" cy="2726680"/>
-          </a:xfrm>
-          <a:prstGeom prst="rect">
-            <a:avLst/>
-          </a:prstGeom>
-        </p:spPr>
-      </p:pic>
-      <p:sp>
-        <p:nvSpPr>
-          <p:cNvPr id="11" name="Text 7"/>
-          <p:cNvSpPr/>
-          <p:nvPr/>
-        </p:nvSpPr>
-        <p:spPr>
-          <a:xfrm>
-            <a:off x="5003750" y="1633389"/>
-            <a:ext cx="381000" cy="381000"/>
-          </a:xfrm>
-          <a:prstGeom prst="roundRect">
-            <a:avLst>
-              <a:gd name="adj" fmla="val 23333"/>
-            </a:avLst>
-          </a:prstGeom>
-          <a:solidFill>
-            <a:srgbClr val="DDF4FF"/>
-          </a:solidFill>
-          <a:ln/>
-        </p:spPr>
-        <p:txBody>
-          <a:bodyPr wrap="square" rtlCol="0" anchor="ctr"/>
-          <a:lstStyle/>
-          <a:p>
-            <a:pPr indent="0" marL="0">
-              <a:buNone/>
-            </a:pPr>
-            <a:endParaRPr lang="en-US" dirty="0"/>
-          </a:p>
-        </p:txBody>
-      </p:sp>
-      <p:pic>
-        <p:nvPicPr>
-          <p:cNvPr id="12" name="Image 2" descr="/Users/danwahlin/.copilot/session-state/56a7a0da-def8-48d4-b5e8-0ac3878cb8dd/files/slides-build/icons/GoCommentDiscussion-0969DA.png">    </p:cNvPr>
+          <p:cNvPr id="10" name="Image 2" descr="/Users/danwahlin/.copilot/session-state/56a7a0da-def8-48d4-b5e8-0ac3878cb8dd/files/slides-build/img/01-producer-control-room-modes.jpg">    </p:cNvPr>
           <p:cNvPicPr>
             <a:picLocks noChangeAspect="1"/>
           </p:cNvPicPr>
@@ -3301,8 +3153,8 @@
         </p:blipFill>
         <p:spPr>
           <a:xfrm>
-            <a:off x="5086350" y="1715988"/>
-            <a:ext cx="215801" cy="215801"/>
+            <a:off x="558701" y="1747986"/>
+            <a:ext cx="4089350" cy="2726680"/>
           </a:xfrm>
           <a:prstGeom prst="rect">
             <a:avLst/>
@@ -3311,94 +3163,13 @@
       </p:pic>
       <p:sp>
         <p:nvSpPr>
-          <p:cNvPr id="13" name="Text 8"/>
-          <p:cNvSpPr/>
-          <p:nvPr/>
-        </p:nvSpPr>
-        <p:spPr>
-          <a:xfrm>
-            <a:off x="5537150" y="1597968"/>
-            <a:ext cx="1322219" cy="228600"/>
-          </a:xfrm>
-          <a:prstGeom prst="rect">
-            <a:avLst/>
-          </a:prstGeom>
-          <a:noFill/>
-          <a:ln/>
-        </p:spPr>
-        <p:txBody>
-          <a:bodyPr wrap="square" lIns="0" tIns="0" rIns="0" bIns="0" rtlCol="0" anchor="t"/>
-          <a:lstStyle/>
-          <a:p>
-            <a:pPr algn="l" indent="0" marL="0">
-              <a:buNone/>
-            </a:pPr>
-            <a:r>
-              <a:rPr lang="en-US" sz="1550" b="1" dirty="0">
-                <a:solidFill>
-                  <a:srgbClr val="1F2328"/>
-                </a:solidFill>
-                <a:latin typeface="Arial" pitchFamily="34" charset="0"/>
-                <a:ea typeface="Arial" pitchFamily="34" charset="-122"/>
-                <a:cs typeface="Arial" pitchFamily="34" charset="-120"/>
-              </a:rPr>
-              <a:t>Chat</a:t>
-            </a:r>
-            <a:endParaRPr lang="en-US" sz="1550" dirty="0"/>
-          </a:p>
-        </p:txBody>
-      </p:sp>
-      <p:sp>
-        <p:nvSpPr>
-          <p:cNvPr id="14" name="Text 9"/>
-          <p:cNvSpPr/>
-          <p:nvPr/>
-        </p:nvSpPr>
-        <p:spPr>
-          <a:xfrm>
-            <a:off x="5537150" y="1851868"/>
-            <a:ext cx="1322219" cy="198090"/>
-          </a:xfrm>
-          <a:prstGeom prst="rect">
-            <a:avLst/>
-          </a:prstGeom>
-          <a:noFill/>
-          <a:ln/>
-        </p:spPr>
-        <p:txBody>
-          <a:bodyPr wrap="square" lIns="0" tIns="0" rIns="0" bIns="0" rtlCol="0" anchor="t"/>
-          <a:lstStyle/>
-          <a:p>
-            <a:pPr algn="l" indent="0" marL="0">
-              <a:lnSpc>
-                <a:spcPts val="1560"/>
-              </a:lnSpc>
-              <a:buNone/>
-            </a:pPr>
-            <a:r>
-              <a:rPr lang="en-US" sz="1350" dirty="0">
-                <a:solidFill>
-                  <a:srgbClr val="59636E"/>
-                </a:solidFill>
-                <a:latin typeface="Arial" pitchFamily="34" charset="0"/>
-                <a:ea typeface="Arial" pitchFamily="34" charset="-122"/>
-                <a:cs typeface="Arial" pitchFamily="34" charset="-120"/>
-              </a:rPr>
-              <a:t>A quick question.</a:t>
-            </a:r>
-            <a:endParaRPr lang="en-US" sz="1350" dirty="0"/>
-          </a:p>
-        </p:txBody>
-      </p:sp>
-      <p:sp>
-        <p:nvSpPr>
-          <p:cNvPr id="15" name="Text 10"/>
-          <p:cNvSpPr/>
-          <p:nvPr/>
-        </p:nvSpPr>
-        <p:spPr>
-          <a:xfrm>
-            <a:off x="5003750" y="2491680"/>
+          <p:cNvPr id="11" name="Text 6"/>
+          <p:cNvSpPr/>
+          <p:nvPr/>
+        </p:nvSpPr>
+        <p:spPr>
+          <a:xfrm>
+            <a:off x="5003750" y="1633389"/>
             <a:ext cx="381000" cy="381000"/>
           </a:xfrm>
           <a:prstGeom prst="roundRect">
@@ -3407,7 +3178,7 @@
             </a:avLst>
           </a:prstGeom>
           <a:solidFill>
-            <a:srgbClr val="FBEFFF"/>
+            <a:srgbClr val="DDF4FF"/>
           </a:solidFill>
           <a:ln/>
         </p:spPr>
@@ -3424,7 +3195,7 @@
       </p:sp>
       <p:pic>
         <p:nvPicPr>
-          <p:cNvPr id="16" name="Image 3" descr="/Users/danwahlin/.copilot/session-state/56a7a0da-def8-48d4-b5e8-0ac3878cb8dd/files/slides-build/icons/GoPerson-8250DF.png">    </p:cNvPr>
+          <p:cNvPr id="12" name="Image 3" descr="/Users/danwahlin/.copilot/session-state/56a7a0da-def8-48d4-b5e8-0ac3878cb8dd/files/slides-build/icons/GoCommentDiscussion-0969DA.png">    </p:cNvPr>
           <p:cNvPicPr>
             <a:picLocks noChangeAspect="1"/>
           </p:cNvPicPr>
@@ -3438,7 +3209,7 @@
         </p:blipFill>
         <p:spPr>
           <a:xfrm>
-            <a:off x="5086350" y="2574280"/>
+            <a:off x="5086350" y="1715988"/>
             <a:ext cx="215801" cy="215801"/>
           </a:xfrm>
           <a:prstGeom prst="rect">
@@ -3448,14 +3219,14 @@
       </p:pic>
       <p:sp>
         <p:nvSpPr>
-          <p:cNvPr id="17" name="Text 11"/>
-          <p:cNvSpPr/>
-          <p:nvPr/>
-        </p:nvSpPr>
-        <p:spPr>
-          <a:xfrm>
-            <a:off x="5537150" y="2456259"/>
-            <a:ext cx="1312200" cy="228600"/>
+          <p:cNvPr id="13" name="Text 7"/>
+          <p:cNvSpPr/>
+          <p:nvPr/>
+        </p:nvSpPr>
+        <p:spPr>
+          <a:xfrm>
+            <a:off x="5537150" y="1597968"/>
+            <a:ext cx="1322219" cy="228600"/>
           </a:xfrm>
           <a:prstGeom prst="rect">
             <a:avLst/>
@@ -3479,7 +3250,7 @@
                 <a:ea typeface="Arial" pitchFamily="34" charset="-122"/>
                 <a:cs typeface="Arial" pitchFamily="34" charset="-120"/>
               </a:rPr>
-              <a:t>Interactive</a:t>
+              <a:t>Chat</a:t>
             </a:r>
             <a:endParaRPr lang="en-US" sz="1550" dirty="0"/>
           </a:p>
@@ -3487,14 +3258,14 @@
       </p:sp>
       <p:sp>
         <p:nvSpPr>
-          <p:cNvPr id="18" name="Text 12"/>
-          <p:cNvSpPr/>
-          <p:nvPr/>
-        </p:nvSpPr>
-        <p:spPr>
-          <a:xfrm>
-            <a:off x="5537150" y="2710160"/>
-            <a:ext cx="1312200" cy="198090"/>
+          <p:cNvPr id="14" name="Text 8"/>
+          <p:cNvSpPr/>
+          <p:nvPr/>
+        </p:nvSpPr>
+        <p:spPr>
+          <a:xfrm>
+            <a:off x="5537150" y="1851868"/>
+            <a:ext cx="1322219" cy="198090"/>
           </a:xfrm>
           <a:prstGeom prst="rect">
             <a:avLst/>
@@ -3521,7 +3292,7 @@
                 <a:ea typeface="Arial" pitchFamily="34" charset="-122"/>
                 <a:cs typeface="Arial" pitchFamily="34" charset="-120"/>
               </a:rPr>
-              <a:t>Direct each take.</a:t>
+              <a:t>A quick question.</a:t>
             </a:r>
             <a:endParaRPr lang="en-US" sz="1350" dirty="0"/>
           </a:p>
@@ -3529,13 +3300,13 @@
       </p:sp>
       <p:sp>
         <p:nvSpPr>
-          <p:cNvPr id="19" name="Text 13"/>
-          <p:cNvSpPr/>
-          <p:nvPr/>
-        </p:nvSpPr>
-        <p:spPr>
-          <a:xfrm>
-            <a:off x="5003750" y="3349972"/>
+          <p:cNvPr id="15" name="Text 9"/>
+          <p:cNvSpPr/>
+          <p:nvPr/>
+        </p:nvSpPr>
+        <p:spPr>
+          <a:xfrm>
+            <a:off x="5003750" y="2491680"/>
             <a:ext cx="381000" cy="381000"/>
           </a:xfrm>
           <a:prstGeom prst="roundRect">
@@ -3544,7 +3315,7 @@
             </a:avLst>
           </a:prstGeom>
           <a:solidFill>
-            <a:srgbClr val="DAFBE1"/>
+            <a:srgbClr val="FBEFFF"/>
           </a:solidFill>
           <a:ln/>
         </p:spPr>
@@ -3561,7 +3332,7 @@
       </p:sp>
       <p:pic>
         <p:nvPicPr>
-          <p:cNvPr id="20" name="Image 4" descr="/Users/danwahlin/.copilot/session-state/56a7a0da-def8-48d4-b5e8-0ac3878cb8dd/files/slides-build/icons/GoChecklist-1A7F37.png">    </p:cNvPr>
+          <p:cNvPr id="16" name="Image 4" descr="/Users/danwahlin/.copilot/session-state/56a7a0da-def8-48d4-b5e8-0ac3878cb8dd/files/slides-build/icons/GoPerson-8250DF.png">    </p:cNvPr>
           <p:cNvPicPr>
             <a:picLocks noChangeAspect="1"/>
           </p:cNvPicPr>
@@ -3575,7 +3346,7 @@
         </p:blipFill>
         <p:spPr>
           <a:xfrm>
-            <a:off x="5086350" y="3432572"/>
+            <a:off x="5086350" y="2574280"/>
             <a:ext cx="215801" cy="215801"/>
           </a:xfrm>
           <a:prstGeom prst="rect">
@@ -3585,14 +3356,14 @@
       </p:pic>
       <p:sp>
         <p:nvSpPr>
-          <p:cNvPr id="21" name="Text 14"/>
-          <p:cNvSpPr/>
-          <p:nvPr/>
-        </p:nvSpPr>
-        <p:spPr>
-          <a:xfrm>
-            <a:off x="5537150" y="3314551"/>
-            <a:ext cx="942555" cy="228600"/>
+          <p:cNvPr id="17" name="Text 10"/>
+          <p:cNvSpPr/>
+          <p:nvPr/>
+        </p:nvSpPr>
+        <p:spPr>
+          <a:xfrm>
+            <a:off x="5537150" y="2456259"/>
+            <a:ext cx="1312200" cy="228600"/>
           </a:xfrm>
           <a:prstGeom prst="rect">
             <a:avLst/>
@@ -3616,7 +3387,7 @@
                 <a:ea typeface="Arial" pitchFamily="34" charset="-122"/>
                 <a:cs typeface="Arial" pitchFamily="34" charset="-120"/>
               </a:rPr>
-              <a:t>Plan</a:t>
+              <a:t>Interactive</a:t>
             </a:r>
             <a:endParaRPr lang="en-US" sz="1550" dirty="0"/>
           </a:p>
@@ -3624,14 +3395,14 @@
       </p:sp>
       <p:sp>
         <p:nvSpPr>
-          <p:cNvPr id="22" name="Text 15"/>
-          <p:cNvSpPr/>
-          <p:nvPr/>
-        </p:nvSpPr>
-        <p:spPr>
-          <a:xfrm>
-            <a:off x="5537150" y="3568452"/>
-            <a:ext cx="942555" cy="198090"/>
+          <p:cNvPr id="18" name="Text 11"/>
+          <p:cNvSpPr/>
+          <p:nvPr/>
+        </p:nvSpPr>
+        <p:spPr>
+          <a:xfrm>
+            <a:off x="5537150" y="2710160"/>
+            <a:ext cx="1312200" cy="198090"/>
           </a:xfrm>
           <a:prstGeom prst="rect">
             <a:avLst/>
@@ -3658,7 +3429,7 @@
                 <a:ea typeface="Arial" pitchFamily="34" charset="-122"/>
                 <a:cs typeface="Arial" pitchFamily="34" charset="-120"/>
               </a:rPr>
-              <a:t>Chart it first.</a:t>
+              <a:t>Direct each take.</a:t>
             </a:r>
             <a:endParaRPr lang="en-US" sz="1350" dirty="0"/>
           </a:p>
@@ -3666,13 +3437,13 @@
       </p:sp>
       <p:sp>
         <p:nvSpPr>
-          <p:cNvPr id="23" name="Text 16"/>
-          <p:cNvSpPr/>
-          <p:nvPr/>
-        </p:nvSpPr>
-        <p:spPr>
-          <a:xfrm>
-            <a:off x="5003750" y="4208264"/>
+          <p:cNvPr id="19" name="Text 12"/>
+          <p:cNvSpPr/>
+          <p:nvPr/>
+        </p:nvSpPr>
+        <p:spPr>
+          <a:xfrm>
+            <a:off x="5003750" y="3349972"/>
             <a:ext cx="381000" cy="381000"/>
           </a:xfrm>
           <a:prstGeom prst="roundRect">
@@ -3681,7 +3452,7 @@
             </a:avLst>
           </a:prstGeom>
           <a:solidFill>
-            <a:srgbClr val="FFF1E5"/>
+            <a:srgbClr val="DAFBE1"/>
           </a:solidFill>
           <a:ln/>
         </p:spPr>
@@ -3698,7 +3469,7 @@
       </p:sp>
       <p:pic>
         <p:nvPicPr>
-          <p:cNvPr id="24" name="Image 5" descr="/Users/danwahlin/.copilot/session-state/56a7a0da-def8-48d4-b5e8-0ac3878cb8dd/files/slides-build/icons/GoRocket-BC4C00.png">    </p:cNvPr>
+          <p:cNvPr id="20" name="Image 5" descr="/Users/danwahlin/.copilot/session-state/56a7a0da-def8-48d4-b5e8-0ac3878cb8dd/files/slides-build/icons/GoChecklist-1A7F37.png">    </p:cNvPr>
           <p:cNvPicPr>
             <a:picLocks noChangeAspect="1"/>
           </p:cNvPicPr>
@@ -3712,6 +3483,143 @@
         </p:blipFill>
         <p:spPr>
           <a:xfrm>
+            <a:off x="5086350" y="3432572"/>
+            <a:ext cx="215801" cy="215801"/>
+          </a:xfrm>
+          <a:prstGeom prst="rect">
+            <a:avLst/>
+          </a:prstGeom>
+        </p:spPr>
+      </p:pic>
+      <p:sp>
+        <p:nvSpPr>
+          <p:cNvPr id="21" name="Text 13"/>
+          <p:cNvSpPr/>
+          <p:nvPr/>
+        </p:nvSpPr>
+        <p:spPr>
+          <a:xfrm>
+            <a:off x="5537150" y="3314551"/>
+            <a:ext cx="942555" cy="228600"/>
+          </a:xfrm>
+          <a:prstGeom prst="rect">
+            <a:avLst/>
+          </a:prstGeom>
+          <a:noFill/>
+          <a:ln/>
+        </p:spPr>
+        <p:txBody>
+          <a:bodyPr wrap="square" lIns="0" tIns="0" rIns="0" bIns="0" rtlCol="0" anchor="t"/>
+          <a:lstStyle/>
+          <a:p>
+            <a:pPr algn="l" indent="0" marL="0">
+              <a:buNone/>
+            </a:pPr>
+            <a:r>
+              <a:rPr lang="en-US" sz="1550" b="1" dirty="0">
+                <a:solidFill>
+                  <a:srgbClr val="1F2328"/>
+                </a:solidFill>
+                <a:latin typeface="Arial" pitchFamily="34" charset="0"/>
+                <a:ea typeface="Arial" pitchFamily="34" charset="-122"/>
+                <a:cs typeface="Arial" pitchFamily="34" charset="-120"/>
+              </a:rPr>
+              <a:t>Plan</a:t>
+            </a:r>
+            <a:endParaRPr lang="en-US" sz="1550" dirty="0"/>
+          </a:p>
+        </p:txBody>
+      </p:sp>
+      <p:sp>
+        <p:nvSpPr>
+          <p:cNvPr id="22" name="Text 14"/>
+          <p:cNvSpPr/>
+          <p:nvPr/>
+        </p:nvSpPr>
+        <p:spPr>
+          <a:xfrm>
+            <a:off x="5537150" y="3568452"/>
+            <a:ext cx="942555" cy="198090"/>
+          </a:xfrm>
+          <a:prstGeom prst="rect">
+            <a:avLst/>
+          </a:prstGeom>
+          <a:noFill/>
+          <a:ln/>
+        </p:spPr>
+        <p:txBody>
+          <a:bodyPr wrap="square" lIns="0" tIns="0" rIns="0" bIns="0" rtlCol="0" anchor="t"/>
+          <a:lstStyle/>
+          <a:p>
+            <a:pPr algn="l" indent="0" marL="0">
+              <a:lnSpc>
+                <a:spcPts val="1560"/>
+              </a:lnSpc>
+              <a:buNone/>
+            </a:pPr>
+            <a:r>
+              <a:rPr lang="en-US" sz="1350" dirty="0">
+                <a:solidFill>
+                  <a:srgbClr val="59636E"/>
+                </a:solidFill>
+                <a:latin typeface="Arial" pitchFamily="34" charset="0"/>
+                <a:ea typeface="Arial" pitchFamily="34" charset="-122"/>
+                <a:cs typeface="Arial" pitchFamily="34" charset="-120"/>
+              </a:rPr>
+              <a:t>Chart it first.</a:t>
+            </a:r>
+            <a:endParaRPr lang="en-US" sz="1350" dirty="0"/>
+          </a:p>
+        </p:txBody>
+      </p:sp>
+      <p:sp>
+        <p:nvSpPr>
+          <p:cNvPr id="23" name="Text 15"/>
+          <p:cNvSpPr/>
+          <p:nvPr/>
+        </p:nvSpPr>
+        <p:spPr>
+          <a:xfrm>
+            <a:off x="5003750" y="4208264"/>
+            <a:ext cx="381000" cy="381000"/>
+          </a:xfrm>
+          <a:prstGeom prst="roundRect">
+            <a:avLst>
+              <a:gd name="adj" fmla="val 23333"/>
+            </a:avLst>
+          </a:prstGeom>
+          <a:solidFill>
+            <a:srgbClr val="FFF1E5"/>
+          </a:solidFill>
+          <a:ln/>
+        </p:spPr>
+        <p:txBody>
+          <a:bodyPr wrap="square" rtlCol="0" anchor="ctr"/>
+          <a:lstStyle/>
+          <a:p>
+            <a:pPr indent="0" marL="0">
+              <a:buNone/>
+            </a:pPr>
+            <a:endParaRPr lang="en-US" dirty="0"/>
+          </a:p>
+        </p:txBody>
+      </p:sp>
+      <p:pic>
+        <p:nvPicPr>
+          <p:cNvPr id="24" name="Image 6" descr="/Users/danwahlin/.copilot/session-state/56a7a0da-def8-48d4-b5e8-0ac3878cb8dd/files/slides-build/icons/GoRocket-BC4C00.png">    </p:cNvPr>
+          <p:cNvPicPr>
+            <a:picLocks noChangeAspect="1"/>
+          </p:cNvPicPr>
+          <p:nvPr/>
+        </p:nvPicPr>
+        <p:blipFill>
+          <a:blip r:embed="rId8"/>
+          <a:stretch>
+            <a:fillRect/>
+          </a:stretch>
+        </p:blipFill>
+        <p:spPr>
+          <a:xfrm>
             <a:off x="5086350" y="4290864"/>
             <a:ext cx="215801" cy="215801"/>
           </a:xfrm>
@@ -3722,7 +3630,7 @@
       </p:pic>
       <p:sp>
         <p:nvSpPr>
-          <p:cNvPr id="25" name="Text 17"/>
+          <p:cNvPr id="25" name="Text 16"/>
           <p:cNvSpPr/>
           <p:nvPr/>
         </p:nvSpPr>
@@ -3761,7 +3669,7 @@
       </p:sp>
       <p:sp>
         <p:nvSpPr>
-          <p:cNvPr id="26" name="Text 18"/>
+          <p:cNvPr id="26" name="Text 17"/>
           <p:cNvSpPr/>
           <p:nvPr/>
         </p:nvSpPr>
@@ -3833,112 +3741,9 @@
           <a:chExt cx="0" cy="0"/>
         </a:xfrm>
       </p:grpSpPr>
-      <p:sp>
-        <p:nvSpPr>
-          <p:cNvPr id="2" name="Text 0"/>
-          <p:cNvSpPr/>
-          <p:nvPr/>
-        </p:nvSpPr>
-        <p:spPr>
-          <a:xfrm>
-            <a:off x="0" y="0"/>
-            <a:ext cx="9144000" cy="76200"/>
-          </a:xfrm>
-          <a:prstGeom prst="rect">
-            <a:avLst/>
-          </a:prstGeom>
-          <a:solidFill>
-            <a:srgbClr val="1A7F37"/>
-          </a:solidFill>
-          <a:ln/>
-        </p:spPr>
-        <p:txBody>
-          <a:bodyPr wrap="square" rtlCol="0" anchor="ctr"/>
-          <a:lstStyle/>
-          <a:p>
-            <a:pPr indent="0" marL="0">
-              <a:buNone/>
-            </a:pPr>
-            <a:endParaRPr lang="en-US" dirty="0"/>
-          </a:p>
-        </p:txBody>
-      </p:sp>
-      <p:sp>
-        <p:nvSpPr>
-          <p:cNvPr id="3" name="Text 1"/>
-          <p:cNvSpPr/>
-          <p:nvPr/>
-        </p:nvSpPr>
-        <p:spPr>
-          <a:xfrm>
-            <a:off x="7340501" y="177701"/>
-            <a:ext cx="1168301" cy="279350"/>
-          </a:xfrm>
-          <a:prstGeom prst="roundRect">
-            <a:avLst>
-              <a:gd name="adj" fmla="val 22731"/>
-            </a:avLst>
-          </a:prstGeom>
-          <a:solidFill>
-            <a:srgbClr val="1A7F37"/>
-          </a:solidFill>
-          <a:ln/>
-        </p:spPr>
-        <p:txBody>
-          <a:bodyPr wrap="square" rtlCol="0" anchor="ctr"/>
-          <a:lstStyle/>
-          <a:p>
-            <a:pPr indent="0" marL="0">
-              <a:buNone/>
-            </a:pPr>
-            <a:endParaRPr lang="en-US" dirty="0"/>
-          </a:p>
-        </p:txBody>
-      </p:sp>
-      <p:sp>
-        <p:nvSpPr>
-          <p:cNvPr id="4" name="Text 2"/>
-          <p:cNvSpPr/>
-          <p:nvPr/>
-        </p:nvSpPr>
-        <p:spPr>
-          <a:xfrm>
-            <a:off x="7461041" y="231577"/>
-            <a:ext cx="927071" cy="171450"/>
-          </a:xfrm>
-          <a:prstGeom prst="rect">
-            <a:avLst/>
-          </a:prstGeom>
-          <a:noFill/>
-          <a:ln/>
-        </p:spPr>
-        <p:txBody>
-          <a:bodyPr wrap="square" lIns="0" tIns="0" rIns="0" bIns="0" rtlCol="0" anchor="t"/>
-          <a:lstStyle/>
-          <a:p>
-            <a:pPr algn="ctr" indent="0" marL="0">
-              <a:buNone/>
-            </a:pPr>
-            <a:r>
-              <a:rPr lang="en-US" sz="1150" b="1" dirty="0">
-                <a:solidFill>
-                  <a:srgbClr val="FFFFFF"/>
-                </a:solidFill>
-                <a:latin typeface="Arial" pitchFamily="34" charset="0"/>
-                <a:ea typeface="Arial" pitchFamily="34" charset="-122"/>
-                <a:cs typeface="Arial" pitchFamily="34" charset="-120"/>
-              </a:rPr>
-              <a:t>CHAPTER 01</a:t>
-            </a:r>
-            <a:endParaRPr lang="en-US" sz="1150" dirty="0"/>
-          </a:p>
-        </p:txBody>
-      </p:sp>
       <p:pic>
         <p:nvPicPr>
-          <p:cNvPr id="5" name="Image 0" descr="/Users/danwahlin/.copilot/session-state/56a7a0da-def8-48d4-b5e8-0ac3878cb8dd/files/slides-build/icons/FaGithub-1F2328.png">
-            <a:hlinkClick r:id="rId2" tooltip="https://github.com/github/copilot-app-for-beginners/tree/main/01-tour-the-app"/>
-          </p:cNvPr>
+          <p:cNvPr id="2" name="Image 0" descr="/Users/danwahlin/.copilot/session-state/56a7a0da-def8-48d4-b5e8-0ac3878cb8dd/files/slides-build/img/grad-corner.png">    </p:cNvPr>
           <p:cNvPicPr>
             <a:picLocks noChangeAspect="1"/>
           </p:cNvPicPr>
@@ -3952,6 +3757,103 @@
         </p:blipFill>
         <p:spPr>
           <a:xfrm>
+            <a:off x="6349901" y="0"/>
+            <a:ext cx="2793950" cy="1308050"/>
+          </a:xfrm>
+          <a:prstGeom prst="rect">
+            <a:avLst/>
+          </a:prstGeom>
+        </p:spPr>
+      </p:pic>
+      <p:sp>
+        <p:nvSpPr>
+          <p:cNvPr id="3" name="Text 0"/>
+          <p:cNvSpPr/>
+          <p:nvPr/>
+        </p:nvSpPr>
+        <p:spPr>
+          <a:xfrm>
+            <a:off x="7340501" y="177701"/>
+            <a:ext cx="1168301" cy="279350"/>
+          </a:xfrm>
+          <a:prstGeom prst="roundRect">
+            <a:avLst>
+              <a:gd name="adj" fmla="val 22731"/>
+            </a:avLst>
+          </a:prstGeom>
+          <a:solidFill>
+            <a:srgbClr val="1A7F37"/>
+          </a:solidFill>
+          <a:ln/>
+        </p:spPr>
+        <p:txBody>
+          <a:bodyPr wrap="square" rtlCol="0" anchor="ctr"/>
+          <a:lstStyle/>
+          <a:p>
+            <a:pPr indent="0" marL="0">
+              <a:buNone/>
+            </a:pPr>
+            <a:endParaRPr lang="en-US" dirty="0"/>
+          </a:p>
+        </p:txBody>
+      </p:sp>
+      <p:sp>
+        <p:nvSpPr>
+          <p:cNvPr id="4" name="Text 1"/>
+          <p:cNvSpPr/>
+          <p:nvPr/>
+        </p:nvSpPr>
+        <p:spPr>
+          <a:xfrm>
+            <a:off x="7461041" y="231577"/>
+            <a:ext cx="927071" cy="171450"/>
+          </a:xfrm>
+          <a:prstGeom prst="rect">
+            <a:avLst/>
+          </a:prstGeom>
+          <a:noFill/>
+          <a:ln/>
+        </p:spPr>
+        <p:txBody>
+          <a:bodyPr wrap="square" lIns="0" tIns="0" rIns="0" bIns="0" rtlCol="0" anchor="t"/>
+          <a:lstStyle/>
+          <a:p>
+            <a:pPr algn="ctr" indent="0" marL="0">
+              <a:buNone/>
+            </a:pPr>
+            <a:r>
+              <a:rPr lang="en-US" sz="1150" b="1" dirty="0">
+                <a:solidFill>
+                  <a:srgbClr val="FFFFFF"/>
+                </a:solidFill>
+                <a:latin typeface="Arial" pitchFamily="34" charset="0"/>
+                <a:ea typeface="Arial" pitchFamily="34" charset="-122"/>
+                <a:cs typeface="Arial" pitchFamily="34" charset="-120"/>
+              </a:rPr>
+              <a:t>CHAPTER 01</a:t>
+            </a:r>
+            <a:endParaRPr lang="en-US" sz="1150" dirty="0"/>
+          </a:p>
+        </p:txBody>
+      </p:sp>
+      <p:pic>
+        <p:nvPicPr>
+          <p:cNvPr id="5" name="Image 1" descr="/Users/danwahlin/.copilot/session-state/56a7a0da-def8-48d4-b5e8-0ac3878cb8dd/files/slides-build/icons/FaGithub-1F2328.png">
+            <a:hlinkClick r:id="rId3" tooltip="https://github.com/github/copilot-app-for-beginners/tree/main/01-tour-the-app"/>
+          </p:cNvPr>
+          <p:cNvPicPr>
+            <a:picLocks noChangeAspect="1"/>
+          </p:cNvPicPr>
+          <p:nvPr/>
+        </p:nvPicPr>
+        <p:blipFill>
+          <a:blip r:embed="rId2"/>
+          <a:stretch>
+            <a:fillRect/>
+          </a:stretch>
+        </p:blipFill>
+        <p:spPr>
+          <a:xfrm>
             <a:off x="8610600" y="165050"/>
             <a:ext cx="304800" cy="304800"/>
           </a:xfrm>
@@ -3962,7 +3864,7 @@
       </p:pic>
       <p:sp>
         <p:nvSpPr>
-          <p:cNvPr id="6" name="Text 3"/>
+          <p:cNvPr id="6" name="Text 2"/>
           <p:cNvSpPr/>
           <p:nvPr/>
         </p:nvSpPr>
@@ -4001,7 +3903,7 @@
       </p:sp>
       <p:sp>
         <p:nvSpPr>
-          <p:cNvPr id="7" name="Text 4"/>
+          <p:cNvPr id="7" name="Text 3"/>
           <p:cNvSpPr/>
           <p:nvPr/>
         </p:nvSpPr>
@@ -4046,7 +3948,7 @@
       </p:sp>
       <p:sp>
         <p:nvSpPr>
-          <p:cNvPr id="8" name="Text 5"/>
+          <p:cNvPr id="8" name="Text 4"/>
           <p:cNvSpPr/>
           <p:nvPr/>
         </p:nvSpPr>
@@ -4082,7 +3984,7 @@
       </p:sp>
       <p:sp>
         <p:nvSpPr>
-          <p:cNvPr id="9" name="Text 6"/>
+          <p:cNvPr id="9" name="Text 5"/>
           <p:cNvSpPr/>
           <p:nvPr/>
         </p:nvSpPr>
@@ -4114,487 +4016,7 @@
       </p:sp>
       <p:pic>
         <p:nvPicPr>
-          <p:cNvPr id="10" name="Image 1" descr="/Users/danwahlin/.copilot/session-state/56a7a0da-def8-48d4-b5e8-0ac3878cb8dd/files/slides-build/icons/GoCommentDiscussion-0969DA.png">    </p:cNvPr>
-          <p:cNvPicPr>
-            <a:picLocks noChangeAspect="1"/>
-          </p:cNvPicPr>
-          <p:nvPr/>
-        </p:nvPicPr>
-        <p:blipFill>
-          <a:blip r:embed="rId3"/>
-          <a:stretch>
-            <a:fillRect/>
-          </a:stretch>
-        </p:blipFill>
-        <p:spPr>
-          <a:xfrm>
-            <a:off x="777776" y="1514326"/>
-            <a:ext cx="215801" cy="215801"/>
-          </a:xfrm>
-          <a:prstGeom prst="rect">
-            <a:avLst/>
-          </a:prstGeom>
-        </p:spPr>
-      </p:pic>
-      <p:sp>
-        <p:nvSpPr>
-          <p:cNvPr id="11" name="Text 7"/>
-          <p:cNvSpPr/>
-          <p:nvPr/>
-        </p:nvSpPr>
-        <p:spPr>
-          <a:xfrm>
-            <a:off x="1190476" y="1507927"/>
-            <a:ext cx="1330416" cy="228600"/>
-          </a:xfrm>
-          <a:prstGeom prst="rect">
-            <a:avLst/>
-          </a:prstGeom>
-          <a:noFill/>
-          <a:ln/>
-        </p:spPr>
-        <p:txBody>
-          <a:bodyPr wrap="square" lIns="0" tIns="0" rIns="0" bIns="0" rtlCol="0" anchor="t"/>
-          <a:lstStyle/>
-          <a:p>
-            <a:pPr algn="l" indent="0" marL="0">
-              <a:lnSpc>
-                <a:spcPts val="1800"/>
-              </a:lnSpc>
-              <a:buNone/>
-            </a:pPr>
-            <a:r>
-              <a:rPr lang="en-US" sz="1650" b="1" dirty="0">
-                <a:solidFill>
-                  <a:srgbClr val="1F2328"/>
-                </a:solidFill>
-                <a:latin typeface="Arial" pitchFamily="34" charset="0"/>
-                <a:ea typeface="Arial" pitchFamily="34" charset="-122"/>
-                <a:cs typeface="Arial" pitchFamily="34" charset="-120"/>
-              </a:rPr>
-              <a:t>Chat session</a:t>
-            </a:r>
-            <a:endParaRPr lang="en-US" sz="1650" dirty="0"/>
-          </a:p>
-        </p:txBody>
-      </p:sp>
-      <p:sp>
-        <p:nvSpPr>
-          <p:cNvPr id="12" name="Text 8"/>
-          <p:cNvSpPr/>
-          <p:nvPr/>
-        </p:nvSpPr>
-        <p:spPr>
-          <a:xfrm>
-            <a:off x="695176" y="1968847"/>
-            <a:ext cx="57150" cy="57150"/>
-          </a:xfrm>
-          <a:prstGeom prst="roundRect">
-            <a:avLst>
-              <a:gd name="adj" fmla="val 1600000"/>
-            </a:avLst>
-          </a:prstGeom>
-          <a:solidFill>
-            <a:srgbClr val="818B98"/>
-          </a:solidFill>
-          <a:ln/>
-        </p:spPr>
-        <p:txBody>
-          <a:bodyPr wrap="square" rtlCol="0" anchor="ctr"/>
-          <a:lstStyle/>
-          <a:p>
-            <a:pPr indent="0" marL="0">
-              <a:buNone/>
-            </a:pPr>
-            <a:endParaRPr lang="en-US" dirty="0"/>
-          </a:p>
-        </p:txBody>
-      </p:sp>
-      <p:sp>
-        <p:nvSpPr>
-          <p:cNvPr id="13" name="Text 9"/>
-          <p:cNvSpPr/>
-          <p:nvPr/>
-        </p:nvSpPr>
-        <p:spPr>
-          <a:xfrm>
-            <a:off x="853827" y="1888927"/>
-            <a:ext cx="2246558" cy="207020"/>
-          </a:xfrm>
-          <a:prstGeom prst="rect">
-            <a:avLst/>
-          </a:prstGeom>
-          <a:noFill/>
-          <a:ln/>
-        </p:spPr>
-        <p:txBody>
-          <a:bodyPr wrap="square" lIns="0" tIns="0" rIns="0" bIns="0" rtlCol="0" anchor="t"/>
-          <a:lstStyle/>
-          <a:p>
-            <a:pPr algn="l" indent="0" marL="0">
-              <a:lnSpc>
-                <a:spcPts val="1630"/>
-              </a:lnSpc>
-              <a:buNone/>
-            </a:pPr>
-            <a:r>
-              <a:rPr lang="en-US" sz="1400" dirty="0">
-                <a:solidFill>
-                  <a:srgbClr val="59636E"/>
-                </a:solidFill>
-                <a:latin typeface="Arial" pitchFamily="34" charset="0"/>
-                <a:ea typeface="Arial" pitchFamily="34" charset="-122"/>
-                <a:cs typeface="Arial" pitchFamily="34" charset="-120"/>
-              </a:rPr>
-              <a:t>Ask, brainstorm, summarize</a:t>
-            </a:r>
-            <a:endParaRPr lang="en-US" sz="1400" dirty="0"/>
-          </a:p>
-        </p:txBody>
-      </p:sp>
-      <p:sp>
-        <p:nvSpPr>
-          <p:cNvPr id="14" name="Text 10"/>
-          <p:cNvSpPr/>
-          <p:nvPr/>
-        </p:nvSpPr>
-        <p:spPr>
-          <a:xfrm>
-            <a:off x="695176" y="2239268"/>
-            <a:ext cx="57150" cy="57150"/>
-          </a:xfrm>
-          <a:prstGeom prst="roundRect">
-            <a:avLst>
-              <a:gd name="adj" fmla="val 1600000"/>
-            </a:avLst>
-          </a:prstGeom>
-          <a:solidFill>
-            <a:srgbClr val="818B98"/>
-          </a:solidFill>
-          <a:ln/>
-        </p:spPr>
-        <p:txBody>
-          <a:bodyPr wrap="square" rtlCol="0" anchor="ctr"/>
-          <a:lstStyle/>
-          <a:p>
-            <a:pPr indent="0" marL="0">
-              <a:buNone/>
-            </a:pPr>
-            <a:endParaRPr lang="en-US" dirty="0"/>
-          </a:p>
-        </p:txBody>
-      </p:sp>
-      <p:sp>
-        <p:nvSpPr>
-          <p:cNvPr id="15" name="Text 11"/>
-          <p:cNvSpPr/>
-          <p:nvPr/>
-        </p:nvSpPr>
-        <p:spPr>
-          <a:xfrm>
-            <a:off x="853827" y="2159347"/>
-            <a:ext cx="1803591" cy="207020"/>
-          </a:xfrm>
-          <a:prstGeom prst="rect">
-            <a:avLst/>
-          </a:prstGeom>
-          <a:noFill/>
-          <a:ln/>
-        </p:spPr>
-        <p:txBody>
-          <a:bodyPr wrap="square" lIns="0" tIns="0" rIns="0" bIns="0" rtlCol="0" anchor="t"/>
-          <a:lstStyle/>
-          <a:p>
-            <a:pPr algn="l" indent="0" marL="0">
-              <a:lnSpc>
-                <a:spcPts val="1630"/>
-              </a:lnSpc>
-              <a:buNone/>
-            </a:pPr>
-            <a:r>
-              <a:rPr lang="en-US" sz="1400" b="1" dirty="0">
-                <a:solidFill>
-                  <a:srgbClr val="59636E"/>
-                </a:solidFill>
-                <a:latin typeface="Arial" pitchFamily="34" charset="0"/>
-                <a:ea typeface="Arial" pitchFamily="34" charset="-122"/>
-                <a:cs typeface="Arial" pitchFamily="34" charset="-120"/>
-              </a:rPr>
-              <a:t>No</a:t>
-            </a:r>
-            <a:pPr algn="l" indent="0" marL="0">
-              <a:lnSpc>
-                <a:spcPts val="1630"/>
-              </a:lnSpc>
-              <a:buNone/>
-            </a:pPr>
-            <a:r>
-              <a:rPr lang="en-US" sz="1400" dirty="0">
-                <a:solidFill>
-                  <a:srgbClr val="59636E"/>
-                </a:solidFill>
-                <a:latin typeface="Arial" pitchFamily="34" charset="0"/>
-                <a:ea typeface="Arial" pitchFamily="34" charset="-122"/>
-                <a:cs typeface="Arial" pitchFamily="34" charset="-120"/>
-              </a:rPr>
-              <a:t> branch or worktree</a:t>
-            </a:r>
-            <a:endParaRPr lang="en-US" sz="1400" dirty="0"/>
-          </a:p>
-        </p:txBody>
-      </p:sp>
-      <p:sp>
-        <p:nvSpPr>
-          <p:cNvPr id="16" name="Text 12"/>
-          <p:cNvSpPr/>
-          <p:nvPr/>
-        </p:nvSpPr>
-        <p:spPr>
-          <a:xfrm>
-            <a:off x="695176" y="2509689"/>
-            <a:ext cx="57150" cy="57150"/>
-          </a:xfrm>
-          <a:prstGeom prst="roundRect">
-            <a:avLst>
-              <a:gd name="adj" fmla="val 1600000"/>
-            </a:avLst>
-          </a:prstGeom>
-          <a:solidFill>
-            <a:srgbClr val="818B98"/>
-          </a:solidFill>
-          <a:ln/>
-        </p:spPr>
-        <p:txBody>
-          <a:bodyPr wrap="square" rtlCol="0" anchor="ctr"/>
-          <a:lstStyle/>
-          <a:p>
-            <a:pPr indent="0" marL="0">
-              <a:buNone/>
-            </a:pPr>
-            <a:endParaRPr lang="en-US" dirty="0"/>
-          </a:p>
-        </p:txBody>
-      </p:sp>
-      <p:sp>
-        <p:nvSpPr>
-          <p:cNvPr id="17" name="Text 13"/>
-          <p:cNvSpPr/>
-          <p:nvPr/>
-        </p:nvSpPr>
-        <p:spPr>
-          <a:xfrm>
-            <a:off x="853827" y="2429768"/>
-            <a:ext cx="1521690" cy="207020"/>
-          </a:xfrm>
-          <a:prstGeom prst="rect">
-            <a:avLst/>
-          </a:prstGeom>
-          <a:noFill/>
-          <a:ln/>
-        </p:spPr>
-        <p:txBody>
-          <a:bodyPr wrap="square" lIns="0" tIns="0" rIns="0" bIns="0" rtlCol="0" anchor="t"/>
-          <a:lstStyle/>
-          <a:p>
-            <a:pPr algn="l" indent="0" marL="0">
-              <a:lnSpc>
-                <a:spcPts val="1630"/>
-              </a:lnSpc>
-              <a:buNone/>
-            </a:pPr>
-            <a:r>
-              <a:rPr lang="en-US" sz="1400" dirty="0">
-                <a:solidFill>
-                  <a:srgbClr val="59636E"/>
-                </a:solidFill>
-                <a:latin typeface="Arial" pitchFamily="34" charset="0"/>
-                <a:ea typeface="Arial" pitchFamily="34" charset="-122"/>
-                <a:cs typeface="Arial" pitchFamily="34" charset="-120"/>
-              </a:rPr>
-              <a:t>Start with </a:t>
-            </a:r>
-            <a:pPr algn="l" indent="0" marL="0">
-              <a:lnSpc>
-                <a:spcPts val="1630"/>
-              </a:lnSpc>
-              <a:buNone/>
-            </a:pPr>
-            <a:r>
-              <a:rPr lang="en-US" sz="1400" b="1" dirty="0">
-                <a:solidFill>
-                  <a:srgbClr val="59636E"/>
-                </a:solidFill>
-                <a:latin typeface="Arial" pitchFamily="34" charset="0"/>
-                <a:ea typeface="Arial" pitchFamily="34" charset="-122"/>
-                <a:cs typeface="Arial" pitchFamily="34" charset="-120"/>
-              </a:rPr>
-              <a:t>+</a:t>
-            </a:r>
-            <a:pPr algn="l" indent="0" marL="0">
-              <a:lnSpc>
-                <a:spcPts val="1630"/>
-              </a:lnSpc>
-              <a:buNone/>
-            </a:pPr>
-            <a:r>
-              <a:rPr lang="en-US" sz="1400" dirty="0">
-                <a:solidFill>
-                  <a:srgbClr val="59636E"/>
-                </a:solidFill>
-                <a:latin typeface="Arial" pitchFamily="34" charset="0"/>
-                <a:ea typeface="Arial" pitchFamily="34" charset="-122"/>
-                <a:cs typeface="Arial" pitchFamily="34" charset="-120"/>
-              </a:rPr>
-              <a:t> &gt; </a:t>
-            </a:r>
-            <a:pPr algn="l" indent="0" marL="0">
-              <a:lnSpc>
-                <a:spcPts val="1630"/>
-              </a:lnSpc>
-              <a:buNone/>
-            </a:pPr>
-            <a:r>
-              <a:rPr lang="en-US" sz="1400" b="1" dirty="0">
-                <a:solidFill>
-                  <a:srgbClr val="59636E"/>
-                </a:solidFill>
-                <a:latin typeface="Arial" pitchFamily="34" charset="0"/>
-                <a:ea typeface="Arial" pitchFamily="34" charset="-122"/>
-                <a:cs typeface="Arial" pitchFamily="34" charset="-120"/>
-              </a:rPr>
-              <a:t>Chat</a:t>
-            </a:r>
-            <a:endParaRPr lang="en-US" sz="1400" dirty="0"/>
-          </a:p>
-        </p:txBody>
-      </p:sp>
-      <p:sp>
-        <p:nvSpPr>
-          <p:cNvPr id="18" name="Text 14"/>
-          <p:cNvSpPr/>
-          <p:nvPr/>
-        </p:nvSpPr>
-        <p:spPr>
-          <a:xfrm>
-            <a:off x="695176" y="3445073"/>
-            <a:ext cx="3587948" cy="939552"/>
-          </a:xfrm>
-          <a:prstGeom prst="roundRect">
-            <a:avLst>
-              <a:gd name="adj" fmla="val 8110"/>
-            </a:avLst>
-          </a:prstGeom>
-          <a:solidFill>
-            <a:srgbClr val="FFFFFF"/>
-          </a:solidFill>
-          <a:ln/>
-        </p:spPr>
-        <p:txBody>
-          <a:bodyPr wrap="square" rtlCol="0" anchor="ctr"/>
-          <a:lstStyle/>
-          <a:p>
-            <a:pPr indent="0" marL="0">
-              <a:buNone/>
-            </a:pPr>
-            <a:endParaRPr lang="en-US" dirty="0"/>
-          </a:p>
-        </p:txBody>
-      </p:sp>
-      <p:sp>
-        <p:nvSpPr>
-          <p:cNvPr id="19" name="Shape 15"/>
-          <p:cNvSpPr/>
-          <p:nvPr/>
-        </p:nvSpPr>
-        <p:spPr>
-          <a:xfrm>
-            <a:off x="695176" y="3449836"/>
-            <a:ext cx="3587948" cy="0"/>
-          </a:xfrm>
-          <a:prstGeom prst="line">
-            <a:avLst/>
-          </a:prstGeom>
-          <a:noFill/>
-          <a:ln w="9525">
-            <a:solidFill>
-              <a:srgbClr val="9CD7FF"/>
-            </a:solidFill>
-            <a:prstDash val="solid"/>
-          </a:ln>
-        </p:spPr>
-      </p:sp>
-      <p:sp>
-        <p:nvSpPr>
-          <p:cNvPr id="20" name="Shape 16"/>
-          <p:cNvSpPr/>
-          <p:nvPr/>
-        </p:nvSpPr>
-        <p:spPr>
-          <a:xfrm>
-            <a:off x="4278362" y="3445073"/>
-            <a:ext cx="0" cy="939552"/>
-          </a:xfrm>
-          <a:prstGeom prst="line">
-            <a:avLst/>
-          </a:prstGeom>
-          <a:noFill/>
-          <a:ln w="9525">
-            <a:solidFill>
-              <a:srgbClr val="9CD7FF"/>
-            </a:solidFill>
-            <a:prstDash val="solid"/>
-          </a:ln>
-        </p:spPr>
-      </p:sp>
-      <p:sp>
-        <p:nvSpPr>
-          <p:cNvPr id="21" name="Shape 17"/>
-          <p:cNvSpPr/>
-          <p:nvPr/>
-        </p:nvSpPr>
-        <p:spPr>
-          <a:xfrm>
-            <a:off x="695176" y="4379863"/>
-            <a:ext cx="3587948" cy="0"/>
-          </a:xfrm>
-          <a:prstGeom prst="line">
-            <a:avLst/>
-          </a:prstGeom>
-          <a:noFill/>
-          <a:ln w="9525">
-            <a:solidFill>
-              <a:srgbClr val="9CD7FF"/>
-            </a:solidFill>
-            <a:prstDash val="solid"/>
-          </a:ln>
-        </p:spPr>
-      </p:sp>
-      <p:sp>
-        <p:nvSpPr>
-          <p:cNvPr id="22" name="Shape 18"/>
-          <p:cNvSpPr/>
-          <p:nvPr/>
-        </p:nvSpPr>
-        <p:spPr>
-          <a:xfrm>
-            <a:off x="718989" y="3445073"/>
-            <a:ext cx="0" cy="939552"/>
-          </a:xfrm>
-          <a:prstGeom prst="line">
-            <a:avLst/>
-          </a:prstGeom>
-          <a:noFill/>
-          <a:ln w="47625">
-            <a:solidFill>
-              <a:srgbClr val="0969DA"/>
-            </a:solidFill>
-            <a:prstDash val="solid"/>
-          </a:ln>
-        </p:spPr>
-      </p:sp>
-      <p:pic>
-        <p:nvPicPr>
-          <p:cNvPr id="23" name="Image 2" descr="/Users/danwahlin/.copilot/session-state/56a7a0da-def8-48d4-b5e8-0ac3878cb8dd/files/slides-build/icons/GoCopilot-0969DA.png">    </p:cNvPr>
+          <p:cNvPr id="10" name="Image 2" descr="/Users/danwahlin/.copilot/session-state/56a7a0da-def8-48d4-b5e8-0ac3878cb8dd/files/slides-build/icons/GoCommentDiscussion-0969DA.png">    </p:cNvPr>
           <p:cNvPicPr>
             <a:picLocks noChangeAspect="1"/>
           </p:cNvPicPr>
@@ -4608,6 +4030,486 @@
         </p:blipFill>
         <p:spPr>
           <a:xfrm>
+            <a:off x="777776" y="1514326"/>
+            <a:ext cx="215801" cy="215801"/>
+          </a:xfrm>
+          <a:prstGeom prst="rect">
+            <a:avLst/>
+          </a:prstGeom>
+        </p:spPr>
+      </p:pic>
+      <p:sp>
+        <p:nvSpPr>
+          <p:cNvPr id="11" name="Text 6"/>
+          <p:cNvSpPr/>
+          <p:nvPr/>
+        </p:nvSpPr>
+        <p:spPr>
+          <a:xfrm>
+            <a:off x="1190476" y="1507927"/>
+            <a:ext cx="1330416" cy="228600"/>
+          </a:xfrm>
+          <a:prstGeom prst="rect">
+            <a:avLst/>
+          </a:prstGeom>
+          <a:noFill/>
+          <a:ln/>
+        </p:spPr>
+        <p:txBody>
+          <a:bodyPr wrap="square" lIns="0" tIns="0" rIns="0" bIns="0" rtlCol="0" anchor="t"/>
+          <a:lstStyle/>
+          <a:p>
+            <a:pPr algn="l" indent="0" marL="0">
+              <a:lnSpc>
+                <a:spcPts val="1800"/>
+              </a:lnSpc>
+              <a:buNone/>
+            </a:pPr>
+            <a:r>
+              <a:rPr lang="en-US" sz="1650" b="1" dirty="0">
+                <a:solidFill>
+                  <a:srgbClr val="1F2328"/>
+                </a:solidFill>
+                <a:latin typeface="Arial" pitchFamily="34" charset="0"/>
+                <a:ea typeface="Arial" pitchFamily="34" charset="-122"/>
+                <a:cs typeface="Arial" pitchFamily="34" charset="-120"/>
+              </a:rPr>
+              <a:t>Chat session</a:t>
+            </a:r>
+            <a:endParaRPr lang="en-US" sz="1650" dirty="0"/>
+          </a:p>
+        </p:txBody>
+      </p:sp>
+      <p:sp>
+        <p:nvSpPr>
+          <p:cNvPr id="12" name="Text 7"/>
+          <p:cNvSpPr/>
+          <p:nvPr/>
+        </p:nvSpPr>
+        <p:spPr>
+          <a:xfrm>
+            <a:off x="695176" y="1968847"/>
+            <a:ext cx="57150" cy="57150"/>
+          </a:xfrm>
+          <a:prstGeom prst="roundRect">
+            <a:avLst>
+              <a:gd name="adj" fmla="val 1600000"/>
+            </a:avLst>
+          </a:prstGeom>
+          <a:solidFill>
+            <a:srgbClr val="818B98"/>
+          </a:solidFill>
+          <a:ln/>
+        </p:spPr>
+        <p:txBody>
+          <a:bodyPr wrap="square" rtlCol="0" anchor="ctr"/>
+          <a:lstStyle/>
+          <a:p>
+            <a:pPr indent="0" marL="0">
+              <a:buNone/>
+            </a:pPr>
+            <a:endParaRPr lang="en-US" dirty="0"/>
+          </a:p>
+        </p:txBody>
+      </p:sp>
+      <p:sp>
+        <p:nvSpPr>
+          <p:cNvPr id="13" name="Text 8"/>
+          <p:cNvSpPr/>
+          <p:nvPr/>
+        </p:nvSpPr>
+        <p:spPr>
+          <a:xfrm>
+            <a:off x="853827" y="1888927"/>
+            <a:ext cx="2246558" cy="207020"/>
+          </a:xfrm>
+          <a:prstGeom prst="rect">
+            <a:avLst/>
+          </a:prstGeom>
+          <a:noFill/>
+          <a:ln/>
+        </p:spPr>
+        <p:txBody>
+          <a:bodyPr wrap="square" lIns="0" tIns="0" rIns="0" bIns="0" rtlCol="0" anchor="t"/>
+          <a:lstStyle/>
+          <a:p>
+            <a:pPr algn="l" indent="0" marL="0">
+              <a:lnSpc>
+                <a:spcPts val="1630"/>
+              </a:lnSpc>
+              <a:buNone/>
+            </a:pPr>
+            <a:r>
+              <a:rPr lang="en-US" sz="1400" dirty="0">
+                <a:solidFill>
+                  <a:srgbClr val="59636E"/>
+                </a:solidFill>
+                <a:latin typeface="Arial" pitchFamily="34" charset="0"/>
+                <a:ea typeface="Arial" pitchFamily="34" charset="-122"/>
+                <a:cs typeface="Arial" pitchFamily="34" charset="-120"/>
+              </a:rPr>
+              <a:t>Ask, brainstorm, summarize</a:t>
+            </a:r>
+            <a:endParaRPr lang="en-US" sz="1400" dirty="0"/>
+          </a:p>
+        </p:txBody>
+      </p:sp>
+      <p:sp>
+        <p:nvSpPr>
+          <p:cNvPr id="14" name="Text 9"/>
+          <p:cNvSpPr/>
+          <p:nvPr/>
+        </p:nvSpPr>
+        <p:spPr>
+          <a:xfrm>
+            <a:off x="695176" y="2239268"/>
+            <a:ext cx="57150" cy="57150"/>
+          </a:xfrm>
+          <a:prstGeom prst="roundRect">
+            <a:avLst>
+              <a:gd name="adj" fmla="val 1600000"/>
+            </a:avLst>
+          </a:prstGeom>
+          <a:solidFill>
+            <a:srgbClr val="818B98"/>
+          </a:solidFill>
+          <a:ln/>
+        </p:spPr>
+        <p:txBody>
+          <a:bodyPr wrap="square" rtlCol="0" anchor="ctr"/>
+          <a:lstStyle/>
+          <a:p>
+            <a:pPr indent="0" marL="0">
+              <a:buNone/>
+            </a:pPr>
+            <a:endParaRPr lang="en-US" dirty="0"/>
+          </a:p>
+        </p:txBody>
+      </p:sp>
+      <p:sp>
+        <p:nvSpPr>
+          <p:cNvPr id="15" name="Text 10"/>
+          <p:cNvSpPr/>
+          <p:nvPr/>
+        </p:nvSpPr>
+        <p:spPr>
+          <a:xfrm>
+            <a:off x="853827" y="2159347"/>
+            <a:ext cx="1803591" cy="207020"/>
+          </a:xfrm>
+          <a:prstGeom prst="rect">
+            <a:avLst/>
+          </a:prstGeom>
+          <a:noFill/>
+          <a:ln/>
+        </p:spPr>
+        <p:txBody>
+          <a:bodyPr wrap="square" lIns="0" tIns="0" rIns="0" bIns="0" rtlCol="0" anchor="t"/>
+          <a:lstStyle/>
+          <a:p>
+            <a:pPr algn="l" indent="0" marL="0">
+              <a:lnSpc>
+                <a:spcPts val="1630"/>
+              </a:lnSpc>
+              <a:buNone/>
+            </a:pPr>
+            <a:r>
+              <a:rPr lang="en-US" sz="1400" b="1" dirty="0">
+                <a:solidFill>
+                  <a:srgbClr val="59636E"/>
+                </a:solidFill>
+                <a:latin typeface="Arial" pitchFamily="34" charset="0"/>
+                <a:ea typeface="Arial" pitchFamily="34" charset="-122"/>
+                <a:cs typeface="Arial" pitchFamily="34" charset="-120"/>
+              </a:rPr>
+              <a:t>No</a:t>
+            </a:r>
+            <a:pPr algn="l" indent="0" marL="0">
+              <a:lnSpc>
+                <a:spcPts val="1630"/>
+              </a:lnSpc>
+              <a:buNone/>
+            </a:pPr>
+            <a:r>
+              <a:rPr lang="en-US" sz="1400" dirty="0">
+                <a:solidFill>
+                  <a:srgbClr val="59636E"/>
+                </a:solidFill>
+                <a:latin typeface="Arial" pitchFamily="34" charset="0"/>
+                <a:ea typeface="Arial" pitchFamily="34" charset="-122"/>
+                <a:cs typeface="Arial" pitchFamily="34" charset="-120"/>
+              </a:rPr>
+              <a:t> branch or worktree</a:t>
+            </a:r>
+            <a:endParaRPr lang="en-US" sz="1400" dirty="0"/>
+          </a:p>
+        </p:txBody>
+      </p:sp>
+      <p:sp>
+        <p:nvSpPr>
+          <p:cNvPr id="16" name="Text 11"/>
+          <p:cNvSpPr/>
+          <p:nvPr/>
+        </p:nvSpPr>
+        <p:spPr>
+          <a:xfrm>
+            <a:off x="695176" y="2509689"/>
+            <a:ext cx="57150" cy="57150"/>
+          </a:xfrm>
+          <a:prstGeom prst="roundRect">
+            <a:avLst>
+              <a:gd name="adj" fmla="val 1600000"/>
+            </a:avLst>
+          </a:prstGeom>
+          <a:solidFill>
+            <a:srgbClr val="818B98"/>
+          </a:solidFill>
+          <a:ln/>
+        </p:spPr>
+        <p:txBody>
+          <a:bodyPr wrap="square" rtlCol="0" anchor="ctr"/>
+          <a:lstStyle/>
+          <a:p>
+            <a:pPr indent="0" marL="0">
+              <a:buNone/>
+            </a:pPr>
+            <a:endParaRPr lang="en-US" dirty="0"/>
+          </a:p>
+        </p:txBody>
+      </p:sp>
+      <p:sp>
+        <p:nvSpPr>
+          <p:cNvPr id="17" name="Text 12"/>
+          <p:cNvSpPr/>
+          <p:nvPr/>
+        </p:nvSpPr>
+        <p:spPr>
+          <a:xfrm>
+            <a:off x="853827" y="2429768"/>
+            <a:ext cx="1521690" cy="207020"/>
+          </a:xfrm>
+          <a:prstGeom prst="rect">
+            <a:avLst/>
+          </a:prstGeom>
+          <a:noFill/>
+          <a:ln/>
+        </p:spPr>
+        <p:txBody>
+          <a:bodyPr wrap="square" lIns="0" tIns="0" rIns="0" bIns="0" rtlCol="0" anchor="t"/>
+          <a:lstStyle/>
+          <a:p>
+            <a:pPr algn="l" indent="0" marL="0">
+              <a:lnSpc>
+                <a:spcPts val="1630"/>
+              </a:lnSpc>
+              <a:buNone/>
+            </a:pPr>
+            <a:r>
+              <a:rPr lang="en-US" sz="1400" dirty="0">
+                <a:solidFill>
+                  <a:srgbClr val="59636E"/>
+                </a:solidFill>
+                <a:latin typeface="Arial" pitchFamily="34" charset="0"/>
+                <a:ea typeface="Arial" pitchFamily="34" charset="-122"/>
+                <a:cs typeface="Arial" pitchFamily="34" charset="-120"/>
+              </a:rPr>
+              <a:t>Start with </a:t>
+            </a:r>
+            <a:pPr algn="l" indent="0" marL="0">
+              <a:lnSpc>
+                <a:spcPts val="1630"/>
+              </a:lnSpc>
+              <a:buNone/>
+            </a:pPr>
+            <a:r>
+              <a:rPr lang="en-US" sz="1400" b="1" dirty="0">
+                <a:solidFill>
+                  <a:srgbClr val="59636E"/>
+                </a:solidFill>
+                <a:latin typeface="Arial" pitchFamily="34" charset="0"/>
+                <a:ea typeface="Arial" pitchFamily="34" charset="-122"/>
+                <a:cs typeface="Arial" pitchFamily="34" charset="-120"/>
+              </a:rPr>
+              <a:t>+</a:t>
+            </a:r>
+            <a:pPr algn="l" indent="0" marL="0">
+              <a:lnSpc>
+                <a:spcPts val="1630"/>
+              </a:lnSpc>
+              <a:buNone/>
+            </a:pPr>
+            <a:r>
+              <a:rPr lang="en-US" sz="1400" dirty="0">
+                <a:solidFill>
+                  <a:srgbClr val="59636E"/>
+                </a:solidFill>
+                <a:latin typeface="Arial" pitchFamily="34" charset="0"/>
+                <a:ea typeface="Arial" pitchFamily="34" charset="-122"/>
+                <a:cs typeface="Arial" pitchFamily="34" charset="-120"/>
+              </a:rPr>
+              <a:t> &gt; </a:t>
+            </a:r>
+            <a:pPr algn="l" indent="0" marL="0">
+              <a:lnSpc>
+                <a:spcPts val="1630"/>
+              </a:lnSpc>
+              <a:buNone/>
+            </a:pPr>
+            <a:r>
+              <a:rPr lang="en-US" sz="1400" b="1" dirty="0">
+                <a:solidFill>
+                  <a:srgbClr val="59636E"/>
+                </a:solidFill>
+                <a:latin typeface="Arial" pitchFamily="34" charset="0"/>
+                <a:ea typeface="Arial" pitchFamily="34" charset="-122"/>
+                <a:cs typeface="Arial" pitchFamily="34" charset="-120"/>
+              </a:rPr>
+              <a:t>Chat</a:t>
+            </a:r>
+            <a:endParaRPr lang="en-US" sz="1400" dirty="0"/>
+          </a:p>
+        </p:txBody>
+      </p:sp>
+      <p:sp>
+        <p:nvSpPr>
+          <p:cNvPr id="18" name="Text 13"/>
+          <p:cNvSpPr/>
+          <p:nvPr/>
+        </p:nvSpPr>
+        <p:spPr>
+          <a:xfrm>
+            <a:off x="695176" y="3445073"/>
+            <a:ext cx="3587948" cy="939552"/>
+          </a:xfrm>
+          <a:prstGeom prst="roundRect">
+            <a:avLst>
+              <a:gd name="adj" fmla="val 8110"/>
+            </a:avLst>
+          </a:prstGeom>
+          <a:solidFill>
+            <a:srgbClr val="FFFFFF"/>
+          </a:solidFill>
+          <a:ln/>
+        </p:spPr>
+        <p:txBody>
+          <a:bodyPr wrap="square" rtlCol="0" anchor="ctr"/>
+          <a:lstStyle/>
+          <a:p>
+            <a:pPr indent="0" marL="0">
+              <a:buNone/>
+            </a:pPr>
+            <a:endParaRPr lang="en-US" dirty="0"/>
+          </a:p>
+        </p:txBody>
+      </p:sp>
+      <p:sp>
+        <p:nvSpPr>
+          <p:cNvPr id="19" name="Shape 14"/>
+          <p:cNvSpPr/>
+          <p:nvPr/>
+        </p:nvSpPr>
+        <p:spPr>
+          <a:xfrm>
+            <a:off x="695176" y="3449836"/>
+            <a:ext cx="3587948" cy="0"/>
+          </a:xfrm>
+          <a:prstGeom prst="line">
+            <a:avLst/>
+          </a:prstGeom>
+          <a:noFill/>
+          <a:ln w="9525">
+            <a:solidFill>
+              <a:srgbClr val="9CD7FF"/>
+            </a:solidFill>
+            <a:prstDash val="solid"/>
+          </a:ln>
+        </p:spPr>
+      </p:sp>
+      <p:sp>
+        <p:nvSpPr>
+          <p:cNvPr id="20" name="Shape 15"/>
+          <p:cNvSpPr/>
+          <p:nvPr/>
+        </p:nvSpPr>
+        <p:spPr>
+          <a:xfrm>
+            <a:off x="4278362" y="3445073"/>
+            <a:ext cx="0" cy="939552"/>
+          </a:xfrm>
+          <a:prstGeom prst="line">
+            <a:avLst/>
+          </a:prstGeom>
+          <a:noFill/>
+          <a:ln w="9525">
+            <a:solidFill>
+              <a:srgbClr val="9CD7FF"/>
+            </a:solidFill>
+            <a:prstDash val="solid"/>
+          </a:ln>
+        </p:spPr>
+      </p:sp>
+      <p:sp>
+        <p:nvSpPr>
+          <p:cNvPr id="21" name="Shape 16"/>
+          <p:cNvSpPr/>
+          <p:nvPr/>
+        </p:nvSpPr>
+        <p:spPr>
+          <a:xfrm>
+            <a:off x="695176" y="4379863"/>
+            <a:ext cx="3587948" cy="0"/>
+          </a:xfrm>
+          <a:prstGeom prst="line">
+            <a:avLst/>
+          </a:prstGeom>
+          <a:noFill/>
+          <a:ln w="9525">
+            <a:solidFill>
+              <a:srgbClr val="9CD7FF"/>
+            </a:solidFill>
+            <a:prstDash val="solid"/>
+          </a:ln>
+        </p:spPr>
+      </p:sp>
+      <p:sp>
+        <p:nvSpPr>
+          <p:cNvPr id="22" name="Shape 17"/>
+          <p:cNvSpPr/>
+          <p:nvPr/>
+        </p:nvSpPr>
+        <p:spPr>
+          <a:xfrm>
+            <a:off x="718989" y="3445073"/>
+            <a:ext cx="0" cy="939552"/>
+          </a:xfrm>
+          <a:prstGeom prst="line">
+            <a:avLst/>
+          </a:prstGeom>
+          <a:noFill/>
+          <a:ln w="47625">
+            <a:solidFill>
+              <a:srgbClr val="0969DA"/>
+            </a:solidFill>
+            <a:prstDash val="solid"/>
+          </a:ln>
+        </p:spPr>
+      </p:sp>
+      <p:pic>
+        <p:nvPicPr>
+          <p:cNvPr id="23" name="Image 3" descr="/Users/danwahlin/.copilot/session-state/56a7a0da-def8-48d4-b5e8-0ac3878cb8dd/files/slides-build/icons/GoCopilot-0969DA.png">    </p:cNvPr>
+          <p:cNvPicPr>
+            <a:picLocks noChangeAspect="1"/>
+          </p:cNvPicPr>
+          <p:nvPr/>
+        </p:nvPicPr>
+        <p:blipFill>
+          <a:blip r:embed="rId5"/>
+          <a:stretch>
+            <a:fillRect/>
+          </a:stretch>
+        </p:blipFill>
+        <p:spPr>
+          <a:xfrm>
             <a:off x="920502" y="3584674"/>
             <a:ext cx="165050" cy="165050"/>
           </a:xfrm>
@@ -4618,7 +4520,7 @@
       </p:pic>
       <p:sp>
         <p:nvSpPr>
-          <p:cNvPr id="24" name="Text 19"/>
+          <p:cNvPr id="24" name="Text 18"/>
           <p:cNvSpPr/>
           <p:nvPr/>
         </p:nvSpPr>
@@ -4657,7 +4559,7 @@
       </p:sp>
       <p:sp>
         <p:nvSpPr>
-          <p:cNvPr id="25" name="Text 20"/>
+          <p:cNvPr id="25" name="Text 19"/>
           <p:cNvSpPr/>
           <p:nvPr/>
         </p:nvSpPr>
@@ -4699,7 +4601,7 @@
       </p:sp>
       <p:sp>
         <p:nvSpPr>
-          <p:cNvPr id="26" name="Text 21"/>
+          <p:cNvPr id="26" name="Text 20"/>
           <p:cNvSpPr/>
           <p:nvPr/>
         </p:nvSpPr>
@@ -4735,7 +4637,7 @@
       </p:sp>
       <p:sp>
         <p:nvSpPr>
-          <p:cNvPr id="27" name="Text 22"/>
+          <p:cNvPr id="27" name="Text 21"/>
           <p:cNvSpPr/>
           <p:nvPr/>
         </p:nvSpPr>
@@ -4767,470 +4669,7 @@
       </p:sp>
       <p:pic>
         <p:nvPicPr>
-          <p:cNvPr id="28" name="Image 3" descr="/Users/danwahlin/.copilot/session-state/56a7a0da-def8-48d4-b5e8-0ac3878cb8dd/files/slides-build/icons/GoRepo-8250DF.png">    </p:cNvPr>
-          <p:cNvPicPr>
-            <a:picLocks noChangeAspect="1"/>
-          </p:cNvPicPr>
-          <p:nvPr/>
-        </p:nvPicPr>
-        <p:blipFill>
-          <a:blip r:embed="rId5"/>
-          <a:stretch>
-            <a:fillRect/>
-          </a:stretch>
-        </p:blipFill>
-        <p:spPr>
-          <a:xfrm>
-            <a:off x="4943326" y="1514326"/>
-            <a:ext cx="215801" cy="215801"/>
-          </a:xfrm>
-          <a:prstGeom prst="rect">
-            <a:avLst/>
-          </a:prstGeom>
-        </p:spPr>
-      </p:pic>
-      <p:sp>
-        <p:nvSpPr>
-          <p:cNvPr id="29" name="Text 23"/>
-          <p:cNvSpPr/>
-          <p:nvPr/>
-        </p:nvSpPr>
-        <p:spPr>
-          <a:xfrm>
-            <a:off x="5356027" y="1507927"/>
-            <a:ext cx="1580135" cy="228600"/>
-          </a:xfrm>
-          <a:prstGeom prst="rect">
-            <a:avLst/>
-          </a:prstGeom>
-          <a:noFill/>
-          <a:ln/>
-        </p:spPr>
-        <p:txBody>
-          <a:bodyPr wrap="square" lIns="0" tIns="0" rIns="0" bIns="0" rtlCol="0" anchor="t"/>
-          <a:lstStyle/>
-          <a:p>
-            <a:pPr algn="l" indent="0" marL="0">
-              <a:lnSpc>
-                <a:spcPts val="1800"/>
-              </a:lnSpc>
-              <a:buNone/>
-            </a:pPr>
-            <a:r>
-              <a:rPr lang="en-US" sz="1650" b="1" dirty="0">
-                <a:solidFill>
-                  <a:srgbClr val="1F2328"/>
-                </a:solidFill>
-                <a:latin typeface="Arial" pitchFamily="34" charset="0"/>
-                <a:ea typeface="Arial" pitchFamily="34" charset="-122"/>
-                <a:cs typeface="Arial" pitchFamily="34" charset="-120"/>
-              </a:rPr>
-              <a:t>Project session</a:t>
-            </a:r>
-            <a:endParaRPr lang="en-US" sz="1650" dirty="0"/>
-          </a:p>
-        </p:txBody>
-      </p:sp>
-      <p:sp>
-        <p:nvSpPr>
-          <p:cNvPr id="30" name="Text 24"/>
-          <p:cNvSpPr/>
-          <p:nvPr/>
-        </p:nvSpPr>
-        <p:spPr>
-          <a:xfrm>
-            <a:off x="4860727" y="1968847"/>
-            <a:ext cx="57150" cy="57150"/>
-          </a:xfrm>
-          <a:prstGeom prst="roundRect">
-            <a:avLst>
-              <a:gd name="adj" fmla="val 1600000"/>
-            </a:avLst>
-          </a:prstGeom>
-          <a:solidFill>
-            <a:srgbClr val="818B98"/>
-          </a:solidFill>
-          <a:ln/>
-        </p:spPr>
-        <p:txBody>
-          <a:bodyPr wrap="square" rtlCol="0" anchor="ctr"/>
-          <a:lstStyle/>
-          <a:p>
-            <a:pPr indent="0" marL="0">
-              <a:buNone/>
-            </a:pPr>
-            <a:endParaRPr lang="en-US" dirty="0"/>
-          </a:p>
-        </p:txBody>
-      </p:sp>
-      <p:sp>
-        <p:nvSpPr>
-          <p:cNvPr id="31" name="Text 25"/>
-          <p:cNvSpPr/>
-          <p:nvPr/>
-        </p:nvSpPr>
-        <p:spPr>
-          <a:xfrm>
-            <a:off x="5019377" y="1888927"/>
-            <a:ext cx="2398666" cy="207020"/>
-          </a:xfrm>
-          <a:prstGeom prst="rect">
-            <a:avLst/>
-          </a:prstGeom>
-          <a:noFill/>
-          <a:ln/>
-        </p:spPr>
-        <p:txBody>
-          <a:bodyPr wrap="square" lIns="0" tIns="0" rIns="0" bIns="0" rtlCol="0" anchor="t"/>
-          <a:lstStyle/>
-          <a:p>
-            <a:pPr algn="l" indent="0" marL="0">
-              <a:lnSpc>
-                <a:spcPts val="1630"/>
-              </a:lnSpc>
-              <a:buNone/>
-            </a:pPr>
-            <a:r>
-              <a:rPr lang="en-US" sz="1400" dirty="0">
-                <a:solidFill>
-                  <a:srgbClr val="59636E"/>
-                </a:solidFill>
-                <a:latin typeface="Arial" pitchFamily="34" charset="0"/>
-                <a:ea typeface="Arial" pitchFamily="34" charset="-122"/>
-                <a:cs typeface="Arial" pitchFamily="34" charset="-120"/>
-              </a:rPr>
-              <a:t>Plan, edit, test, and open PRs</a:t>
-            </a:r>
-            <a:endParaRPr lang="en-US" sz="1400" dirty="0"/>
-          </a:p>
-        </p:txBody>
-      </p:sp>
-      <p:sp>
-        <p:nvSpPr>
-          <p:cNvPr id="32" name="Text 26"/>
-          <p:cNvSpPr/>
-          <p:nvPr/>
-        </p:nvSpPr>
-        <p:spPr>
-          <a:xfrm>
-            <a:off x="4860727" y="2239268"/>
-            <a:ext cx="57150" cy="57150"/>
-          </a:xfrm>
-          <a:prstGeom prst="roundRect">
-            <a:avLst>
-              <a:gd name="adj" fmla="val 1600000"/>
-            </a:avLst>
-          </a:prstGeom>
-          <a:solidFill>
-            <a:srgbClr val="818B98"/>
-          </a:solidFill>
-          <a:ln/>
-        </p:spPr>
-        <p:txBody>
-          <a:bodyPr wrap="square" rtlCol="0" anchor="ctr"/>
-          <a:lstStyle/>
-          <a:p>
-            <a:pPr indent="0" marL="0">
-              <a:buNone/>
-            </a:pPr>
-            <a:endParaRPr lang="en-US" dirty="0"/>
-          </a:p>
-        </p:txBody>
-      </p:sp>
-      <p:sp>
-        <p:nvSpPr>
-          <p:cNvPr id="33" name="Text 27"/>
-          <p:cNvSpPr/>
-          <p:nvPr/>
-        </p:nvSpPr>
-        <p:spPr>
-          <a:xfrm>
-            <a:off x="5019377" y="2159347"/>
-            <a:ext cx="1974979" cy="207020"/>
-          </a:xfrm>
-          <a:prstGeom prst="rect">
-            <a:avLst/>
-          </a:prstGeom>
-          <a:noFill/>
-          <a:ln/>
-        </p:spPr>
-        <p:txBody>
-          <a:bodyPr wrap="square" lIns="0" tIns="0" rIns="0" bIns="0" rtlCol="0" anchor="t"/>
-          <a:lstStyle/>
-          <a:p>
-            <a:pPr algn="l" indent="0" marL="0">
-              <a:lnSpc>
-                <a:spcPts val="1630"/>
-              </a:lnSpc>
-              <a:buNone/>
-            </a:pPr>
-            <a:r>
-              <a:rPr lang="en-US" sz="1400" dirty="0">
-                <a:solidFill>
-                  <a:srgbClr val="59636E"/>
-                </a:solidFill>
-                <a:latin typeface="Arial" pitchFamily="34" charset="0"/>
-                <a:ea typeface="Arial" pitchFamily="34" charset="-122"/>
-                <a:cs typeface="Arial" pitchFamily="34" charset="-120"/>
-              </a:rPr>
-              <a:t>Usually a </a:t>
-            </a:r>
-            <a:pPr algn="l" indent="0" marL="0">
-              <a:lnSpc>
-                <a:spcPts val="1630"/>
-              </a:lnSpc>
-              <a:buNone/>
-            </a:pPr>
-            <a:r>
-              <a:rPr lang="en-US" sz="1400" b="1" dirty="0">
-                <a:solidFill>
-                  <a:srgbClr val="59636E"/>
-                </a:solidFill>
-                <a:latin typeface="Arial" pitchFamily="34" charset="0"/>
-                <a:ea typeface="Arial" pitchFamily="34" charset="-122"/>
-                <a:cs typeface="Arial" pitchFamily="34" charset="-120"/>
-              </a:rPr>
-              <a:t>New worktree</a:t>
-            </a:r>
-            <a:endParaRPr lang="en-US" sz="1400" dirty="0"/>
-          </a:p>
-        </p:txBody>
-      </p:sp>
-      <p:sp>
-        <p:nvSpPr>
-          <p:cNvPr id="34" name="Text 28"/>
-          <p:cNvSpPr/>
-          <p:nvPr/>
-        </p:nvSpPr>
-        <p:spPr>
-          <a:xfrm>
-            <a:off x="4860727" y="2509689"/>
-            <a:ext cx="57150" cy="57150"/>
-          </a:xfrm>
-          <a:prstGeom prst="roundRect">
-            <a:avLst>
-              <a:gd name="adj" fmla="val 1600000"/>
-            </a:avLst>
-          </a:prstGeom>
-          <a:solidFill>
-            <a:srgbClr val="818B98"/>
-          </a:solidFill>
-          <a:ln/>
-        </p:spPr>
-        <p:txBody>
-          <a:bodyPr wrap="square" rtlCol="0" anchor="ctr"/>
-          <a:lstStyle/>
-          <a:p>
-            <a:pPr indent="0" marL="0">
-              <a:buNone/>
-            </a:pPr>
-            <a:endParaRPr lang="en-US" dirty="0"/>
-          </a:p>
-        </p:txBody>
-      </p:sp>
-      <p:sp>
-        <p:nvSpPr>
-          <p:cNvPr id="35" name="Text 29"/>
-          <p:cNvSpPr/>
-          <p:nvPr/>
-        </p:nvSpPr>
-        <p:spPr>
-          <a:xfrm>
-            <a:off x="5019377" y="2429768"/>
-            <a:ext cx="1909855" cy="207020"/>
-          </a:xfrm>
-          <a:prstGeom prst="rect">
-            <a:avLst/>
-          </a:prstGeom>
-          <a:noFill/>
-          <a:ln/>
-        </p:spPr>
-        <p:txBody>
-          <a:bodyPr wrap="square" lIns="0" tIns="0" rIns="0" bIns="0" rtlCol="0" anchor="t"/>
-          <a:lstStyle/>
-          <a:p>
-            <a:pPr algn="l" indent="0" marL="0">
-              <a:lnSpc>
-                <a:spcPts val="1630"/>
-              </a:lnSpc>
-              <a:buNone/>
-            </a:pPr>
-            <a:r>
-              <a:rPr lang="en-US" sz="1400" dirty="0">
-                <a:solidFill>
-                  <a:srgbClr val="59636E"/>
-                </a:solidFill>
-                <a:latin typeface="Arial" pitchFamily="34" charset="0"/>
-                <a:ea typeface="Arial" pitchFamily="34" charset="-122"/>
-                <a:cs typeface="Arial" pitchFamily="34" charset="-120"/>
-              </a:rPr>
-              <a:t>Start with </a:t>
-            </a:r>
-            <a:pPr algn="l" indent="0" marL="0">
-              <a:lnSpc>
-                <a:spcPts val="1630"/>
-              </a:lnSpc>
-              <a:buNone/>
-            </a:pPr>
-            <a:r>
-              <a:rPr lang="en-US" sz="1400" b="1" dirty="0">
-                <a:solidFill>
-                  <a:srgbClr val="59636E"/>
-                </a:solidFill>
-                <a:latin typeface="Arial" pitchFamily="34" charset="0"/>
-                <a:ea typeface="Arial" pitchFamily="34" charset="-122"/>
-                <a:cs typeface="Arial" pitchFamily="34" charset="-120"/>
-              </a:rPr>
-              <a:t>+</a:t>
-            </a:r>
-            <a:pPr algn="l" indent="0" marL="0">
-              <a:lnSpc>
-                <a:spcPts val="1630"/>
-              </a:lnSpc>
-              <a:buNone/>
-            </a:pPr>
-            <a:r>
-              <a:rPr lang="en-US" sz="1400" dirty="0">
-                <a:solidFill>
-                  <a:srgbClr val="59636E"/>
-                </a:solidFill>
-                <a:latin typeface="Arial" pitchFamily="34" charset="0"/>
-                <a:ea typeface="Arial" pitchFamily="34" charset="-122"/>
-                <a:cs typeface="Arial" pitchFamily="34" charset="-120"/>
-              </a:rPr>
-              <a:t> on a project</a:t>
-            </a:r>
-            <a:endParaRPr lang="en-US" sz="1400" dirty="0"/>
-          </a:p>
-        </p:txBody>
-      </p:sp>
-      <p:sp>
-        <p:nvSpPr>
-          <p:cNvPr id="36" name="Text 30"/>
-          <p:cNvSpPr/>
-          <p:nvPr/>
-        </p:nvSpPr>
-        <p:spPr>
-          <a:xfrm>
-            <a:off x="4860727" y="3222873"/>
-            <a:ext cx="3587948" cy="1161752"/>
-          </a:xfrm>
-          <a:prstGeom prst="roundRect">
-            <a:avLst>
-              <a:gd name="adj" fmla="val 6559"/>
-            </a:avLst>
-          </a:prstGeom>
-          <a:solidFill>
-            <a:srgbClr val="FFFFFF"/>
-          </a:solidFill>
-          <a:ln/>
-        </p:spPr>
-        <p:txBody>
-          <a:bodyPr wrap="square" rtlCol="0" anchor="ctr"/>
-          <a:lstStyle/>
-          <a:p>
-            <a:pPr indent="0" marL="0">
-              <a:buNone/>
-            </a:pPr>
-            <a:endParaRPr lang="en-US" dirty="0"/>
-          </a:p>
-        </p:txBody>
-      </p:sp>
-      <p:sp>
-        <p:nvSpPr>
-          <p:cNvPr id="37" name="Shape 31"/>
-          <p:cNvSpPr/>
-          <p:nvPr/>
-        </p:nvSpPr>
-        <p:spPr>
-          <a:xfrm>
-            <a:off x="4860727" y="3227636"/>
-            <a:ext cx="3587948" cy="0"/>
-          </a:xfrm>
-          <a:prstGeom prst="line">
-            <a:avLst/>
-          </a:prstGeom>
-          <a:noFill/>
-          <a:ln w="9525">
-            <a:solidFill>
-              <a:srgbClr val="E0C5FF"/>
-            </a:solidFill>
-            <a:prstDash val="solid"/>
-          </a:ln>
-        </p:spPr>
-      </p:sp>
-      <p:sp>
-        <p:nvSpPr>
-          <p:cNvPr id="38" name="Shape 32"/>
-          <p:cNvSpPr/>
-          <p:nvPr/>
-        </p:nvSpPr>
-        <p:spPr>
-          <a:xfrm>
-            <a:off x="8443912" y="3222873"/>
-            <a:ext cx="0" cy="1161752"/>
-          </a:xfrm>
-          <a:prstGeom prst="line">
-            <a:avLst/>
-          </a:prstGeom>
-          <a:noFill/>
-          <a:ln w="9525">
-            <a:solidFill>
-              <a:srgbClr val="E0C5FF"/>
-            </a:solidFill>
-            <a:prstDash val="solid"/>
-          </a:ln>
-        </p:spPr>
-      </p:sp>
-      <p:sp>
-        <p:nvSpPr>
-          <p:cNvPr id="39" name="Shape 33"/>
-          <p:cNvSpPr/>
-          <p:nvPr/>
-        </p:nvSpPr>
-        <p:spPr>
-          <a:xfrm>
-            <a:off x="4860727" y="4379863"/>
-            <a:ext cx="3587948" cy="0"/>
-          </a:xfrm>
-          <a:prstGeom prst="line">
-            <a:avLst/>
-          </a:prstGeom>
-          <a:noFill/>
-          <a:ln w="9525">
-            <a:solidFill>
-              <a:srgbClr val="E0C5FF"/>
-            </a:solidFill>
-            <a:prstDash val="solid"/>
-          </a:ln>
-        </p:spPr>
-      </p:sp>
-      <p:sp>
-        <p:nvSpPr>
-          <p:cNvPr id="40" name="Shape 34"/>
-          <p:cNvSpPr/>
-          <p:nvPr/>
-        </p:nvSpPr>
-        <p:spPr>
-          <a:xfrm>
-            <a:off x="4884539" y="3222873"/>
-            <a:ext cx="0" cy="1161752"/>
-          </a:xfrm>
-          <a:prstGeom prst="line">
-            <a:avLst/>
-          </a:prstGeom>
-          <a:noFill/>
-          <a:ln w="47625">
-            <a:solidFill>
-              <a:srgbClr val="8250DF"/>
-            </a:solidFill>
-            <a:prstDash val="solid"/>
-          </a:ln>
-        </p:spPr>
-      </p:sp>
-      <p:pic>
-        <p:nvPicPr>
-          <p:cNvPr id="41" name="Image 4" descr="/Users/danwahlin/.copilot/session-state/56a7a0da-def8-48d4-b5e8-0ac3878cb8dd/files/slides-build/icons/GoCopilot-8250DF.png">    </p:cNvPr>
+          <p:cNvPr id="28" name="Image 4" descr="/Users/danwahlin/.copilot/session-state/56a7a0da-def8-48d4-b5e8-0ac3878cb8dd/files/slides-build/icons/GoRepo-8250DF.png">    </p:cNvPr>
           <p:cNvPicPr>
             <a:picLocks noChangeAspect="1"/>
           </p:cNvPicPr>
@@ -5244,6 +4683,469 @@
         </p:blipFill>
         <p:spPr>
           <a:xfrm>
+            <a:off x="4943326" y="1514326"/>
+            <a:ext cx="215801" cy="215801"/>
+          </a:xfrm>
+          <a:prstGeom prst="rect">
+            <a:avLst/>
+          </a:prstGeom>
+        </p:spPr>
+      </p:pic>
+      <p:sp>
+        <p:nvSpPr>
+          <p:cNvPr id="29" name="Text 22"/>
+          <p:cNvSpPr/>
+          <p:nvPr/>
+        </p:nvSpPr>
+        <p:spPr>
+          <a:xfrm>
+            <a:off x="5356027" y="1507927"/>
+            <a:ext cx="1580135" cy="228600"/>
+          </a:xfrm>
+          <a:prstGeom prst="rect">
+            <a:avLst/>
+          </a:prstGeom>
+          <a:noFill/>
+          <a:ln/>
+        </p:spPr>
+        <p:txBody>
+          <a:bodyPr wrap="square" lIns="0" tIns="0" rIns="0" bIns="0" rtlCol="0" anchor="t"/>
+          <a:lstStyle/>
+          <a:p>
+            <a:pPr algn="l" indent="0" marL="0">
+              <a:lnSpc>
+                <a:spcPts val="1800"/>
+              </a:lnSpc>
+              <a:buNone/>
+            </a:pPr>
+            <a:r>
+              <a:rPr lang="en-US" sz="1650" b="1" dirty="0">
+                <a:solidFill>
+                  <a:srgbClr val="1F2328"/>
+                </a:solidFill>
+                <a:latin typeface="Arial" pitchFamily="34" charset="0"/>
+                <a:ea typeface="Arial" pitchFamily="34" charset="-122"/>
+                <a:cs typeface="Arial" pitchFamily="34" charset="-120"/>
+              </a:rPr>
+              <a:t>Project session</a:t>
+            </a:r>
+            <a:endParaRPr lang="en-US" sz="1650" dirty="0"/>
+          </a:p>
+        </p:txBody>
+      </p:sp>
+      <p:sp>
+        <p:nvSpPr>
+          <p:cNvPr id="30" name="Text 23"/>
+          <p:cNvSpPr/>
+          <p:nvPr/>
+        </p:nvSpPr>
+        <p:spPr>
+          <a:xfrm>
+            <a:off x="4860727" y="1968847"/>
+            <a:ext cx="57150" cy="57150"/>
+          </a:xfrm>
+          <a:prstGeom prst="roundRect">
+            <a:avLst>
+              <a:gd name="adj" fmla="val 1600000"/>
+            </a:avLst>
+          </a:prstGeom>
+          <a:solidFill>
+            <a:srgbClr val="818B98"/>
+          </a:solidFill>
+          <a:ln/>
+        </p:spPr>
+        <p:txBody>
+          <a:bodyPr wrap="square" rtlCol="0" anchor="ctr"/>
+          <a:lstStyle/>
+          <a:p>
+            <a:pPr indent="0" marL="0">
+              <a:buNone/>
+            </a:pPr>
+            <a:endParaRPr lang="en-US" dirty="0"/>
+          </a:p>
+        </p:txBody>
+      </p:sp>
+      <p:sp>
+        <p:nvSpPr>
+          <p:cNvPr id="31" name="Text 24"/>
+          <p:cNvSpPr/>
+          <p:nvPr/>
+        </p:nvSpPr>
+        <p:spPr>
+          <a:xfrm>
+            <a:off x="5019377" y="1888927"/>
+            <a:ext cx="2398666" cy="207020"/>
+          </a:xfrm>
+          <a:prstGeom prst="rect">
+            <a:avLst/>
+          </a:prstGeom>
+          <a:noFill/>
+          <a:ln/>
+        </p:spPr>
+        <p:txBody>
+          <a:bodyPr wrap="square" lIns="0" tIns="0" rIns="0" bIns="0" rtlCol="0" anchor="t"/>
+          <a:lstStyle/>
+          <a:p>
+            <a:pPr algn="l" indent="0" marL="0">
+              <a:lnSpc>
+                <a:spcPts val="1630"/>
+              </a:lnSpc>
+              <a:buNone/>
+            </a:pPr>
+            <a:r>
+              <a:rPr lang="en-US" sz="1400" dirty="0">
+                <a:solidFill>
+                  <a:srgbClr val="59636E"/>
+                </a:solidFill>
+                <a:latin typeface="Arial" pitchFamily="34" charset="0"/>
+                <a:ea typeface="Arial" pitchFamily="34" charset="-122"/>
+                <a:cs typeface="Arial" pitchFamily="34" charset="-120"/>
+              </a:rPr>
+              <a:t>Plan, edit, test, and open PRs</a:t>
+            </a:r>
+            <a:endParaRPr lang="en-US" sz="1400" dirty="0"/>
+          </a:p>
+        </p:txBody>
+      </p:sp>
+      <p:sp>
+        <p:nvSpPr>
+          <p:cNvPr id="32" name="Text 25"/>
+          <p:cNvSpPr/>
+          <p:nvPr/>
+        </p:nvSpPr>
+        <p:spPr>
+          <a:xfrm>
+            <a:off x="4860727" y="2239268"/>
+            <a:ext cx="57150" cy="57150"/>
+          </a:xfrm>
+          <a:prstGeom prst="roundRect">
+            <a:avLst>
+              <a:gd name="adj" fmla="val 1600000"/>
+            </a:avLst>
+          </a:prstGeom>
+          <a:solidFill>
+            <a:srgbClr val="818B98"/>
+          </a:solidFill>
+          <a:ln/>
+        </p:spPr>
+        <p:txBody>
+          <a:bodyPr wrap="square" rtlCol="0" anchor="ctr"/>
+          <a:lstStyle/>
+          <a:p>
+            <a:pPr indent="0" marL="0">
+              <a:buNone/>
+            </a:pPr>
+            <a:endParaRPr lang="en-US" dirty="0"/>
+          </a:p>
+        </p:txBody>
+      </p:sp>
+      <p:sp>
+        <p:nvSpPr>
+          <p:cNvPr id="33" name="Text 26"/>
+          <p:cNvSpPr/>
+          <p:nvPr/>
+        </p:nvSpPr>
+        <p:spPr>
+          <a:xfrm>
+            <a:off x="5019377" y="2159347"/>
+            <a:ext cx="1974979" cy="207020"/>
+          </a:xfrm>
+          <a:prstGeom prst="rect">
+            <a:avLst/>
+          </a:prstGeom>
+          <a:noFill/>
+          <a:ln/>
+        </p:spPr>
+        <p:txBody>
+          <a:bodyPr wrap="square" lIns="0" tIns="0" rIns="0" bIns="0" rtlCol="0" anchor="t"/>
+          <a:lstStyle/>
+          <a:p>
+            <a:pPr algn="l" indent="0" marL="0">
+              <a:lnSpc>
+                <a:spcPts val="1630"/>
+              </a:lnSpc>
+              <a:buNone/>
+            </a:pPr>
+            <a:r>
+              <a:rPr lang="en-US" sz="1400" dirty="0">
+                <a:solidFill>
+                  <a:srgbClr val="59636E"/>
+                </a:solidFill>
+                <a:latin typeface="Arial" pitchFamily="34" charset="0"/>
+                <a:ea typeface="Arial" pitchFamily="34" charset="-122"/>
+                <a:cs typeface="Arial" pitchFamily="34" charset="-120"/>
+              </a:rPr>
+              <a:t>Usually a </a:t>
+            </a:r>
+            <a:pPr algn="l" indent="0" marL="0">
+              <a:lnSpc>
+                <a:spcPts val="1630"/>
+              </a:lnSpc>
+              <a:buNone/>
+            </a:pPr>
+            <a:r>
+              <a:rPr lang="en-US" sz="1400" b="1" dirty="0">
+                <a:solidFill>
+                  <a:srgbClr val="59636E"/>
+                </a:solidFill>
+                <a:latin typeface="Arial" pitchFamily="34" charset="0"/>
+                <a:ea typeface="Arial" pitchFamily="34" charset="-122"/>
+                <a:cs typeface="Arial" pitchFamily="34" charset="-120"/>
+              </a:rPr>
+              <a:t>New worktree</a:t>
+            </a:r>
+            <a:endParaRPr lang="en-US" sz="1400" dirty="0"/>
+          </a:p>
+        </p:txBody>
+      </p:sp>
+      <p:sp>
+        <p:nvSpPr>
+          <p:cNvPr id="34" name="Text 27"/>
+          <p:cNvSpPr/>
+          <p:nvPr/>
+        </p:nvSpPr>
+        <p:spPr>
+          <a:xfrm>
+            <a:off x="4860727" y="2509689"/>
+            <a:ext cx="57150" cy="57150"/>
+          </a:xfrm>
+          <a:prstGeom prst="roundRect">
+            <a:avLst>
+              <a:gd name="adj" fmla="val 1600000"/>
+            </a:avLst>
+          </a:prstGeom>
+          <a:solidFill>
+            <a:srgbClr val="818B98"/>
+          </a:solidFill>
+          <a:ln/>
+        </p:spPr>
+        <p:txBody>
+          <a:bodyPr wrap="square" rtlCol="0" anchor="ctr"/>
+          <a:lstStyle/>
+          <a:p>
+            <a:pPr indent="0" marL="0">
+              <a:buNone/>
+            </a:pPr>
+            <a:endParaRPr lang="en-US" dirty="0"/>
+          </a:p>
+        </p:txBody>
+      </p:sp>
+      <p:sp>
+        <p:nvSpPr>
+          <p:cNvPr id="35" name="Text 28"/>
+          <p:cNvSpPr/>
+          <p:nvPr/>
+        </p:nvSpPr>
+        <p:spPr>
+          <a:xfrm>
+            <a:off x="5019377" y="2429768"/>
+            <a:ext cx="1909855" cy="207020"/>
+          </a:xfrm>
+          <a:prstGeom prst="rect">
+            <a:avLst/>
+          </a:prstGeom>
+          <a:noFill/>
+          <a:ln/>
+        </p:spPr>
+        <p:txBody>
+          <a:bodyPr wrap="square" lIns="0" tIns="0" rIns="0" bIns="0" rtlCol="0" anchor="t"/>
+          <a:lstStyle/>
+          <a:p>
+            <a:pPr algn="l" indent="0" marL="0">
+              <a:lnSpc>
+                <a:spcPts val="1630"/>
+              </a:lnSpc>
+              <a:buNone/>
+            </a:pPr>
+            <a:r>
+              <a:rPr lang="en-US" sz="1400" dirty="0">
+                <a:solidFill>
+                  <a:srgbClr val="59636E"/>
+                </a:solidFill>
+                <a:latin typeface="Arial" pitchFamily="34" charset="0"/>
+                <a:ea typeface="Arial" pitchFamily="34" charset="-122"/>
+                <a:cs typeface="Arial" pitchFamily="34" charset="-120"/>
+              </a:rPr>
+              <a:t>Start with </a:t>
+            </a:r>
+            <a:pPr algn="l" indent="0" marL="0">
+              <a:lnSpc>
+                <a:spcPts val="1630"/>
+              </a:lnSpc>
+              <a:buNone/>
+            </a:pPr>
+            <a:r>
+              <a:rPr lang="en-US" sz="1400" b="1" dirty="0">
+                <a:solidFill>
+                  <a:srgbClr val="59636E"/>
+                </a:solidFill>
+                <a:latin typeface="Arial" pitchFamily="34" charset="0"/>
+                <a:ea typeface="Arial" pitchFamily="34" charset="-122"/>
+                <a:cs typeface="Arial" pitchFamily="34" charset="-120"/>
+              </a:rPr>
+              <a:t>+</a:t>
+            </a:r>
+            <a:pPr algn="l" indent="0" marL="0">
+              <a:lnSpc>
+                <a:spcPts val="1630"/>
+              </a:lnSpc>
+              <a:buNone/>
+            </a:pPr>
+            <a:r>
+              <a:rPr lang="en-US" sz="1400" dirty="0">
+                <a:solidFill>
+                  <a:srgbClr val="59636E"/>
+                </a:solidFill>
+                <a:latin typeface="Arial" pitchFamily="34" charset="0"/>
+                <a:ea typeface="Arial" pitchFamily="34" charset="-122"/>
+                <a:cs typeface="Arial" pitchFamily="34" charset="-120"/>
+              </a:rPr>
+              <a:t> on a project</a:t>
+            </a:r>
+            <a:endParaRPr lang="en-US" sz="1400" dirty="0"/>
+          </a:p>
+        </p:txBody>
+      </p:sp>
+      <p:sp>
+        <p:nvSpPr>
+          <p:cNvPr id="36" name="Text 29"/>
+          <p:cNvSpPr/>
+          <p:nvPr/>
+        </p:nvSpPr>
+        <p:spPr>
+          <a:xfrm>
+            <a:off x="4860727" y="3222873"/>
+            <a:ext cx="3587948" cy="1161752"/>
+          </a:xfrm>
+          <a:prstGeom prst="roundRect">
+            <a:avLst>
+              <a:gd name="adj" fmla="val 6559"/>
+            </a:avLst>
+          </a:prstGeom>
+          <a:solidFill>
+            <a:srgbClr val="FFFFFF"/>
+          </a:solidFill>
+          <a:ln/>
+        </p:spPr>
+        <p:txBody>
+          <a:bodyPr wrap="square" rtlCol="0" anchor="ctr"/>
+          <a:lstStyle/>
+          <a:p>
+            <a:pPr indent="0" marL="0">
+              <a:buNone/>
+            </a:pPr>
+            <a:endParaRPr lang="en-US" dirty="0"/>
+          </a:p>
+        </p:txBody>
+      </p:sp>
+      <p:sp>
+        <p:nvSpPr>
+          <p:cNvPr id="37" name="Shape 30"/>
+          <p:cNvSpPr/>
+          <p:nvPr/>
+        </p:nvSpPr>
+        <p:spPr>
+          <a:xfrm>
+            <a:off x="4860727" y="3227636"/>
+            <a:ext cx="3587948" cy="0"/>
+          </a:xfrm>
+          <a:prstGeom prst="line">
+            <a:avLst/>
+          </a:prstGeom>
+          <a:noFill/>
+          <a:ln w="9525">
+            <a:solidFill>
+              <a:srgbClr val="E0C5FF"/>
+            </a:solidFill>
+            <a:prstDash val="solid"/>
+          </a:ln>
+        </p:spPr>
+      </p:sp>
+      <p:sp>
+        <p:nvSpPr>
+          <p:cNvPr id="38" name="Shape 31"/>
+          <p:cNvSpPr/>
+          <p:nvPr/>
+        </p:nvSpPr>
+        <p:spPr>
+          <a:xfrm>
+            <a:off x="8443912" y="3222873"/>
+            <a:ext cx="0" cy="1161752"/>
+          </a:xfrm>
+          <a:prstGeom prst="line">
+            <a:avLst/>
+          </a:prstGeom>
+          <a:noFill/>
+          <a:ln w="9525">
+            <a:solidFill>
+              <a:srgbClr val="E0C5FF"/>
+            </a:solidFill>
+            <a:prstDash val="solid"/>
+          </a:ln>
+        </p:spPr>
+      </p:sp>
+      <p:sp>
+        <p:nvSpPr>
+          <p:cNvPr id="39" name="Shape 32"/>
+          <p:cNvSpPr/>
+          <p:nvPr/>
+        </p:nvSpPr>
+        <p:spPr>
+          <a:xfrm>
+            <a:off x="4860727" y="4379863"/>
+            <a:ext cx="3587948" cy="0"/>
+          </a:xfrm>
+          <a:prstGeom prst="line">
+            <a:avLst/>
+          </a:prstGeom>
+          <a:noFill/>
+          <a:ln w="9525">
+            <a:solidFill>
+              <a:srgbClr val="E0C5FF"/>
+            </a:solidFill>
+            <a:prstDash val="solid"/>
+          </a:ln>
+        </p:spPr>
+      </p:sp>
+      <p:sp>
+        <p:nvSpPr>
+          <p:cNvPr id="40" name="Shape 33"/>
+          <p:cNvSpPr/>
+          <p:nvPr/>
+        </p:nvSpPr>
+        <p:spPr>
+          <a:xfrm>
+            <a:off x="4884539" y="3222873"/>
+            <a:ext cx="0" cy="1161752"/>
+          </a:xfrm>
+          <a:prstGeom prst="line">
+            <a:avLst/>
+          </a:prstGeom>
+          <a:noFill/>
+          <a:ln w="47625">
+            <a:solidFill>
+              <a:srgbClr val="8250DF"/>
+            </a:solidFill>
+            <a:prstDash val="solid"/>
+          </a:ln>
+        </p:spPr>
+      </p:sp>
+      <p:pic>
+        <p:nvPicPr>
+          <p:cNvPr id="41" name="Image 5" descr="/Users/danwahlin/.copilot/session-state/56a7a0da-def8-48d4-b5e8-0ac3878cb8dd/files/slides-build/icons/GoCopilot-8250DF.png">    </p:cNvPr>
+          <p:cNvPicPr>
+            <a:picLocks noChangeAspect="1"/>
+          </p:cNvPicPr>
+          <p:nvPr/>
+        </p:nvPicPr>
+        <p:blipFill>
+          <a:blip r:embed="rId7"/>
+          <a:stretch>
+            <a:fillRect/>
+          </a:stretch>
+        </p:blipFill>
+        <p:spPr>
+          <a:xfrm>
             <a:off x="5086052" y="3362474"/>
             <a:ext cx="165050" cy="165050"/>
           </a:xfrm>
@@ -5254,7 +5156,7 @@
       </p:pic>
       <p:sp>
         <p:nvSpPr>
-          <p:cNvPr id="42" name="Text 35"/>
+          <p:cNvPr id="42" name="Text 34"/>
           <p:cNvSpPr/>
           <p:nvPr/>
         </p:nvSpPr>
@@ -5293,7 +5195,7 @@
       </p:sp>
       <p:sp>
         <p:nvSpPr>
-          <p:cNvPr id="43" name="Text 36"/>
+          <p:cNvPr id="43" name="Text 35"/>
           <p:cNvSpPr/>
           <p:nvPr/>
         </p:nvSpPr>
@@ -5365,112 +5267,9 @@
           <a:chExt cx="0" cy="0"/>
         </a:xfrm>
       </p:grpSpPr>
-      <p:sp>
-        <p:nvSpPr>
-          <p:cNvPr id="2" name="Text 0"/>
-          <p:cNvSpPr/>
-          <p:nvPr/>
-        </p:nvSpPr>
-        <p:spPr>
-          <a:xfrm>
-            <a:off x="0" y="0"/>
-            <a:ext cx="9144000" cy="76200"/>
-          </a:xfrm>
-          <a:prstGeom prst="rect">
-            <a:avLst/>
-          </a:prstGeom>
-          <a:solidFill>
-            <a:srgbClr val="1A7F37"/>
-          </a:solidFill>
-          <a:ln/>
-        </p:spPr>
-        <p:txBody>
-          <a:bodyPr wrap="square" rtlCol="0" anchor="ctr"/>
-          <a:lstStyle/>
-          <a:p>
-            <a:pPr indent="0" marL="0">
-              <a:buNone/>
-            </a:pPr>
-            <a:endParaRPr lang="en-US" dirty="0"/>
-          </a:p>
-        </p:txBody>
-      </p:sp>
-      <p:sp>
-        <p:nvSpPr>
-          <p:cNvPr id="3" name="Text 1"/>
-          <p:cNvSpPr/>
-          <p:nvPr/>
-        </p:nvSpPr>
-        <p:spPr>
-          <a:xfrm>
-            <a:off x="7340501" y="177701"/>
-            <a:ext cx="1168301" cy="279350"/>
-          </a:xfrm>
-          <a:prstGeom prst="roundRect">
-            <a:avLst>
-              <a:gd name="adj" fmla="val 22731"/>
-            </a:avLst>
-          </a:prstGeom>
-          <a:solidFill>
-            <a:srgbClr val="1A7F37"/>
-          </a:solidFill>
-          <a:ln/>
-        </p:spPr>
-        <p:txBody>
-          <a:bodyPr wrap="square" rtlCol="0" anchor="ctr"/>
-          <a:lstStyle/>
-          <a:p>
-            <a:pPr indent="0" marL="0">
-              <a:buNone/>
-            </a:pPr>
-            <a:endParaRPr lang="en-US" dirty="0"/>
-          </a:p>
-        </p:txBody>
-      </p:sp>
-      <p:sp>
-        <p:nvSpPr>
-          <p:cNvPr id="4" name="Text 2"/>
-          <p:cNvSpPr/>
-          <p:nvPr/>
-        </p:nvSpPr>
-        <p:spPr>
-          <a:xfrm>
-            <a:off x="7461041" y="231577"/>
-            <a:ext cx="927071" cy="171450"/>
-          </a:xfrm>
-          <a:prstGeom prst="rect">
-            <a:avLst/>
-          </a:prstGeom>
-          <a:noFill/>
-          <a:ln/>
-        </p:spPr>
-        <p:txBody>
-          <a:bodyPr wrap="square" lIns="0" tIns="0" rIns="0" bIns="0" rtlCol="0" anchor="t"/>
-          <a:lstStyle/>
-          <a:p>
-            <a:pPr algn="ctr" indent="0" marL="0">
-              <a:buNone/>
-            </a:pPr>
-            <a:r>
-              <a:rPr lang="en-US" sz="1150" b="1" dirty="0">
-                <a:solidFill>
-                  <a:srgbClr val="FFFFFF"/>
-                </a:solidFill>
-                <a:latin typeface="Arial" pitchFamily="34" charset="0"/>
-                <a:ea typeface="Arial" pitchFamily="34" charset="-122"/>
-                <a:cs typeface="Arial" pitchFamily="34" charset="-120"/>
-              </a:rPr>
-              <a:t>CHAPTER 01</a:t>
-            </a:r>
-            <a:endParaRPr lang="en-US" sz="1150" dirty="0"/>
-          </a:p>
-        </p:txBody>
-      </p:sp>
       <p:pic>
         <p:nvPicPr>
-          <p:cNvPr id="5" name="Image 0" descr="/Users/danwahlin/.copilot/session-state/56a7a0da-def8-48d4-b5e8-0ac3878cb8dd/files/slides-build/icons/FaGithub-1F2328.png">
-            <a:hlinkClick r:id="rId2" tooltip="https://github.com/github/copilot-app-for-beginners/tree/main/01-tour-the-app"/>
-          </p:cNvPr>
+          <p:cNvPr id="2" name="Image 0" descr="/Users/danwahlin/.copilot/session-state/56a7a0da-def8-48d4-b5e8-0ac3878cb8dd/files/slides-build/img/grad-corner.png">    </p:cNvPr>
           <p:cNvPicPr>
             <a:picLocks noChangeAspect="1"/>
           </p:cNvPicPr>
@@ -5484,6 +5283,103 @@
         </p:blipFill>
         <p:spPr>
           <a:xfrm>
+            <a:off x="6349901" y="0"/>
+            <a:ext cx="2793950" cy="1308050"/>
+          </a:xfrm>
+          <a:prstGeom prst="rect">
+            <a:avLst/>
+          </a:prstGeom>
+        </p:spPr>
+      </p:pic>
+      <p:sp>
+        <p:nvSpPr>
+          <p:cNvPr id="3" name="Text 0"/>
+          <p:cNvSpPr/>
+          <p:nvPr/>
+        </p:nvSpPr>
+        <p:spPr>
+          <a:xfrm>
+            <a:off x="7340501" y="177701"/>
+            <a:ext cx="1168301" cy="279350"/>
+          </a:xfrm>
+          <a:prstGeom prst="roundRect">
+            <a:avLst>
+              <a:gd name="adj" fmla="val 22731"/>
+            </a:avLst>
+          </a:prstGeom>
+          <a:solidFill>
+            <a:srgbClr val="1A7F37"/>
+          </a:solidFill>
+          <a:ln/>
+        </p:spPr>
+        <p:txBody>
+          <a:bodyPr wrap="square" rtlCol="0" anchor="ctr"/>
+          <a:lstStyle/>
+          <a:p>
+            <a:pPr indent="0" marL="0">
+              <a:buNone/>
+            </a:pPr>
+            <a:endParaRPr lang="en-US" dirty="0"/>
+          </a:p>
+        </p:txBody>
+      </p:sp>
+      <p:sp>
+        <p:nvSpPr>
+          <p:cNvPr id="4" name="Text 1"/>
+          <p:cNvSpPr/>
+          <p:nvPr/>
+        </p:nvSpPr>
+        <p:spPr>
+          <a:xfrm>
+            <a:off x="7461041" y="231577"/>
+            <a:ext cx="927071" cy="171450"/>
+          </a:xfrm>
+          <a:prstGeom prst="rect">
+            <a:avLst/>
+          </a:prstGeom>
+          <a:noFill/>
+          <a:ln/>
+        </p:spPr>
+        <p:txBody>
+          <a:bodyPr wrap="square" lIns="0" tIns="0" rIns="0" bIns="0" rtlCol="0" anchor="t"/>
+          <a:lstStyle/>
+          <a:p>
+            <a:pPr algn="ctr" indent="0" marL="0">
+              <a:buNone/>
+            </a:pPr>
+            <a:r>
+              <a:rPr lang="en-US" sz="1150" b="1" dirty="0">
+                <a:solidFill>
+                  <a:srgbClr val="FFFFFF"/>
+                </a:solidFill>
+                <a:latin typeface="Arial" pitchFamily="34" charset="0"/>
+                <a:ea typeface="Arial" pitchFamily="34" charset="-122"/>
+                <a:cs typeface="Arial" pitchFamily="34" charset="-120"/>
+              </a:rPr>
+              <a:t>CHAPTER 01</a:t>
+            </a:r>
+            <a:endParaRPr lang="en-US" sz="1150" dirty="0"/>
+          </a:p>
+        </p:txBody>
+      </p:sp>
+      <p:pic>
+        <p:nvPicPr>
+          <p:cNvPr id="5" name="Image 1" descr="/Users/danwahlin/.copilot/session-state/56a7a0da-def8-48d4-b5e8-0ac3878cb8dd/files/slides-build/icons/FaGithub-1F2328.png">
+            <a:hlinkClick r:id="rId3" tooltip="https://github.com/github/copilot-app-for-beginners/tree/main/01-tour-the-app"/>
+          </p:cNvPr>
+          <p:cNvPicPr>
+            <a:picLocks noChangeAspect="1"/>
+          </p:cNvPicPr>
+          <p:nvPr/>
+        </p:nvPicPr>
+        <p:blipFill>
+          <a:blip r:embed="rId2"/>
+          <a:stretch>
+            <a:fillRect/>
+          </a:stretch>
+        </p:blipFill>
+        <p:spPr>
+          <a:xfrm>
             <a:off x="8610600" y="165050"/>
             <a:ext cx="304800" cy="304800"/>
           </a:xfrm>
@@ -5494,7 +5390,7 @@
       </p:pic>
       <p:sp>
         <p:nvSpPr>
-          <p:cNvPr id="6" name="Text 3"/>
+          <p:cNvPr id="6" name="Text 2"/>
           <p:cNvSpPr/>
           <p:nvPr/>
         </p:nvSpPr>
@@ -5533,7 +5429,7 @@
       </p:sp>
       <p:sp>
         <p:nvSpPr>
-          <p:cNvPr id="7" name="Text 4"/>
+          <p:cNvPr id="7" name="Text 3"/>
           <p:cNvSpPr/>
           <p:nvPr/>
         </p:nvSpPr>
@@ -5578,7 +5474,7 @@
       </p:sp>
       <p:sp>
         <p:nvSpPr>
-          <p:cNvPr id="8" name="Text 5"/>
+          <p:cNvPr id="8" name="Text 4"/>
           <p:cNvSpPr/>
           <p:nvPr/>
         </p:nvSpPr>
@@ -5623,7 +5519,7 @@
       </p:sp>
       <p:sp>
         <p:nvSpPr>
-          <p:cNvPr id="9" name="Text 6"/>
+          <p:cNvPr id="9" name="Text 5"/>
           <p:cNvSpPr/>
           <p:nvPr/>
         </p:nvSpPr>
@@ -5666,14 +5562,14 @@
       </p:sp>
       <p:pic>
         <p:nvPicPr>
-          <p:cNvPr id="10" name="Image 1" descr="/Users/danwahlin/.copilot/session-state/56a7a0da-def8-48d4-b5e8-0ac3878cb8dd/files/slides-build/img/01-session-mode-decision-ladder.jpg">    </p:cNvPr>
+          <p:cNvPr id="10" name="Image 2" descr="/Users/danwahlin/.copilot/session-state/56a7a0da-def8-48d4-b5e8-0ac3878cb8dd/files/slides-build/img/01-session-mode-decision-ladder.jpg">    </p:cNvPr>
           <p:cNvPicPr>
             <a:picLocks noChangeAspect="1"/>
           </p:cNvPicPr>
           <p:nvPr/>
         </p:nvPicPr>
         <p:blipFill>
-          <a:blip r:embed="rId3"/>
+          <a:blip r:embed="rId4"/>
           <a:stretch>
             <a:fillRect/>
           </a:stretch>
@@ -5690,7 +5586,7 @@
       </p:pic>
       <p:sp>
         <p:nvSpPr>
-          <p:cNvPr id="11" name="Text 7"/>
+          <p:cNvPr id="11" name="Text 6"/>
           <p:cNvSpPr/>
           <p:nvPr/>
         </p:nvSpPr>
@@ -5726,7 +5622,7 @@
       </p:sp>
       <p:sp>
         <p:nvSpPr>
-          <p:cNvPr id="12" name="Text 8"/>
+          <p:cNvPr id="12" name="Text 7"/>
           <p:cNvSpPr/>
           <p:nvPr/>
         </p:nvSpPr>
@@ -5758,14 +5654,14 @@
       </p:sp>
       <p:pic>
         <p:nvPicPr>
-          <p:cNvPr id="13" name="Image 2" descr="/Users/danwahlin/.copilot/session-state/56a7a0da-def8-48d4-b5e8-0ac3878cb8dd/files/slides-build/icons/GoPerson-0969DA.png">    </p:cNvPr>
+          <p:cNvPr id="13" name="Image 3" descr="/Users/danwahlin/.copilot/session-state/56a7a0da-def8-48d4-b5e8-0ac3878cb8dd/files/slides-build/icons/GoPerson-0969DA.png">    </p:cNvPr>
           <p:cNvPicPr>
             <a:picLocks noChangeAspect="1"/>
           </p:cNvPicPr>
           <p:nvPr/>
         </p:nvPicPr>
         <p:blipFill>
-          <a:blip r:embed="rId4"/>
+          <a:blip r:embed="rId5"/>
           <a:stretch>
             <a:fillRect/>
           </a:stretch>
@@ -5782,7 +5678,7 @@
       </p:pic>
       <p:sp>
         <p:nvSpPr>
-          <p:cNvPr id="14" name="Text 9"/>
+          <p:cNvPr id="14" name="Text 8"/>
           <p:cNvSpPr/>
           <p:nvPr/>
         </p:nvSpPr>
@@ -5824,7 +5720,7 @@
       </p:sp>
       <p:sp>
         <p:nvSpPr>
-          <p:cNvPr id="15" name="Text 10"/>
+          <p:cNvPr id="15" name="Text 9"/>
           <p:cNvSpPr/>
           <p:nvPr/>
         </p:nvSpPr>
@@ -5866,7 +5762,7 @@
       </p:sp>
       <p:sp>
         <p:nvSpPr>
-          <p:cNvPr id="16" name="Text 11"/>
+          <p:cNvPr id="16" name="Text 10"/>
           <p:cNvSpPr/>
           <p:nvPr/>
         </p:nvSpPr>
@@ -5902,7 +5798,7 @@
       </p:sp>
       <p:sp>
         <p:nvSpPr>
-          <p:cNvPr id="17" name="Text 12"/>
+          <p:cNvPr id="17" name="Text 11"/>
           <p:cNvSpPr/>
           <p:nvPr/>
         </p:nvSpPr>
@@ -5934,14 +5830,14 @@
       </p:sp>
       <p:pic>
         <p:nvPicPr>
-          <p:cNvPr id="18" name="Image 3" descr="/Users/danwahlin/.copilot/session-state/56a7a0da-def8-48d4-b5e8-0ac3878cb8dd/files/slides-build/icons/GoChecklist-8250DF.png">    </p:cNvPr>
+          <p:cNvPr id="18" name="Image 4" descr="/Users/danwahlin/.copilot/session-state/56a7a0da-def8-48d4-b5e8-0ac3878cb8dd/files/slides-build/icons/GoChecklist-8250DF.png">    </p:cNvPr>
           <p:cNvPicPr>
             <a:picLocks noChangeAspect="1"/>
           </p:cNvPicPr>
           <p:nvPr/>
         </p:nvPicPr>
         <p:blipFill>
-          <a:blip r:embed="rId5"/>
+          <a:blip r:embed="rId6"/>
           <a:stretch>
             <a:fillRect/>
           </a:stretch>
@@ -5958,7 +5854,7 @@
       </p:pic>
       <p:sp>
         <p:nvSpPr>
-          <p:cNvPr id="19" name="Text 13"/>
+          <p:cNvPr id="19" name="Text 12"/>
           <p:cNvSpPr/>
           <p:nvPr/>
         </p:nvSpPr>
@@ -6000,7 +5896,7 @@
       </p:sp>
       <p:sp>
         <p:nvSpPr>
-          <p:cNvPr id="20" name="Text 14"/>
+          <p:cNvPr id="20" name="Text 13"/>
           <p:cNvSpPr/>
           <p:nvPr/>
         </p:nvSpPr>
@@ -6042,7 +5938,7 @@
       </p:sp>
       <p:sp>
         <p:nvSpPr>
-          <p:cNvPr id="21" name="Text 15"/>
+          <p:cNvPr id="21" name="Text 14"/>
           <p:cNvSpPr/>
           <p:nvPr/>
         </p:nvSpPr>
@@ -6078,7 +5974,7 @@
       </p:sp>
       <p:sp>
         <p:nvSpPr>
-          <p:cNvPr id="22" name="Text 16"/>
+          <p:cNvPr id="22" name="Text 15"/>
           <p:cNvSpPr/>
           <p:nvPr/>
         </p:nvSpPr>
@@ -6110,14 +6006,14 @@
       </p:sp>
       <p:pic>
         <p:nvPicPr>
-          <p:cNvPr id="23" name="Image 4" descr="/Users/danwahlin/.copilot/session-state/56a7a0da-def8-48d4-b5e8-0ac3878cb8dd/files/slides-build/icons/GoRocket-1A7F37.png">    </p:cNvPr>
+          <p:cNvPr id="23" name="Image 5" descr="/Users/danwahlin/.copilot/session-state/56a7a0da-def8-48d4-b5e8-0ac3878cb8dd/files/slides-build/icons/GoRocket-1A7F37.png">    </p:cNvPr>
           <p:cNvPicPr>
             <a:picLocks noChangeAspect="1"/>
           </p:cNvPicPr>
           <p:nvPr/>
         </p:nvPicPr>
         <p:blipFill>
-          <a:blip r:embed="rId6"/>
+          <a:blip r:embed="rId7"/>
           <a:stretch>
             <a:fillRect/>
           </a:stretch>
@@ -6134,7 +6030,7 @@
       </p:pic>
       <p:sp>
         <p:nvSpPr>
-          <p:cNvPr id="24" name="Text 17"/>
+          <p:cNvPr id="24" name="Text 16"/>
           <p:cNvSpPr/>
           <p:nvPr/>
         </p:nvSpPr>
@@ -6176,7 +6072,7 @@
       </p:sp>
       <p:sp>
         <p:nvSpPr>
-          <p:cNvPr id="25" name="Text 18"/>
+          <p:cNvPr id="25" name="Text 17"/>
           <p:cNvSpPr/>
           <p:nvPr/>
         </p:nvSpPr>
@@ -6248,112 +6144,9 @@
           <a:chExt cx="0" cy="0"/>
         </a:xfrm>
       </p:grpSpPr>
-      <p:sp>
-        <p:nvSpPr>
-          <p:cNvPr id="2" name="Text 0"/>
-          <p:cNvSpPr/>
-          <p:nvPr/>
-        </p:nvSpPr>
-        <p:spPr>
-          <a:xfrm>
-            <a:off x="0" y="0"/>
-            <a:ext cx="9144000" cy="76200"/>
-          </a:xfrm>
-          <a:prstGeom prst="rect">
-            <a:avLst/>
-          </a:prstGeom>
-          <a:solidFill>
-            <a:srgbClr val="1A7F37"/>
-          </a:solidFill>
-          <a:ln/>
-        </p:spPr>
-        <p:txBody>
-          <a:bodyPr wrap="square" rtlCol="0" anchor="ctr"/>
-          <a:lstStyle/>
-          <a:p>
-            <a:pPr indent="0" marL="0">
-              <a:buNone/>
-            </a:pPr>
-            <a:endParaRPr lang="en-US" dirty="0"/>
-          </a:p>
-        </p:txBody>
-      </p:sp>
-      <p:sp>
-        <p:nvSpPr>
-          <p:cNvPr id="3" name="Text 1"/>
-          <p:cNvSpPr/>
-          <p:nvPr/>
-        </p:nvSpPr>
-        <p:spPr>
-          <a:xfrm>
-            <a:off x="7340501" y="177701"/>
-            <a:ext cx="1168301" cy="279350"/>
-          </a:xfrm>
-          <a:prstGeom prst="roundRect">
-            <a:avLst>
-              <a:gd name="adj" fmla="val 22731"/>
-            </a:avLst>
-          </a:prstGeom>
-          <a:solidFill>
-            <a:srgbClr val="1A7F37"/>
-          </a:solidFill>
-          <a:ln/>
-        </p:spPr>
-        <p:txBody>
-          <a:bodyPr wrap="square" rtlCol="0" anchor="ctr"/>
-          <a:lstStyle/>
-          <a:p>
-            <a:pPr indent="0" marL="0">
-              <a:buNone/>
-            </a:pPr>
-            <a:endParaRPr lang="en-US" dirty="0"/>
-          </a:p>
-        </p:txBody>
-      </p:sp>
-      <p:sp>
-        <p:nvSpPr>
-          <p:cNvPr id="4" name="Text 2"/>
-          <p:cNvSpPr/>
-          <p:nvPr/>
-        </p:nvSpPr>
-        <p:spPr>
-          <a:xfrm>
-            <a:off x="7461041" y="231577"/>
-            <a:ext cx="927071" cy="171450"/>
-          </a:xfrm>
-          <a:prstGeom prst="rect">
-            <a:avLst/>
-          </a:prstGeom>
-          <a:noFill/>
-          <a:ln/>
-        </p:spPr>
-        <p:txBody>
-          <a:bodyPr wrap="square" lIns="0" tIns="0" rIns="0" bIns="0" rtlCol="0" anchor="t"/>
-          <a:lstStyle/>
-          <a:p>
-            <a:pPr algn="ctr" indent="0" marL="0">
-              <a:buNone/>
-            </a:pPr>
-            <a:r>
-              <a:rPr lang="en-US" sz="1150" b="1" dirty="0">
-                <a:solidFill>
-                  <a:srgbClr val="FFFFFF"/>
-                </a:solidFill>
-                <a:latin typeface="Arial" pitchFamily="34" charset="0"/>
-                <a:ea typeface="Arial" pitchFamily="34" charset="-122"/>
-                <a:cs typeface="Arial" pitchFamily="34" charset="-120"/>
-              </a:rPr>
-              <a:t>CHAPTER 01</a:t>
-            </a:r>
-            <a:endParaRPr lang="en-US" sz="1150" dirty="0"/>
-          </a:p>
-        </p:txBody>
-      </p:sp>
       <p:pic>
         <p:nvPicPr>
-          <p:cNvPr id="5" name="Image 0" descr="/Users/danwahlin/.copilot/session-state/56a7a0da-def8-48d4-b5e8-0ac3878cb8dd/files/slides-build/icons/FaGithub-1F2328.png">
-            <a:hlinkClick r:id="rId2" tooltip="https://github.com/github/copilot-app-for-beginners/tree/main/01-tour-the-app"/>
-          </p:cNvPr>
+          <p:cNvPr id="2" name="Image 0" descr="/Users/danwahlin/.copilot/session-state/56a7a0da-def8-48d4-b5e8-0ac3878cb8dd/files/slides-build/img/grad-corner.png">    </p:cNvPr>
           <p:cNvPicPr>
             <a:picLocks noChangeAspect="1"/>
           </p:cNvPicPr>
@@ -6367,6 +6160,103 @@
         </p:blipFill>
         <p:spPr>
           <a:xfrm>
+            <a:off x="6349901" y="0"/>
+            <a:ext cx="2793950" cy="1308050"/>
+          </a:xfrm>
+          <a:prstGeom prst="rect">
+            <a:avLst/>
+          </a:prstGeom>
+        </p:spPr>
+      </p:pic>
+      <p:sp>
+        <p:nvSpPr>
+          <p:cNvPr id="3" name="Text 0"/>
+          <p:cNvSpPr/>
+          <p:nvPr/>
+        </p:nvSpPr>
+        <p:spPr>
+          <a:xfrm>
+            <a:off x="7340501" y="177701"/>
+            <a:ext cx="1168301" cy="279350"/>
+          </a:xfrm>
+          <a:prstGeom prst="roundRect">
+            <a:avLst>
+              <a:gd name="adj" fmla="val 22731"/>
+            </a:avLst>
+          </a:prstGeom>
+          <a:solidFill>
+            <a:srgbClr val="1A7F37"/>
+          </a:solidFill>
+          <a:ln/>
+        </p:spPr>
+        <p:txBody>
+          <a:bodyPr wrap="square" rtlCol="0" anchor="ctr"/>
+          <a:lstStyle/>
+          <a:p>
+            <a:pPr indent="0" marL="0">
+              <a:buNone/>
+            </a:pPr>
+            <a:endParaRPr lang="en-US" dirty="0"/>
+          </a:p>
+        </p:txBody>
+      </p:sp>
+      <p:sp>
+        <p:nvSpPr>
+          <p:cNvPr id="4" name="Text 1"/>
+          <p:cNvSpPr/>
+          <p:nvPr/>
+        </p:nvSpPr>
+        <p:spPr>
+          <a:xfrm>
+            <a:off x="7461041" y="231577"/>
+            <a:ext cx="927071" cy="171450"/>
+          </a:xfrm>
+          <a:prstGeom prst="rect">
+            <a:avLst/>
+          </a:prstGeom>
+          <a:noFill/>
+          <a:ln/>
+        </p:spPr>
+        <p:txBody>
+          <a:bodyPr wrap="square" lIns="0" tIns="0" rIns="0" bIns="0" rtlCol="0" anchor="t"/>
+          <a:lstStyle/>
+          <a:p>
+            <a:pPr algn="ctr" indent="0" marL="0">
+              <a:buNone/>
+            </a:pPr>
+            <a:r>
+              <a:rPr lang="en-US" sz="1150" b="1" dirty="0">
+                <a:solidFill>
+                  <a:srgbClr val="FFFFFF"/>
+                </a:solidFill>
+                <a:latin typeface="Arial" pitchFamily="34" charset="0"/>
+                <a:ea typeface="Arial" pitchFamily="34" charset="-122"/>
+                <a:cs typeface="Arial" pitchFamily="34" charset="-120"/>
+              </a:rPr>
+              <a:t>CHAPTER 01</a:t>
+            </a:r>
+            <a:endParaRPr lang="en-US" sz="1150" dirty="0"/>
+          </a:p>
+        </p:txBody>
+      </p:sp>
+      <p:pic>
+        <p:nvPicPr>
+          <p:cNvPr id="5" name="Image 1" descr="/Users/danwahlin/.copilot/session-state/56a7a0da-def8-48d4-b5e8-0ac3878cb8dd/files/slides-build/icons/FaGithub-1F2328.png">
+            <a:hlinkClick r:id="rId3" tooltip="https://github.com/github/copilot-app-for-beginners/tree/main/01-tour-the-app"/>
+          </p:cNvPr>
+          <p:cNvPicPr>
+            <a:picLocks noChangeAspect="1"/>
+          </p:cNvPicPr>
+          <p:nvPr/>
+        </p:nvPicPr>
+        <p:blipFill>
+          <a:blip r:embed="rId2"/>
+          <a:stretch>
+            <a:fillRect/>
+          </a:stretch>
+        </p:blipFill>
+        <p:spPr>
+          <a:xfrm>
             <a:off x="8610600" y="165050"/>
             <a:ext cx="304800" cy="304800"/>
           </a:xfrm>
@@ -6377,7 +6267,7 @@
       </p:pic>
       <p:sp>
         <p:nvSpPr>
-          <p:cNvPr id="6" name="Text 3"/>
+          <p:cNvPr id="6" name="Text 2"/>
           <p:cNvSpPr/>
           <p:nvPr/>
         </p:nvSpPr>
@@ -6416,7 +6306,7 @@
       </p:sp>
       <p:sp>
         <p:nvSpPr>
-          <p:cNvPr id="7" name="Text 4"/>
+          <p:cNvPr id="7" name="Text 3"/>
           <p:cNvSpPr/>
           <p:nvPr/>
         </p:nvSpPr>
@@ -6461,7 +6351,7 @@
       </p:sp>
       <p:sp>
         <p:nvSpPr>
-          <p:cNvPr id="8" name="Text 5"/>
+          <p:cNvPr id="8" name="Text 4"/>
           <p:cNvSpPr/>
           <p:nvPr/>
         </p:nvSpPr>
@@ -6497,7 +6387,7 @@
       </p:sp>
       <p:sp>
         <p:nvSpPr>
-          <p:cNvPr id="9" name="Shape 6"/>
+          <p:cNvPr id="9" name="Shape 5"/>
           <p:cNvSpPr/>
           <p:nvPr/>
         </p:nvSpPr>
@@ -6520,7 +6410,7 @@
       </p:sp>
       <p:sp>
         <p:nvSpPr>
-          <p:cNvPr id="10" name="Text 7"/>
+          <p:cNvPr id="10" name="Text 6"/>
           <p:cNvSpPr/>
           <p:nvPr/>
         </p:nvSpPr>
@@ -6562,7 +6452,7 @@
       </p:sp>
       <p:sp>
         <p:nvSpPr>
-          <p:cNvPr id="11" name="Text 8"/>
+          <p:cNvPr id="11" name="Text 7"/>
           <p:cNvSpPr/>
           <p:nvPr/>
         </p:nvSpPr>
@@ -6604,7 +6494,7 @@
       </p:sp>
       <p:sp>
         <p:nvSpPr>
-          <p:cNvPr id="12" name="Shape 9"/>
+          <p:cNvPr id="12" name="Shape 8"/>
           <p:cNvSpPr/>
           <p:nvPr/>
         </p:nvSpPr>
@@ -6627,7 +6517,7 @@
       </p:sp>
       <p:sp>
         <p:nvSpPr>
-          <p:cNvPr id="13" name="Text 10"/>
+          <p:cNvPr id="13" name="Text 9"/>
           <p:cNvSpPr/>
           <p:nvPr/>
         </p:nvSpPr>
@@ -6669,7 +6559,7 @@
       </p:sp>
       <p:sp>
         <p:nvSpPr>
-          <p:cNvPr id="14" name="Text 11"/>
+          <p:cNvPr id="14" name="Text 10"/>
           <p:cNvSpPr/>
           <p:nvPr/>
         </p:nvSpPr>
@@ -6711,7 +6601,7 @@
       </p:sp>
       <p:sp>
         <p:nvSpPr>
-          <p:cNvPr id="15" name="Text 12"/>
+          <p:cNvPr id="15" name="Text 11"/>
           <p:cNvSpPr/>
           <p:nvPr/>
         </p:nvSpPr>
@@ -6753,7 +6643,7 @@
       </p:sp>
       <p:sp>
         <p:nvSpPr>
-          <p:cNvPr id="16" name="Text 13"/>
+          <p:cNvPr id="16" name="Text 12"/>
           <p:cNvSpPr/>
           <p:nvPr/>
         </p:nvSpPr>
@@ -6795,7 +6685,7 @@
       </p:sp>
       <p:sp>
         <p:nvSpPr>
-          <p:cNvPr id="17" name="Text 14"/>
+          <p:cNvPr id="17" name="Text 13"/>
           <p:cNvSpPr/>
           <p:nvPr/>
         </p:nvSpPr>
@@ -6831,248 +6721,7 @@
       </p:sp>
       <p:pic>
         <p:nvPicPr>
-          <p:cNvPr id="18" name="Image 1" descr="/Users/danwahlin/.copilot/session-state/56a7a0da-def8-48d4-b5e8-0ac3878cb8dd/files/slides-build/icons/GoAlert-9A6700.png">    </p:cNvPr>
-          <p:cNvPicPr>
-            <a:picLocks noChangeAspect="1"/>
-          </p:cNvPicPr>
-          <p:nvPr/>
-        </p:nvPicPr>
-        <p:blipFill>
-          <a:blip r:embed="rId3"/>
-          <a:stretch>
-            <a:fillRect/>
-          </a:stretch>
-        </p:blipFill>
-        <p:spPr>
-          <a:xfrm>
-            <a:off x="695176" y="3529459"/>
-            <a:ext cx="203150" cy="203150"/>
-          </a:xfrm>
-          <a:prstGeom prst="rect">
-            <a:avLst/>
-          </a:prstGeom>
-        </p:spPr>
-      </p:pic>
-      <p:sp>
-        <p:nvSpPr>
-          <p:cNvPr id="19" name="Text 15"/>
-          <p:cNvSpPr/>
-          <p:nvPr/>
-        </p:nvSpPr>
-        <p:spPr>
-          <a:xfrm>
-            <a:off x="1025277" y="3407569"/>
-            <a:ext cx="3167557" cy="447080"/>
-          </a:xfrm>
-          <a:prstGeom prst="rect">
-            <a:avLst/>
-          </a:prstGeom>
-          <a:noFill/>
-          <a:ln/>
-        </p:spPr>
-        <p:txBody>
-          <a:bodyPr wrap="square" lIns="0" tIns="0" rIns="0" bIns="0" rtlCol="0" anchor="t"/>
-          <a:lstStyle/>
-          <a:p>
-            <a:pPr algn="l" indent="0" marL="0">
-              <a:lnSpc>
-                <a:spcPts val="1760"/>
-              </a:lnSpc>
-              <a:buNone/>
-            </a:pPr>
-            <a:r>
-              <a:rPr lang="en-US" sz="1450" b="1" dirty="0">
-                <a:solidFill>
-                  <a:srgbClr val="1F2328"/>
-                </a:solidFill>
-                <a:latin typeface="Arial" pitchFamily="34" charset="0"/>
-                <a:ea typeface="Arial" pitchFamily="34" charset="-122"/>
-                <a:cs typeface="Arial" pitchFamily="34" charset="-120"/>
-              </a:rPr>
-              <a:t>Auto</a:t>
-            </a:r>
-            <a:pPr algn="l" indent="0" marL="0">
-              <a:lnSpc>
-                <a:spcPts val="1760"/>
-              </a:lnSpc>
-              <a:buNone/>
-            </a:pPr>
-            <a:r>
-              <a:rPr lang="en-US" sz="1450" dirty="0">
-                <a:solidFill>
-                  <a:srgbClr val="1F2328"/>
-                </a:solidFill>
-                <a:latin typeface="Arial" pitchFamily="34" charset="0"/>
-                <a:ea typeface="Arial" pitchFamily="34" charset="-122"/>
-                <a:cs typeface="Arial" pitchFamily="34" charset="-120"/>
-              </a:rPr>
-              <a:t> picks a model. </a:t>
-            </a:r>
-            <a:pPr algn="l" indent="0" marL="0">
-              <a:lnSpc>
-                <a:spcPts val="1760"/>
-              </a:lnSpc>
-              <a:buNone/>
-            </a:pPr>
-            <a:r>
-              <a:rPr lang="en-US" sz="1450" b="1" dirty="0">
-                <a:solidFill>
-                  <a:srgbClr val="1F2328"/>
-                </a:solidFill>
-                <a:latin typeface="Arial" pitchFamily="34" charset="0"/>
-                <a:ea typeface="Arial" pitchFamily="34" charset="-122"/>
-                <a:cs typeface="Arial" pitchFamily="34" charset="-120"/>
-              </a:rPr>
-              <a:t>Autopilot</a:t>
-            </a:r>
-            <a:pPr algn="l" indent="0" marL="0">
-              <a:lnSpc>
-                <a:spcPts val="1760"/>
-              </a:lnSpc>
-              <a:buNone/>
-            </a:pPr>
-            <a:r>
-              <a:rPr lang="en-US" sz="1450" dirty="0">
-                <a:solidFill>
-                  <a:srgbClr val="1F2328"/>
-                </a:solidFill>
-                <a:latin typeface="Arial" pitchFamily="34" charset="0"/>
-                <a:ea typeface="Arial" pitchFamily="34" charset="-122"/>
-                <a:cs typeface="Arial" pitchFamily="34" charset="-120"/>
-              </a:rPr>
-              <a:t> is a mode.</a:t>
-            </a:r>
-            <a:endParaRPr lang="en-US" sz="1450" dirty="0"/>
-          </a:p>
-        </p:txBody>
-      </p:sp>
-      <p:sp>
-        <p:nvSpPr>
-          <p:cNvPr id="20" name="Text 16"/>
-          <p:cNvSpPr/>
-          <p:nvPr/>
-        </p:nvSpPr>
-        <p:spPr>
-          <a:xfrm>
-            <a:off x="4546550" y="1770459"/>
-            <a:ext cx="4089350" cy="1383953"/>
-          </a:xfrm>
-          <a:prstGeom prst="roundRect">
-            <a:avLst>
-              <a:gd name="adj" fmla="val 5506"/>
-            </a:avLst>
-          </a:prstGeom>
-          <a:solidFill>
-            <a:srgbClr val="FFFFFF"/>
-          </a:solidFill>
-          <a:ln/>
-        </p:spPr>
-        <p:txBody>
-          <a:bodyPr wrap="square" rtlCol="0" anchor="ctr"/>
-          <a:lstStyle/>
-          <a:p>
-            <a:pPr indent="0" marL="0">
-              <a:buNone/>
-            </a:pPr>
-            <a:endParaRPr lang="en-US" dirty="0"/>
-          </a:p>
-        </p:txBody>
-      </p:sp>
-      <p:sp>
-        <p:nvSpPr>
-          <p:cNvPr id="21" name="Shape 17"/>
-          <p:cNvSpPr/>
-          <p:nvPr/>
-        </p:nvSpPr>
-        <p:spPr>
-          <a:xfrm>
-            <a:off x="4546550" y="1775222"/>
-            <a:ext cx="4089350" cy="0"/>
-          </a:xfrm>
-          <a:prstGeom prst="line">
-            <a:avLst/>
-          </a:prstGeom>
-          <a:noFill/>
-          <a:ln w="9525">
-            <a:solidFill>
-              <a:srgbClr val="E0C5FF"/>
-            </a:solidFill>
-            <a:prstDash val="solid"/>
-          </a:ln>
-        </p:spPr>
-      </p:sp>
-      <p:sp>
-        <p:nvSpPr>
-          <p:cNvPr id="22" name="Shape 18"/>
-          <p:cNvSpPr/>
-          <p:nvPr/>
-        </p:nvSpPr>
-        <p:spPr>
-          <a:xfrm>
-            <a:off x="8631138" y="1770459"/>
-            <a:ext cx="0" cy="1383953"/>
-          </a:xfrm>
-          <a:prstGeom prst="line">
-            <a:avLst/>
-          </a:prstGeom>
-          <a:noFill/>
-          <a:ln w="9525">
-            <a:solidFill>
-              <a:srgbClr val="E0C5FF"/>
-            </a:solidFill>
-            <a:prstDash val="solid"/>
-          </a:ln>
-        </p:spPr>
-      </p:sp>
-      <p:sp>
-        <p:nvSpPr>
-          <p:cNvPr id="23" name="Shape 19"/>
-          <p:cNvSpPr/>
-          <p:nvPr/>
-        </p:nvSpPr>
-        <p:spPr>
-          <a:xfrm>
-            <a:off x="4546550" y="3149650"/>
-            <a:ext cx="4089350" cy="0"/>
-          </a:xfrm>
-          <a:prstGeom prst="line">
-            <a:avLst/>
-          </a:prstGeom>
-          <a:noFill/>
-          <a:ln w="9525">
-            <a:solidFill>
-              <a:srgbClr val="E0C5FF"/>
-            </a:solidFill>
-            <a:prstDash val="solid"/>
-          </a:ln>
-        </p:spPr>
-      </p:sp>
-      <p:sp>
-        <p:nvSpPr>
-          <p:cNvPr id="24" name="Shape 20"/>
-          <p:cNvSpPr/>
-          <p:nvPr/>
-        </p:nvSpPr>
-        <p:spPr>
-          <a:xfrm>
-            <a:off x="4570363" y="1770459"/>
-            <a:ext cx="0" cy="1383953"/>
-          </a:xfrm>
-          <a:prstGeom prst="line">
-            <a:avLst/>
-          </a:prstGeom>
-          <a:noFill/>
-          <a:ln w="47625">
-            <a:solidFill>
-              <a:srgbClr val="8250DF"/>
-            </a:solidFill>
-            <a:prstDash val="solid"/>
-          </a:ln>
-        </p:spPr>
-      </p:sp>
-      <p:pic>
-        <p:nvPicPr>
-          <p:cNvPr id="25" name="Image 2" descr="/Users/danwahlin/.copilot/session-state/56a7a0da-def8-48d4-b5e8-0ac3878cb8dd/files/slides-build/icons/GoCopilot-8250DF.png">    </p:cNvPr>
+          <p:cNvPr id="18" name="Image 2" descr="/Users/danwahlin/.copilot/session-state/56a7a0da-def8-48d4-b5e8-0ac3878cb8dd/files/slides-build/icons/GoAlert-9A6700.png">    </p:cNvPr>
           <p:cNvPicPr>
             <a:picLocks noChangeAspect="1"/>
           </p:cNvPicPr>
@@ -7086,6 +6735,247 @@
         </p:blipFill>
         <p:spPr>
           <a:xfrm>
+            <a:off x="695176" y="3529459"/>
+            <a:ext cx="203150" cy="203150"/>
+          </a:xfrm>
+          <a:prstGeom prst="rect">
+            <a:avLst/>
+          </a:prstGeom>
+        </p:spPr>
+      </p:pic>
+      <p:sp>
+        <p:nvSpPr>
+          <p:cNvPr id="19" name="Text 14"/>
+          <p:cNvSpPr/>
+          <p:nvPr/>
+        </p:nvSpPr>
+        <p:spPr>
+          <a:xfrm>
+            <a:off x="1025277" y="3407569"/>
+            <a:ext cx="3167557" cy="447080"/>
+          </a:xfrm>
+          <a:prstGeom prst="rect">
+            <a:avLst/>
+          </a:prstGeom>
+          <a:noFill/>
+          <a:ln/>
+        </p:spPr>
+        <p:txBody>
+          <a:bodyPr wrap="square" lIns="0" tIns="0" rIns="0" bIns="0" rtlCol="0" anchor="t"/>
+          <a:lstStyle/>
+          <a:p>
+            <a:pPr algn="l" indent="0" marL="0">
+              <a:lnSpc>
+                <a:spcPts val="1760"/>
+              </a:lnSpc>
+              <a:buNone/>
+            </a:pPr>
+            <a:r>
+              <a:rPr lang="en-US" sz="1450" b="1" dirty="0">
+                <a:solidFill>
+                  <a:srgbClr val="1F2328"/>
+                </a:solidFill>
+                <a:latin typeface="Arial" pitchFamily="34" charset="0"/>
+                <a:ea typeface="Arial" pitchFamily="34" charset="-122"/>
+                <a:cs typeface="Arial" pitchFamily="34" charset="-120"/>
+              </a:rPr>
+              <a:t>Auto</a:t>
+            </a:r>
+            <a:pPr algn="l" indent="0" marL="0">
+              <a:lnSpc>
+                <a:spcPts val="1760"/>
+              </a:lnSpc>
+              <a:buNone/>
+            </a:pPr>
+            <a:r>
+              <a:rPr lang="en-US" sz="1450" dirty="0">
+                <a:solidFill>
+                  <a:srgbClr val="1F2328"/>
+                </a:solidFill>
+                <a:latin typeface="Arial" pitchFamily="34" charset="0"/>
+                <a:ea typeface="Arial" pitchFamily="34" charset="-122"/>
+                <a:cs typeface="Arial" pitchFamily="34" charset="-120"/>
+              </a:rPr>
+              <a:t> picks a model. </a:t>
+            </a:r>
+            <a:pPr algn="l" indent="0" marL="0">
+              <a:lnSpc>
+                <a:spcPts val="1760"/>
+              </a:lnSpc>
+              <a:buNone/>
+            </a:pPr>
+            <a:r>
+              <a:rPr lang="en-US" sz="1450" b="1" dirty="0">
+                <a:solidFill>
+                  <a:srgbClr val="1F2328"/>
+                </a:solidFill>
+                <a:latin typeface="Arial" pitchFamily="34" charset="0"/>
+                <a:ea typeface="Arial" pitchFamily="34" charset="-122"/>
+                <a:cs typeface="Arial" pitchFamily="34" charset="-120"/>
+              </a:rPr>
+              <a:t>Autopilot</a:t>
+            </a:r>
+            <a:pPr algn="l" indent="0" marL="0">
+              <a:lnSpc>
+                <a:spcPts val="1760"/>
+              </a:lnSpc>
+              <a:buNone/>
+            </a:pPr>
+            <a:r>
+              <a:rPr lang="en-US" sz="1450" dirty="0">
+                <a:solidFill>
+                  <a:srgbClr val="1F2328"/>
+                </a:solidFill>
+                <a:latin typeface="Arial" pitchFamily="34" charset="0"/>
+                <a:ea typeface="Arial" pitchFamily="34" charset="-122"/>
+                <a:cs typeface="Arial" pitchFamily="34" charset="-120"/>
+              </a:rPr>
+              <a:t> is a mode.</a:t>
+            </a:r>
+            <a:endParaRPr lang="en-US" sz="1450" dirty="0"/>
+          </a:p>
+        </p:txBody>
+      </p:sp>
+      <p:sp>
+        <p:nvSpPr>
+          <p:cNvPr id="20" name="Text 15"/>
+          <p:cNvSpPr/>
+          <p:nvPr/>
+        </p:nvSpPr>
+        <p:spPr>
+          <a:xfrm>
+            <a:off x="4546550" y="1770459"/>
+            <a:ext cx="4089350" cy="1383953"/>
+          </a:xfrm>
+          <a:prstGeom prst="roundRect">
+            <a:avLst>
+              <a:gd name="adj" fmla="val 5506"/>
+            </a:avLst>
+          </a:prstGeom>
+          <a:solidFill>
+            <a:srgbClr val="FFFFFF"/>
+          </a:solidFill>
+          <a:ln/>
+        </p:spPr>
+        <p:txBody>
+          <a:bodyPr wrap="square" rtlCol="0" anchor="ctr"/>
+          <a:lstStyle/>
+          <a:p>
+            <a:pPr indent="0" marL="0">
+              <a:buNone/>
+            </a:pPr>
+            <a:endParaRPr lang="en-US" dirty="0"/>
+          </a:p>
+        </p:txBody>
+      </p:sp>
+      <p:sp>
+        <p:nvSpPr>
+          <p:cNvPr id="21" name="Shape 16"/>
+          <p:cNvSpPr/>
+          <p:nvPr/>
+        </p:nvSpPr>
+        <p:spPr>
+          <a:xfrm>
+            <a:off x="4546550" y="1775222"/>
+            <a:ext cx="4089350" cy="0"/>
+          </a:xfrm>
+          <a:prstGeom prst="line">
+            <a:avLst/>
+          </a:prstGeom>
+          <a:noFill/>
+          <a:ln w="9525">
+            <a:solidFill>
+              <a:srgbClr val="E0C5FF"/>
+            </a:solidFill>
+            <a:prstDash val="solid"/>
+          </a:ln>
+        </p:spPr>
+      </p:sp>
+      <p:sp>
+        <p:nvSpPr>
+          <p:cNvPr id="22" name="Shape 17"/>
+          <p:cNvSpPr/>
+          <p:nvPr/>
+        </p:nvSpPr>
+        <p:spPr>
+          <a:xfrm>
+            <a:off x="8631138" y="1770459"/>
+            <a:ext cx="0" cy="1383953"/>
+          </a:xfrm>
+          <a:prstGeom prst="line">
+            <a:avLst/>
+          </a:prstGeom>
+          <a:noFill/>
+          <a:ln w="9525">
+            <a:solidFill>
+              <a:srgbClr val="E0C5FF"/>
+            </a:solidFill>
+            <a:prstDash val="solid"/>
+          </a:ln>
+        </p:spPr>
+      </p:sp>
+      <p:sp>
+        <p:nvSpPr>
+          <p:cNvPr id="23" name="Shape 18"/>
+          <p:cNvSpPr/>
+          <p:nvPr/>
+        </p:nvSpPr>
+        <p:spPr>
+          <a:xfrm>
+            <a:off x="4546550" y="3149650"/>
+            <a:ext cx="4089350" cy="0"/>
+          </a:xfrm>
+          <a:prstGeom prst="line">
+            <a:avLst/>
+          </a:prstGeom>
+          <a:noFill/>
+          <a:ln w="9525">
+            <a:solidFill>
+              <a:srgbClr val="E0C5FF"/>
+            </a:solidFill>
+            <a:prstDash val="solid"/>
+          </a:ln>
+        </p:spPr>
+      </p:sp>
+      <p:sp>
+        <p:nvSpPr>
+          <p:cNvPr id="24" name="Shape 19"/>
+          <p:cNvSpPr/>
+          <p:nvPr/>
+        </p:nvSpPr>
+        <p:spPr>
+          <a:xfrm>
+            <a:off x="4570363" y="1770459"/>
+            <a:ext cx="0" cy="1383953"/>
+          </a:xfrm>
+          <a:prstGeom prst="line">
+            <a:avLst/>
+          </a:prstGeom>
+          <a:noFill/>
+          <a:ln w="47625">
+            <a:solidFill>
+              <a:srgbClr val="8250DF"/>
+            </a:solidFill>
+            <a:prstDash val="solid"/>
+          </a:ln>
+        </p:spPr>
+      </p:sp>
+      <p:pic>
+        <p:nvPicPr>
+          <p:cNvPr id="25" name="Image 3" descr="/Users/danwahlin/.copilot/session-state/56a7a0da-def8-48d4-b5e8-0ac3878cb8dd/files/slides-build/icons/GoCopilot-8250DF.png">    </p:cNvPr>
+          <p:cNvPicPr>
+            <a:picLocks noChangeAspect="1"/>
+          </p:cNvPicPr>
+          <p:nvPr/>
+        </p:nvPicPr>
+        <p:blipFill>
+          <a:blip r:embed="rId5"/>
+          <a:stretch>
+            <a:fillRect/>
+          </a:stretch>
+        </p:blipFill>
+        <p:spPr>
+          <a:xfrm>
             <a:off x="4771876" y="1910060"/>
             <a:ext cx="165050" cy="165050"/>
           </a:xfrm>
@@ -7096,7 +6986,7 @@
       </p:pic>
       <p:sp>
         <p:nvSpPr>
-          <p:cNvPr id="26" name="Text 21"/>
+          <p:cNvPr id="26" name="Text 20"/>
           <p:cNvSpPr/>
           <p:nvPr/>
         </p:nvSpPr>
@@ -7135,7 +7025,7 @@
       </p:sp>
       <p:sp>
         <p:nvSpPr>
-          <p:cNvPr id="27" name="Text 22"/>
+          <p:cNvPr id="27" name="Text 21"/>
           <p:cNvSpPr/>
           <p:nvPr/>
         </p:nvSpPr>
@@ -7177,7 +7067,7 @@
       </p:sp>
       <p:sp>
         <p:nvSpPr>
-          <p:cNvPr id="28" name="Text 23"/>
+          <p:cNvPr id="28" name="Text 22"/>
           <p:cNvSpPr/>
           <p:nvPr/>
         </p:nvSpPr>
@@ -7213,14 +7103,14 @@
       </p:sp>
       <p:pic>
         <p:nvPicPr>
-          <p:cNvPr id="29" name="Image 3" descr="/Users/danwahlin/.copilot/session-state/56a7a0da-def8-48d4-b5e8-0ac3878cb8dd/files/slides-build/icons/GoCheckCircle-1A7F37.png">    </p:cNvPr>
+          <p:cNvPr id="29" name="Image 4" descr="/Users/danwahlin/.copilot/session-state/56a7a0da-def8-48d4-b5e8-0ac3878cb8dd/files/slides-build/icons/GoCheckCircle-1A7F37.png">    </p:cNvPr>
           <p:cNvPicPr>
             <a:picLocks noChangeAspect="1"/>
           </p:cNvPicPr>
           <p:nvPr/>
         </p:nvPicPr>
         <p:blipFill>
-          <a:blip r:embed="rId5"/>
+          <a:blip r:embed="rId6"/>
           <a:stretch>
             <a:fillRect/>
           </a:stretch>
@@ -7237,7 +7127,7 @@
       </p:pic>
       <p:sp>
         <p:nvSpPr>
-          <p:cNvPr id="30" name="Text 24"/>
+          <p:cNvPr id="30" name="Text 23"/>
           <p:cNvSpPr/>
           <p:nvPr/>
         </p:nvSpPr>
@@ -7360,112 +7250,9 @@
           <a:chExt cx="0" cy="0"/>
         </a:xfrm>
       </p:grpSpPr>
-      <p:sp>
-        <p:nvSpPr>
-          <p:cNvPr id="2" name="Text 0"/>
-          <p:cNvSpPr/>
-          <p:nvPr/>
-        </p:nvSpPr>
-        <p:spPr>
-          <a:xfrm>
-            <a:off x="0" y="0"/>
-            <a:ext cx="9144000" cy="76200"/>
-          </a:xfrm>
-          <a:prstGeom prst="rect">
-            <a:avLst/>
-          </a:prstGeom>
-          <a:solidFill>
-            <a:srgbClr val="1A7F37"/>
-          </a:solidFill>
-          <a:ln/>
-        </p:spPr>
-        <p:txBody>
-          <a:bodyPr wrap="square" rtlCol="0" anchor="ctr"/>
-          <a:lstStyle/>
-          <a:p>
-            <a:pPr indent="0" marL="0">
-              <a:buNone/>
-            </a:pPr>
-            <a:endParaRPr lang="en-US" dirty="0"/>
-          </a:p>
-        </p:txBody>
-      </p:sp>
-      <p:sp>
-        <p:nvSpPr>
-          <p:cNvPr id="3" name="Text 1"/>
-          <p:cNvSpPr/>
-          <p:nvPr/>
-        </p:nvSpPr>
-        <p:spPr>
-          <a:xfrm>
-            <a:off x="7340501" y="177701"/>
-            <a:ext cx="1168301" cy="279350"/>
-          </a:xfrm>
-          <a:prstGeom prst="roundRect">
-            <a:avLst>
-              <a:gd name="adj" fmla="val 22731"/>
-            </a:avLst>
-          </a:prstGeom>
-          <a:solidFill>
-            <a:srgbClr val="1A7F37"/>
-          </a:solidFill>
-          <a:ln/>
-        </p:spPr>
-        <p:txBody>
-          <a:bodyPr wrap="square" rtlCol="0" anchor="ctr"/>
-          <a:lstStyle/>
-          <a:p>
-            <a:pPr indent="0" marL="0">
-              <a:buNone/>
-            </a:pPr>
-            <a:endParaRPr lang="en-US" dirty="0"/>
-          </a:p>
-        </p:txBody>
-      </p:sp>
-      <p:sp>
-        <p:nvSpPr>
-          <p:cNvPr id="4" name="Text 2"/>
-          <p:cNvSpPr/>
-          <p:nvPr/>
-        </p:nvSpPr>
-        <p:spPr>
-          <a:xfrm>
-            <a:off x="7461041" y="231577"/>
-            <a:ext cx="927071" cy="171450"/>
-          </a:xfrm>
-          <a:prstGeom prst="rect">
-            <a:avLst/>
-          </a:prstGeom>
-          <a:noFill/>
-          <a:ln/>
-        </p:spPr>
-        <p:txBody>
-          <a:bodyPr wrap="square" lIns="0" tIns="0" rIns="0" bIns="0" rtlCol="0" anchor="t"/>
-          <a:lstStyle/>
-          <a:p>
-            <a:pPr algn="ctr" indent="0" marL="0">
-              <a:buNone/>
-            </a:pPr>
-            <a:r>
-              <a:rPr lang="en-US" sz="1150" b="1" dirty="0">
-                <a:solidFill>
-                  <a:srgbClr val="FFFFFF"/>
-                </a:solidFill>
-                <a:latin typeface="Arial" pitchFamily="34" charset="0"/>
-                <a:ea typeface="Arial" pitchFamily="34" charset="-122"/>
-                <a:cs typeface="Arial" pitchFamily="34" charset="-120"/>
-              </a:rPr>
-              <a:t>CHAPTER 01</a:t>
-            </a:r>
-            <a:endParaRPr lang="en-US" sz="1150" dirty="0"/>
-          </a:p>
-        </p:txBody>
-      </p:sp>
       <p:pic>
         <p:nvPicPr>
-          <p:cNvPr id="5" name="Image 0" descr="/Users/danwahlin/.copilot/session-state/56a7a0da-def8-48d4-b5e8-0ac3878cb8dd/files/slides-build/icons/FaGithub-1F2328.png">
-            <a:hlinkClick r:id="rId2" tooltip="https://github.com/github/copilot-app-for-beginners/tree/main/01-tour-the-app"/>
-          </p:cNvPr>
+          <p:cNvPr id="2" name="Image 0" descr="/Users/danwahlin/.copilot/session-state/56a7a0da-def8-48d4-b5e8-0ac3878cb8dd/files/slides-build/img/grad-corner.png">    </p:cNvPr>
           <p:cNvPicPr>
             <a:picLocks noChangeAspect="1"/>
           </p:cNvPicPr>
@@ -7479,6 +7266,103 @@
         </p:blipFill>
         <p:spPr>
           <a:xfrm>
+            <a:off x="6349901" y="0"/>
+            <a:ext cx="2793950" cy="1308050"/>
+          </a:xfrm>
+          <a:prstGeom prst="rect">
+            <a:avLst/>
+          </a:prstGeom>
+        </p:spPr>
+      </p:pic>
+      <p:sp>
+        <p:nvSpPr>
+          <p:cNvPr id="3" name="Text 0"/>
+          <p:cNvSpPr/>
+          <p:nvPr/>
+        </p:nvSpPr>
+        <p:spPr>
+          <a:xfrm>
+            <a:off x="7340501" y="177701"/>
+            <a:ext cx="1168301" cy="279350"/>
+          </a:xfrm>
+          <a:prstGeom prst="roundRect">
+            <a:avLst>
+              <a:gd name="adj" fmla="val 22731"/>
+            </a:avLst>
+          </a:prstGeom>
+          <a:solidFill>
+            <a:srgbClr val="1A7F37"/>
+          </a:solidFill>
+          <a:ln/>
+        </p:spPr>
+        <p:txBody>
+          <a:bodyPr wrap="square" rtlCol="0" anchor="ctr"/>
+          <a:lstStyle/>
+          <a:p>
+            <a:pPr indent="0" marL="0">
+              <a:buNone/>
+            </a:pPr>
+            <a:endParaRPr lang="en-US" dirty="0"/>
+          </a:p>
+        </p:txBody>
+      </p:sp>
+      <p:sp>
+        <p:nvSpPr>
+          <p:cNvPr id="4" name="Text 1"/>
+          <p:cNvSpPr/>
+          <p:nvPr/>
+        </p:nvSpPr>
+        <p:spPr>
+          <a:xfrm>
+            <a:off x="7461041" y="231577"/>
+            <a:ext cx="927071" cy="171450"/>
+          </a:xfrm>
+          <a:prstGeom prst="rect">
+            <a:avLst/>
+          </a:prstGeom>
+          <a:noFill/>
+          <a:ln/>
+        </p:spPr>
+        <p:txBody>
+          <a:bodyPr wrap="square" lIns="0" tIns="0" rIns="0" bIns="0" rtlCol="0" anchor="t"/>
+          <a:lstStyle/>
+          <a:p>
+            <a:pPr algn="ctr" indent="0" marL="0">
+              <a:buNone/>
+            </a:pPr>
+            <a:r>
+              <a:rPr lang="en-US" sz="1150" b="1" dirty="0">
+                <a:solidFill>
+                  <a:srgbClr val="FFFFFF"/>
+                </a:solidFill>
+                <a:latin typeface="Arial" pitchFamily="34" charset="0"/>
+                <a:ea typeface="Arial" pitchFamily="34" charset="-122"/>
+                <a:cs typeface="Arial" pitchFamily="34" charset="-120"/>
+              </a:rPr>
+              <a:t>CHAPTER 01</a:t>
+            </a:r>
+            <a:endParaRPr lang="en-US" sz="1150" dirty="0"/>
+          </a:p>
+        </p:txBody>
+      </p:sp>
+      <p:pic>
+        <p:nvPicPr>
+          <p:cNvPr id="5" name="Image 1" descr="/Users/danwahlin/.copilot/session-state/56a7a0da-def8-48d4-b5e8-0ac3878cb8dd/files/slides-build/icons/FaGithub-1F2328.png">
+            <a:hlinkClick r:id="rId3" tooltip="https://github.com/github/copilot-app-for-beginners/tree/main/01-tour-the-app"/>
+          </p:cNvPr>
+          <p:cNvPicPr>
+            <a:picLocks noChangeAspect="1"/>
+          </p:cNvPicPr>
+          <p:nvPr/>
+        </p:nvPicPr>
+        <p:blipFill>
+          <a:blip r:embed="rId2"/>
+          <a:stretch>
+            <a:fillRect/>
+          </a:stretch>
+        </p:blipFill>
+        <p:spPr>
+          <a:xfrm>
             <a:off x="8610600" y="165050"/>
             <a:ext cx="304800" cy="304800"/>
           </a:xfrm>
@@ -7489,7 +7373,7 @@
       </p:pic>
       <p:sp>
         <p:nvSpPr>
-          <p:cNvPr id="6" name="Text 3"/>
+          <p:cNvPr id="6" name="Text 2"/>
           <p:cNvSpPr/>
           <p:nvPr/>
         </p:nvSpPr>
@@ -7528,7 +7412,7 @@
       </p:sp>
       <p:sp>
         <p:nvSpPr>
-          <p:cNvPr id="7" name="Text 4"/>
+          <p:cNvPr id="7" name="Text 3"/>
           <p:cNvSpPr/>
           <p:nvPr/>
         </p:nvSpPr>
@@ -7573,7 +7457,7 @@
       </p:sp>
       <p:sp>
         <p:nvSpPr>
-          <p:cNvPr id="8" name="Text 5"/>
+          <p:cNvPr id="8" name="Text 4"/>
           <p:cNvSpPr/>
           <p:nvPr/>
         </p:nvSpPr>
@@ -7609,7 +7493,7 @@
       </p:sp>
       <p:sp>
         <p:nvSpPr>
-          <p:cNvPr id="9" name="Text 6"/>
+          <p:cNvPr id="9" name="Text 5"/>
           <p:cNvSpPr/>
           <p:nvPr/>
         </p:nvSpPr>
@@ -7641,7 +7525,7 @@
       </p:sp>
       <p:sp>
         <p:nvSpPr>
-          <p:cNvPr id="10" name="Text 7"/>
+          <p:cNvPr id="10" name="Text 6"/>
           <p:cNvSpPr/>
           <p:nvPr/>
         </p:nvSpPr>
@@ -7680,7 +7564,7 @@
       </p:sp>
       <p:sp>
         <p:nvSpPr>
-          <p:cNvPr id="11" name="Text 8"/>
+          <p:cNvPr id="11" name="Text 7"/>
           <p:cNvSpPr/>
           <p:nvPr/>
         </p:nvSpPr>
@@ -7722,7 +7606,7 @@
       </p:sp>
       <p:sp>
         <p:nvSpPr>
-          <p:cNvPr id="12" name="Text 9"/>
+          <p:cNvPr id="12" name="Text 8"/>
           <p:cNvSpPr/>
           <p:nvPr/>
         </p:nvSpPr>
@@ -7758,7 +7642,7 @@
       </p:sp>
       <p:sp>
         <p:nvSpPr>
-          <p:cNvPr id="13" name="Text 10"/>
+          <p:cNvPr id="13" name="Text 9"/>
           <p:cNvSpPr/>
           <p:nvPr/>
         </p:nvSpPr>
@@ -7790,7 +7674,7 @@
       </p:sp>
       <p:sp>
         <p:nvSpPr>
-          <p:cNvPr id="14" name="Text 11"/>
+          <p:cNvPr id="14" name="Text 10"/>
           <p:cNvSpPr/>
           <p:nvPr/>
         </p:nvSpPr>
@@ -7829,7 +7713,7 @@
       </p:sp>
       <p:sp>
         <p:nvSpPr>
-          <p:cNvPr id="15" name="Text 12"/>
+          <p:cNvPr id="15" name="Text 11"/>
           <p:cNvSpPr/>
           <p:nvPr/>
         </p:nvSpPr>
@@ -7871,7 +7755,7 @@
       </p:sp>
       <p:sp>
         <p:nvSpPr>
-          <p:cNvPr id="16" name="Text 13"/>
+          <p:cNvPr id="16" name="Text 12"/>
           <p:cNvSpPr/>
           <p:nvPr/>
         </p:nvSpPr>
@@ -7907,7 +7791,7 @@
       </p:sp>
       <p:sp>
         <p:nvSpPr>
-          <p:cNvPr id="17" name="Text 14"/>
+          <p:cNvPr id="17" name="Text 13"/>
           <p:cNvSpPr/>
           <p:nvPr/>
         </p:nvSpPr>
@@ -7939,7 +7823,7 @@
       </p:sp>
       <p:sp>
         <p:nvSpPr>
-          <p:cNvPr id="18" name="Text 15"/>
+          <p:cNvPr id="18" name="Text 14"/>
           <p:cNvSpPr/>
           <p:nvPr/>
         </p:nvSpPr>
@@ -7978,7 +7862,7 @@
       </p:sp>
       <p:sp>
         <p:nvSpPr>
-          <p:cNvPr id="19" name="Text 16"/>
+          <p:cNvPr id="19" name="Text 15"/>
           <p:cNvSpPr/>
           <p:nvPr/>
         </p:nvSpPr>
@@ -8020,7 +7904,7 @@
       </p:sp>
       <p:sp>
         <p:nvSpPr>
-          <p:cNvPr id="20" name="Text 17"/>
+          <p:cNvPr id="20" name="Text 16"/>
           <p:cNvSpPr/>
           <p:nvPr/>
         </p:nvSpPr>
@@ -8056,7 +7940,7 @@
       </p:sp>
       <p:sp>
         <p:nvSpPr>
-          <p:cNvPr id="21" name="Text 18"/>
+          <p:cNvPr id="21" name="Text 17"/>
           <p:cNvSpPr/>
           <p:nvPr/>
         </p:nvSpPr>
@@ -8088,7 +7972,7 @@
       </p:sp>
       <p:sp>
         <p:nvSpPr>
-          <p:cNvPr id="22" name="Text 19"/>
+          <p:cNvPr id="22" name="Text 18"/>
           <p:cNvSpPr/>
           <p:nvPr/>
         </p:nvSpPr>
@@ -8127,7 +8011,7 @@
       </p:sp>
       <p:sp>
         <p:nvSpPr>
-          <p:cNvPr id="23" name="Text 20"/>
+          <p:cNvPr id="23" name="Text 19"/>
           <p:cNvSpPr/>
           <p:nvPr/>
         </p:nvSpPr>
@@ -8169,7 +8053,7 @@
       </p:sp>
       <p:sp>
         <p:nvSpPr>
-          <p:cNvPr id="24" name="Text 21"/>
+          <p:cNvPr id="24" name="Text 20"/>
           <p:cNvSpPr/>
           <p:nvPr/>
         </p:nvSpPr>
@@ -8205,7 +8089,7 @@
       </p:sp>
       <p:sp>
         <p:nvSpPr>
-          <p:cNvPr id="25" name="Text 22"/>
+          <p:cNvPr id="25" name="Text 21"/>
           <p:cNvSpPr/>
           <p:nvPr/>
         </p:nvSpPr>
@@ -8237,14 +8121,14 @@
       </p:sp>
       <p:pic>
         <p:nvPicPr>
-          <p:cNvPr id="26" name="Image 1" descr="/Users/danwahlin/.copilot/session-state/56a7a0da-def8-48d4-b5e8-0ac3878cb8dd/files/slides-build/icons/FaGithub-0969DA.png">    </p:cNvPr>
+          <p:cNvPr id="26" name="Image 2" descr="/Users/danwahlin/.copilot/session-state/56a7a0da-def8-48d4-b5e8-0ac3878cb8dd/files/slides-build/icons/FaGithub-0969DA.png">    </p:cNvPr>
           <p:cNvPicPr>
             <a:picLocks noChangeAspect="1"/>
           </p:cNvPicPr>
           <p:nvPr/>
         </p:nvPicPr>
         <p:blipFill>
-          <a:blip r:embed="rId3"/>
+          <a:blip r:embed="rId4"/>
           <a:stretch>
             <a:fillRect/>
           </a:stretch>
@@ -8261,7 +8145,7 @@
       </p:pic>
       <p:sp>
         <p:nvSpPr>
-          <p:cNvPr id="27" name="Text 23"/>
+          <p:cNvPr id="27" name="Text 22"/>
           <p:cNvSpPr/>
           <p:nvPr/>
         </p:nvSpPr>
@@ -8300,7 +8184,7 @@
       </p:sp>
       <p:sp>
         <p:nvSpPr>
-          <p:cNvPr id="28" name="Text 24"/>
+          <p:cNvPr id="28" name="Text 23"/>
           <p:cNvSpPr/>
           <p:nvPr/>
         </p:nvSpPr>
@@ -8330,7 +8214,7 @@
                 <a:latin typeface="Arial" pitchFamily="34" charset="0"/>
                 <a:ea typeface="Arial" pitchFamily="34" charset="-122"/>
                 <a:cs typeface="Arial" pitchFamily="34" charset="-120"/>
-                <a:hlinkClick r:id="rId4" invalidUrl="" action="" tgtFrame="" tooltip="https://github.com/github/copilot-app-for-beginners/tree/main/01-tour-the-app" history="1" highlightClick="0" endSnd="0">
+                <a:hlinkClick r:id="rId5" invalidUrl="" action="" tgtFrame="" tooltip="https://github.com/github/copilot-app-for-beginners/tree/main/01-tour-the-app" history="1" highlightClick="0" endSnd="0">
                   <a:extLst>
                     <a:ext uri="{A12FA001-AC4F-418D-AE19-62706E023703}">
                       <ahyp:hlinkClr xmlns:ahyp="http://schemas.microsoft.com/office/drawing/2018/hyperlinkcolor" val="tx"/>
@@ -8346,7 +8230,7 @@
       </p:sp>
       <p:sp>
         <p:nvSpPr>
-          <p:cNvPr id="29" name="Text 25"/>
+          <p:cNvPr id="29" name="Text 24"/>
           <p:cNvSpPr/>
           <p:nvPr/>
         </p:nvSpPr>
@@ -8385,7 +8269,7 @@
       </p:sp>
       <p:sp>
         <p:nvSpPr>
-          <p:cNvPr id="30" name="Text 26"/>
+          <p:cNvPr id="30" name="Text 25"/>
           <p:cNvSpPr/>
           <p:nvPr/>
         </p:nvSpPr>
@@ -8415,7 +8299,7 @@
                 <a:latin typeface="Arial" pitchFamily="34" charset="0"/>
                 <a:ea typeface="Arial" pitchFamily="34" charset="-122"/>
                 <a:cs typeface="Arial" pitchFamily="34" charset="-120"/>
-                <a:hlinkClick r:id="rId5" invalidUrl="" action="" tgtFrame="" tooltip="https://github.com/github/copilot-app-for-beginners/tree/main/02-sessions-worktrees-context" history="1" highlightClick="0" endSnd="0">
+                <a:hlinkClick r:id="rId6" invalidUrl="" action="" tgtFrame="" tooltip="https://github.com/github/copilot-app-for-beginners/tree/main/02-sessions-worktrees-context" history="1" highlightClick="0" endSnd="0">
                   <a:extLst>
                     <a:ext uri="{A12FA001-AC4F-418D-AE19-62706E023703}">
                       <ahyp:hlinkClr xmlns:ahyp="http://schemas.microsoft.com/office/drawing/2018/hyperlinkcolor" val="tx"/>
@@ -8461,112 +8345,9 @@
           <a:chExt cx="0" cy="0"/>
         </a:xfrm>
       </p:grpSpPr>
-      <p:sp>
-        <p:nvSpPr>
-          <p:cNvPr id="2" name="Text 0"/>
-          <p:cNvSpPr/>
-          <p:nvPr/>
-        </p:nvSpPr>
-        <p:spPr>
-          <a:xfrm>
-            <a:off x="0" y="0"/>
-            <a:ext cx="9144000" cy="76200"/>
-          </a:xfrm>
-          <a:prstGeom prst="rect">
-            <a:avLst/>
-          </a:prstGeom>
-          <a:solidFill>
-            <a:srgbClr val="1A7F37"/>
-          </a:solidFill>
-          <a:ln/>
-        </p:spPr>
-        <p:txBody>
-          <a:bodyPr wrap="square" rtlCol="0" anchor="ctr"/>
-          <a:lstStyle/>
-          <a:p>
-            <a:pPr indent="0" marL="0">
-              <a:buNone/>
-            </a:pPr>
-            <a:endParaRPr lang="en-US" dirty="0"/>
-          </a:p>
-        </p:txBody>
-      </p:sp>
-      <p:sp>
-        <p:nvSpPr>
-          <p:cNvPr id="3" name="Text 1"/>
-          <p:cNvSpPr/>
-          <p:nvPr/>
-        </p:nvSpPr>
-        <p:spPr>
-          <a:xfrm>
-            <a:off x="7340501" y="177701"/>
-            <a:ext cx="1168301" cy="279350"/>
-          </a:xfrm>
-          <a:prstGeom prst="roundRect">
-            <a:avLst>
-              <a:gd name="adj" fmla="val 22731"/>
-            </a:avLst>
-          </a:prstGeom>
-          <a:solidFill>
-            <a:srgbClr val="1A7F37"/>
-          </a:solidFill>
-          <a:ln/>
-        </p:spPr>
-        <p:txBody>
-          <a:bodyPr wrap="square" rtlCol="0" anchor="ctr"/>
-          <a:lstStyle/>
-          <a:p>
-            <a:pPr indent="0" marL="0">
-              <a:buNone/>
-            </a:pPr>
-            <a:endParaRPr lang="en-US" dirty="0"/>
-          </a:p>
-        </p:txBody>
-      </p:sp>
-      <p:sp>
-        <p:nvSpPr>
-          <p:cNvPr id="4" name="Text 2"/>
-          <p:cNvSpPr/>
-          <p:nvPr/>
-        </p:nvSpPr>
-        <p:spPr>
-          <a:xfrm>
-            <a:off x="7461041" y="231577"/>
-            <a:ext cx="927071" cy="171450"/>
-          </a:xfrm>
-          <a:prstGeom prst="rect">
-            <a:avLst/>
-          </a:prstGeom>
-          <a:noFill/>
-          <a:ln/>
-        </p:spPr>
-        <p:txBody>
-          <a:bodyPr wrap="square" lIns="0" tIns="0" rIns="0" bIns="0" rtlCol="0" anchor="t"/>
-          <a:lstStyle/>
-          <a:p>
-            <a:pPr algn="ctr" indent="0" marL="0">
-              <a:buNone/>
-            </a:pPr>
-            <a:r>
-              <a:rPr lang="en-US" sz="1150" b="1" dirty="0">
-                <a:solidFill>
-                  <a:srgbClr val="FFFFFF"/>
-                </a:solidFill>
-                <a:latin typeface="Arial" pitchFamily="34" charset="0"/>
-                <a:ea typeface="Arial" pitchFamily="34" charset="-122"/>
-                <a:cs typeface="Arial" pitchFamily="34" charset="-120"/>
-              </a:rPr>
-              <a:t>CHAPTER 01</a:t>
-            </a:r>
-            <a:endParaRPr lang="en-US" sz="1150" dirty="0"/>
-          </a:p>
-        </p:txBody>
-      </p:sp>
       <p:pic>
         <p:nvPicPr>
-          <p:cNvPr id="5" name="Image 0" descr="/Users/danwahlin/.copilot/session-state/56a7a0da-def8-48d4-b5e8-0ac3878cb8dd/files/slides-build/icons/FaGithub-1F2328.png">
-            <a:hlinkClick r:id="rId2" tooltip="https://github.com/github/copilot-app-for-beginners/tree/main/01-tour-the-app"/>
-          </p:cNvPr>
+          <p:cNvPr id="2" name="Image 0" descr="/Users/danwahlin/.copilot/session-state/56a7a0da-def8-48d4-b5e8-0ac3878cb8dd/files/slides-build/img/grad-corner.png">    </p:cNvPr>
           <p:cNvPicPr>
             <a:picLocks noChangeAspect="1"/>
           </p:cNvPicPr>
@@ -8580,6 +8361,103 @@
         </p:blipFill>
         <p:spPr>
           <a:xfrm>
+            <a:off x="6349901" y="0"/>
+            <a:ext cx="2793950" cy="1308050"/>
+          </a:xfrm>
+          <a:prstGeom prst="rect">
+            <a:avLst/>
+          </a:prstGeom>
+        </p:spPr>
+      </p:pic>
+      <p:sp>
+        <p:nvSpPr>
+          <p:cNvPr id="3" name="Text 0"/>
+          <p:cNvSpPr/>
+          <p:nvPr/>
+        </p:nvSpPr>
+        <p:spPr>
+          <a:xfrm>
+            <a:off x="7340501" y="177701"/>
+            <a:ext cx="1168301" cy="279350"/>
+          </a:xfrm>
+          <a:prstGeom prst="roundRect">
+            <a:avLst>
+              <a:gd name="adj" fmla="val 22731"/>
+            </a:avLst>
+          </a:prstGeom>
+          <a:solidFill>
+            <a:srgbClr val="1A7F37"/>
+          </a:solidFill>
+          <a:ln/>
+        </p:spPr>
+        <p:txBody>
+          <a:bodyPr wrap="square" rtlCol="0" anchor="ctr"/>
+          <a:lstStyle/>
+          <a:p>
+            <a:pPr indent="0" marL="0">
+              <a:buNone/>
+            </a:pPr>
+            <a:endParaRPr lang="en-US" dirty="0"/>
+          </a:p>
+        </p:txBody>
+      </p:sp>
+      <p:sp>
+        <p:nvSpPr>
+          <p:cNvPr id="4" name="Text 1"/>
+          <p:cNvSpPr/>
+          <p:nvPr/>
+        </p:nvSpPr>
+        <p:spPr>
+          <a:xfrm>
+            <a:off x="7461041" y="231577"/>
+            <a:ext cx="927071" cy="171450"/>
+          </a:xfrm>
+          <a:prstGeom prst="rect">
+            <a:avLst/>
+          </a:prstGeom>
+          <a:noFill/>
+          <a:ln/>
+        </p:spPr>
+        <p:txBody>
+          <a:bodyPr wrap="square" lIns="0" tIns="0" rIns="0" bIns="0" rtlCol="0" anchor="t"/>
+          <a:lstStyle/>
+          <a:p>
+            <a:pPr algn="ctr" indent="0" marL="0">
+              <a:buNone/>
+            </a:pPr>
+            <a:r>
+              <a:rPr lang="en-US" sz="1150" b="1" dirty="0">
+                <a:solidFill>
+                  <a:srgbClr val="FFFFFF"/>
+                </a:solidFill>
+                <a:latin typeface="Arial" pitchFamily="34" charset="0"/>
+                <a:ea typeface="Arial" pitchFamily="34" charset="-122"/>
+                <a:cs typeface="Arial" pitchFamily="34" charset="-120"/>
+              </a:rPr>
+              <a:t>CHAPTER 01</a:t>
+            </a:r>
+            <a:endParaRPr lang="en-US" sz="1150" dirty="0"/>
+          </a:p>
+        </p:txBody>
+      </p:sp>
+      <p:pic>
+        <p:nvPicPr>
+          <p:cNvPr id="5" name="Image 1" descr="/Users/danwahlin/.copilot/session-state/56a7a0da-def8-48d4-b5e8-0ac3878cb8dd/files/slides-build/icons/FaGithub-1F2328.png">
+            <a:hlinkClick r:id="rId3" tooltip="https://github.com/github/copilot-app-for-beginners/tree/main/01-tour-the-app"/>
+          </p:cNvPr>
+          <p:cNvPicPr>
+            <a:picLocks noChangeAspect="1"/>
+          </p:cNvPicPr>
+          <p:nvPr/>
+        </p:nvPicPr>
+        <p:blipFill>
+          <a:blip r:embed="rId2"/>
+          <a:stretch>
+            <a:fillRect/>
+          </a:stretch>
+        </p:blipFill>
+        <p:spPr>
+          <a:xfrm>
             <a:off x="8610600" y="165050"/>
             <a:ext cx="304800" cy="304800"/>
           </a:xfrm>
@@ -8590,7 +8468,7 @@
       </p:pic>
       <p:sp>
         <p:nvSpPr>
-          <p:cNvPr id="6" name="Text 3"/>
+          <p:cNvPr id="6" name="Text 2"/>
           <p:cNvSpPr/>
           <p:nvPr/>
         </p:nvSpPr>
@@ -8629,7 +8507,7 @@
       </p:sp>
       <p:sp>
         <p:nvSpPr>
-          <p:cNvPr id="7" name="Text 4"/>
+          <p:cNvPr id="7" name="Text 3"/>
           <p:cNvSpPr/>
           <p:nvPr/>
         </p:nvSpPr>
@@ -8674,7 +8552,7 @@
       </p:sp>
       <p:sp>
         <p:nvSpPr>
-          <p:cNvPr id="8" name="Text 5"/>
+          <p:cNvPr id="8" name="Text 4"/>
           <p:cNvSpPr/>
           <p:nvPr/>
         </p:nvSpPr>
@@ -8706,7 +8584,7 @@
       </p:sp>
       <p:sp>
         <p:nvSpPr>
-          <p:cNvPr id="9" name="Shape 6"/>
+          <p:cNvPr id="9" name="Shape 5"/>
           <p:cNvSpPr/>
           <p:nvPr/>
         </p:nvSpPr>
@@ -8729,7 +8607,7 @@
       </p:sp>
       <p:sp>
         <p:nvSpPr>
-          <p:cNvPr id="10" name="Shape 7"/>
+          <p:cNvPr id="10" name="Shape 6"/>
           <p:cNvSpPr/>
           <p:nvPr/>
         </p:nvSpPr>
@@ -8752,7 +8630,7 @@
       </p:sp>
       <p:sp>
         <p:nvSpPr>
-          <p:cNvPr id="11" name="Shape 8"/>
+          <p:cNvPr id="11" name="Shape 7"/>
           <p:cNvSpPr/>
           <p:nvPr/>
         </p:nvSpPr>
@@ -8775,7 +8653,7 @@
       </p:sp>
       <p:sp>
         <p:nvSpPr>
-          <p:cNvPr id="12" name="Shape 9"/>
+          <p:cNvPr id="12" name="Shape 8"/>
           <p:cNvSpPr/>
           <p:nvPr/>
         </p:nvSpPr>
@@ -8798,7 +8676,7 @@
       </p:sp>
       <p:sp>
         <p:nvSpPr>
-          <p:cNvPr id="13" name="Text 10"/>
+          <p:cNvPr id="13" name="Text 9"/>
           <p:cNvSpPr/>
           <p:nvPr/>
         </p:nvSpPr>
@@ -8837,7 +8715,7 @@
       </p:sp>
       <p:sp>
         <p:nvSpPr>
-          <p:cNvPr id="14" name="Text 11"/>
+          <p:cNvPr id="14" name="Text 10"/>
           <p:cNvSpPr/>
           <p:nvPr/>
         </p:nvSpPr>
@@ -8876,7 +8754,7 @@
       </p:sp>
       <p:sp>
         <p:nvSpPr>
-          <p:cNvPr id="15" name="Text 12"/>
+          <p:cNvPr id="15" name="Text 11"/>
           <p:cNvSpPr/>
           <p:nvPr/>
         </p:nvSpPr>
@@ -8918,7 +8796,7 @@
       </p:sp>
       <p:sp>
         <p:nvSpPr>
-          <p:cNvPr id="16" name="Text 13"/>
+          <p:cNvPr id="16" name="Text 12"/>
           <p:cNvSpPr/>
           <p:nvPr/>
         </p:nvSpPr>
@@ -8950,7 +8828,7 @@
       </p:sp>
       <p:sp>
         <p:nvSpPr>
-          <p:cNvPr id="17" name="Shape 14"/>
+          <p:cNvPr id="17" name="Shape 13"/>
           <p:cNvSpPr/>
           <p:nvPr/>
         </p:nvSpPr>
@@ -8973,7 +8851,7 @@
       </p:sp>
       <p:sp>
         <p:nvSpPr>
-          <p:cNvPr id="18" name="Shape 15"/>
+          <p:cNvPr id="18" name="Shape 14"/>
           <p:cNvSpPr/>
           <p:nvPr/>
         </p:nvSpPr>
@@ -8996,7 +8874,7 @@
       </p:sp>
       <p:sp>
         <p:nvSpPr>
-          <p:cNvPr id="19" name="Shape 16"/>
+          <p:cNvPr id="19" name="Shape 15"/>
           <p:cNvSpPr/>
           <p:nvPr/>
         </p:nvSpPr>
@@ -9019,7 +8897,7 @@
       </p:sp>
       <p:sp>
         <p:nvSpPr>
-          <p:cNvPr id="20" name="Shape 17"/>
+          <p:cNvPr id="20" name="Shape 16"/>
           <p:cNvSpPr/>
           <p:nvPr/>
         </p:nvSpPr>
@@ -9042,7 +8920,7 @@
       </p:sp>
       <p:sp>
         <p:nvSpPr>
-          <p:cNvPr id="21" name="Text 18"/>
+          <p:cNvPr id="21" name="Text 17"/>
           <p:cNvSpPr/>
           <p:nvPr/>
         </p:nvSpPr>
@@ -9081,7 +8959,7 @@
       </p:sp>
       <p:sp>
         <p:nvSpPr>
-          <p:cNvPr id="22" name="Text 19"/>
+          <p:cNvPr id="22" name="Text 18"/>
           <p:cNvSpPr/>
           <p:nvPr/>
         </p:nvSpPr>
@@ -9120,7 +8998,7 @@
       </p:sp>
       <p:sp>
         <p:nvSpPr>
-          <p:cNvPr id="23" name="Text 20"/>
+          <p:cNvPr id="23" name="Text 19"/>
           <p:cNvSpPr/>
           <p:nvPr/>
         </p:nvSpPr>
@@ -9162,7 +9040,7 @@
       </p:sp>
       <p:sp>
         <p:nvSpPr>
-          <p:cNvPr id="24" name="Text 21"/>
+          <p:cNvPr id="24" name="Text 20"/>
           <p:cNvSpPr/>
           <p:nvPr/>
         </p:nvSpPr>
@@ -9194,7 +9072,7 @@
       </p:sp>
       <p:sp>
         <p:nvSpPr>
-          <p:cNvPr id="25" name="Shape 22"/>
+          <p:cNvPr id="25" name="Shape 21"/>
           <p:cNvSpPr/>
           <p:nvPr/>
         </p:nvSpPr>
@@ -9217,7 +9095,7 @@
       </p:sp>
       <p:sp>
         <p:nvSpPr>
-          <p:cNvPr id="26" name="Shape 23"/>
+          <p:cNvPr id="26" name="Shape 22"/>
           <p:cNvSpPr/>
           <p:nvPr/>
         </p:nvSpPr>
@@ -9240,7 +9118,7 @@
       </p:sp>
       <p:sp>
         <p:nvSpPr>
-          <p:cNvPr id="27" name="Shape 24"/>
+          <p:cNvPr id="27" name="Shape 23"/>
           <p:cNvSpPr/>
           <p:nvPr/>
         </p:nvSpPr>
@@ -9263,7 +9141,7 @@
       </p:sp>
       <p:sp>
         <p:nvSpPr>
-          <p:cNvPr id="28" name="Shape 25"/>
+          <p:cNvPr id="28" name="Shape 24"/>
           <p:cNvSpPr/>
           <p:nvPr/>
         </p:nvSpPr>
@@ -9286,7 +9164,7 @@
       </p:sp>
       <p:sp>
         <p:nvSpPr>
-          <p:cNvPr id="29" name="Text 26"/>
+          <p:cNvPr id="29" name="Text 25"/>
           <p:cNvSpPr/>
           <p:nvPr/>
         </p:nvSpPr>
@@ -9325,7 +9203,7 @@
       </p:sp>
       <p:sp>
         <p:nvSpPr>
-          <p:cNvPr id="30" name="Text 27"/>
+          <p:cNvPr id="30" name="Text 26"/>
           <p:cNvSpPr/>
           <p:nvPr/>
         </p:nvSpPr>
@@ -9364,7 +9242,7 @@
       </p:sp>
       <p:sp>
         <p:nvSpPr>
-          <p:cNvPr id="31" name="Text 28"/>
+          <p:cNvPr id="31" name="Text 27"/>
           <p:cNvSpPr/>
           <p:nvPr/>
         </p:nvSpPr>
@@ -9538,82 +9416,9 @@
           </a:p>
         </p:txBody>
       </p:sp>
-      <p:sp>
-        <p:nvSpPr>
-          <p:cNvPr id="5" name="Text 3"/>
-          <p:cNvSpPr/>
-          <p:nvPr/>
-        </p:nvSpPr>
-        <p:spPr>
-          <a:xfrm>
-            <a:off x="7340501" y="177701"/>
-            <a:ext cx="1168301" cy="279350"/>
-          </a:xfrm>
-          <a:prstGeom prst="roundRect">
-            <a:avLst>
-              <a:gd name="adj" fmla="val 22731"/>
-            </a:avLst>
-          </a:prstGeom>
-          <a:solidFill>
-            <a:srgbClr val="1A7F37"/>
-          </a:solidFill>
-          <a:ln/>
-        </p:spPr>
-        <p:txBody>
-          <a:bodyPr wrap="square" rtlCol="0" anchor="ctr"/>
-          <a:lstStyle/>
-          <a:p>
-            <a:pPr indent="0" marL="0">
-              <a:buNone/>
-            </a:pPr>
-            <a:endParaRPr lang="en-US" dirty="0"/>
-          </a:p>
-        </p:txBody>
-      </p:sp>
-      <p:sp>
-        <p:nvSpPr>
-          <p:cNvPr id="6" name="Text 4"/>
-          <p:cNvSpPr/>
-          <p:nvPr/>
-        </p:nvSpPr>
-        <p:spPr>
-          <a:xfrm>
-            <a:off x="7461041" y="231577"/>
-            <a:ext cx="927071" cy="171450"/>
-          </a:xfrm>
-          <a:prstGeom prst="rect">
-            <a:avLst/>
-          </a:prstGeom>
-          <a:noFill/>
-          <a:ln/>
-        </p:spPr>
-        <p:txBody>
-          <a:bodyPr wrap="square" lIns="0" tIns="0" rIns="0" bIns="0" rtlCol="0" anchor="t"/>
-          <a:lstStyle/>
-          <a:p>
-            <a:pPr algn="ctr" indent="0" marL="0">
-              <a:buNone/>
-            </a:pPr>
-            <a:r>
-              <a:rPr lang="en-US" sz="1150" b="1" dirty="0">
-                <a:solidFill>
-                  <a:srgbClr val="FFFFFF"/>
-                </a:solidFill>
-                <a:latin typeface="Arial" pitchFamily="34" charset="0"/>
-                <a:ea typeface="Arial" pitchFamily="34" charset="-122"/>
-                <a:cs typeface="Arial" pitchFamily="34" charset="-120"/>
-              </a:rPr>
-              <a:t>CHAPTER 01</a:t>
-            </a:r>
-            <a:endParaRPr lang="en-US" sz="1150" dirty="0"/>
-          </a:p>
-        </p:txBody>
-      </p:sp>
       <p:pic>
         <p:nvPicPr>
-          <p:cNvPr id="7" name="Image 0" descr="/Users/danwahlin/.copilot/session-state/56a7a0da-def8-48d4-b5e8-0ac3878cb8dd/files/slides-build/icons/FaGithub-1F2328.png">
-            <a:hlinkClick r:id="rId2" tooltip="https://github.com/github/copilot-app-for-beginners/tree/main/01-tour-the-app"/>
-          </p:cNvPr>
+          <p:cNvPr id="5" name="Image 0" descr="/Users/danwahlin/.copilot/session-state/56a7a0da-def8-48d4-b5e8-0ac3878cb8dd/files/slides-build/img/grad-corner.png">    </p:cNvPr>
           <p:cNvPicPr>
             <a:picLocks noChangeAspect="1"/>
           </p:cNvPicPr>
@@ -9627,6 +9432,103 @@
         </p:blipFill>
         <p:spPr>
           <a:xfrm>
+            <a:off x="6349901" y="0"/>
+            <a:ext cx="2793950" cy="1308050"/>
+          </a:xfrm>
+          <a:prstGeom prst="rect">
+            <a:avLst/>
+          </a:prstGeom>
+        </p:spPr>
+      </p:pic>
+      <p:sp>
+        <p:nvSpPr>
+          <p:cNvPr id="6" name="Text 3"/>
+          <p:cNvSpPr/>
+          <p:nvPr/>
+        </p:nvSpPr>
+        <p:spPr>
+          <a:xfrm>
+            <a:off x="7340501" y="177701"/>
+            <a:ext cx="1168301" cy="279350"/>
+          </a:xfrm>
+          <a:prstGeom prst="roundRect">
+            <a:avLst>
+              <a:gd name="adj" fmla="val 22731"/>
+            </a:avLst>
+          </a:prstGeom>
+          <a:solidFill>
+            <a:srgbClr val="1A7F37"/>
+          </a:solidFill>
+          <a:ln/>
+        </p:spPr>
+        <p:txBody>
+          <a:bodyPr wrap="square" rtlCol="0" anchor="ctr"/>
+          <a:lstStyle/>
+          <a:p>
+            <a:pPr indent="0" marL="0">
+              <a:buNone/>
+            </a:pPr>
+            <a:endParaRPr lang="en-US" dirty="0"/>
+          </a:p>
+        </p:txBody>
+      </p:sp>
+      <p:sp>
+        <p:nvSpPr>
+          <p:cNvPr id="7" name="Text 4"/>
+          <p:cNvSpPr/>
+          <p:nvPr/>
+        </p:nvSpPr>
+        <p:spPr>
+          <a:xfrm>
+            <a:off x="7461041" y="231577"/>
+            <a:ext cx="927071" cy="171450"/>
+          </a:xfrm>
+          <a:prstGeom prst="rect">
+            <a:avLst/>
+          </a:prstGeom>
+          <a:noFill/>
+          <a:ln/>
+        </p:spPr>
+        <p:txBody>
+          <a:bodyPr wrap="square" lIns="0" tIns="0" rIns="0" bIns="0" rtlCol="0" anchor="t"/>
+          <a:lstStyle/>
+          <a:p>
+            <a:pPr algn="ctr" indent="0" marL="0">
+              <a:buNone/>
+            </a:pPr>
+            <a:r>
+              <a:rPr lang="en-US" sz="1150" b="1" dirty="0">
+                <a:solidFill>
+                  <a:srgbClr val="FFFFFF"/>
+                </a:solidFill>
+                <a:latin typeface="Arial" pitchFamily="34" charset="0"/>
+                <a:ea typeface="Arial" pitchFamily="34" charset="-122"/>
+                <a:cs typeface="Arial" pitchFamily="34" charset="-120"/>
+              </a:rPr>
+              <a:t>CHAPTER 01</a:t>
+            </a:r>
+            <a:endParaRPr lang="en-US" sz="1150" dirty="0"/>
+          </a:p>
+        </p:txBody>
+      </p:sp>
+      <p:pic>
+        <p:nvPicPr>
+          <p:cNvPr id="8" name="Image 1" descr="/Users/danwahlin/.copilot/session-state/56a7a0da-def8-48d4-b5e8-0ac3878cb8dd/files/slides-build/icons/FaGithub-1F2328.png">
+            <a:hlinkClick r:id="rId3" tooltip="https://github.com/github/copilot-app-for-beginners/tree/main/01-tour-the-app"/>
+          </p:cNvPr>
+          <p:cNvPicPr>
+            <a:picLocks noChangeAspect="1"/>
+          </p:cNvPicPr>
+          <p:nvPr/>
+        </p:nvPicPr>
+        <p:blipFill>
+          <a:blip r:embed="rId2"/>
+          <a:stretch>
+            <a:fillRect/>
+          </a:stretch>
+        </p:blipFill>
+        <p:spPr>
+          <a:xfrm>
             <a:off x="8610600" y="165050"/>
             <a:ext cx="304800" cy="304800"/>
           </a:xfrm>
@@ -9637,7 +9539,7 @@
       </p:pic>
       <p:sp>
         <p:nvSpPr>
-          <p:cNvPr id="8" name="Text 5"/>
+          <p:cNvPr id="9" name="Text 5"/>
           <p:cNvSpPr/>
           <p:nvPr/>
         </p:nvSpPr>
@@ -9676,7 +9578,7 @@
       </p:sp>
       <p:sp>
         <p:nvSpPr>
-          <p:cNvPr id="9" name="Text 6"/>
+          <p:cNvPr id="10" name="Text 6"/>
           <p:cNvSpPr/>
           <p:nvPr/>
         </p:nvSpPr>
@@ -9721,7 +9623,7 @@
       </p:sp>
       <p:sp>
         <p:nvSpPr>
-          <p:cNvPr id="10" name="Text 7"/>
+          <p:cNvPr id="11" name="Text 7"/>
           <p:cNvSpPr/>
           <p:nvPr/>
         </p:nvSpPr>
@@ -9753,7 +9655,7 @@
       </p:sp>
       <p:sp>
         <p:nvSpPr>
-          <p:cNvPr id="11" name="Text 8"/>
+          <p:cNvPr id="12" name="Text 8"/>
           <p:cNvSpPr/>
           <p:nvPr/>
         </p:nvSpPr>
@@ -9825,112 +9727,9 @@
           <a:chExt cx="0" cy="0"/>
         </a:xfrm>
       </p:grpSpPr>
-      <p:sp>
-        <p:nvSpPr>
-          <p:cNvPr id="2" name="Text 0"/>
-          <p:cNvSpPr/>
-          <p:nvPr/>
-        </p:nvSpPr>
-        <p:spPr>
-          <a:xfrm>
-            <a:off x="0" y="0"/>
-            <a:ext cx="9144000" cy="76200"/>
-          </a:xfrm>
-          <a:prstGeom prst="rect">
-            <a:avLst/>
-          </a:prstGeom>
-          <a:solidFill>
-            <a:srgbClr val="0969DA"/>
-          </a:solidFill>
-          <a:ln/>
-        </p:spPr>
-        <p:txBody>
-          <a:bodyPr wrap="square" rtlCol="0" anchor="ctr"/>
-          <a:lstStyle/>
-          <a:p>
-            <a:pPr indent="0" marL="0">
-              <a:buNone/>
-            </a:pPr>
-            <a:endParaRPr lang="en-US" dirty="0"/>
-          </a:p>
-        </p:txBody>
-      </p:sp>
-      <p:sp>
-        <p:nvSpPr>
-          <p:cNvPr id="3" name="Text 1"/>
-          <p:cNvSpPr/>
-          <p:nvPr/>
-        </p:nvSpPr>
-        <p:spPr>
-          <a:xfrm>
-            <a:off x="7340501" y="177701"/>
-            <a:ext cx="1168301" cy="279350"/>
-          </a:xfrm>
-          <a:prstGeom prst="roundRect">
-            <a:avLst>
-              <a:gd name="adj" fmla="val 22731"/>
-            </a:avLst>
-          </a:prstGeom>
-          <a:solidFill>
-            <a:srgbClr val="1A7F37"/>
-          </a:solidFill>
-          <a:ln/>
-        </p:spPr>
-        <p:txBody>
-          <a:bodyPr wrap="square" rtlCol="0" anchor="ctr"/>
-          <a:lstStyle/>
-          <a:p>
-            <a:pPr indent="0" marL="0">
-              <a:buNone/>
-            </a:pPr>
-            <a:endParaRPr lang="en-US" dirty="0"/>
-          </a:p>
-        </p:txBody>
-      </p:sp>
-      <p:sp>
-        <p:nvSpPr>
-          <p:cNvPr id="4" name="Text 2"/>
-          <p:cNvSpPr/>
-          <p:nvPr/>
-        </p:nvSpPr>
-        <p:spPr>
-          <a:xfrm>
-            <a:off x="7461041" y="231577"/>
-            <a:ext cx="927071" cy="171450"/>
-          </a:xfrm>
-          <a:prstGeom prst="rect">
-            <a:avLst/>
-          </a:prstGeom>
-          <a:noFill/>
-          <a:ln/>
-        </p:spPr>
-        <p:txBody>
-          <a:bodyPr wrap="square" lIns="0" tIns="0" rIns="0" bIns="0" rtlCol="0" anchor="t"/>
-          <a:lstStyle/>
-          <a:p>
-            <a:pPr algn="ctr" indent="0" marL="0">
-              <a:buNone/>
-            </a:pPr>
-            <a:r>
-              <a:rPr lang="en-US" sz="1150" b="1" dirty="0">
-                <a:solidFill>
-                  <a:srgbClr val="FFFFFF"/>
-                </a:solidFill>
-                <a:latin typeface="Arial" pitchFamily="34" charset="0"/>
-                <a:ea typeface="Arial" pitchFamily="34" charset="-122"/>
-                <a:cs typeface="Arial" pitchFamily="34" charset="-120"/>
-              </a:rPr>
-              <a:t>CHAPTER 01</a:t>
-            </a:r>
-            <a:endParaRPr lang="en-US" sz="1150" dirty="0"/>
-          </a:p>
-        </p:txBody>
-      </p:sp>
       <p:pic>
         <p:nvPicPr>
-          <p:cNvPr id="5" name="Image 0" descr="/Users/danwahlin/.copilot/session-state/56a7a0da-def8-48d4-b5e8-0ac3878cb8dd/files/slides-build/icons/FaGithub-1F2328.png">
-            <a:hlinkClick r:id="rId2" tooltip="https://github.com/github/copilot-app-for-beginners/tree/main/01-tour-the-app"/>
-          </p:cNvPr>
+          <p:cNvPr id="2" name="Image 0" descr="/Users/danwahlin/.copilot/session-state/56a7a0da-def8-48d4-b5e8-0ac3878cb8dd/files/slides-build/img/grad-corner.png">    </p:cNvPr>
           <p:cNvPicPr>
             <a:picLocks noChangeAspect="1"/>
           </p:cNvPicPr>
@@ -9944,6 +9743,103 @@
         </p:blipFill>
         <p:spPr>
           <a:xfrm>
+            <a:off x="6349901" y="0"/>
+            <a:ext cx="2793950" cy="1308050"/>
+          </a:xfrm>
+          <a:prstGeom prst="rect">
+            <a:avLst/>
+          </a:prstGeom>
+        </p:spPr>
+      </p:pic>
+      <p:sp>
+        <p:nvSpPr>
+          <p:cNvPr id="3" name="Text 0"/>
+          <p:cNvSpPr/>
+          <p:nvPr/>
+        </p:nvSpPr>
+        <p:spPr>
+          <a:xfrm>
+            <a:off x="7340501" y="177701"/>
+            <a:ext cx="1168301" cy="279350"/>
+          </a:xfrm>
+          <a:prstGeom prst="roundRect">
+            <a:avLst>
+              <a:gd name="adj" fmla="val 22731"/>
+            </a:avLst>
+          </a:prstGeom>
+          <a:solidFill>
+            <a:srgbClr val="1A7F37"/>
+          </a:solidFill>
+          <a:ln/>
+        </p:spPr>
+        <p:txBody>
+          <a:bodyPr wrap="square" rtlCol="0" anchor="ctr"/>
+          <a:lstStyle/>
+          <a:p>
+            <a:pPr indent="0" marL="0">
+              <a:buNone/>
+            </a:pPr>
+            <a:endParaRPr lang="en-US" dirty="0"/>
+          </a:p>
+        </p:txBody>
+      </p:sp>
+      <p:sp>
+        <p:nvSpPr>
+          <p:cNvPr id="4" name="Text 1"/>
+          <p:cNvSpPr/>
+          <p:nvPr/>
+        </p:nvSpPr>
+        <p:spPr>
+          <a:xfrm>
+            <a:off x="7461041" y="231577"/>
+            <a:ext cx="927071" cy="171450"/>
+          </a:xfrm>
+          <a:prstGeom prst="rect">
+            <a:avLst/>
+          </a:prstGeom>
+          <a:noFill/>
+          <a:ln/>
+        </p:spPr>
+        <p:txBody>
+          <a:bodyPr wrap="square" lIns="0" tIns="0" rIns="0" bIns="0" rtlCol="0" anchor="t"/>
+          <a:lstStyle/>
+          <a:p>
+            <a:pPr algn="ctr" indent="0" marL="0">
+              <a:buNone/>
+            </a:pPr>
+            <a:r>
+              <a:rPr lang="en-US" sz="1150" b="1" dirty="0">
+                <a:solidFill>
+                  <a:srgbClr val="FFFFFF"/>
+                </a:solidFill>
+                <a:latin typeface="Arial" pitchFamily="34" charset="0"/>
+                <a:ea typeface="Arial" pitchFamily="34" charset="-122"/>
+                <a:cs typeface="Arial" pitchFamily="34" charset="-120"/>
+              </a:rPr>
+              <a:t>CHAPTER 01</a:t>
+            </a:r>
+            <a:endParaRPr lang="en-US" sz="1150" dirty="0"/>
+          </a:p>
+        </p:txBody>
+      </p:sp>
+      <p:pic>
+        <p:nvPicPr>
+          <p:cNvPr id="5" name="Image 1" descr="/Users/danwahlin/.copilot/session-state/56a7a0da-def8-48d4-b5e8-0ac3878cb8dd/files/slides-build/icons/FaGithub-1F2328.png">
+            <a:hlinkClick r:id="rId3" tooltip="https://github.com/github/copilot-app-for-beginners/tree/main/01-tour-the-app"/>
+          </p:cNvPr>
+          <p:cNvPicPr>
+            <a:picLocks noChangeAspect="1"/>
+          </p:cNvPicPr>
+          <p:nvPr/>
+        </p:nvPicPr>
+        <p:blipFill>
+          <a:blip r:embed="rId2"/>
+          <a:stretch>
+            <a:fillRect/>
+          </a:stretch>
+        </p:blipFill>
+        <p:spPr>
+          <a:xfrm>
             <a:off x="8610600" y="165050"/>
             <a:ext cx="304800" cy="304800"/>
           </a:xfrm>
@@ -9954,7 +9850,7 @@
       </p:pic>
       <p:sp>
         <p:nvSpPr>
-          <p:cNvPr id="6" name="Text 3"/>
+          <p:cNvPr id="6" name="Text 2"/>
           <p:cNvSpPr/>
           <p:nvPr/>
         </p:nvSpPr>
@@ -9993,7 +9889,7 @@
       </p:sp>
       <p:sp>
         <p:nvSpPr>
-          <p:cNvPr id="7" name="Text 4"/>
+          <p:cNvPr id="7" name="Text 3"/>
           <p:cNvSpPr/>
           <p:nvPr/>
         </p:nvSpPr>
@@ -10038,7 +9934,7 @@
       </p:sp>
       <p:sp>
         <p:nvSpPr>
-          <p:cNvPr id="8" name="Text 5"/>
+          <p:cNvPr id="8" name="Text 4"/>
           <p:cNvSpPr/>
           <p:nvPr/>
         </p:nvSpPr>
@@ -10083,7 +9979,7 @@
       </p:sp>
       <p:sp>
         <p:nvSpPr>
-          <p:cNvPr id="9" name="Text 6"/>
+          <p:cNvPr id="9" name="Text 5"/>
           <p:cNvSpPr/>
           <p:nvPr/>
         </p:nvSpPr>
@@ -10119,7 +10015,7 @@
       </p:sp>
       <p:sp>
         <p:nvSpPr>
-          <p:cNvPr id="10" name="Text 7"/>
+          <p:cNvPr id="10" name="Text 6"/>
           <p:cNvSpPr/>
           <p:nvPr/>
         </p:nvSpPr>
@@ -10149,7 +10045,7 @@
       </p:sp>
       <p:sp>
         <p:nvSpPr>
-          <p:cNvPr id="11" name="Shape 8"/>
+          <p:cNvPr id="11" name="Shape 7"/>
           <p:cNvSpPr/>
           <p:nvPr/>
         </p:nvSpPr>
@@ -10172,7 +10068,7 @@
       </p:sp>
       <p:sp>
         <p:nvSpPr>
-          <p:cNvPr id="12" name="Text 9"/>
+          <p:cNvPr id="12" name="Text 8"/>
           <p:cNvSpPr/>
           <p:nvPr/>
         </p:nvSpPr>
@@ -10214,7 +10110,7 @@
       </p:sp>
       <p:sp>
         <p:nvSpPr>
-          <p:cNvPr id="13" name="Text 10"/>
+          <p:cNvPr id="13" name="Text 9"/>
           <p:cNvSpPr/>
           <p:nvPr/>
         </p:nvSpPr>
@@ -10256,7 +10152,7 @@
       </p:sp>
       <p:sp>
         <p:nvSpPr>
-          <p:cNvPr id="14" name="Shape 11"/>
+          <p:cNvPr id="14" name="Shape 10"/>
           <p:cNvSpPr/>
           <p:nvPr/>
         </p:nvSpPr>
@@ -10279,7 +10175,7 @@
       </p:sp>
       <p:sp>
         <p:nvSpPr>
-          <p:cNvPr id="15" name="Text 12"/>
+          <p:cNvPr id="15" name="Text 11"/>
           <p:cNvSpPr/>
           <p:nvPr/>
         </p:nvSpPr>
@@ -10321,7 +10217,7 @@
       </p:sp>
       <p:sp>
         <p:nvSpPr>
-          <p:cNvPr id="16" name="Text 13"/>
+          <p:cNvPr id="16" name="Text 12"/>
           <p:cNvSpPr/>
           <p:nvPr/>
         </p:nvSpPr>
@@ -10363,7 +10259,7 @@
       </p:sp>
       <p:sp>
         <p:nvSpPr>
-          <p:cNvPr id="17" name="Shape 14"/>
+          <p:cNvPr id="17" name="Shape 13"/>
           <p:cNvSpPr/>
           <p:nvPr/>
         </p:nvSpPr>
@@ -10386,7 +10282,7 @@
       </p:sp>
       <p:sp>
         <p:nvSpPr>
-          <p:cNvPr id="18" name="Text 15"/>
+          <p:cNvPr id="18" name="Text 14"/>
           <p:cNvSpPr/>
           <p:nvPr/>
         </p:nvSpPr>
@@ -10428,7 +10324,7 @@
       </p:sp>
       <p:sp>
         <p:nvSpPr>
-          <p:cNvPr id="19" name="Text 16"/>
+          <p:cNvPr id="19" name="Text 15"/>
           <p:cNvSpPr/>
           <p:nvPr/>
         </p:nvSpPr>
@@ -10470,7 +10366,7 @@
       </p:sp>
       <p:sp>
         <p:nvSpPr>
-          <p:cNvPr id="20" name="Shape 17"/>
+          <p:cNvPr id="20" name="Shape 16"/>
           <p:cNvSpPr/>
           <p:nvPr/>
         </p:nvSpPr>
@@ -10493,7 +10389,7 @@
       </p:sp>
       <p:sp>
         <p:nvSpPr>
-          <p:cNvPr id="21" name="Text 18"/>
+          <p:cNvPr id="21" name="Text 17"/>
           <p:cNvSpPr/>
           <p:nvPr/>
         </p:nvSpPr>
@@ -10535,7 +10431,7 @@
       </p:sp>
       <p:sp>
         <p:nvSpPr>
-          <p:cNvPr id="22" name="Text 19"/>
+          <p:cNvPr id="22" name="Text 18"/>
           <p:cNvSpPr/>
           <p:nvPr/>
         </p:nvSpPr>
@@ -10577,7 +10473,7 @@
       </p:sp>
       <p:sp>
         <p:nvSpPr>
-          <p:cNvPr id="23" name="Shape 20"/>
+          <p:cNvPr id="23" name="Shape 19"/>
           <p:cNvSpPr/>
           <p:nvPr/>
         </p:nvSpPr>
@@ -10600,7 +10496,7 @@
       </p:sp>
       <p:sp>
         <p:nvSpPr>
-          <p:cNvPr id="24" name="Text 21"/>
+          <p:cNvPr id="24" name="Text 20"/>
           <p:cNvSpPr/>
           <p:nvPr/>
         </p:nvSpPr>
@@ -10642,7 +10538,7 @@
       </p:sp>
       <p:sp>
         <p:nvSpPr>
-          <p:cNvPr id="25" name="Text 22"/>
+          <p:cNvPr id="25" name="Text 21"/>
           <p:cNvSpPr/>
           <p:nvPr/>
         </p:nvSpPr>
@@ -10684,7 +10580,7 @@
       </p:sp>
       <p:sp>
         <p:nvSpPr>
-          <p:cNvPr id="26" name="Text 23"/>
+          <p:cNvPr id="26" name="Text 22"/>
           <p:cNvSpPr/>
           <p:nvPr/>
         </p:nvSpPr>
@@ -10726,7 +10622,7 @@
       </p:sp>
       <p:sp>
         <p:nvSpPr>
-          <p:cNvPr id="27" name="Text 24"/>
+          <p:cNvPr id="27" name="Text 23"/>
           <p:cNvSpPr/>
           <p:nvPr/>
         </p:nvSpPr>
@@ -10798,112 +10694,9 @@
           <a:chExt cx="0" cy="0"/>
         </a:xfrm>
       </p:grpSpPr>
-      <p:sp>
-        <p:nvSpPr>
-          <p:cNvPr id="2" name="Text 0"/>
-          <p:cNvSpPr/>
-          <p:nvPr/>
-        </p:nvSpPr>
-        <p:spPr>
-          <a:xfrm>
-            <a:off x="0" y="0"/>
-            <a:ext cx="9144000" cy="76200"/>
-          </a:xfrm>
-          <a:prstGeom prst="rect">
-            <a:avLst/>
-          </a:prstGeom>
-          <a:solidFill>
-            <a:srgbClr val="0969DA"/>
-          </a:solidFill>
-          <a:ln/>
-        </p:spPr>
-        <p:txBody>
-          <a:bodyPr wrap="square" rtlCol="0" anchor="ctr"/>
-          <a:lstStyle/>
-          <a:p>
-            <a:pPr indent="0" marL="0">
-              <a:buNone/>
-            </a:pPr>
-            <a:endParaRPr lang="en-US" dirty="0"/>
-          </a:p>
-        </p:txBody>
-      </p:sp>
-      <p:sp>
-        <p:nvSpPr>
-          <p:cNvPr id="3" name="Text 1"/>
-          <p:cNvSpPr/>
-          <p:nvPr/>
-        </p:nvSpPr>
-        <p:spPr>
-          <a:xfrm>
-            <a:off x="7340501" y="177701"/>
-            <a:ext cx="1168301" cy="279350"/>
-          </a:xfrm>
-          <a:prstGeom prst="roundRect">
-            <a:avLst>
-              <a:gd name="adj" fmla="val 22731"/>
-            </a:avLst>
-          </a:prstGeom>
-          <a:solidFill>
-            <a:srgbClr val="1A7F37"/>
-          </a:solidFill>
-          <a:ln/>
-        </p:spPr>
-        <p:txBody>
-          <a:bodyPr wrap="square" rtlCol="0" anchor="ctr"/>
-          <a:lstStyle/>
-          <a:p>
-            <a:pPr indent="0" marL="0">
-              <a:buNone/>
-            </a:pPr>
-            <a:endParaRPr lang="en-US" dirty="0"/>
-          </a:p>
-        </p:txBody>
-      </p:sp>
-      <p:sp>
-        <p:nvSpPr>
-          <p:cNvPr id="4" name="Text 2"/>
-          <p:cNvSpPr/>
-          <p:nvPr/>
-        </p:nvSpPr>
-        <p:spPr>
-          <a:xfrm>
-            <a:off x="7461041" y="231577"/>
-            <a:ext cx="927071" cy="171450"/>
-          </a:xfrm>
-          <a:prstGeom prst="rect">
-            <a:avLst/>
-          </a:prstGeom>
-          <a:noFill/>
-          <a:ln/>
-        </p:spPr>
-        <p:txBody>
-          <a:bodyPr wrap="square" lIns="0" tIns="0" rIns="0" bIns="0" rtlCol="0" anchor="t"/>
-          <a:lstStyle/>
-          <a:p>
-            <a:pPr algn="ctr" indent="0" marL="0">
-              <a:buNone/>
-            </a:pPr>
-            <a:r>
-              <a:rPr lang="en-US" sz="1150" b="1" dirty="0">
-                <a:solidFill>
-                  <a:srgbClr val="FFFFFF"/>
-                </a:solidFill>
-                <a:latin typeface="Arial" pitchFamily="34" charset="0"/>
-                <a:ea typeface="Arial" pitchFamily="34" charset="-122"/>
-                <a:cs typeface="Arial" pitchFamily="34" charset="-120"/>
-              </a:rPr>
-              <a:t>CHAPTER 01</a:t>
-            </a:r>
-            <a:endParaRPr lang="en-US" sz="1150" dirty="0"/>
-          </a:p>
-        </p:txBody>
-      </p:sp>
       <p:pic>
         <p:nvPicPr>
-          <p:cNvPr id="5" name="Image 0" descr="/Users/danwahlin/.copilot/session-state/56a7a0da-def8-48d4-b5e8-0ac3878cb8dd/files/slides-build/icons/FaGithub-1F2328.png">
-            <a:hlinkClick r:id="rId2" tooltip="https://github.com/github/copilot-app-for-beginners/tree/main/01-tour-the-app"/>
-          </p:cNvPr>
+          <p:cNvPr id="2" name="Image 0" descr="/Users/danwahlin/.copilot/session-state/56a7a0da-def8-48d4-b5e8-0ac3878cb8dd/files/slides-build/img/grad-corner.png">    </p:cNvPr>
           <p:cNvPicPr>
             <a:picLocks noChangeAspect="1"/>
           </p:cNvPicPr>
@@ -10917,6 +10710,103 @@
         </p:blipFill>
         <p:spPr>
           <a:xfrm>
+            <a:off x="6349901" y="0"/>
+            <a:ext cx="2793950" cy="1308050"/>
+          </a:xfrm>
+          <a:prstGeom prst="rect">
+            <a:avLst/>
+          </a:prstGeom>
+        </p:spPr>
+      </p:pic>
+      <p:sp>
+        <p:nvSpPr>
+          <p:cNvPr id="3" name="Text 0"/>
+          <p:cNvSpPr/>
+          <p:nvPr/>
+        </p:nvSpPr>
+        <p:spPr>
+          <a:xfrm>
+            <a:off x="7340501" y="177701"/>
+            <a:ext cx="1168301" cy="279350"/>
+          </a:xfrm>
+          <a:prstGeom prst="roundRect">
+            <a:avLst>
+              <a:gd name="adj" fmla="val 22731"/>
+            </a:avLst>
+          </a:prstGeom>
+          <a:solidFill>
+            <a:srgbClr val="1A7F37"/>
+          </a:solidFill>
+          <a:ln/>
+        </p:spPr>
+        <p:txBody>
+          <a:bodyPr wrap="square" rtlCol="0" anchor="ctr"/>
+          <a:lstStyle/>
+          <a:p>
+            <a:pPr indent="0" marL="0">
+              <a:buNone/>
+            </a:pPr>
+            <a:endParaRPr lang="en-US" dirty="0"/>
+          </a:p>
+        </p:txBody>
+      </p:sp>
+      <p:sp>
+        <p:nvSpPr>
+          <p:cNvPr id="4" name="Text 1"/>
+          <p:cNvSpPr/>
+          <p:nvPr/>
+        </p:nvSpPr>
+        <p:spPr>
+          <a:xfrm>
+            <a:off x="7461041" y="231577"/>
+            <a:ext cx="927071" cy="171450"/>
+          </a:xfrm>
+          <a:prstGeom prst="rect">
+            <a:avLst/>
+          </a:prstGeom>
+          <a:noFill/>
+          <a:ln/>
+        </p:spPr>
+        <p:txBody>
+          <a:bodyPr wrap="square" lIns="0" tIns="0" rIns="0" bIns="0" rtlCol="0" anchor="t"/>
+          <a:lstStyle/>
+          <a:p>
+            <a:pPr algn="ctr" indent="0" marL="0">
+              <a:buNone/>
+            </a:pPr>
+            <a:r>
+              <a:rPr lang="en-US" sz="1150" b="1" dirty="0">
+                <a:solidFill>
+                  <a:srgbClr val="FFFFFF"/>
+                </a:solidFill>
+                <a:latin typeface="Arial" pitchFamily="34" charset="0"/>
+                <a:ea typeface="Arial" pitchFamily="34" charset="-122"/>
+                <a:cs typeface="Arial" pitchFamily="34" charset="-120"/>
+              </a:rPr>
+              <a:t>CHAPTER 01</a:t>
+            </a:r>
+            <a:endParaRPr lang="en-US" sz="1150" dirty="0"/>
+          </a:p>
+        </p:txBody>
+      </p:sp>
+      <p:pic>
+        <p:nvPicPr>
+          <p:cNvPr id="5" name="Image 1" descr="/Users/danwahlin/.copilot/session-state/56a7a0da-def8-48d4-b5e8-0ac3878cb8dd/files/slides-build/icons/FaGithub-1F2328.png">
+            <a:hlinkClick r:id="rId3" tooltip="https://github.com/github/copilot-app-for-beginners/tree/main/01-tour-the-app"/>
+          </p:cNvPr>
+          <p:cNvPicPr>
+            <a:picLocks noChangeAspect="1"/>
+          </p:cNvPicPr>
+          <p:nvPr/>
+        </p:nvPicPr>
+        <p:blipFill>
+          <a:blip r:embed="rId2"/>
+          <a:stretch>
+            <a:fillRect/>
+          </a:stretch>
+        </p:blipFill>
+        <p:spPr>
+          <a:xfrm>
             <a:off x="8610600" y="165050"/>
             <a:ext cx="304800" cy="304800"/>
           </a:xfrm>
@@ -10927,7 +10817,7 @@
       </p:pic>
       <p:sp>
         <p:nvSpPr>
-          <p:cNvPr id="6" name="Text 3"/>
+          <p:cNvPr id="6" name="Text 2"/>
           <p:cNvSpPr/>
           <p:nvPr/>
         </p:nvSpPr>
@@ -10966,7 +10856,7 @@
       </p:sp>
       <p:sp>
         <p:nvSpPr>
-          <p:cNvPr id="7" name="Text 4"/>
+          <p:cNvPr id="7" name="Text 3"/>
           <p:cNvSpPr/>
           <p:nvPr/>
         </p:nvSpPr>
@@ -11011,7 +10901,7 @@
       </p:sp>
       <p:sp>
         <p:nvSpPr>
-          <p:cNvPr id="8" name="Text 5"/>
+          <p:cNvPr id="8" name="Text 4"/>
           <p:cNvSpPr/>
           <p:nvPr/>
         </p:nvSpPr>
@@ -11054,14 +10944,14 @@
       </p:sp>
       <p:pic>
         <p:nvPicPr>
-          <p:cNvPr id="9" name="Image 1" descr="/Users/danwahlin/.copilot/session-state/56a7a0da-def8-48d4-b5e8-0ac3878cb8dd/files/slides-build/img/01-editor-vs-app.jpg">    </p:cNvPr>
+          <p:cNvPr id="9" name="Image 2" descr="/Users/danwahlin/.copilot/session-state/56a7a0da-def8-48d4-b5e8-0ac3878cb8dd/files/slides-build/img/01-editor-vs-app.jpg">    </p:cNvPr>
           <p:cNvPicPr>
             <a:picLocks noChangeAspect="1"/>
           </p:cNvPicPr>
           <p:nvPr/>
         </p:nvPicPr>
         <p:blipFill>
-          <a:blip r:embed="rId3"/>
+          <a:blip r:embed="rId4"/>
           <a:stretch>
             <a:fillRect/>
           </a:stretch>
@@ -11078,7 +10968,7 @@
       </p:pic>
       <p:sp>
         <p:nvSpPr>
-          <p:cNvPr id="10" name="Text 6"/>
+          <p:cNvPr id="10" name="Text 5"/>
           <p:cNvSpPr/>
           <p:nvPr/>
         </p:nvSpPr>
@@ -11114,7 +11004,7 @@
       </p:sp>
       <p:sp>
         <p:nvSpPr>
-          <p:cNvPr id="11" name="Text 7"/>
+          <p:cNvPr id="11" name="Text 6"/>
           <p:cNvSpPr/>
           <p:nvPr/>
         </p:nvSpPr>
@@ -11146,14 +11036,14 @@
       </p:sp>
       <p:pic>
         <p:nvPicPr>
-          <p:cNvPr id="12" name="Image 2" descr="/Users/danwahlin/.copilot/session-state/56a7a0da-def8-48d4-b5e8-0ac3878cb8dd/files/slides-build/icons/GoCode-0969DA.png">    </p:cNvPr>
+          <p:cNvPr id="12" name="Image 3" descr="/Users/danwahlin/.copilot/session-state/56a7a0da-def8-48d4-b5e8-0ac3878cb8dd/files/slides-build/icons/GoCode-0969DA.png">    </p:cNvPr>
           <p:cNvPicPr>
             <a:picLocks noChangeAspect="1"/>
           </p:cNvPicPr>
           <p:nvPr/>
         </p:nvPicPr>
         <p:blipFill>
-          <a:blip r:embed="rId4"/>
+          <a:blip r:embed="rId5"/>
           <a:stretch>
             <a:fillRect/>
           </a:stretch>
@@ -11170,7 +11060,7 @@
       </p:pic>
       <p:sp>
         <p:nvSpPr>
-          <p:cNvPr id="13" name="Text 8"/>
+          <p:cNvPr id="13" name="Text 7"/>
           <p:cNvSpPr/>
           <p:nvPr/>
         </p:nvSpPr>
@@ -11209,7 +11099,7 @@
       </p:sp>
       <p:sp>
         <p:nvSpPr>
-          <p:cNvPr id="14" name="Text 9"/>
+          <p:cNvPr id="14" name="Text 8"/>
           <p:cNvSpPr/>
           <p:nvPr/>
         </p:nvSpPr>
@@ -11251,7 +11141,7 @@
       </p:sp>
       <p:sp>
         <p:nvSpPr>
-          <p:cNvPr id="15" name="Text 10"/>
+          <p:cNvPr id="15" name="Text 9"/>
           <p:cNvSpPr/>
           <p:nvPr/>
         </p:nvSpPr>
@@ -11287,7 +11177,7 @@
       </p:sp>
       <p:sp>
         <p:nvSpPr>
-          <p:cNvPr id="16" name="Text 11"/>
+          <p:cNvPr id="16" name="Text 10"/>
           <p:cNvSpPr/>
           <p:nvPr/>
         </p:nvSpPr>
@@ -11319,14 +11209,14 @@
       </p:sp>
       <p:pic>
         <p:nvPicPr>
-          <p:cNvPr id="17" name="Image 3" descr="/Users/danwahlin/.copilot/session-state/56a7a0da-def8-48d4-b5e8-0ac3878cb8dd/files/slides-build/icons/GoCopilot-8250DF.png">    </p:cNvPr>
+          <p:cNvPr id="17" name="Image 4" descr="/Users/danwahlin/.copilot/session-state/56a7a0da-def8-48d4-b5e8-0ac3878cb8dd/files/slides-build/icons/GoCopilot-8250DF.png">    </p:cNvPr>
           <p:cNvPicPr>
             <a:picLocks noChangeAspect="1"/>
           </p:cNvPicPr>
           <p:nvPr/>
         </p:nvPicPr>
         <p:blipFill>
-          <a:blip r:embed="rId5"/>
+          <a:blip r:embed="rId6"/>
           <a:stretch>
             <a:fillRect/>
           </a:stretch>
@@ -11343,7 +11233,7 @@
       </p:pic>
       <p:sp>
         <p:nvSpPr>
-          <p:cNvPr id="18" name="Text 12"/>
+          <p:cNvPr id="18" name="Text 11"/>
           <p:cNvSpPr/>
           <p:nvPr/>
         </p:nvSpPr>
@@ -11382,7 +11272,7 @@
       </p:sp>
       <p:sp>
         <p:nvSpPr>
-          <p:cNvPr id="19" name="Text 13"/>
+          <p:cNvPr id="19" name="Text 12"/>
           <p:cNvSpPr/>
           <p:nvPr/>
         </p:nvSpPr>
@@ -11424,7 +11314,7 @@
       </p:sp>
       <p:sp>
         <p:nvSpPr>
-          <p:cNvPr id="20" name="Text 14"/>
+          <p:cNvPr id="20" name="Text 13"/>
           <p:cNvSpPr/>
           <p:nvPr/>
         </p:nvSpPr>
@@ -11460,7 +11350,7 @@
       </p:sp>
       <p:sp>
         <p:nvSpPr>
-          <p:cNvPr id="21" name="Text 15"/>
+          <p:cNvPr id="21" name="Text 14"/>
           <p:cNvSpPr/>
           <p:nvPr/>
         </p:nvSpPr>
@@ -11492,14 +11382,14 @@
       </p:sp>
       <p:pic>
         <p:nvPicPr>
-          <p:cNvPr id="22" name="Image 4" descr="/Users/danwahlin/.copilot/session-state/56a7a0da-def8-48d4-b5e8-0ac3878cb8dd/files/slides-build/icons/GoLinkExternal-1A7F37.png">    </p:cNvPr>
+          <p:cNvPr id="22" name="Image 5" descr="/Users/danwahlin/.copilot/session-state/56a7a0da-def8-48d4-b5e8-0ac3878cb8dd/files/slides-build/icons/GoLinkExternal-1A7F37.png">    </p:cNvPr>
           <p:cNvPicPr>
             <a:picLocks noChangeAspect="1"/>
           </p:cNvPicPr>
           <p:nvPr/>
         </p:nvPicPr>
         <p:blipFill>
-          <a:blip r:embed="rId6"/>
+          <a:blip r:embed="rId7"/>
           <a:stretch>
             <a:fillRect/>
           </a:stretch>
@@ -11516,7 +11406,7 @@
       </p:pic>
       <p:sp>
         <p:nvSpPr>
-          <p:cNvPr id="23" name="Text 16"/>
+          <p:cNvPr id="23" name="Text 15"/>
           <p:cNvSpPr/>
           <p:nvPr/>
         </p:nvSpPr>
@@ -11555,7 +11445,7 @@
       </p:sp>
       <p:sp>
         <p:nvSpPr>
-          <p:cNvPr id="24" name="Text 17"/>
+          <p:cNvPr id="24" name="Text 16"/>
           <p:cNvSpPr/>
           <p:nvPr/>
         </p:nvSpPr>
@@ -11729,82 +11619,9 @@
           </a:p>
         </p:txBody>
       </p:sp>
-      <p:sp>
-        <p:nvSpPr>
-          <p:cNvPr id="5" name="Text 3"/>
-          <p:cNvSpPr/>
-          <p:nvPr/>
-        </p:nvSpPr>
-        <p:spPr>
-          <a:xfrm>
-            <a:off x="7340501" y="177701"/>
-            <a:ext cx="1168301" cy="279350"/>
-          </a:xfrm>
-          <a:prstGeom prst="roundRect">
-            <a:avLst>
-              <a:gd name="adj" fmla="val 22731"/>
-            </a:avLst>
-          </a:prstGeom>
-          <a:solidFill>
-            <a:srgbClr val="1A7F37"/>
-          </a:solidFill>
-          <a:ln/>
-        </p:spPr>
-        <p:txBody>
-          <a:bodyPr wrap="square" rtlCol="0" anchor="ctr"/>
-          <a:lstStyle/>
-          <a:p>
-            <a:pPr indent="0" marL="0">
-              <a:buNone/>
-            </a:pPr>
-            <a:endParaRPr lang="en-US" dirty="0"/>
-          </a:p>
-        </p:txBody>
-      </p:sp>
-      <p:sp>
-        <p:nvSpPr>
-          <p:cNvPr id="6" name="Text 4"/>
-          <p:cNvSpPr/>
-          <p:nvPr/>
-        </p:nvSpPr>
-        <p:spPr>
-          <a:xfrm>
-            <a:off x="7461041" y="231577"/>
-            <a:ext cx="927071" cy="171450"/>
-          </a:xfrm>
-          <a:prstGeom prst="rect">
-            <a:avLst/>
-          </a:prstGeom>
-          <a:noFill/>
-          <a:ln/>
-        </p:spPr>
-        <p:txBody>
-          <a:bodyPr wrap="square" lIns="0" tIns="0" rIns="0" bIns="0" rtlCol="0" anchor="t"/>
-          <a:lstStyle/>
-          <a:p>
-            <a:pPr algn="ctr" indent="0" marL="0">
-              <a:buNone/>
-            </a:pPr>
-            <a:r>
-              <a:rPr lang="en-US" sz="1150" b="1" dirty="0">
-                <a:solidFill>
-                  <a:srgbClr val="FFFFFF"/>
-                </a:solidFill>
-                <a:latin typeface="Arial" pitchFamily="34" charset="0"/>
-                <a:ea typeface="Arial" pitchFamily="34" charset="-122"/>
-                <a:cs typeface="Arial" pitchFamily="34" charset="-120"/>
-              </a:rPr>
-              <a:t>CHAPTER 01</a:t>
-            </a:r>
-            <a:endParaRPr lang="en-US" sz="1150" dirty="0"/>
-          </a:p>
-        </p:txBody>
-      </p:sp>
       <p:pic>
         <p:nvPicPr>
-          <p:cNvPr id="7" name="Image 0" descr="/Users/danwahlin/.copilot/session-state/56a7a0da-def8-48d4-b5e8-0ac3878cb8dd/files/slides-build/icons/FaGithub-1F2328.png">
-            <a:hlinkClick r:id="rId2" tooltip="https://github.com/github/copilot-app-for-beginners/tree/main/01-tour-the-app"/>
-          </p:cNvPr>
+          <p:cNvPr id="5" name="Image 0" descr="/Users/danwahlin/.copilot/session-state/56a7a0da-def8-48d4-b5e8-0ac3878cb8dd/files/slides-build/img/grad-corner.png">    </p:cNvPr>
           <p:cNvPicPr>
             <a:picLocks noChangeAspect="1"/>
           </p:cNvPicPr>
@@ -11818,6 +11635,103 @@
         </p:blipFill>
         <p:spPr>
           <a:xfrm>
+            <a:off x="6349901" y="0"/>
+            <a:ext cx="2793950" cy="1308050"/>
+          </a:xfrm>
+          <a:prstGeom prst="rect">
+            <a:avLst/>
+          </a:prstGeom>
+        </p:spPr>
+      </p:pic>
+      <p:sp>
+        <p:nvSpPr>
+          <p:cNvPr id="6" name="Text 3"/>
+          <p:cNvSpPr/>
+          <p:nvPr/>
+        </p:nvSpPr>
+        <p:spPr>
+          <a:xfrm>
+            <a:off x="7340501" y="177701"/>
+            <a:ext cx="1168301" cy="279350"/>
+          </a:xfrm>
+          <a:prstGeom prst="roundRect">
+            <a:avLst>
+              <a:gd name="adj" fmla="val 22731"/>
+            </a:avLst>
+          </a:prstGeom>
+          <a:solidFill>
+            <a:srgbClr val="1A7F37"/>
+          </a:solidFill>
+          <a:ln/>
+        </p:spPr>
+        <p:txBody>
+          <a:bodyPr wrap="square" rtlCol="0" anchor="ctr"/>
+          <a:lstStyle/>
+          <a:p>
+            <a:pPr indent="0" marL="0">
+              <a:buNone/>
+            </a:pPr>
+            <a:endParaRPr lang="en-US" dirty="0"/>
+          </a:p>
+        </p:txBody>
+      </p:sp>
+      <p:sp>
+        <p:nvSpPr>
+          <p:cNvPr id="7" name="Text 4"/>
+          <p:cNvSpPr/>
+          <p:nvPr/>
+        </p:nvSpPr>
+        <p:spPr>
+          <a:xfrm>
+            <a:off x="7461041" y="231577"/>
+            <a:ext cx="927071" cy="171450"/>
+          </a:xfrm>
+          <a:prstGeom prst="rect">
+            <a:avLst/>
+          </a:prstGeom>
+          <a:noFill/>
+          <a:ln/>
+        </p:spPr>
+        <p:txBody>
+          <a:bodyPr wrap="square" lIns="0" tIns="0" rIns="0" bIns="0" rtlCol="0" anchor="t"/>
+          <a:lstStyle/>
+          <a:p>
+            <a:pPr algn="ctr" indent="0" marL="0">
+              <a:buNone/>
+            </a:pPr>
+            <a:r>
+              <a:rPr lang="en-US" sz="1150" b="1" dirty="0">
+                <a:solidFill>
+                  <a:srgbClr val="FFFFFF"/>
+                </a:solidFill>
+                <a:latin typeface="Arial" pitchFamily="34" charset="0"/>
+                <a:ea typeface="Arial" pitchFamily="34" charset="-122"/>
+                <a:cs typeface="Arial" pitchFamily="34" charset="-120"/>
+              </a:rPr>
+              <a:t>CHAPTER 01</a:t>
+            </a:r>
+            <a:endParaRPr lang="en-US" sz="1150" dirty="0"/>
+          </a:p>
+        </p:txBody>
+      </p:sp>
+      <p:pic>
+        <p:nvPicPr>
+          <p:cNvPr id="8" name="Image 1" descr="/Users/danwahlin/.copilot/session-state/56a7a0da-def8-48d4-b5e8-0ac3878cb8dd/files/slides-build/icons/FaGithub-1F2328.png">
+            <a:hlinkClick r:id="rId3" tooltip="https://github.com/github/copilot-app-for-beginners/tree/main/01-tour-the-app"/>
+          </p:cNvPr>
+          <p:cNvPicPr>
+            <a:picLocks noChangeAspect="1"/>
+          </p:cNvPicPr>
+          <p:nvPr/>
+        </p:nvPicPr>
+        <p:blipFill>
+          <a:blip r:embed="rId2"/>
+          <a:stretch>
+            <a:fillRect/>
+          </a:stretch>
+        </p:blipFill>
+        <p:spPr>
+          <a:xfrm>
             <a:off x="8610600" y="165050"/>
             <a:ext cx="304800" cy="304800"/>
           </a:xfrm>
@@ -11828,7 +11742,7 @@
       </p:pic>
       <p:sp>
         <p:nvSpPr>
-          <p:cNvPr id="8" name="Text 5"/>
+          <p:cNvPr id="9" name="Text 5"/>
           <p:cNvSpPr/>
           <p:nvPr/>
         </p:nvSpPr>
@@ -11867,7 +11781,7 @@
       </p:sp>
       <p:sp>
         <p:nvSpPr>
-          <p:cNvPr id="9" name="Text 6"/>
+          <p:cNvPr id="10" name="Text 6"/>
           <p:cNvSpPr/>
           <p:nvPr/>
         </p:nvSpPr>
@@ -11912,7 +11826,7 @@
       </p:sp>
       <p:sp>
         <p:nvSpPr>
-          <p:cNvPr id="10" name="Text 7"/>
+          <p:cNvPr id="11" name="Text 7"/>
           <p:cNvSpPr/>
           <p:nvPr/>
         </p:nvSpPr>
@@ -11944,7 +11858,7 @@
       </p:sp>
       <p:sp>
         <p:nvSpPr>
-          <p:cNvPr id="11" name="Text 8"/>
+          <p:cNvPr id="12" name="Text 8"/>
           <p:cNvSpPr/>
           <p:nvPr/>
         </p:nvSpPr>
@@ -12016,112 +11930,9 @@
           <a:chExt cx="0" cy="0"/>
         </a:xfrm>
       </p:grpSpPr>
-      <p:sp>
-        <p:nvSpPr>
-          <p:cNvPr id="2" name="Text 0"/>
-          <p:cNvSpPr/>
-          <p:nvPr/>
-        </p:nvSpPr>
-        <p:spPr>
-          <a:xfrm>
-            <a:off x="0" y="0"/>
-            <a:ext cx="9144000" cy="76200"/>
-          </a:xfrm>
-          <a:prstGeom prst="rect">
-            <a:avLst/>
-          </a:prstGeom>
-          <a:solidFill>
-            <a:srgbClr val="8250DF"/>
-          </a:solidFill>
-          <a:ln/>
-        </p:spPr>
-        <p:txBody>
-          <a:bodyPr wrap="square" rtlCol="0" anchor="ctr"/>
-          <a:lstStyle/>
-          <a:p>
-            <a:pPr indent="0" marL="0">
-              <a:buNone/>
-            </a:pPr>
-            <a:endParaRPr lang="en-US" dirty="0"/>
-          </a:p>
-        </p:txBody>
-      </p:sp>
-      <p:sp>
-        <p:nvSpPr>
-          <p:cNvPr id="3" name="Text 1"/>
-          <p:cNvSpPr/>
-          <p:nvPr/>
-        </p:nvSpPr>
-        <p:spPr>
-          <a:xfrm>
-            <a:off x="7340501" y="177701"/>
-            <a:ext cx="1168301" cy="279350"/>
-          </a:xfrm>
-          <a:prstGeom prst="roundRect">
-            <a:avLst>
-              <a:gd name="adj" fmla="val 22731"/>
-            </a:avLst>
-          </a:prstGeom>
-          <a:solidFill>
-            <a:srgbClr val="1A7F37"/>
-          </a:solidFill>
-          <a:ln/>
-        </p:spPr>
-        <p:txBody>
-          <a:bodyPr wrap="square" rtlCol="0" anchor="ctr"/>
-          <a:lstStyle/>
-          <a:p>
-            <a:pPr indent="0" marL="0">
-              <a:buNone/>
-            </a:pPr>
-            <a:endParaRPr lang="en-US" dirty="0"/>
-          </a:p>
-        </p:txBody>
-      </p:sp>
-      <p:sp>
-        <p:nvSpPr>
-          <p:cNvPr id="4" name="Text 2"/>
-          <p:cNvSpPr/>
-          <p:nvPr/>
-        </p:nvSpPr>
-        <p:spPr>
-          <a:xfrm>
-            <a:off x="7461041" y="231577"/>
-            <a:ext cx="927071" cy="171450"/>
-          </a:xfrm>
-          <a:prstGeom prst="rect">
-            <a:avLst/>
-          </a:prstGeom>
-          <a:noFill/>
-          <a:ln/>
-        </p:spPr>
-        <p:txBody>
-          <a:bodyPr wrap="square" lIns="0" tIns="0" rIns="0" bIns="0" rtlCol="0" anchor="t"/>
-          <a:lstStyle/>
-          <a:p>
-            <a:pPr algn="ctr" indent="0" marL="0">
-              <a:buNone/>
-            </a:pPr>
-            <a:r>
-              <a:rPr lang="en-US" sz="1150" b="1" dirty="0">
-                <a:solidFill>
-                  <a:srgbClr val="FFFFFF"/>
-                </a:solidFill>
-                <a:latin typeface="Arial" pitchFamily="34" charset="0"/>
-                <a:ea typeface="Arial" pitchFamily="34" charset="-122"/>
-                <a:cs typeface="Arial" pitchFamily="34" charset="-120"/>
-              </a:rPr>
-              <a:t>CHAPTER 01</a:t>
-            </a:r>
-            <a:endParaRPr lang="en-US" sz="1150" dirty="0"/>
-          </a:p>
-        </p:txBody>
-      </p:sp>
       <p:pic>
         <p:nvPicPr>
-          <p:cNvPr id="5" name="Image 0" descr="/Users/danwahlin/.copilot/session-state/56a7a0da-def8-48d4-b5e8-0ac3878cb8dd/files/slides-build/icons/FaGithub-1F2328.png">
-            <a:hlinkClick r:id="rId2" tooltip="https://github.com/github/copilot-app-for-beginners/tree/main/01-tour-the-app"/>
-          </p:cNvPr>
+          <p:cNvPr id="2" name="Image 0" descr="/Users/danwahlin/.copilot/session-state/56a7a0da-def8-48d4-b5e8-0ac3878cb8dd/files/slides-build/img/grad-corner.png">    </p:cNvPr>
           <p:cNvPicPr>
             <a:picLocks noChangeAspect="1"/>
           </p:cNvPicPr>
@@ -12135,6 +11946,103 @@
         </p:blipFill>
         <p:spPr>
           <a:xfrm>
+            <a:off x="6349901" y="0"/>
+            <a:ext cx="2793950" cy="1308050"/>
+          </a:xfrm>
+          <a:prstGeom prst="rect">
+            <a:avLst/>
+          </a:prstGeom>
+        </p:spPr>
+      </p:pic>
+      <p:sp>
+        <p:nvSpPr>
+          <p:cNvPr id="3" name="Text 0"/>
+          <p:cNvSpPr/>
+          <p:nvPr/>
+        </p:nvSpPr>
+        <p:spPr>
+          <a:xfrm>
+            <a:off x="7340501" y="177701"/>
+            <a:ext cx="1168301" cy="279350"/>
+          </a:xfrm>
+          <a:prstGeom prst="roundRect">
+            <a:avLst>
+              <a:gd name="adj" fmla="val 22731"/>
+            </a:avLst>
+          </a:prstGeom>
+          <a:solidFill>
+            <a:srgbClr val="1A7F37"/>
+          </a:solidFill>
+          <a:ln/>
+        </p:spPr>
+        <p:txBody>
+          <a:bodyPr wrap="square" rtlCol="0" anchor="ctr"/>
+          <a:lstStyle/>
+          <a:p>
+            <a:pPr indent="0" marL="0">
+              <a:buNone/>
+            </a:pPr>
+            <a:endParaRPr lang="en-US" dirty="0"/>
+          </a:p>
+        </p:txBody>
+      </p:sp>
+      <p:sp>
+        <p:nvSpPr>
+          <p:cNvPr id="4" name="Text 1"/>
+          <p:cNvSpPr/>
+          <p:nvPr/>
+        </p:nvSpPr>
+        <p:spPr>
+          <a:xfrm>
+            <a:off x="7461041" y="231577"/>
+            <a:ext cx="927071" cy="171450"/>
+          </a:xfrm>
+          <a:prstGeom prst="rect">
+            <a:avLst/>
+          </a:prstGeom>
+          <a:noFill/>
+          <a:ln/>
+        </p:spPr>
+        <p:txBody>
+          <a:bodyPr wrap="square" lIns="0" tIns="0" rIns="0" bIns="0" rtlCol="0" anchor="t"/>
+          <a:lstStyle/>
+          <a:p>
+            <a:pPr algn="ctr" indent="0" marL="0">
+              <a:buNone/>
+            </a:pPr>
+            <a:r>
+              <a:rPr lang="en-US" sz="1150" b="1" dirty="0">
+                <a:solidFill>
+                  <a:srgbClr val="FFFFFF"/>
+                </a:solidFill>
+                <a:latin typeface="Arial" pitchFamily="34" charset="0"/>
+                <a:ea typeface="Arial" pitchFamily="34" charset="-122"/>
+                <a:cs typeface="Arial" pitchFamily="34" charset="-120"/>
+              </a:rPr>
+              <a:t>CHAPTER 01</a:t>
+            </a:r>
+            <a:endParaRPr lang="en-US" sz="1150" dirty="0"/>
+          </a:p>
+        </p:txBody>
+      </p:sp>
+      <p:pic>
+        <p:nvPicPr>
+          <p:cNvPr id="5" name="Image 1" descr="/Users/danwahlin/.copilot/session-state/56a7a0da-def8-48d4-b5e8-0ac3878cb8dd/files/slides-build/icons/FaGithub-1F2328.png">
+            <a:hlinkClick r:id="rId3" tooltip="https://github.com/github/copilot-app-for-beginners/tree/main/01-tour-the-app"/>
+          </p:cNvPr>
+          <p:cNvPicPr>
+            <a:picLocks noChangeAspect="1"/>
+          </p:cNvPicPr>
+          <p:nvPr/>
+        </p:nvPicPr>
+        <p:blipFill>
+          <a:blip r:embed="rId2"/>
+          <a:stretch>
+            <a:fillRect/>
+          </a:stretch>
+        </p:blipFill>
+        <p:spPr>
+          <a:xfrm>
             <a:off x="8610600" y="165050"/>
             <a:ext cx="304800" cy="304800"/>
           </a:xfrm>
@@ -12145,7 +12053,7 @@
       </p:pic>
       <p:sp>
         <p:nvSpPr>
-          <p:cNvPr id="6" name="Text 3"/>
+          <p:cNvPr id="6" name="Text 2"/>
           <p:cNvSpPr/>
           <p:nvPr/>
         </p:nvSpPr>
@@ -12184,7 +12092,7 @@
       </p:sp>
       <p:sp>
         <p:nvSpPr>
-          <p:cNvPr id="7" name="Text 4"/>
+          <p:cNvPr id="7" name="Text 3"/>
           <p:cNvSpPr/>
           <p:nvPr/>
         </p:nvSpPr>
@@ -12229,7 +12137,7 @@
       </p:sp>
       <p:sp>
         <p:nvSpPr>
-          <p:cNvPr id="8" name="Text 5"/>
+          <p:cNvPr id="8" name="Text 4"/>
           <p:cNvSpPr/>
           <p:nvPr/>
         </p:nvSpPr>
@@ -12272,63 +12180,7 @@
       </p:sp>
       <p:pic>
         <p:nvPicPr>
-          <p:cNvPr id="9" name="Image 1" descr="/Users/danwahlin/.copilot/session-state/56a7a0da-def8-48d4-b5e8-0ac3878cb8dd/files/slides-build/img/01-sidebar-crop.png">    </p:cNvPr>
-          <p:cNvPicPr>
-            <a:picLocks noChangeAspect="1"/>
-          </p:cNvPicPr>
-          <p:nvPr/>
-        </p:nvPicPr>
-        <p:blipFill>
-          <a:blip r:embed="rId3"/>
-          <a:stretch>
-            <a:fillRect/>
-          </a:stretch>
-        </p:blipFill>
-        <p:spPr>
-          <a:xfrm>
-            <a:off x="735211" y="1295251"/>
-            <a:ext cx="2593330" cy="3225701"/>
-          </a:xfrm>
-          <a:prstGeom prst="rect">
-            <a:avLst/>
-          </a:prstGeom>
-        </p:spPr>
-      </p:pic>
-      <p:sp>
-        <p:nvSpPr>
-          <p:cNvPr id="10" name="Text 6"/>
-          <p:cNvSpPr/>
-          <p:nvPr/>
-        </p:nvSpPr>
-        <p:spPr>
-          <a:xfrm>
-            <a:off x="4063901" y="1521619"/>
-            <a:ext cx="355550" cy="355550"/>
-          </a:xfrm>
-          <a:prstGeom prst="roundRect">
-            <a:avLst>
-              <a:gd name="adj" fmla="val 25004"/>
-            </a:avLst>
-          </a:prstGeom>
-          <a:solidFill>
-            <a:srgbClr val="DDF4FF"/>
-          </a:solidFill>
-          <a:ln/>
-        </p:spPr>
-        <p:txBody>
-          <a:bodyPr wrap="square" rtlCol="0" anchor="ctr"/>
-          <a:lstStyle/>
-          <a:p>
-            <a:pPr indent="0" marL="0">
-              <a:buNone/>
-            </a:pPr>
-            <a:endParaRPr lang="en-US" dirty="0"/>
-          </a:p>
-        </p:txBody>
-      </p:sp>
-      <p:pic>
-        <p:nvPicPr>
-          <p:cNvPr id="11" name="Image 2" descr="/Users/danwahlin/.copilot/session-state/56a7a0da-def8-48d4-b5e8-0ac3878cb8dd/files/slides-build/icons/GoPlus-0969DA.png">    </p:cNvPr>
+          <p:cNvPr id="9" name="Image 2" descr="/Users/danwahlin/.copilot/session-state/56a7a0da-def8-48d4-b5e8-0ac3878cb8dd/files/slides-build/img/01-sidebar-crop.png">    </p:cNvPr>
           <p:cNvPicPr>
             <a:picLocks noChangeAspect="1"/>
           </p:cNvPicPr>
@@ -12342,8 +12194,8 @@
         </p:blipFill>
         <p:spPr>
           <a:xfrm>
-            <a:off x="4146352" y="1604070"/>
-            <a:ext cx="190500" cy="190500"/>
+            <a:off x="735211" y="1295251"/>
+            <a:ext cx="2593330" cy="3225701"/>
           </a:xfrm>
           <a:prstGeom prst="rect">
             <a:avLst/>
@@ -12352,94 +12204,13 @@
       </p:pic>
       <p:sp>
         <p:nvSpPr>
-          <p:cNvPr id="12" name="Text 7"/>
-          <p:cNvSpPr/>
-          <p:nvPr/>
-        </p:nvSpPr>
-        <p:spPr>
-          <a:xfrm>
-            <a:off x="4571851" y="1473398"/>
-            <a:ext cx="2362081" cy="228600"/>
-          </a:xfrm>
-          <a:prstGeom prst="rect">
-            <a:avLst/>
-          </a:prstGeom>
-          <a:noFill/>
-          <a:ln/>
-        </p:spPr>
-        <p:txBody>
-          <a:bodyPr wrap="square" lIns="0" tIns="0" rIns="0" bIns="0" rtlCol="0" anchor="t"/>
-          <a:lstStyle/>
-          <a:p>
-            <a:pPr algn="l" indent="0" marL="0">
-              <a:buNone/>
-            </a:pPr>
-            <a:r>
-              <a:rPr lang="en-US" sz="1550" b="1" dirty="0">
-                <a:solidFill>
-                  <a:srgbClr val="1F2328"/>
-                </a:solidFill>
-                <a:latin typeface="Arial" pitchFamily="34" charset="0"/>
-                <a:ea typeface="Arial" pitchFamily="34" charset="-122"/>
-                <a:cs typeface="Arial" pitchFamily="34" charset="-120"/>
-              </a:rPr>
-              <a:t>New</a:t>
-            </a:r>
-            <a:endParaRPr lang="en-US" sz="1550" dirty="0"/>
-          </a:p>
-        </p:txBody>
-      </p:sp>
-      <p:sp>
-        <p:nvSpPr>
-          <p:cNvPr id="13" name="Text 8"/>
-          <p:cNvSpPr/>
-          <p:nvPr/>
-        </p:nvSpPr>
-        <p:spPr>
-          <a:xfrm>
-            <a:off x="4571851" y="1727299"/>
-            <a:ext cx="2362081" cy="198090"/>
-          </a:xfrm>
-          <a:prstGeom prst="rect">
-            <a:avLst/>
-          </a:prstGeom>
-          <a:noFill/>
-          <a:ln/>
-        </p:spPr>
-        <p:txBody>
-          <a:bodyPr wrap="square" lIns="0" tIns="0" rIns="0" bIns="0" rtlCol="0" anchor="t"/>
-          <a:lstStyle/>
-          <a:p>
-            <a:pPr algn="l" indent="0" marL="0">
-              <a:lnSpc>
-                <a:spcPts val="1560"/>
-              </a:lnSpc>
-              <a:buNone/>
-            </a:pPr>
-            <a:r>
-              <a:rPr lang="en-US" sz="1350" dirty="0">
-                <a:solidFill>
-                  <a:srgbClr val="59636E"/>
-                </a:solidFill>
-                <a:latin typeface="Arial" pitchFamily="34" charset="0"/>
-                <a:ea typeface="Arial" pitchFamily="34" charset="-122"/>
-                <a:cs typeface="Arial" pitchFamily="34" charset="-120"/>
-              </a:rPr>
-              <a:t>Start a chat or project session.</a:t>
-            </a:r>
-            <a:endParaRPr lang="en-US" sz="1350" dirty="0"/>
-          </a:p>
-        </p:txBody>
-      </p:sp>
-      <p:sp>
-        <p:nvSpPr>
-          <p:cNvPr id="14" name="Text 9"/>
-          <p:cNvSpPr/>
-          <p:nvPr/>
-        </p:nvSpPr>
-        <p:spPr>
-          <a:xfrm>
-            <a:off x="4063901" y="2126010"/>
+          <p:cNvPr id="10" name="Text 5"/>
+          <p:cNvSpPr/>
+          <p:nvPr/>
+        </p:nvSpPr>
+        <p:spPr>
+          <a:xfrm>
+            <a:off x="4063901" y="1521619"/>
             <a:ext cx="355550" cy="355550"/>
           </a:xfrm>
           <a:prstGeom prst="roundRect">
@@ -12448,7 +12219,7 @@
             </a:avLst>
           </a:prstGeom>
           <a:solidFill>
-            <a:srgbClr val="FBEFFF"/>
+            <a:srgbClr val="DDF4FF"/>
           </a:solidFill>
           <a:ln/>
         </p:spPr>
@@ -12465,7 +12236,7 @@
       </p:sp>
       <p:pic>
         <p:nvPicPr>
-          <p:cNvPr id="15" name="Image 3" descr="/Users/danwahlin/.copilot/session-state/56a7a0da-def8-48d4-b5e8-0ac3878cb8dd/files/slides-build/icons/GoGitPullRequest-8250DF.png">    </p:cNvPr>
+          <p:cNvPr id="11" name="Image 3" descr="/Users/danwahlin/.copilot/session-state/56a7a0da-def8-48d4-b5e8-0ac3878cb8dd/files/slides-build/icons/GoPlus-0969DA.png">    </p:cNvPr>
           <p:cNvPicPr>
             <a:picLocks noChangeAspect="1"/>
           </p:cNvPicPr>
@@ -12479,7 +12250,7 @@
         </p:blipFill>
         <p:spPr>
           <a:xfrm>
-            <a:off x="4146352" y="2208461"/>
+            <a:off x="4146352" y="1604070"/>
             <a:ext cx="190500" cy="190500"/>
           </a:xfrm>
           <a:prstGeom prst="rect">
@@ -12489,14 +12260,14 @@
       </p:pic>
       <p:sp>
         <p:nvSpPr>
-          <p:cNvPr id="16" name="Text 10"/>
-          <p:cNvSpPr/>
-          <p:nvPr/>
-        </p:nvSpPr>
-        <p:spPr>
-          <a:xfrm>
-            <a:off x="4571851" y="2077789"/>
-            <a:ext cx="2361929" cy="228600"/>
+          <p:cNvPr id="12" name="Text 6"/>
+          <p:cNvSpPr/>
+          <p:nvPr/>
+        </p:nvSpPr>
+        <p:spPr>
+          <a:xfrm>
+            <a:off x="4571851" y="1473398"/>
+            <a:ext cx="2362081" cy="228600"/>
           </a:xfrm>
           <a:prstGeom prst="rect">
             <a:avLst/>
@@ -12520,7 +12291,7 @@
                 <a:ea typeface="Arial" pitchFamily="34" charset="-122"/>
                 <a:cs typeface="Arial" pitchFamily="34" charset="-120"/>
               </a:rPr>
-              <a:t>Pull requests and Issues</a:t>
+              <a:t>New</a:t>
             </a:r>
             <a:endParaRPr lang="en-US" sz="1550" dirty="0"/>
           </a:p>
@@ -12528,14 +12299,14 @@
       </p:sp>
       <p:sp>
         <p:nvSpPr>
-          <p:cNvPr id="17" name="Text 11"/>
-          <p:cNvSpPr/>
-          <p:nvPr/>
-        </p:nvSpPr>
-        <p:spPr>
-          <a:xfrm>
-            <a:off x="4571851" y="2331690"/>
-            <a:ext cx="2361929" cy="198090"/>
+          <p:cNvPr id="13" name="Text 7"/>
+          <p:cNvSpPr/>
+          <p:nvPr/>
+        </p:nvSpPr>
+        <p:spPr>
+          <a:xfrm>
+            <a:off x="4571851" y="1727299"/>
+            <a:ext cx="2362081" cy="198090"/>
           </a:xfrm>
           <a:prstGeom prst="rect">
             <a:avLst/>
@@ -12562,7 +12333,7 @@
                 <a:ea typeface="Arial" pitchFamily="34" charset="-122"/>
                 <a:cs typeface="Arial" pitchFamily="34" charset="-120"/>
               </a:rPr>
-              <a:t>GitHub work that involves you.</a:t>
+              <a:t>Start a chat or project session.</a:t>
             </a:r>
             <a:endParaRPr lang="en-US" sz="1350" dirty="0"/>
           </a:p>
@@ -12570,13 +12341,13 @@
       </p:sp>
       <p:sp>
         <p:nvSpPr>
-          <p:cNvPr id="18" name="Text 12"/>
-          <p:cNvSpPr/>
-          <p:nvPr/>
-        </p:nvSpPr>
-        <p:spPr>
-          <a:xfrm>
-            <a:off x="4063901" y="2730401"/>
+          <p:cNvPr id="14" name="Text 8"/>
+          <p:cNvSpPr/>
+          <p:nvPr/>
+        </p:nvSpPr>
+        <p:spPr>
+          <a:xfrm>
+            <a:off x="4063901" y="2126010"/>
             <a:ext cx="355550" cy="355550"/>
           </a:xfrm>
           <a:prstGeom prst="roundRect">
@@ -12585,7 +12356,7 @@
             </a:avLst>
           </a:prstGeom>
           <a:solidFill>
-            <a:srgbClr val="FFF1E5"/>
+            <a:srgbClr val="FBEFFF"/>
           </a:solidFill>
           <a:ln/>
         </p:spPr>
@@ -12602,7 +12373,7 @@
       </p:sp>
       <p:pic>
         <p:nvPicPr>
-          <p:cNvPr id="19" name="Image 4" descr="/Users/danwahlin/.copilot/session-state/56a7a0da-def8-48d4-b5e8-0ac3878cb8dd/files/slides-build/icons/GoClock-BC4C00.png">    </p:cNvPr>
+          <p:cNvPr id="15" name="Image 4" descr="/Users/danwahlin/.copilot/session-state/56a7a0da-def8-48d4-b5e8-0ac3878cb8dd/files/slides-build/icons/GoGitPullRequest-8250DF.png">    </p:cNvPr>
           <p:cNvPicPr>
             <a:picLocks noChangeAspect="1"/>
           </p:cNvPicPr>
@@ -12616,7 +12387,7 @@
         </p:blipFill>
         <p:spPr>
           <a:xfrm>
-            <a:off x="4146352" y="2812852"/>
+            <a:off x="4146352" y="2208461"/>
             <a:ext cx="190500" cy="190500"/>
           </a:xfrm>
           <a:prstGeom prst="rect">
@@ -12626,14 +12397,14 @@
       </p:pic>
       <p:sp>
         <p:nvSpPr>
-          <p:cNvPr id="20" name="Text 13"/>
-          <p:cNvSpPr/>
-          <p:nvPr/>
-        </p:nvSpPr>
-        <p:spPr>
-          <a:xfrm>
-            <a:off x="4571851" y="2682180"/>
-            <a:ext cx="2605576" cy="228600"/>
+          <p:cNvPr id="16" name="Text 9"/>
+          <p:cNvSpPr/>
+          <p:nvPr/>
+        </p:nvSpPr>
+        <p:spPr>
+          <a:xfrm>
+            <a:off x="4571851" y="2077789"/>
+            <a:ext cx="2361929" cy="228600"/>
           </a:xfrm>
           <a:prstGeom prst="rect">
             <a:avLst/>
@@ -12657,7 +12428,7 @@
                 <a:ea typeface="Arial" pitchFamily="34" charset="-122"/>
                 <a:cs typeface="Arial" pitchFamily="34" charset="-120"/>
               </a:rPr>
-              <a:t>Automations</a:t>
+              <a:t>Pull requests and Issues</a:t>
             </a:r>
             <a:endParaRPr lang="en-US" sz="1550" dirty="0"/>
           </a:p>
@@ -12665,14 +12436,14 @@
       </p:sp>
       <p:sp>
         <p:nvSpPr>
-          <p:cNvPr id="21" name="Text 14"/>
-          <p:cNvSpPr/>
-          <p:nvPr/>
-        </p:nvSpPr>
-        <p:spPr>
-          <a:xfrm>
-            <a:off x="4571851" y="2936081"/>
-            <a:ext cx="2605576" cy="198090"/>
+          <p:cNvPr id="17" name="Text 10"/>
+          <p:cNvSpPr/>
+          <p:nvPr/>
+        </p:nvSpPr>
+        <p:spPr>
+          <a:xfrm>
+            <a:off x="4571851" y="2331690"/>
+            <a:ext cx="2361929" cy="198090"/>
           </a:xfrm>
           <a:prstGeom prst="rect">
             <a:avLst/>
@@ -12699,7 +12470,7 @@
                 <a:ea typeface="Arial" pitchFamily="34" charset="-122"/>
                 <a:cs typeface="Arial" pitchFamily="34" charset="-120"/>
               </a:rPr>
-              <a:t>Saved agent tasks that run again.</a:t>
+              <a:t>GitHub work that involves you.</a:t>
             </a:r>
             <a:endParaRPr lang="en-US" sz="1350" dirty="0"/>
           </a:p>
@@ -12707,13 +12478,13 @@
       </p:sp>
       <p:sp>
         <p:nvSpPr>
-          <p:cNvPr id="22" name="Text 15"/>
-          <p:cNvSpPr/>
-          <p:nvPr/>
-        </p:nvSpPr>
-        <p:spPr>
-          <a:xfrm>
-            <a:off x="4063901" y="3334792"/>
+          <p:cNvPr id="18" name="Text 11"/>
+          <p:cNvSpPr/>
+          <p:nvPr/>
+        </p:nvSpPr>
+        <p:spPr>
+          <a:xfrm>
+            <a:off x="4063901" y="2730401"/>
             <a:ext cx="355550" cy="355550"/>
           </a:xfrm>
           <a:prstGeom prst="roundRect">
@@ -12722,7 +12493,7 @@
             </a:avLst>
           </a:prstGeom>
           <a:solidFill>
-            <a:srgbClr val="DAFBE1"/>
+            <a:srgbClr val="FFF1E5"/>
           </a:solidFill>
           <a:ln/>
         </p:spPr>
@@ -12739,7 +12510,7 @@
       </p:sp>
       <p:pic>
         <p:nvPicPr>
-          <p:cNvPr id="23" name="Image 5" descr="/Users/danwahlin/.copilot/session-state/56a7a0da-def8-48d4-b5e8-0ac3878cb8dd/files/slides-build/icons/GoPlug-1A7F37.png">    </p:cNvPr>
+          <p:cNvPr id="19" name="Image 5" descr="/Users/danwahlin/.copilot/session-state/56a7a0da-def8-48d4-b5e8-0ac3878cb8dd/files/slides-build/icons/GoClock-BC4C00.png">    </p:cNvPr>
           <p:cNvPicPr>
             <a:picLocks noChangeAspect="1"/>
           </p:cNvPicPr>
@@ -12753,7 +12524,7 @@
         </p:blipFill>
         <p:spPr>
           <a:xfrm>
-            <a:off x="4146352" y="3417243"/>
+            <a:off x="4146352" y="2812852"/>
             <a:ext cx="190500" cy="190500"/>
           </a:xfrm>
           <a:prstGeom prst="rect">
@@ -12763,14 +12534,14 @@
       </p:pic>
       <p:sp>
         <p:nvSpPr>
-          <p:cNvPr id="24" name="Text 16"/>
-          <p:cNvSpPr/>
-          <p:nvPr/>
-        </p:nvSpPr>
-        <p:spPr>
-          <a:xfrm>
-            <a:off x="4571851" y="3286571"/>
-            <a:ext cx="2747665" cy="228600"/>
+          <p:cNvPr id="20" name="Text 12"/>
+          <p:cNvSpPr/>
+          <p:nvPr/>
+        </p:nvSpPr>
+        <p:spPr>
+          <a:xfrm>
+            <a:off x="4571851" y="2682180"/>
+            <a:ext cx="2605576" cy="228600"/>
           </a:xfrm>
           <a:prstGeom prst="rect">
             <a:avLst/>
@@ -12794,7 +12565,7 @@
                 <a:ea typeface="Arial" pitchFamily="34" charset="-122"/>
                 <a:cs typeface="Arial" pitchFamily="34" charset="-120"/>
               </a:rPr>
-              <a:t>Customize</a:t>
+              <a:t>Automations</a:t>
             </a:r>
             <a:endParaRPr lang="en-US" sz="1550" dirty="0"/>
           </a:p>
@@ -12802,14 +12573,14 @@
       </p:sp>
       <p:sp>
         <p:nvSpPr>
-          <p:cNvPr id="25" name="Text 17"/>
-          <p:cNvSpPr/>
-          <p:nvPr/>
-        </p:nvSpPr>
-        <p:spPr>
-          <a:xfrm>
-            <a:off x="4571851" y="3540472"/>
-            <a:ext cx="2747665" cy="198090"/>
+          <p:cNvPr id="21" name="Text 13"/>
+          <p:cNvSpPr/>
+          <p:nvPr/>
+        </p:nvSpPr>
+        <p:spPr>
+          <a:xfrm>
+            <a:off x="4571851" y="2936081"/>
+            <a:ext cx="2605576" cy="198090"/>
           </a:xfrm>
           <a:prstGeom prst="rect">
             <a:avLst/>
@@ -12836,7 +12607,7 @@
                 <a:ea typeface="Arial" pitchFamily="34" charset="-122"/>
                 <a:cs typeface="Arial" pitchFamily="34" charset="-120"/>
               </a:rPr>
-              <a:t>Skills, MCP, plugins, and canvases.</a:t>
+              <a:t>Saved agent tasks that run again.</a:t>
             </a:r>
             <a:endParaRPr lang="en-US" sz="1350" dirty="0"/>
           </a:p>
@@ -12844,13 +12615,13 @@
       </p:sp>
       <p:sp>
         <p:nvSpPr>
-          <p:cNvPr id="26" name="Text 18"/>
-          <p:cNvSpPr/>
-          <p:nvPr/>
-        </p:nvSpPr>
-        <p:spPr>
-          <a:xfrm>
-            <a:off x="4063901" y="3939183"/>
+          <p:cNvPr id="22" name="Text 14"/>
+          <p:cNvSpPr/>
+          <p:nvPr/>
+        </p:nvSpPr>
+        <p:spPr>
+          <a:xfrm>
+            <a:off x="4063901" y="3334792"/>
             <a:ext cx="355550" cy="355550"/>
           </a:xfrm>
           <a:prstGeom prst="roundRect">
@@ -12859,7 +12630,7 @@
             </a:avLst>
           </a:prstGeom>
           <a:solidFill>
-            <a:srgbClr val="F6F8FA"/>
+            <a:srgbClr val="DAFBE1"/>
           </a:solidFill>
           <a:ln/>
         </p:spPr>
@@ -12876,7 +12647,7 @@
       </p:sp>
       <p:pic>
         <p:nvPicPr>
-          <p:cNvPr id="27" name="Image 6" descr="/Users/danwahlin/.copilot/session-state/56a7a0da-def8-48d4-b5e8-0ac3878cb8dd/files/slides-build/icons/GoKebabHorizontal-59636E.png">    </p:cNvPr>
+          <p:cNvPr id="23" name="Image 6" descr="/Users/danwahlin/.copilot/session-state/56a7a0da-def8-48d4-b5e8-0ac3878cb8dd/files/slides-build/icons/GoPlug-1A7F37.png">    </p:cNvPr>
           <p:cNvPicPr>
             <a:picLocks noChangeAspect="1"/>
           </p:cNvPicPr>
@@ -12890,6 +12661,143 @@
         </p:blipFill>
         <p:spPr>
           <a:xfrm>
+            <a:off x="4146352" y="3417243"/>
+            <a:ext cx="190500" cy="190500"/>
+          </a:xfrm>
+          <a:prstGeom prst="rect">
+            <a:avLst/>
+          </a:prstGeom>
+        </p:spPr>
+      </p:pic>
+      <p:sp>
+        <p:nvSpPr>
+          <p:cNvPr id="24" name="Text 15"/>
+          <p:cNvSpPr/>
+          <p:nvPr/>
+        </p:nvSpPr>
+        <p:spPr>
+          <a:xfrm>
+            <a:off x="4571851" y="3286571"/>
+            <a:ext cx="2747665" cy="228600"/>
+          </a:xfrm>
+          <a:prstGeom prst="rect">
+            <a:avLst/>
+          </a:prstGeom>
+          <a:noFill/>
+          <a:ln/>
+        </p:spPr>
+        <p:txBody>
+          <a:bodyPr wrap="square" lIns="0" tIns="0" rIns="0" bIns="0" rtlCol="0" anchor="t"/>
+          <a:lstStyle/>
+          <a:p>
+            <a:pPr algn="l" indent="0" marL="0">
+              <a:buNone/>
+            </a:pPr>
+            <a:r>
+              <a:rPr lang="en-US" sz="1550" b="1" dirty="0">
+                <a:solidFill>
+                  <a:srgbClr val="1F2328"/>
+                </a:solidFill>
+                <a:latin typeface="Arial" pitchFamily="34" charset="0"/>
+                <a:ea typeface="Arial" pitchFamily="34" charset="-122"/>
+                <a:cs typeface="Arial" pitchFamily="34" charset="-120"/>
+              </a:rPr>
+              <a:t>Customize</a:t>
+            </a:r>
+            <a:endParaRPr lang="en-US" sz="1550" dirty="0"/>
+          </a:p>
+        </p:txBody>
+      </p:sp>
+      <p:sp>
+        <p:nvSpPr>
+          <p:cNvPr id="25" name="Text 16"/>
+          <p:cNvSpPr/>
+          <p:nvPr/>
+        </p:nvSpPr>
+        <p:spPr>
+          <a:xfrm>
+            <a:off x="4571851" y="3540472"/>
+            <a:ext cx="2747665" cy="198090"/>
+          </a:xfrm>
+          <a:prstGeom prst="rect">
+            <a:avLst/>
+          </a:prstGeom>
+          <a:noFill/>
+          <a:ln/>
+        </p:spPr>
+        <p:txBody>
+          <a:bodyPr wrap="square" lIns="0" tIns="0" rIns="0" bIns="0" rtlCol="0" anchor="t"/>
+          <a:lstStyle/>
+          <a:p>
+            <a:pPr algn="l" indent="0" marL="0">
+              <a:lnSpc>
+                <a:spcPts val="1560"/>
+              </a:lnSpc>
+              <a:buNone/>
+            </a:pPr>
+            <a:r>
+              <a:rPr lang="en-US" sz="1350" dirty="0">
+                <a:solidFill>
+                  <a:srgbClr val="59636E"/>
+                </a:solidFill>
+                <a:latin typeface="Arial" pitchFamily="34" charset="0"/>
+                <a:ea typeface="Arial" pitchFamily="34" charset="-122"/>
+                <a:cs typeface="Arial" pitchFamily="34" charset="-120"/>
+              </a:rPr>
+              <a:t>Skills, MCP, plugins, and canvases.</a:t>
+            </a:r>
+            <a:endParaRPr lang="en-US" sz="1350" dirty="0"/>
+          </a:p>
+        </p:txBody>
+      </p:sp>
+      <p:sp>
+        <p:nvSpPr>
+          <p:cNvPr id="26" name="Text 17"/>
+          <p:cNvSpPr/>
+          <p:nvPr/>
+        </p:nvSpPr>
+        <p:spPr>
+          <a:xfrm>
+            <a:off x="4063901" y="3939183"/>
+            <a:ext cx="355550" cy="355550"/>
+          </a:xfrm>
+          <a:prstGeom prst="roundRect">
+            <a:avLst>
+              <a:gd name="adj" fmla="val 25004"/>
+            </a:avLst>
+          </a:prstGeom>
+          <a:solidFill>
+            <a:srgbClr val="F6F8FA"/>
+          </a:solidFill>
+          <a:ln/>
+        </p:spPr>
+        <p:txBody>
+          <a:bodyPr wrap="square" rtlCol="0" anchor="ctr"/>
+          <a:lstStyle/>
+          <a:p>
+            <a:pPr indent="0" marL="0">
+              <a:buNone/>
+            </a:pPr>
+            <a:endParaRPr lang="en-US" dirty="0"/>
+          </a:p>
+        </p:txBody>
+      </p:sp>
+      <p:pic>
+        <p:nvPicPr>
+          <p:cNvPr id="27" name="Image 7" descr="/Users/danwahlin/.copilot/session-state/56a7a0da-def8-48d4-b5e8-0ac3878cb8dd/files/slides-build/icons/GoKebabHorizontal-59636E.png">    </p:cNvPr>
+          <p:cNvPicPr>
+            <a:picLocks noChangeAspect="1"/>
+          </p:cNvPicPr>
+          <p:nvPr/>
+        </p:nvPicPr>
+        <p:blipFill>
+          <a:blip r:embed="rId9"/>
+          <a:stretch>
+            <a:fillRect/>
+          </a:stretch>
+        </p:blipFill>
+        <p:spPr>
+          <a:xfrm>
             <a:off x="4146352" y="4021634"/>
             <a:ext cx="190500" cy="190500"/>
           </a:xfrm>
@@ -12900,7 +12808,7 @@
       </p:pic>
       <p:sp>
         <p:nvSpPr>
-          <p:cNvPr id="28" name="Text 19"/>
+          <p:cNvPr id="28" name="Text 18"/>
           <p:cNvSpPr/>
           <p:nvPr/>
         </p:nvSpPr>
@@ -12939,7 +12847,7 @@
       </p:sp>
       <p:sp>
         <p:nvSpPr>
-          <p:cNvPr id="29" name="Text 20"/>
+          <p:cNvPr id="29" name="Text 19"/>
           <p:cNvSpPr/>
           <p:nvPr/>
         </p:nvSpPr>
@@ -13011,112 +12919,9 @@
           <a:chExt cx="0" cy="0"/>
         </a:xfrm>
       </p:grpSpPr>
-      <p:sp>
-        <p:nvSpPr>
-          <p:cNvPr id="2" name="Text 0"/>
-          <p:cNvSpPr/>
-          <p:nvPr/>
-        </p:nvSpPr>
-        <p:spPr>
-          <a:xfrm>
-            <a:off x="0" y="0"/>
-            <a:ext cx="9144000" cy="76200"/>
-          </a:xfrm>
-          <a:prstGeom prst="rect">
-            <a:avLst/>
-          </a:prstGeom>
-          <a:solidFill>
-            <a:srgbClr val="8250DF"/>
-          </a:solidFill>
-          <a:ln/>
-        </p:spPr>
-        <p:txBody>
-          <a:bodyPr wrap="square" rtlCol="0" anchor="ctr"/>
-          <a:lstStyle/>
-          <a:p>
-            <a:pPr indent="0" marL="0">
-              <a:buNone/>
-            </a:pPr>
-            <a:endParaRPr lang="en-US" dirty="0"/>
-          </a:p>
-        </p:txBody>
-      </p:sp>
-      <p:sp>
-        <p:nvSpPr>
-          <p:cNvPr id="3" name="Text 1"/>
-          <p:cNvSpPr/>
-          <p:nvPr/>
-        </p:nvSpPr>
-        <p:spPr>
-          <a:xfrm>
-            <a:off x="7340501" y="177701"/>
-            <a:ext cx="1168301" cy="279350"/>
-          </a:xfrm>
-          <a:prstGeom prst="roundRect">
-            <a:avLst>
-              <a:gd name="adj" fmla="val 22731"/>
-            </a:avLst>
-          </a:prstGeom>
-          <a:solidFill>
-            <a:srgbClr val="1A7F37"/>
-          </a:solidFill>
-          <a:ln/>
-        </p:spPr>
-        <p:txBody>
-          <a:bodyPr wrap="square" rtlCol="0" anchor="ctr"/>
-          <a:lstStyle/>
-          <a:p>
-            <a:pPr indent="0" marL="0">
-              <a:buNone/>
-            </a:pPr>
-            <a:endParaRPr lang="en-US" dirty="0"/>
-          </a:p>
-        </p:txBody>
-      </p:sp>
-      <p:sp>
-        <p:nvSpPr>
-          <p:cNvPr id="4" name="Text 2"/>
-          <p:cNvSpPr/>
-          <p:nvPr/>
-        </p:nvSpPr>
-        <p:spPr>
-          <a:xfrm>
-            <a:off x="7461041" y="231577"/>
-            <a:ext cx="927071" cy="171450"/>
-          </a:xfrm>
-          <a:prstGeom prst="rect">
-            <a:avLst/>
-          </a:prstGeom>
-          <a:noFill/>
-          <a:ln/>
-        </p:spPr>
-        <p:txBody>
-          <a:bodyPr wrap="square" lIns="0" tIns="0" rIns="0" bIns="0" rtlCol="0" anchor="t"/>
-          <a:lstStyle/>
-          <a:p>
-            <a:pPr algn="ctr" indent="0" marL="0">
-              <a:buNone/>
-            </a:pPr>
-            <a:r>
-              <a:rPr lang="en-US" sz="1150" b="1" dirty="0">
-                <a:solidFill>
-                  <a:srgbClr val="FFFFFF"/>
-                </a:solidFill>
-                <a:latin typeface="Arial" pitchFamily="34" charset="0"/>
-                <a:ea typeface="Arial" pitchFamily="34" charset="-122"/>
-                <a:cs typeface="Arial" pitchFamily="34" charset="-120"/>
-              </a:rPr>
-              <a:t>CHAPTER 01</a:t>
-            </a:r>
-            <a:endParaRPr lang="en-US" sz="1150" dirty="0"/>
-          </a:p>
-        </p:txBody>
-      </p:sp>
       <p:pic>
         <p:nvPicPr>
-          <p:cNvPr id="5" name="Image 0" descr="/Users/danwahlin/.copilot/session-state/56a7a0da-def8-48d4-b5e8-0ac3878cb8dd/files/slides-build/icons/FaGithub-1F2328.png">
-            <a:hlinkClick r:id="rId2" tooltip="https://github.com/github/copilot-app-for-beginners/tree/main/01-tour-the-app"/>
-          </p:cNvPr>
+          <p:cNvPr id="2" name="Image 0" descr="/Users/danwahlin/.copilot/session-state/56a7a0da-def8-48d4-b5e8-0ac3878cb8dd/files/slides-build/img/grad-corner.png">    </p:cNvPr>
           <p:cNvPicPr>
             <a:picLocks noChangeAspect="1"/>
           </p:cNvPicPr>
@@ -13130,6 +12935,103 @@
         </p:blipFill>
         <p:spPr>
           <a:xfrm>
+            <a:off x="6349901" y="0"/>
+            <a:ext cx="2793950" cy="1308050"/>
+          </a:xfrm>
+          <a:prstGeom prst="rect">
+            <a:avLst/>
+          </a:prstGeom>
+        </p:spPr>
+      </p:pic>
+      <p:sp>
+        <p:nvSpPr>
+          <p:cNvPr id="3" name="Text 0"/>
+          <p:cNvSpPr/>
+          <p:nvPr/>
+        </p:nvSpPr>
+        <p:spPr>
+          <a:xfrm>
+            <a:off x="7340501" y="177701"/>
+            <a:ext cx="1168301" cy="279350"/>
+          </a:xfrm>
+          <a:prstGeom prst="roundRect">
+            <a:avLst>
+              <a:gd name="adj" fmla="val 22731"/>
+            </a:avLst>
+          </a:prstGeom>
+          <a:solidFill>
+            <a:srgbClr val="1A7F37"/>
+          </a:solidFill>
+          <a:ln/>
+        </p:spPr>
+        <p:txBody>
+          <a:bodyPr wrap="square" rtlCol="0" anchor="ctr"/>
+          <a:lstStyle/>
+          <a:p>
+            <a:pPr indent="0" marL="0">
+              <a:buNone/>
+            </a:pPr>
+            <a:endParaRPr lang="en-US" dirty="0"/>
+          </a:p>
+        </p:txBody>
+      </p:sp>
+      <p:sp>
+        <p:nvSpPr>
+          <p:cNvPr id="4" name="Text 1"/>
+          <p:cNvSpPr/>
+          <p:nvPr/>
+        </p:nvSpPr>
+        <p:spPr>
+          <a:xfrm>
+            <a:off x="7461041" y="231577"/>
+            <a:ext cx="927071" cy="171450"/>
+          </a:xfrm>
+          <a:prstGeom prst="rect">
+            <a:avLst/>
+          </a:prstGeom>
+          <a:noFill/>
+          <a:ln/>
+        </p:spPr>
+        <p:txBody>
+          <a:bodyPr wrap="square" lIns="0" tIns="0" rIns="0" bIns="0" rtlCol="0" anchor="t"/>
+          <a:lstStyle/>
+          <a:p>
+            <a:pPr algn="ctr" indent="0" marL="0">
+              <a:buNone/>
+            </a:pPr>
+            <a:r>
+              <a:rPr lang="en-US" sz="1150" b="1" dirty="0">
+                <a:solidFill>
+                  <a:srgbClr val="FFFFFF"/>
+                </a:solidFill>
+                <a:latin typeface="Arial" pitchFamily="34" charset="0"/>
+                <a:ea typeface="Arial" pitchFamily="34" charset="-122"/>
+                <a:cs typeface="Arial" pitchFamily="34" charset="-120"/>
+              </a:rPr>
+              <a:t>CHAPTER 01</a:t>
+            </a:r>
+            <a:endParaRPr lang="en-US" sz="1150" dirty="0"/>
+          </a:p>
+        </p:txBody>
+      </p:sp>
+      <p:pic>
+        <p:nvPicPr>
+          <p:cNvPr id="5" name="Image 1" descr="/Users/danwahlin/.copilot/session-state/56a7a0da-def8-48d4-b5e8-0ac3878cb8dd/files/slides-build/icons/FaGithub-1F2328.png">
+            <a:hlinkClick r:id="rId3" tooltip="https://github.com/github/copilot-app-for-beginners/tree/main/01-tour-the-app"/>
+          </p:cNvPr>
+          <p:cNvPicPr>
+            <a:picLocks noChangeAspect="1"/>
+          </p:cNvPicPr>
+          <p:nvPr/>
+        </p:nvPicPr>
+        <p:blipFill>
+          <a:blip r:embed="rId2"/>
+          <a:stretch>
+            <a:fillRect/>
+          </a:stretch>
+        </p:blipFill>
+        <p:spPr>
+          <a:xfrm>
             <a:off x="8610600" y="165050"/>
             <a:ext cx="304800" cy="304800"/>
           </a:xfrm>
@@ -13140,7 +13042,7 @@
       </p:pic>
       <p:sp>
         <p:nvSpPr>
-          <p:cNvPr id="6" name="Text 3"/>
+          <p:cNvPr id="6" name="Text 2"/>
           <p:cNvSpPr/>
           <p:nvPr/>
         </p:nvSpPr>
@@ -13179,7 +13081,7 @@
       </p:sp>
       <p:sp>
         <p:nvSpPr>
-          <p:cNvPr id="7" name="Text 4"/>
+          <p:cNvPr id="7" name="Text 3"/>
           <p:cNvSpPr/>
           <p:nvPr/>
         </p:nvSpPr>
@@ -13224,7 +13126,7 @@
       </p:sp>
       <p:sp>
         <p:nvSpPr>
-          <p:cNvPr id="8" name="Text 5"/>
+          <p:cNvPr id="8" name="Text 4"/>
           <p:cNvSpPr/>
           <p:nvPr/>
         </p:nvSpPr>
@@ -13269,7 +13171,7 @@
       </p:sp>
       <p:sp>
         <p:nvSpPr>
-          <p:cNvPr id="9" name="Text 6"/>
+          <p:cNvPr id="9" name="Text 5"/>
           <p:cNvSpPr/>
           <p:nvPr/>
         </p:nvSpPr>
@@ -13312,63 +13214,7 @@
       </p:sp>
       <p:pic>
         <p:nvPicPr>
-          <p:cNvPr id="10" name="Image 1" descr="/Users/danwahlin/.copilot/session-state/56a7a0da-def8-48d4-b5e8-0ac3878cb8dd/files/slides-build/img/01-pulls-crop.png">    </p:cNvPr>
-          <p:cNvPicPr>
-            <a:picLocks noChangeAspect="1"/>
-          </p:cNvPicPr>
-          <p:nvPr/>
-        </p:nvPicPr>
-        <p:blipFill>
-          <a:blip r:embed="rId3"/>
-          <a:stretch>
-            <a:fillRect/>
-          </a:stretch>
-        </p:blipFill>
-        <p:spPr>
-          <a:xfrm>
-            <a:off x="558701" y="1982539"/>
-            <a:ext cx="3860750" cy="1628031"/>
-          </a:xfrm>
-          <a:prstGeom prst="rect">
-            <a:avLst/>
-          </a:prstGeom>
-        </p:spPr>
-      </p:pic>
-      <p:sp>
-        <p:nvSpPr>
-          <p:cNvPr id="11" name="Text 7"/>
-          <p:cNvSpPr/>
-          <p:nvPr/>
-        </p:nvSpPr>
-        <p:spPr>
-          <a:xfrm>
-            <a:off x="507950" y="4038451"/>
-            <a:ext cx="355550" cy="355550"/>
-          </a:xfrm>
-          <a:prstGeom prst="roundRect">
-            <a:avLst>
-              <a:gd name="adj" fmla="val 25004"/>
-            </a:avLst>
-          </a:prstGeom>
-          <a:solidFill>
-            <a:srgbClr val="DDF4FF"/>
-          </a:solidFill>
-          <a:ln/>
-        </p:spPr>
-        <p:txBody>
-          <a:bodyPr wrap="square" rtlCol="0" anchor="ctr"/>
-          <a:lstStyle/>
-          <a:p>
-            <a:pPr indent="0" marL="0">
-              <a:buNone/>
-            </a:pPr>
-            <a:endParaRPr lang="en-US" dirty="0"/>
-          </a:p>
-        </p:txBody>
-      </p:sp>
-      <p:pic>
-        <p:nvPicPr>
-          <p:cNvPr id="12" name="Image 2" descr="/Users/danwahlin/.copilot/session-state/56a7a0da-def8-48d4-b5e8-0ac3878cb8dd/files/slides-build/icons/GoGitPullRequest-0969DA.png">    </p:cNvPr>
+          <p:cNvPr id="10" name="Image 2" descr="/Users/danwahlin/.copilot/session-state/56a7a0da-def8-48d4-b5e8-0ac3878cb8dd/files/slides-build/img/01-pulls-crop.png">    </p:cNvPr>
           <p:cNvPicPr>
             <a:picLocks noChangeAspect="1"/>
           </p:cNvPicPr>
@@ -13382,6 +13228,62 @@
         </p:blipFill>
         <p:spPr>
           <a:xfrm>
+            <a:off x="558701" y="1982539"/>
+            <a:ext cx="3860750" cy="1628031"/>
+          </a:xfrm>
+          <a:prstGeom prst="rect">
+            <a:avLst/>
+          </a:prstGeom>
+        </p:spPr>
+      </p:pic>
+      <p:sp>
+        <p:nvSpPr>
+          <p:cNvPr id="11" name="Text 6"/>
+          <p:cNvSpPr/>
+          <p:nvPr/>
+        </p:nvSpPr>
+        <p:spPr>
+          <a:xfrm>
+            <a:off x="507950" y="4038451"/>
+            <a:ext cx="355550" cy="355550"/>
+          </a:xfrm>
+          <a:prstGeom prst="roundRect">
+            <a:avLst>
+              <a:gd name="adj" fmla="val 25004"/>
+            </a:avLst>
+          </a:prstGeom>
+          <a:solidFill>
+            <a:srgbClr val="DDF4FF"/>
+          </a:solidFill>
+          <a:ln/>
+        </p:spPr>
+        <p:txBody>
+          <a:bodyPr wrap="square" rtlCol="0" anchor="ctr"/>
+          <a:lstStyle/>
+          <a:p>
+            <a:pPr indent="0" marL="0">
+              <a:buNone/>
+            </a:pPr>
+            <a:endParaRPr lang="en-US" dirty="0"/>
+          </a:p>
+        </p:txBody>
+      </p:sp>
+      <p:pic>
+        <p:nvPicPr>
+          <p:cNvPr id="12" name="Image 3" descr="/Users/danwahlin/.copilot/session-state/56a7a0da-def8-48d4-b5e8-0ac3878cb8dd/files/slides-build/icons/GoGitPullRequest-0969DA.png">    </p:cNvPr>
+          <p:cNvPicPr>
+            <a:picLocks noChangeAspect="1"/>
+          </p:cNvPicPr>
+          <p:nvPr/>
+        </p:nvPicPr>
+        <p:blipFill>
+          <a:blip r:embed="rId5"/>
+          <a:stretch>
+            <a:fillRect/>
+          </a:stretch>
+        </p:blipFill>
+        <p:spPr>
+          <a:xfrm>
             <a:off x="590401" y="4120902"/>
             <a:ext cx="190500" cy="190500"/>
           </a:xfrm>
@@ -13392,7 +13294,7 @@
       </p:pic>
       <p:sp>
         <p:nvSpPr>
-          <p:cNvPr id="13" name="Text 8"/>
+          <p:cNvPr id="13" name="Text 7"/>
           <p:cNvSpPr/>
           <p:nvPr/>
         </p:nvSpPr>
@@ -13431,7 +13333,7 @@
       </p:sp>
       <p:sp>
         <p:nvSpPr>
-          <p:cNvPr id="14" name="Text 9"/>
+          <p:cNvPr id="14" name="Text 8"/>
           <p:cNvSpPr/>
           <p:nvPr/>
         </p:nvSpPr>
@@ -13507,7 +13409,7 @@
       </p:sp>
       <p:sp>
         <p:nvSpPr>
-          <p:cNvPr id="15" name="Text 10"/>
+          <p:cNvPr id="15" name="Text 9"/>
           <p:cNvSpPr/>
           <p:nvPr/>
         </p:nvSpPr>
@@ -13550,63 +13452,7 @@
       </p:sp>
       <p:pic>
         <p:nvPicPr>
-          <p:cNvPr id="16" name="Image 3" descr="/Users/danwahlin/.copilot/session-state/56a7a0da-def8-48d4-b5e8-0ac3878cb8dd/files/slides-build/img/01-issues-crop.png">    </p:cNvPr>
-          <p:cNvPicPr>
-            <a:picLocks noChangeAspect="1"/>
-          </p:cNvPicPr>
-          <p:nvPr/>
-        </p:nvPicPr>
-        <p:blipFill>
-          <a:blip r:embed="rId5"/>
-          <a:stretch>
-            <a:fillRect/>
-          </a:stretch>
-        </p:blipFill>
-        <p:spPr>
-          <a:xfrm>
-            <a:off x="4724251" y="1982539"/>
-            <a:ext cx="3860750" cy="1628031"/>
-          </a:xfrm>
-          <a:prstGeom prst="rect">
-            <a:avLst/>
-          </a:prstGeom>
-        </p:spPr>
-      </p:pic>
-      <p:sp>
-        <p:nvSpPr>
-          <p:cNvPr id="17" name="Text 11"/>
-          <p:cNvSpPr/>
-          <p:nvPr/>
-        </p:nvSpPr>
-        <p:spPr>
-          <a:xfrm>
-            <a:off x="4673501" y="4038451"/>
-            <a:ext cx="355550" cy="355550"/>
-          </a:xfrm>
-          <a:prstGeom prst="roundRect">
-            <a:avLst>
-              <a:gd name="adj" fmla="val 25004"/>
-            </a:avLst>
-          </a:prstGeom>
-          <a:solidFill>
-            <a:srgbClr val="FBEFFF"/>
-          </a:solidFill>
-          <a:ln/>
-        </p:spPr>
-        <p:txBody>
-          <a:bodyPr wrap="square" rtlCol="0" anchor="ctr"/>
-          <a:lstStyle/>
-          <a:p>
-            <a:pPr indent="0" marL="0">
-              <a:buNone/>
-            </a:pPr>
-            <a:endParaRPr lang="en-US" dirty="0"/>
-          </a:p>
-        </p:txBody>
-      </p:sp>
-      <p:pic>
-        <p:nvPicPr>
-          <p:cNvPr id="18" name="Image 4" descr="/Users/danwahlin/.copilot/session-state/56a7a0da-def8-48d4-b5e8-0ac3878cb8dd/files/slides-build/icons/GoIssueOpened-8250DF.png">    </p:cNvPr>
+          <p:cNvPr id="16" name="Image 4" descr="/Users/danwahlin/.copilot/session-state/56a7a0da-def8-48d4-b5e8-0ac3878cb8dd/files/slides-build/img/01-issues-crop.png">    </p:cNvPr>
           <p:cNvPicPr>
             <a:picLocks noChangeAspect="1"/>
           </p:cNvPicPr>
@@ -13620,6 +13466,62 @@
         </p:blipFill>
         <p:spPr>
           <a:xfrm>
+            <a:off x="4724251" y="1982539"/>
+            <a:ext cx="3860750" cy="1628031"/>
+          </a:xfrm>
+          <a:prstGeom prst="rect">
+            <a:avLst/>
+          </a:prstGeom>
+        </p:spPr>
+      </p:pic>
+      <p:sp>
+        <p:nvSpPr>
+          <p:cNvPr id="17" name="Text 10"/>
+          <p:cNvSpPr/>
+          <p:nvPr/>
+        </p:nvSpPr>
+        <p:spPr>
+          <a:xfrm>
+            <a:off x="4673501" y="4038451"/>
+            <a:ext cx="355550" cy="355550"/>
+          </a:xfrm>
+          <a:prstGeom prst="roundRect">
+            <a:avLst>
+              <a:gd name="adj" fmla="val 25004"/>
+            </a:avLst>
+          </a:prstGeom>
+          <a:solidFill>
+            <a:srgbClr val="FBEFFF"/>
+          </a:solidFill>
+          <a:ln/>
+        </p:spPr>
+        <p:txBody>
+          <a:bodyPr wrap="square" rtlCol="0" anchor="ctr"/>
+          <a:lstStyle/>
+          <a:p>
+            <a:pPr indent="0" marL="0">
+              <a:buNone/>
+            </a:pPr>
+            <a:endParaRPr lang="en-US" dirty="0"/>
+          </a:p>
+        </p:txBody>
+      </p:sp>
+      <p:pic>
+        <p:nvPicPr>
+          <p:cNvPr id="18" name="Image 5" descr="/Users/danwahlin/.copilot/session-state/56a7a0da-def8-48d4-b5e8-0ac3878cb8dd/files/slides-build/icons/GoIssueOpened-8250DF.png">    </p:cNvPr>
+          <p:cNvPicPr>
+            <a:picLocks noChangeAspect="1"/>
+          </p:cNvPicPr>
+          <p:nvPr/>
+        </p:nvPicPr>
+        <p:blipFill>
+          <a:blip r:embed="rId7"/>
+          <a:stretch>
+            <a:fillRect/>
+          </a:stretch>
+        </p:blipFill>
+        <p:spPr>
+          <a:xfrm>
             <a:off x="4755952" y="4120902"/>
             <a:ext cx="190500" cy="190500"/>
           </a:xfrm>
@@ -13630,7 +13532,7 @@
       </p:pic>
       <p:sp>
         <p:nvSpPr>
-          <p:cNvPr id="19" name="Text 12"/>
+          <p:cNvPr id="19" name="Text 11"/>
           <p:cNvSpPr/>
           <p:nvPr/>
         </p:nvSpPr>
@@ -13669,7 +13571,7 @@
       </p:sp>
       <p:sp>
         <p:nvSpPr>
-          <p:cNvPr id="20" name="Text 13"/>
+          <p:cNvPr id="20" name="Text 12"/>
           <p:cNvSpPr/>
           <p:nvPr/>
         </p:nvSpPr>
@@ -13775,112 +13677,9 @@
           <a:chExt cx="0" cy="0"/>
         </a:xfrm>
       </p:grpSpPr>
-      <p:sp>
-        <p:nvSpPr>
-          <p:cNvPr id="2" name="Text 0"/>
-          <p:cNvSpPr/>
-          <p:nvPr/>
-        </p:nvSpPr>
-        <p:spPr>
-          <a:xfrm>
-            <a:off x="0" y="0"/>
-            <a:ext cx="9144000" cy="76200"/>
-          </a:xfrm>
-          <a:prstGeom prst="rect">
-            <a:avLst/>
-          </a:prstGeom>
-          <a:solidFill>
-            <a:srgbClr val="8250DF"/>
-          </a:solidFill>
-          <a:ln/>
-        </p:spPr>
-        <p:txBody>
-          <a:bodyPr wrap="square" rtlCol="0" anchor="ctr"/>
-          <a:lstStyle/>
-          <a:p>
-            <a:pPr indent="0" marL="0">
-              <a:buNone/>
-            </a:pPr>
-            <a:endParaRPr lang="en-US" dirty="0"/>
-          </a:p>
-        </p:txBody>
-      </p:sp>
-      <p:sp>
-        <p:nvSpPr>
-          <p:cNvPr id="3" name="Text 1"/>
-          <p:cNvSpPr/>
-          <p:nvPr/>
-        </p:nvSpPr>
-        <p:spPr>
-          <a:xfrm>
-            <a:off x="7340501" y="177701"/>
-            <a:ext cx="1168301" cy="279350"/>
-          </a:xfrm>
-          <a:prstGeom prst="roundRect">
-            <a:avLst>
-              <a:gd name="adj" fmla="val 22731"/>
-            </a:avLst>
-          </a:prstGeom>
-          <a:solidFill>
-            <a:srgbClr val="1A7F37"/>
-          </a:solidFill>
-          <a:ln/>
-        </p:spPr>
-        <p:txBody>
-          <a:bodyPr wrap="square" rtlCol="0" anchor="ctr"/>
-          <a:lstStyle/>
-          <a:p>
-            <a:pPr indent="0" marL="0">
-              <a:buNone/>
-            </a:pPr>
-            <a:endParaRPr lang="en-US" dirty="0"/>
-          </a:p>
-        </p:txBody>
-      </p:sp>
-      <p:sp>
-        <p:nvSpPr>
-          <p:cNvPr id="4" name="Text 2"/>
-          <p:cNvSpPr/>
-          <p:nvPr/>
-        </p:nvSpPr>
-        <p:spPr>
-          <a:xfrm>
-            <a:off x="7461041" y="231577"/>
-            <a:ext cx="927071" cy="171450"/>
-          </a:xfrm>
-          <a:prstGeom prst="rect">
-            <a:avLst/>
-          </a:prstGeom>
-          <a:noFill/>
-          <a:ln/>
-        </p:spPr>
-        <p:txBody>
-          <a:bodyPr wrap="square" lIns="0" tIns="0" rIns="0" bIns="0" rtlCol="0" anchor="t"/>
-          <a:lstStyle/>
-          <a:p>
-            <a:pPr algn="ctr" indent="0" marL="0">
-              <a:buNone/>
-            </a:pPr>
-            <a:r>
-              <a:rPr lang="en-US" sz="1150" b="1" dirty="0">
-                <a:solidFill>
-                  <a:srgbClr val="FFFFFF"/>
-                </a:solidFill>
-                <a:latin typeface="Arial" pitchFamily="34" charset="0"/>
-                <a:ea typeface="Arial" pitchFamily="34" charset="-122"/>
-                <a:cs typeface="Arial" pitchFamily="34" charset="-120"/>
-              </a:rPr>
-              <a:t>CHAPTER 01</a:t>
-            </a:r>
-            <a:endParaRPr lang="en-US" sz="1150" dirty="0"/>
-          </a:p>
-        </p:txBody>
-      </p:sp>
       <p:pic>
         <p:nvPicPr>
-          <p:cNvPr id="5" name="Image 0" descr="/Users/danwahlin/.copilot/session-state/56a7a0da-def8-48d4-b5e8-0ac3878cb8dd/files/slides-build/icons/FaGithub-1F2328.png">
-            <a:hlinkClick r:id="rId2" tooltip="https://github.com/github/copilot-app-for-beginners/tree/main/01-tour-the-app"/>
-          </p:cNvPr>
+          <p:cNvPr id="2" name="Image 0" descr="/Users/danwahlin/.copilot/session-state/56a7a0da-def8-48d4-b5e8-0ac3878cb8dd/files/slides-build/img/grad-corner.png">    </p:cNvPr>
           <p:cNvPicPr>
             <a:picLocks noChangeAspect="1"/>
           </p:cNvPicPr>
@@ -13894,6 +13693,103 @@
         </p:blipFill>
         <p:spPr>
           <a:xfrm>
+            <a:off x="6349901" y="0"/>
+            <a:ext cx="2793950" cy="1308050"/>
+          </a:xfrm>
+          <a:prstGeom prst="rect">
+            <a:avLst/>
+          </a:prstGeom>
+        </p:spPr>
+      </p:pic>
+      <p:sp>
+        <p:nvSpPr>
+          <p:cNvPr id="3" name="Text 0"/>
+          <p:cNvSpPr/>
+          <p:nvPr/>
+        </p:nvSpPr>
+        <p:spPr>
+          <a:xfrm>
+            <a:off x="7340501" y="177701"/>
+            <a:ext cx="1168301" cy="279350"/>
+          </a:xfrm>
+          <a:prstGeom prst="roundRect">
+            <a:avLst>
+              <a:gd name="adj" fmla="val 22731"/>
+            </a:avLst>
+          </a:prstGeom>
+          <a:solidFill>
+            <a:srgbClr val="1A7F37"/>
+          </a:solidFill>
+          <a:ln/>
+        </p:spPr>
+        <p:txBody>
+          <a:bodyPr wrap="square" rtlCol="0" anchor="ctr"/>
+          <a:lstStyle/>
+          <a:p>
+            <a:pPr indent="0" marL="0">
+              <a:buNone/>
+            </a:pPr>
+            <a:endParaRPr lang="en-US" dirty="0"/>
+          </a:p>
+        </p:txBody>
+      </p:sp>
+      <p:sp>
+        <p:nvSpPr>
+          <p:cNvPr id="4" name="Text 1"/>
+          <p:cNvSpPr/>
+          <p:nvPr/>
+        </p:nvSpPr>
+        <p:spPr>
+          <a:xfrm>
+            <a:off x="7461041" y="231577"/>
+            <a:ext cx="927071" cy="171450"/>
+          </a:xfrm>
+          <a:prstGeom prst="rect">
+            <a:avLst/>
+          </a:prstGeom>
+          <a:noFill/>
+          <a:ln/>
+        </p:spPr>
+        <p:txBody>
+          <a:bodyPr wrap="square" lIns="0" tIns="0" rIns="0" bIns="0" rtlCol="0" anchor="t"/>
+          <a:lstStyle/>
+          <a:p>
+            <a:pPr algn="ctr" indent="0" marL="0">
+              <a:buNone/>
+            </a:pPr>
+            <a:r>
+              <a:rPr lang="en-US" sz="1150" b="1" dirty="0">
+                <a:solidFill>
+                  <a:srgbClr val="FFFFFF"/>
+                </a:solidFill>
+                <a:latin typeface="Arial" pitchFamily="34" charset="0"/>
+                <a:ea typeface="Arial" pitchFamily="34" charset="-122"/>
+                <a:cs typeface="Arial" pitchFamily="34" charset="-120"/>
+              </a:rPr>
+              <a:t>CHAPTER 01</a:t>
+            </a:r>
+            <a:endParaRPr lang="en-US" sz="1150" dirty="0"/>
+          </a:p>
+        </p:txBody>
+      </p:sp>
+      <p:pic>
+        <p:nvPicPr>
+          <p:cNvPr id="5" name="Image 1" descr="/Users/danwahlin/.copilot/session-state/56a7a0da-def8-48d4-b5e8-0ac3878cb8dd/files/slides-build/icons/FaGithub-1F2328.png">
+            <a:hlinkClick r:id="rId3" tooltip="https://github.com/github/copilot-app-for-beginners/tree/main/01-tour-the-app"/>
+          </p:cNvPr>
+          <p:cNvPicPr>
+            <a:picLocks noChangeAspect="1"/>
+          </p:cNvPicPr>
+          <p:nvPr/>
+        </p:nvPicPr>
+        <p:blipFill>
+          <a:blip r:embed="rId2"/>
+          <a:stretch>
+            <a:fillRect/>
+          </a:stretch>
+        </p:blipFill>
+        <p:spPr>
+          <a:xfrm>
             <a:off x="8610600" y="165050"/>
             <a:ext cx="304800" cy="304800"/>
           </a:xfrm>
@@ -13904,7 +13800,7 @@
       </p:pic>
       <p:sp>
         <p:nvSpPr>
-          <p:cNvPr id="6" name="Text 3"/>
+          <p:cNvPr id="6" name="Text 2"/>
           <p:cNvSpPr/>
           <p:nvPr/>
         </p:nvSpPr>
@@ -13943,7 +13839,7 @@
       </p:sp>
       <p:sp>
         <p:nvSpPr>
-          <p:cNvPr id="7" name="Text 4"/>
+          <p:cNvPr id="7" name="Text 3"/>
           <p:cNvSpPr/>
           <p:nvPr/>
         </p:nvSpPr>
@@ -13988,7 +13884,7 @@
       </p:sp>
       <p:sp>
         <p:nvSpPr>
-          <p:cNvPr id="8" name="Text 5"/>
+          <p:cNvPr id="8" name="Text 4"/>
           <p:cNvSpPr/>
           <p:nvPr/>
         </p:nvSpPr>
@@ -14031,14 +13927,14 @@
       </p:sp>
       <p:pic>
         <p:nvPicPr>
-          <p:cNvPr id="9" name="Image 1" descr="/Users/danwahlin/.copilot/session-state/56a7a0da-def8-48d4-b5e8-0ac3878cb8dd/files/slides-build/img/01-automations-crop.png">    </p:cNvPr>
+          <p:cNvPr id="9" name="Image 2" descr="/Users/danwahlin/.copilot/session-state/56a7a0da-def8-48d4-b5e8-0ac3878cb8dd/files/slides-build/img/01-automations-crop.png">    </p:cNvPr>
           <p:cNvPicPr>
             <a:picLocks noChangeAspect="1"/>
           </p:cNvPicPr>
           <p:nvPr/>
         </p:nvPicPr>
         <p:blipFill>
-          <a:blip r:embed="rId3"/>
+          <a:blip r:embed="rId4"/>
           <a:stretch>
             <a:fillRect/>
           </a:stretch>
@@ -14055,7 +13951,7 @@
       </p:pic>
       <p:sp>
         <p:nvSpPr>
-          <p:cNvPr id="10" name="Text 6"/>
+          <p:cNvPr id="10" name="Text 5"/>
           <p:cNvSpPr/>
           <p:nvPr/>
         </p:nvSpPr>
@@ -14091,7 +13987,7 @@
       </p:sp>
       <p:sp>
         <p:nvSpPr>
-          <p:cNvPr id="11" name="Text 7"/>
+          <p:cNvPr id="11" name="Text 6"/>
           <p:cNvSpPr/>
           <p:nvPr/>
         </p:nvSpPr>
@@ -14123,14 +14019,14 @@
       </p:sp>
       <p:pic>
         <p:nvPicPr>
-          <p:cNvPr id="12" name="Image 2" descr="/Users/danwahlin/.copilot/session-state/56a7a0da-def8-48d4-b5e8-0ac3878cb8dd/files/slides-build/icons/GoClock-BC4C00.png">    </p:cNvPr>
+          <p:cNvPr id="12" name="Image 3" descr="/Users/danwahlin/.copilot/session-state/56a7a0da-def8-48d4-b5e8-0ac3878cb8dd/files/slides-build/icons/GoClock-BC4C00.png">    </p:cNvPr>
           <p:cNvPicPr>
             <a:picLocks noChangeAspect="1"/>
           </p:cNvPicPr>
           <p:nvPr/>
         </p:nvPicPr>
         <p:blipFill>
-          <a:blip r:embed="rId4"/>
+          <a:blip r:embed="rId5"/>
           <a:stretch>
             <a:fillRect/>
           </a:stretch>
@@ -14147,7 +14043,7 @@
       </p:pic>
       <p:sp>
         <p:nvSpPr>
-          <p:cNvPr id="13" name="Text 8"/>
+          <p:cNvPr id="13" name="Text 7"/>
           <p:cNvSpPr/>
           <p:nvPr/>
         </p:nvSpPr>
@@ -14186,7 +14082,7 @@
       </p:sp>
       <p:sp>
         <p:nvSpPr>
-          <p:cNvPr id="14" name="Text 9"/>
+          <p:cNvPr id="14" name="Text 8"/>
           <p:cNvSpPr/>
           <p:nvPr/>
         </p:nvSpPr>
@@ -14228,7 +14124,7 @@
       </p:sp>
       <p:sp>
         <p:nvSpPr>
-          <p:cNvPr id="15" name="Text 10"/>
+          <p:cNvPr id="15" name="Text 9"/>
           <p:cNvSpPr/>
           <p:nvPr/>
         </p:nvSpPr>
@@ -14264,7 +14160,7 @@
       </p:sp>
       <p:sp>
         <p:nvSpPr>
-          <p:cNvPr id="16" name="Text 11"/>
+          <p:cNvPr id="16" name="Text 10"/>
           <p:cNvSpPr/>
           <p:nvPr/>
         </p:nvSpPr>
@@ -14296,14 +14192,14 @@
       </p:sp>
       <p:pic>
         <p:nvPicPr>
-          <p:cNvPr id="17" name="Image 3" descr="/Users/danwahlin/.copilot/session-state/56a7a0da-def8-48d4-b5e8-0ac3878cb8dd/files/slides-build/icons/GoGear-1A7F37.png">    </p:cNvPr>
+          <p:cNvPr id="17" name="Image 4" descr="/Users/danwahlin/.copilot/session-state/56a7a0da-def8-48d4-b5e8-0ac3878cb8dd/files/slides-build/icons/GoGear-1A7F37.png">    </p:cNvPr>
           <p:cNvPicPr>
             <a:picLocks noChangeAspect="1"/>
           </p:cNvPicPr>
           <p:nvPr/>
         </p:nvPicPr>
         <p:blipFill>
-          <a:blip r:embed="rId5"/>
+          <a:blip r:embed="rId6"/>
           <a:stretch>
             <a:fillRect/>
           </a:stretch>
@@ -14320,7 +14216,7 @@
       </p:pic>
       <p:sp>
         <p:nvSpPr>
-          <p:cNvPr id="18" name="Text 12"/>
+          <p:cNvPr id="18" name="Text 11"/>
           <p:cNvSpPr/>
           <p:nvPr/>
         </p:nvSpPr>
@@ -14359,7 +14255,7 @@
       </p:sp>
       <p:sp>
         <p:nvSpPr>
-          <p:cNvPr id="19" name="Text 13"/>
+          <p:cNvPr id="19" name="Text 12"/>
           <p:cNvSpPr/>
           <p:nvPr/>
         </p:nvSpPr>

--- a/slides/01-tour-the-app.pptx
+++ b/slides/01-tour-the-app.pptx
@@ -13177,12 +13177,12 @@
         </p:nvSpPr>
         <p:spPr>
           <a:xfrm>
-            <a:off x="511076" y="1934914"/>
-            <a:ext cx="3956000" cy="1723281"/>
+            <a:off x="511076" y="1975396"/>
+            <a:ext cx="3956000" cy="1642021"/>
           </a:xfrm>
           <a:prstGeom prst="roundRect">
             <a:avLst>
-              <a:gd name="adj" fmla="val 4422"/>
+              <a:gd name="adj" fmla="val 4641"/>
             </a:avLst>
           </a:prstGeom>
           <a:solidFill>
@@ -13228,8 +13228,8 @@
         </p:blipFill>
         <p:spPr>
           <a:xfrm>
-            <a:off x="558701" y="1982539"/>
-            <a:ext cx="3860750" cy="1628031"/>
+            <a:off x="558701" y="2023021"/>
+            <a:ext cx="3860750" cy="1546771"/>
           </a:xfrm>
           <a:prstGeom prst="rect">
             <a:avLst/>
@@ -13244,7 +13244,7 @@
         </p:nvSpPr>
         <p:spPr>
           <a:xfrm>
-            <a:off x="507950" y="4038451"/>
+            <a:off x="507950" y="4165402"/>
             <a:ext cx="355550" cy="355550"/>
           </a:xfrm>
           <a:prstGeom prst="roundRect">
@@ -13284,7 +13284,7 @@
         </p:blipFill>
         <p:spPr>
           <a:xfrm>
-            <a:off x="590401" y="4120902"/>
+            <a:off x="590401" y="4247852"/>
             <a:ext cx="190500" cy="190500"/>
           </a:xfrm>
           <a:prstGeom prst="rect">
@@ -13300,7 +13300,7 @@
         </p:nvSpPr>
         <p:spPr>
           <a:xfrm>
-            <a:off x="1015901" y="3990231"/>
+            <a:off x="1015901" y="4117181"/>
             <a:ext cx="2487775" cy="228600"/>
           </a:xfrm>
           <a:prstGeom prst="rect">
@@ -13339,7 +13339,7 @@
         </p:nvSpPr>
         <p:spPr>
           <a:xfrm>
-            <a:off x="1015901" y="4244132"/>
+            <a:off x="1015901" y="4371082"/>
             <a:ext cx="2487775" cy="198090"/>
           </a:xfrm>
           <a:prstGeom prst="rect">
@@ -13415,12 +13415,12 @@
         </p:nvSpPr>
         <p:spPr>
           <a:xfrm>
-            <a:off x="4676626" y="1934914"/>
-            <a:ext cx="3956000" cy="1723281"/>
+            <a:off x="4676626" y="2125861"/>
+            <a:ext cx="3956000" cy="1341090"/>
           </a:xfrm>
           <a:prstGeom prst="roundRect">
             <a:avLst>
-              <a:gd name="adj" fmla="val 4422"/>
+              <a:gd name="adj" fmla="val 5682"/>
             </a:avLst>
           </a:prstGeom>
           <a:solidFill>
@@ -13466,8 +13466,8 @@
         </p:blipFill>
         <p:spPr>
           <a:xfrm>
-            <a:off x="4724251" y="1982539"/>
-            <a:ext cx="3860750" cy="1628031"/>
+            <a:off x="4724251" y="2173486"/>
+            <a:ext cx="3860750" cy="1245840"/>
           </a:xfrm>
           <a:prstGeom prst="rect">
             <a:avLst/>
@@ -13482,7 +13482,7 @@
         </p:nvSpPr>
         <p:spPr>
           <a:xfrm>
-            <a:off x="4673501" y="4038451"/>
+            <a:off x="4673501" y="4165402"/>
             <a:ext cx="355550" cy="355550"/>
           </a:xfrm>
           <a:prstGeom prst="roundRect">
@@ -13522,7 +13522,7 @@
         </p:blipFill>
         <p:spPr>
           <a:xfrm>
-            <a:off x="4755952" y="4120902"/>
+            <a:off x="4755952" y="4247852"/>
             <a:ext cx="190500" cy="190500"/>
           </a:xfrm>
           <a:prstGeom prst="rect">
@@ -13538,7 +13538,7 @@
         </p:nvSpPr>
         <p:spPr>
           <a:xfrm>
-            <a:off x="5181451" y="3990231"/>
+            <a:off x="5181451" y="4117181"/>
             <a:ext cx="2624096" cy="228600"/>
           </a:xfrm>
           <a:prstGeom prst="rect">
@@ -13577,7 +13577,7 @@
         </p:nvSpPr>
         <p:spPr>
           <a:xfrm>
-            <a:off x="5181451" y="4244132"/>
+            <a:off x="5181451" y="4371082"/>
             <a:ext cx="2624096" cy="198090"/>
           </a:xfrm>
           <a:prstGeom prst="rect">
@@ -13890,12 +13890,12 @@
         </p:nvSpPr>
         <p:spPr>
           <a:xfrm>
-            <a:off x="536525" y="1535311"/>
-            <a:ext cx="8070800" cy="1670000"/>
+            <a:off x="511076" y="1659880"/>
+            <a:ext cx="7105650" cy="1421011"/>
           </a:xfrm>
           <a:prstGeom prst="roundRect">
             <a:avLst>
-              <a:gd name="adj" fmla="val 4563"/>
+              <a:gd name="adj" fmla="val 5362"/>
             </a:avLst>
           </a:prstGeom>
           <a:solidFill>
@@ -13941,8 +13941,8 @@
         </p:blipFill>
         <p:spPr>
           <a:xfrm>
-            <a:off x="584150" y="1582936"/>
-            <a:ext cx="7975550" cy="1574750"/>
+            <a:off x="558701" y="1707505"/>
+            <a:ext cx="7010400" cy="1325761"/>
           </a:xfrm>
           <a:prstGeom prst="rect">
             <a:avLst/>
@@ -13957,7 +13957,7 @@
         </p:nvSpPr>
         <p:spPr>
           <a:xfrm>
-            <a:off x="507950" y="3437186"/>
+            <a:off x="507950" y="3551486"/>
             <a:ext cx="4514701" cy="923032"/>
           </a:xfrm>
           <a:prstGeom prst="roundRect">
@@ -13993,7 +13993,7 @@
         </p:nvSpPr>
         <p:spPr>
           <a:xfrm>
-            <a:off x="669875" y="3708202"/>
+            <a:off x="669875" y="3822502"/>
             <a:ext cx="381000" cy="381000"/>
           </a:xfrm>
           <a:prstGeom prst="roundRect">
@@ -14033,7 +14033,7 @@
         </p:blipFill>
         <p:spPr>
           <a:xfrm>
-            <a:off x="752475" y="3790801"/>
+            <a:off x="752475" y="3905101"/>
             <a:ext cx="215801" cy="215801"/>
           </a:xfrm>
           <a:prstGeom prst="rect">
@@ -14049,7 +14049,7 @@
         </p:nvSpPr>
         <p:spPr>
           <a:xfrm>
-            <a:off x="1203275" y="3573661"/>
+            <a:off x="1203275" y="3687961"/>
             <a:ext cx="3730600" cy="228600"/>
           </a:xfrm>
           <a:prstGeom prst="rect">
@@ -14088,7 +14088,7 @@
         </p:nvSpPr>
         <p:spPr>
           <a:xfrm>
-            <a:off x="1203275" y="3827562"/>
+            <a:off x="1203275" y="3941862"/>
             <a:ext cx="3730600" cy="396180"/>
           </a:xfrm>
           <a:prstGeom prst="rect">
@@ -14130,7 +14130,7 @@
         </p:nvSpPr>
         <p:spPr>
           <a:xfrm>
-            <a:off x="5200352" y="3437186"/>
+            <a:off x="5200352" y="3551486"/>
             <a:ext cx="3435548" cy="923032"/>
           </a:xfrm>
           <a:prstGeom prst="roundRect">
@@ -14166,7 +14166,7 @@
         </p:nvSpPr>
         <p:spPr>
           <a:xfrm>
-            <a:off x="5362277" y="3708202"/>
+            <a:off x="5362277" y="3822502"/>
             <a:ext cx="381000" cy="381000"/>
           </a:xfrm>
           <a:prstGeom prst="roundRect">
@@ -14206,7 +14206,7 @@
         </p:blipFill>
         <p:spPr>
           <a:xfrm>
-            <a:off x="5444877" y="3790801"/>
+            <a:off x="5444877" y="3905101"/>
             <a:ext cx="215801" cy="215801"/>
           </a:xfrm>
           <a:prstGeom prst="rect">
@@ -14222,7 +14222,7 @@
         </p:nvSpPr>
         <p:spPr>
           <a:xfrm>
-            <a:off x="5895677" y="3573661"/>
+            <a:off x="5895677" y="3687961"/>
             <a:ext cx="2629864" cy="228600"/>
           </a:xfrm>
           <a:prstGeom prst="rect">
@@ -14261,7 +14261,7 @@
         </p:nvSpPr>
         <p:spPr>
           <a:xfrm>
-            <a:off x="5895677" y="3827562"/>
+            <a:off x="5895677" y="3941862"/>
             <a:ext cx="2629864" cy="396180"/>
           </a:xfrm>
           <a:prstGeom prst="rect">

--- a/slides/01-tour-the-app.pptx
+++ b/slides/01-tour-the-app.pptx
@@ -2123,7 +2123,7 @@
       </p:grpSpPr>
       <p:pic>
         <p:nvPicPr>
-          <p:cNvPr id="2" name="Image 0" descr="/Users/danwahlin/.copilot/session-state/56a7a0da-def8-48d4-b5e8-0ac3878cb8dd/files/slides-build/img/grad-title.jpg">    </p:cNvPr>
+          <p:cNvPr id="2" name="Image 0" descr="/Users/danwahlin/.copilot/session-state/56a7a0da-def8-48d4-b5e8-0ac3878cb8dd/files/slides-build/img/grad-title-pattern.jpg">    </p:cNvPr>
           <p:cNvPicPr>
             <a:picLocks noChangeAspect="1"/>
           </p:cNvPicPr>
@@ -2535,7 +2535,7 @@
       </p:sp>
       <p:pic>
         <p:nvPicPr>
-          <p:cNvPr id="5" name="Image 0" descr="/Users/danwahlin/.copilot/session-state/56a7a0da-def8-48d4-b5e8-0ac3878cb8dd/files/slides-build/img/grad-corner.png">    </p:cNvPr>
+          <p:cNvPr id="5" name="Image 0" descr="/Users/danwahlin/.copilot/session-state/56a7a0da-def8-48d4-b5e8-0ac3878cb8dd/files/slides-build/img/grad-corner-pattern.png">    </p:cNvPr>
           <p:cNvPicPr>
             <a:picLocks noChangeAspect="1"/>
           </p:cNvPicPr>
@@ -2846,7 +2846,7 @@
       </p:grpSpPr>
       <p:pic>
         <p:nvPicPr>
-          <p:cNvPr id="2" name="Image 0" descr="/Users/danwahlin/.copilot/session-state/56a7a0da-def8-48d4-b5e8-0ac3878cb8dd/files/slides-build/img/grad-corner.png">    </p:cNvPr>
+          <p:cNvPr id="2" name="Image 0" descr="/Users/danwahlin/.copilot/session-state/56a7a0da-def8-48d4-b5e8-0ac3878cb8dd/files/slides-build/img/grad-corner-pattern.png">    </p:cNvPr>
           <p:cNvPicPr>
             <a:picLocks noChangeAspect="1"/>
           </p:cNvPicPr>
@@ -3743,7 +3743,7 @@
       </p:grpSpPr>
       <p:pic>
         <p:nvPicPr>
-          <p:cNvPr id="2" name="Image 0" descr="/Users/danwahlin/.copilot/session-state/56a7a0da-def8-48d4-b5e8-0ac3878cb8dd/files/slides-build/img/grad-corner.png">    </p:cNvPr>
+          <p:cNvPr id="2" name="Image 0" descr="/Users/danwahlin/.copilot/session-state/56a7a0da-def8-48d4-b5e8-0ac3878cb8dd/files/slides-build/img/grad-corner-pattern.png">    </p:cNvPr>
           <p:cNvPicPr>
             <a:picLocks noChangeAspect="1"/>
           </p:cNvPicPr>
@@ -5269,7 +5269,7 @@
       </p:grpSpPr>
       <p:pic>
         <p:nvPicPr>
-          <p:cNvPr id="2" name="Image 0" descr="/Users/danwahlin/.copilot/session-state/56a7a0da-def8-48d4-b5e8-0ac3878cb8dd/files/slides-build/img/grad-corner.png">    </p:cNvPr>
+          <p:cNvPr id="2" name="Image 0" descr="/Users/danwahlin/.copilot/session-state/56a7a0da-def8-48d4-b5e8-0ac3878cb8dd/files/slides-build/img/grad-corner-pattern.png">    </p:cNvPr>
           <p:cNvPicPr>
             <a:picLocks noChangeAspect="1"/>
           </p:cNvPicPr>
@@ -6146,7 +6146,7 @@
       </p:grpSpPr>
       <p:pic>
         <p:nvPicPr>
-          <p:cNvPr id="2" name="Image 0" descr="/Users/danwahlin/.copilot/session-state/56a7a0da-def8-48d4-b5e8-0ac3878cb8dd/files/slides-build/img/grad-corner.png">    </p:cNvPr>
+          <p:cNvPr id="2" name="Image 0" descr="/Users/danwahlin/.copilot/session-state/56a7a0da-def8-48d4-b5e8-0ac3878cb8dd/files/slides-build/img/grad-corner-pattern.png">    </p:cNvPr>
           <p:cNvPicPr>
             <a:picLocks noChangeAspect="1"/>
           </p:cNvPicPr>
@@ -7252,7 +7252,7 @@
       </p:grpSpPr>
       <p:pic>
         <p:nvPicPr>
-          <p:cNvPr id="2" name="Image 0" descr="/Users/danwahlin/.copilot/session-state/56a7a0da-def8-48d4-b5e8-0ac3878cb8dd/files/slides-build/img/grad-corner.png">    </p:cNvPr>
+          <p:cNvPr id="2" name="Image 0" descr="/Users/danwahlin/.copilot/session-state/56a7a0da-def8-48d4-b5e8-0ac3878cb8dd/files/slides-build/img/grad-corner-pattern.png">    </p:cNvPr>
           <p:cNvPicPr>
             <a:picLocks noChangeAspect="1"/>
           </p:cNvPicPr>
@@ -8347,7 +8347,7 @@
       </p:grpSpPr>
       <p:pic>
         <p:nvPicPr>
-          <p:cNvPr id="2" name="Image 0" descr="/Users/danwahlin/.copilot/session-state/56a7a0da-def8-48d4-b5e8-0ac3878cb8dd/files/slides-build/img/grad-corner.png">    </p:cNvPr>
+          <p:cNvPr id="2" name="Image 0" descr="/Users/danwahlin/.copilot/session-state/56a7a0da-def8-48d4-b5e8-0ac3878cb8dd/files/slides-build/img/grad-corner-pattern.png">    </p:cNvPr>
           <p:cNvPicPr>
             <a:picLocks noChangeAspect="1"/>
           </p:cNvPicPr>
@@ -9418,7 +9418,7 @@
       </p:sp>
       <p:pic>
         <p:nvPicPr>
-          <p:cNvPr id="5" name="Image 0" descr="/Users/danwahlin/.copilot/session-state/56a7a0da-def8-48d4-b5e8-0ac3878cb8dd/files/slides-build/img/grad-corner.png">    </p:cNvPr>
+          <p:cNvPr id="5" name="Image 0" descr="/Users/danwahlin/.copilot/session-state/56a7a0da-def8-48d4-b5e8-0ac3878cb8dd/files/slides-build/img/grad-corner-pattern.png">    </p:cNvPr>
           <p:cNvPicPr>
             <a:picLocks noChangeAspect="1"/>
           </p:cNvPicPr>
@@ -9729,7 +9729,7 @@
       </p:grpSpPr>
       <p:pic>
         <p:nvPicPr>
-          <p:cNvPr id="2" name="Image 0" descr="/Users/danwahlin/.copilot/session-state/56a7a0da-def8-48d4-b5e8-0ac3878cb8dd/files/slides-build/img/grad-corner.png">    </p:cNvPr>
+          <p:cNvPr id="2" name="Image 0" descr="/Users/danwahlin/.copilot/session-state/56a7a0da-def8-48d4-b5e8-0ac3878cb8dd/files/slides-build/img/grad-corner-pattern.png">    </p:cNvPr>
           <p:cNvPicPr>
             <a:picLocks noChangeAspect="1"/>
           </p:cNvPicPr>
@@ -10696,7 +10696,7 @@
       </p:grpSpPr>
       <p:pic>
         <p:nvPicPr>
-          <p:cNvPr id="2" name="Image 0" descr="/Users/danwahlin/.copilot/session-state/56a7a0da-def8-48d4-b5e8-0ac3878cb8dd/files/slides-build/img/grad-corner.png">    </p:cNvPr>
+          <p:cNvPr id="2" name="Image 0" descr="/Users/danwahlin/.copilot/session-state/56a7a0da-def8-48d4-b5e8-0ac3878cb8dd/files/slides-build/img/grad-corner-pattern.png">    </p:cNvPr>
           <p:cNvPicPr>
             <a:picLocks noChangeAspect="1"/>
           </p:cNvPicPr>
@@ -11621,7 +11621,7 @@
       </p:sp>
       <p:pic>
         <p:nvPicPr>
-          <p:cNvPr id="5" name="Image 0" descr="/Users/danwahlin/.copilot/session-state/56a7a0da-def8-48d4-b5e8-0ac3878cb8dd/files/slides-build/img/grad-corner.png">    </p:cNvPr>
+          <p:cNvPr id="5" name="Image 0" descr="/Users/danwahlin/.copilot/session-state/56a7a0da-def8-48d4-b5e8-0ac3878cb8dd/files/slides-build/img/grad-corner-pattern.png">    </p:cNvPr>
           <p:cNvPicPr>
             <a:picLocks noChangeAspect="1"/>
           </p:cNvPicPr>
@@ -11932,7 +11932,7 @@
       </p:grpSpPr>
       <p:pic>
         <p:nvPicPr>
-          <p:cNvPr id="2" name="Image 0" descr="/Users/danwahlin/.copilot/session-state/56a7a0da-def8-48d4-b5e8-0ac3878cb8dd/files/slides-build/img/grad-corner.png">    </p:cNvPr>
+          <p:cNvPr id="2" name="Image 0" descr="/Users/danwahlin/.copilot/session-state/56a7a0da-def8-48d4-b5e8-0ac3878cb8dd/files/slides-build/img/grad-corner-pattern.png">    </p:cNvPr>
           <p:cNvPicPr>
             <a:picLocks noChangeAspect="1"/>
           </p:cNvPicPr>
@@ -12921,7 +12921,7 @@
       </p:grpSpPr>
       <p:pic>
         <p:nvPicPr>
-          <p:cNvPr id="2" name="Image 0" descr="/Users/danwahlin/.copilot/session-state/56a7a0da-def8-48d4-b5e8-0ac3878cb8dd/files/slides-build/img/grad-corner.png">    </p:cNvPr>
+          <p:cNvPr id="2" name="Image 0" descr="/Users/danwahlin/.copilot/session-state/56a7a0da-def8-48d4-b5e8-0ac3878cb8dd/files/slides-build/img/grad-corner-pattern.png">    </p:cNvPr>
           <p:cNvPicPr>
             <a:picLocks noChangeAspect="1"/>
           </p:cNvPicPr>
@@ -13679,7 +13679,7 @@
       </p:grpSpPr>
       <p:pic>
         <p:nvPicPr>
-          <p:cNvPr id="2" name="Image 0" descr="/Users/danwahlin/.copilot/session-state/56a7a0da-def8-48d4-b5e8-0ac3878cb8dd/files/slides-build/img/grad-corner.png">    </p:cNvPr>
+          <p:cNvPr id="2" name="Image 0" descr="/Users/danwahlin/.copilot/session-state/56a7a0da-def8-48d4-b5e8-0ac3878cb8dd/files/slides-build/img/grad-corner-pattern.png">    </p:cNvPr>
           <p:cNvPicPr>
             <a:picLocks noChangeAspect="1"/>
           </p:cNvPicPr>

--- a/slides/01-tour-the-app.pptx
+++ b/slides/01-tour-the-app.pptx
@@ -20,9 +20,10 @@
     <p:sldId id="268" r:id="rId14"/>
     <p:sldId id="269" r:id="rId15"/>
     <p:sldId id="270" r:id="rId16"/>
+    <p:sldId id="271" r:id="rId17"/>
   </p:sldIdLst>
   <p:notesMasterIdLst>
-    <p:notesMasterId r:id="rId17"/>
+    <p:notesMasterId r:id="rId18"/>
   </p:notesMasterIdLst>
   <p:sldSz cx="9144000" cy="5143500"/>
   <p:notesSz cx="5143500" cy="9144000"/>
@@ -1044,7 +1045,7 @@
           <a:p>
             <a:r>
               <a:rPr lang="en-US" dirty="0"/>
-              <a:t>Recap the chapter. Keep the model and effort defaults for simple tasks. Next, Chapter 02 solves the shared working copy problem with isolated worktree sessions and focused context with @, #, and /.</a:t>
+              <a:t>Three features save time in the prompt box. If a response does not work for you, select Retry below it and pick a different model, reasoning effort, or context window. You do not retype the prompt. Press Ctrl+R, or Cmd+R on macOS, to open your prompt history across all sessions. Search it and select a prompt to reuse it. Voice dictation is on by default. It turns speech into prompt text that you can edit before you send it. You can change the microphone and transcription model in Settings, Voice dictation, and the operating system must allow microphone access.</a:t>
             </a:r>
             <a:endParaRPr lang="en-US" dirty="0"/>
           </a:p>
@@ -1068,6 +1069,94 @@
             <a:fld id="{F7021451-1387-4CA6-816F-3879F97B5CBC}" type="slidenum">
               <a:rPr lang="en-US"/>
               <a:t>15</a:t>
+            </a:fld>
+            <a:endParaRPr lang="en-US"/>
+          </a:p>
+        </p:txBody>
+      </p:sp>
+    </p:spTree>
+    <p:extLst>
+      <p:ext uri="{BB962C8B-B14F-4D97-AF65-F5344CB8AC3E}">
+        <p14:creationId xmlns:p14="http://schemas.microsoft.com/office/powerpoint/2010/main" val="1024086991"/>
+      </p:ext>
+    </p:extLst>
+  </p:cSld>
+  <p:clrMapOvr>
+    <a:masterClrMapping/>
+  </p:clrMapOvr>
+</p:notes>
+</file>
+
+<file path=ppt/notesSlides/notesSlide16.xml><?xml version="1.0" encoding="utf-8"?>
+<p:notes xmlns:a="http://schemas.openxmlformats.org/drawingml/2006/main" xmlns:r="http://schemas.openxmlformats.org/officeDocument/2006/relationships" xmlns:p="http://schemas.openxmlformats.org/presentationml/2006/main">
+  <p:cSld>
+    <p:spTree>
+      <p:nvGrpSpPr>
+        <p:cNvPr id="1" name=""/>
+        <p:cNvGrpSpPr/>
+        <p:nvPr/>
+      </p:nvGrpSpPr>
+      <p:grpSpPr>
+        <a:xfrm>
+          <a:off x="0" y="0"/>
+          <a:ext cx="0" cy="0"/>
+          <a:chOff x="0" y="0"/>
+          <a:chExt cx="0" cy="0"/>
+        </a:xfrm>
+      </p:grpSpPr>
+      <p:sp>
+        <p:nvSpPr>
+          <p:cNvPr id="2" name="Slide Image Placeholder 1"/>
+          <p:cNvSpPr>
+            <a:spLocks noGrp="1" noRot="1" noChangeAspect="1"/>
+          </p:cNvSpPr>
+          <p:nvPr>
+            <p:ph type="sldImg"/>
+          </p:nvPr>
+        </p:nvSpPr>
+        <p:spPr/>
+      </p:sp>
+      <p:sp>
+        <p:nvSpPr>
+          <p:cNvPr id="3" name="Notes Placeholder 2"/>
+          <p:cNvSpPr>
+            <a:spLocks noGrp="1"/>
+          </p:cNvSpPr>
+          <p:nvPr>
+            <p:ph type="body" idx="1"/>
+          </p:nvPr>
+        </p:nvSpPr>
+        <p:spPr/>
+        <p:txBody>
+          <a:bodyPr/>
+          <a:lstStyle/>
+          <a:p>
+            <a:r>
+              <a:rPr lang="en-US" dirty="0"/>
+              <a:t>Recap the chapter. Keep the model and effort defaults for simple tasks. Next, Chapter 02 solves the shared working copy problem with isolated worktree sessions and focused context with @, #, and /.</a:t>
+            </a:r>
+            <a:endParaRPr lang="en-US" dirty="0"/>
+          </a:p>
+        </p:txBody>
+      </p:sp>
+      <p:sp>
+        <p:nvSpPr>
+          <p:cNvPr id="4" name="Slide Number Placeholder 3"/>
+          <p:cNvSpPr>
+            <a:spLocks noGrp="1"/>
+          </p:cNvSpPr>
+          <p:nvPr>
+            <p:ph type="sldNum" sz="quarter" idx="10"/>
+          </p:nvPr>
+        </p:nvSpPr>
+        <p:spPr/>
+        <p:txBody>
+          <a:bodyPr/>
+          <a:lstStyle/>
+          <a:p>
+            <a:fld id="{F7021451-1387-4CA6-816F-3879F97B5CBC}" type="slidenum">
+              <a:rPr lang="en-US"/>
+              <a:t>16</a:t>
             </a:fld>
             <a:endParaRPr lang="en-US"/>
           </a:p>
@@ -5480,52 +5569,7 @@
         </p:nvSpPr>
         <p:spPr>
           <a:xfrm>
-            <a:off x="507950" y="1104751"/>
-            <a:ext cx="8161020" cy="254050"/>
-          </a:xfrm>
-          <a:prstGeom prst="rect">
-            <a:avLst/>
-          </a:prstGeom>
-          <a:noFill/>
-          <a:ln/>
-        </p:spPr>
-        <p:txBody>
-          <a:bodyPr wrap="square" lIns="0" tIns="0" rIns="0" bIns="0" rtlCol="0" anchor="t"/>
-          <a:lstStyle/>
-          <a:p>
-            <a:pPr algn="l" indent="0" marL="0">
-              <a:lnSpc>
-                <a:spcPts val="2000"/>
-              </a:lnSpc>
-              <a:spcBef>
-                <a:spcPts val="500"/>
-              </a:spcBef>
-              <a:buNone/>
-            </a:pPr>
-            <a:r>
-              <a:rPr lang="en-US" sz="1650" dirty="0">
-                <a:solidFill>
-                  <a:srgbClr val="59636E"/>
-                </a:solidFill>
-                <a:latin typeface="Arial" pitchFamily="34" charset="0"/>
-                <a:ea typeface="Arial" pitchFamily="34" charset="-122"/>
-                <a:cs typeface="Arial" pitchFamily="34" charset="-120"/>
-              </a:rPr>
-              <a:t>More autonomy from left to right. Pick what fits.</a:t>
-            </a:r>
-            <a:endParaRPr lang="en-US" sz="1650" dirty="0"/>
-          </a:p>
-        </p:txBody>
-      </p:sp>
-      <p:sp>
-        <p:nvSpPr>
-          <p:cNvPr id="9" name="Text 5"/>
-          <p:cNvSpPr/>
-          <p:nvPr/>
-        </p:nvSpPr>
-        <p:spPr>
-          <a:xfrm>
-            <a:off x="511076" y="1874490"/>
+            <a:off x="511076" y="1569690"/>
             <a:ext cx="3549551" cy="2397621"/>
           </a:xfrm>
           <a:prstGeom prst="roundRect">
@@ -5562,7 +5606,7 @@
       </p:sp>
       <p:pic>
         <p:nvPicPr>
-          <p:cNvPr id="10" name="Image 2" descr="/Users/danwahlin/.copilot/session-state/56a7a0da-def8-48d4-b5e8-0ac3878cb8dd/files/slides-build/img/01-session-mode-decision-ladder.jpg">    </p:cNvPr>
+          <p:cNvPr id="9" name="Image 2" descr="/Users/danwahlin/.copilot/session-state/56a7a0da-def8-48d4-b5e8-0ac3878cb8dd/files/slides-build/img/01-session-mode-decision-ladder.jpg">    </p:cNvPr>
           <p:cNvPicPr>
             <a:picLocks noChangeAspect="1"/>
           </p:cNvPicPr>
@@ -5576,7 +5620,7 @@
         </p:blipFill>
         <p:spPr>
           <a:xfrm>
-            <a:off x="558701" y="1922115"/>
+            <a:off x="558701" y="1617315"/>
             <a:ext cx="3454301" cy="2302371"/>
           </a:xfrm>
           <a:prstGeom prst="rect">
@@ -5586,18 +5630,18 @@
       </p:pic>
       <p:sp>
         <p:nvSpPr>
-          <p:cNvPr id="11" name="Text 6"/>
-          <p:cNvSpPr/>
-          <p:nvPr/>
-        </p:nvSpPr>
-        <p:spPr>
-          <a:xfrm>
-            <a:off x="4317802" y="1567458"/>
-            <a:ext cx="4318099" cy="919311"/>
+          <p:cNvPr id="10" name="Text 5"/>
+          <p:cNvSpPr/>
+          <p:nvPr/>
+        </p:nvSpPr>
+        <p:spPr>
+          <a:xfrm>
+            <a:off x="4317802" y="1244501"/>
+            <a:ext cx="4318099" cy="898773"/>
           </a:xfrm>
           <a:prstGeom prst="roundRect">
             <a:avLst>
-              <a:gd name="adj" fmla="val 13815"/>
+              <a:gd name="adj" fmla="val 14130"/>
             </a:avLst>
           </a:prstGeom>
           <a:solidFill>
@@ -5622,13 +5666,13 @@
       </p:sp>
       <p:sp>
         <p:nvSpPr>
-          <p:cNvPr id="12" name="Text 7"/>
-          <p:cNvSpPr/>
-          <p:nvPr/>
-        </p:nvSpPr>
-        <p:spPr>
-          <a:xfrm>
-            <a:off x="4454277" y="1703933"/>
+          <p:cNvPr id="11" name="Text 6"/>
+          <p:cNvSpPr/>
+          <p:nvPr/>
+        </p:nvSpPr>
+        <p:spPr>
+          <a:xfrm>
+            <a:off x="4428827" y="1355527"/>
             <a:ext cx="381000" cy="381000"/>
           </a:xfrm>
           <a:prstGeom prst="roundRect">
@@ -5654,7 +5698,7 @@
       </p:sp>
       <p:pic>
         <p:nvPicPr>
-          <p:cNvPr id="13" name="Image 3" descr="/Users/danwahlin/.copilot/session-state/56a7a0da-def8-48d4-b5e8-0ac3878cb8dd/files/slides-build/icons/GoPerson-0969DA.png">    </p:cNvPr>
+          <p:cNvPr id="12" name="Image 3" descr="/Users/danwahlin/.copilot/session-state/56a7a0da-def8-48d4-b5e8-0ac3878cb8dd/files/slides-build/icons/GoPerson-0969DA.png">    </p:cNvPr>
           <p:cNvPicPr>
             <a:picLocks noChangeAspect="1"/>
           </p:cNvPicPr>
@@ -5668,7 +5712,7 @@
         </p:blipFill>
         <p:spPr>
           <a:xfrm>
-            <a:off x="4536877" y="1786533"/>
+            <a:off x="4511427" y="1438126"/>
             <a:ext cx="215801" cy="215801"/>
           </a:xfrm>
           <a:prstGeom prst="rect">
@@ -5678,13 +5722,13 @@
       </p:pic>
       <p:sp>
         <p:nvSpPr>
-          <p:cNvPr id="14" name="Text 8"/>
-          <p:cNvSpPr/>
-          <p:nvPr/>
-        </p:nvSpPr>
-        <p:spPr>
-          <a:xfrm>
-            <a:off x="4949577" y="1780133"/>
+          <p:cNvPr id="13" name="Text 7"/>
+          <p:cNvSpPr/>
+          <p:nvPr/>
+        </p:nvSpPr>
+        <p:spPr>
+          <a:xfrm>
+            <a:off x="4924127" y="1431727"/>
             <a:ext cx="1069312" cy="228600"/>
           </a:xfrm>
           <a:prstGeom prst="rect">
@@ -5720,14 +5764,14 @@
       </p:sp>
       <p:sp>
         <p:nvSpPr>
-          <p:cNvPr id="15" name="Text 9"/>
-          <p:cNvSpPr/>
-          <p:nvPr/>
-        </p:nvSpPr>
-        <p:spPr>
-          <a:xfrm>
-            <a:off x="4454277" y="2135684"/>
-            <a:ext cx="4126051" cy="214610"/>
+          <p:cNvPr id="14" name="Text 8"/>
+          <p:cNvSpPr/>
+          <p:nvPr/>
+        </p:nvSpPr>
+        <p:spPr>
+          <a:xfrm>
+            <a:off x="4428827" y="1761827"/>
+            <a:ext cx="4177969" cy="214610"/>
           </a:xfrm>
           <a:prstGeom prst="rect">
             <a:avLst/>
@@ -5762,18 +5806,18 @@
       </p:sp>
       <p:sp>
         <p:nvSpPr>
-          <p:cNvPr id="16" name="Text 10"/>
-          <p:cNvSpPr/>
-          <p:nvPr/>
-        </p:nvSpPr>
-        <p:spPr>
-          <a:xfrm>
-            <a:off x="4317802" y="2613720"/>
-            <a:ext cx="4318099" cy="919311"/>
+          <p:cNvPr id="15" name="Text 9"/>
+          <p:cNvSpPr/>
+          <p:nvPr/>
+        </p:nvSpPr>
+        <p:spPr>
+          <a:xfrm>
+            <a:off x="4317802" y="2219474"/>
+            <a:ext cx="4318099" cy="898773"/>
           </a:xfrm>
           <a:prstGeom prst="roundRect">
             <a:avLst>
-              <a:gd name="adj" fmla="val 13815"/>
+              <a:gd name="adj" fmla="val 14130"/>
             </a:avLst>
           </a:prstGeom>
           <a:solidFill>
@@ -5798,13 +5842,13 @@
       </p:sp>
       <p:sp>
         <p:nvSpPr>
-          <p:cNvPr id="17" name="Text 11"/>
-          <p:cNvSpPr/>
-          <p:nvPr/>
-        </p:nvSpPr>
-        <p:spPr>
-          <a:xfrm>
-            <a:off x="4454277" y="2750195"/>
+          <p:cNvPr id="16" name="Text 10"/>
+          <p:cNvSpPr/>
+          <p:nvPr/>
+        </p:nvSpPr>
+        <p:spPr>
+          <a:xfrm>
+            <a:off x="4428827" y="2330500"/>
             <a:ext cx="381000" cy="381000"/>
           </a:xfrm>
           <a:prstGeom prst="roundRect">
@@ -5830,7 +5874,7 @@
       </p:sp>
       <p:pic>
         <p:nvPicPr>
-          <p:cNvPr id="18" name="Image 4" descr="/Users/danwahlin/.copilot/session-state/56a7a0da-def8-48d4-b5e8-0ac3878cb8dd/files/slides-build/icons/GoChecklist-8250DF.png">    </p:cNvPr>
+          <p:cNvPr id="17" name="Image 4" descr="/Users/danwahlin/.copilot/session-state/56a7a0da-def8-48d4-b5e8-0ac3878cb8dd/files/slides-build/icons/GoChecklist-8250DF.png">    </p:cNvPr>
           <p:cNvPicPr>
             <a:picLocks noChangeAspect="1"/>
           </p:cNvPicPr>
@@ -5844,7 +5888,7 @@
         </p:blipFill>
         <p:spPr>
           <a:xfrm>
-            <a:off x="4536877" y="2832795"/>
+            <a:off x="4511427" y="2413099"/>
             <a:ext cx="215801" cy="215801"/>
           </a:xfrm>
           <a:prstGeom prst="rect">
@@ -5854,13 +5898,13 @@
       </p:pic>
       <p:sp>
         <p:nvSpPr>
-          <p:cNvPr id="19" name="Text 12"/>
-          <p:cNvSpPr/>
-          <p:nvPr/>
-        </p:nvSpPr>
-        <p:spPr>
-          <a:xfrm>
-            <a:off x="4949577" y="2826395"/>
+          <p:cNvPr id="18" name="Text 11"/>
+          <p:cNvSpPr/>
+          <p:nvPr/>
+        </p:nvSpPr>
+        <p:spPr>
+          <a:xfrm>
+            <a:off x="4924127" y="2406700"/>
             <a:ext cx="451467" cy="228600"/>
           </a:xfrm>
           <a:prstGeom prst="rect">
@@ -5896,14 +5940,14 @@
       </p:sp>
       <p:sp>
         <p:nvSpPr>
-          <p:cNvPr id="20" name="Text 13"/>
-          <p:cNvSpPr/>
-          <p:nvPr/>
-        </p:nvSpPr>
-        <p:spPr>
-          <a:xfrm>
-            <a:off x="4454277" y="3181945"/>
-            <a:ext cx="4126051" cy="214610"/>
+          <p:cNvPr id="19" name="Text 12"/>
+          <p:cNvSpPr/>
+          <p:nvPr/>
+        </p:nvSpPr>
+        <p:spPr>
+          <a:xfrm>
+            <a:off x="4428827" y="2736800"/>
+            <a:ext cx="4177969" cy="214610"/>
           </a:xfrm>
           <a:prstGeom prst="rect">
             <a:avLst/>
@@ -5938,18 +5982,18 @@
       </p:sp>
       <p:sp>
         <p:nvSpPr>
-          <p:cNvPr id="21" name="Text 14"/>
-          <p:cNvSpPr/>
-          <p:nvPr/>
-        </p:nvSpPr>
-        <p:spPr>
-          <a:xfrm>
-            <a:off x="4317802" y="3659981"/>
-            <a:ext cx="4318099" cy="919311"/>
+          <p:cNvPr id="20" name="Text 13"/>
+          <p:cNvSpPr/>
+          <p:nvPr/>
+        </p:nvSpPr>
+        <p:spPr>
+          <a:xfrm>
+            <a:off x="4317802" y="3194447"/>
+            <a:ext cx="4318099" cy="898773"/>
           </a:xfrm>
           <a:prstGeom prst="roundRect">
             <a:avLst>
-              <a:gd name="adj" fmla="val 13815"/>
+              <a:gd name="adj" fmla="val 14130"/>
             </a:avLst>
           </a:prstGeom>
           <a:solidFill>
@@ -5974,13 +6018,13 @@
       </p:sp>
       <p:sp>
         <p:nvSpPr>
-          <p:cNvPr id="22" name="Text 15"/>
-          <p:cNvSpPr/>
-          <p:nvPr/>
-        </p:nvSpPr>
-        <p:spPr>
-          <a:xfrm>
-            <a:off x="4454277" y="3796457"/>
+          <p:cNvPr id="21" name="Text 14"/>
+          <p:cNvSpPr/>
+          <p:nvPr/>
+        </p:nvSpPr>
+        <p:spPr>
+          <a:xfrm>
+            <a:off x="4428827" y="3305473"/>
             <a:ext cx="381000" cy="381000"/>
           </a:xfrm>
           <a:prstGeom prst="roundRect">
@@ -6006,7 +6050,7 @@
       </p:sp>
       <p:pic>
         <p:nvPicPr>
-          <p:cNvPr id="23" name="Image 5" descr="/Users/danwahlin/.copilot/session-state/56a7a0da-def8-48d4-b5e8-0ac3878cb8dd/files/slides-build/icons/GoRocket-1A7F37.png">    </p:cNvPr>
+          <p:cNvPr id="22" name="Image 5" descr="/Users/danwahlin/.copilot/session-state/56a7a0da-def8-48d4-b5e8-0ac3878cb8dd/files/slides-build/icons/GoRocket-1A7F37.png">    </p:cNvPr>
           <p:cNvPicPr>
             <a:picLocks noChangeAspect="1"/>
           </p:cNvPicPr>
@@ -6020,7 +6064,7 @@
         </p:blipFill>
         <p:spPr>
           <a:xfrm>
-            <a:off x="4536877" y="3879056"/>
+            <a:off x="4511427" y="3388072"/>
             <a:ext cx="215801" cy="215801"/>
           </a:xfrm>
           <a:prstGeom prst="rect">
@@ -6030,13 +6074,13 @@
       </p:pic>
       <p:sp>
         <p:nvSpPr>
-          <p:cNvPr id="24" name="Text 16"/>
-          <p:cNvSpPr/>
-          <p:nvPr/>
-        </p:nvSpPr>
-        <p:spPr>
-          <a:xfrm>
-            <a:off x="4949577" y="3872657"/>
+          <p:cNvPr id="23" name="Text 15"/>
+          <p:cNvSpPr/>
+          <p:nvPr/>
+        </p:nvSpPr>
+        <p:spPr>
+          <a:xfrm>
+            <a:off x="4924127" y="3381673"/>
             <a:ext cx="937849" cy="228600"/>
           </a:xfrm>
           <a:prstGeom prst="rect">
@@ -6072,14 +6116,14 @@
       </p:sp>
       <p:sp>
         <p:nvSpPr>
-          <p:cNvPr id="25" name="Text 17"/>
-          <p:cNvSpPr/>
-          <p:nvPr/>
-        </p:nvSpPr>
-        <p:spPr>
-          <a:xfrm>
-            <a:off x="4454277" y="4228207"/>
-            <a:ext cx="4126051" cy="214610"/>
+          <p:cNvPr id="24" name="Text 16"/>
+          <p:cNvSpPr/>
+          <p:nvPr/>
+        </p:nvSpPr>
+        <p:spPr>
+          <a:xfrm>
+            <a:off x="4428827" y="3711773"/>
+            <a:ext cx="4177969" cy="214610"/>
           </a:xfrm>
           <a:prstGeom prst="rect">
             <a:avLst/>
@@ -6109,6 +6153,125 @@
               <a:t>Well-defined tasks, clear outcomes.</a:t>
             </a:r>
             <a:endParaRPr lang="en-US" sz="1400" dirty="0"/>
+          </a:p>
+        </p:txBody>
+      </p:sp>
+      <p:sp>
+        <p:nvSpPr>
+          <p:cNvPr id="25" name="Text 17"/>
+          <p:cNvSpPr/>
+          <p:nvPr/>
+        </p:nvSpPr>
+        <p:spPr>
+          <a:xfrm>
+            <a:off x="4317802" y="4169420"/>
+            <a:ext cx="4318099" cy="478631"/>
+          </a:xfrm>
+          <a:prstGeom prst="roundRect">
+            <a:avLst>
+              <a:gd name="adj" fmla="val 21227"/>
+            </a:avLst>
+          </a:prstGeom>
+          <a:solidFill>
+            <a:srgbClr val="DDF4FF"/>
+          </a:solidFill>
+          <a:ln w="9525">
+            <a:solidFill>
+              <a:srgbClr val="9CD7FF"/>
+            </a:solidFill>
+          </a:ln>
+        </p:spPr>
+        <p:txBody>
+          <a:bodyPr wrap="square" rtlCol="0" anchor="ctr"/>
+          <a:lstStyle/>
+          <a:p>
+            <a:pPr indent="0" marL="0">
+              <a:buNone/>
+            </a:pPr>
+            <a:endParaRPr lang="en-US" dirty="0"/>
+          </a:p>
+        </p:txBody>
+      </p:sp>
+      <p:pic>
+        <p:nvPicPr>
+          <p:cNvPr id="26" name="Image 6" descr="/Users/danwahlin/.copilot/session-state/56a7a0da-def8-48d4-b5e8-0ac3878cb8dd/files/slides-build/icons/GoShieldCheck-0969DA.png">    </p:cNvPr>
+          <p:cNvPicPr>
+            <a:picLocks noChangeAspect="1"/>
+          </p:cNvPicPr>
+          <p:nvPr/>
+        </p:nvPicPr>
+        <p:blipFill>
+          <a:blip r:embed="rId8"/>
+          <a:stretch>
+            <a:fillRect/>
+          </a:stretch>
+        </p:blipFill>
+        <p:spPr>
+          <a:xfrm>
+            <a:off x="4505027" y="4307086"/>
+            <a:ext cx="203150" cy="203150"/>
+          </a:xfrm>
+          <a:prstGeom prst="rect">
+            <a:avLst/>
+          </a:prstGeom>
+        </p:spPr>
+      </p:pic>
+      <p:sp>
+        <p:nvSpPr>
+          <p:cNvPr id="27" name="Text 18"/>
+          <p:cNvSpPr/>
+          <p:nvPr/>
+        </p:nvSpPr>
+        <p:spPr>
+          <a:xfrm>
+            <a:off x="4835128" y="4305895"/>
+            <a:ext cx="2853928" cy="205680"/>
+          </a:xfrm>
+          <a:prstGeom prst="rect">
+            <a:avLst/>
+          </a:prstGeom>
+          <a:noFill/>
+          <a:ln/>
+        </p:spPr>
+        <p:txBody>
+          <a:bodyPr wrap="square" lIns="0" tIns="0" rIns="0" bIns="0" rtlCol="0" anchor="t"/>
+          <a:lstStyle/>
+          <a:p>
+            <a:pPr algn="l" indent="0" marL="0">
+              <a:lnSpc>
+                <a:spcPts val="1620"/>
+              </a:lnSpc>
+              <a:buNone/>
+            </a:pPr>
+            <a:r>
+              <a:rPr lang="en-US" sz="1350" b="1" dirty="0">
+                <a:solidFill>
+                  <a:srgbClr val="1F2328"/>
+                </a:solidFill>
+                <a:latin typeface="Arial" pitchFamily="34" charset="0"/>
+                <a:ea typeface="Arial" pitchFamily="34" charset="-122"/>
+                <a:cs typeface="Arial" pitchFamily="34" charset="-120"/>
+              </a:rPr>
+              <a:t>Tool permissions:</a:t>
+            </a:r>
+            <a:pPr algn="l" indent="0" marL="0">
+              <a:lnSpc>
+                <a:spcPts val="1620"/>
+              </a:lnSpc>
+              <a:buNone/>
+            </a:pPr>
+            <a:r>
+              <a:rPr lang="en-US" sz="1350" dirty="0">
+                <a:solidFill>
+                  <a:srgbClr val="1F2328"/>
+                </a:solidFill>
+                <a:latin typeface="Arial" pitchFamily="34" charset="0"/>
+                <a:ea typeface="Arial" pitchFamily="34" charset="-122"/>
+                <a:cs typeface="Arial" pitchFamily="34" charset="-120"/>
+              </a:rPr>
+              <a:t> when to ask first.</a:t>
+            </a:r>
+            <a:endParaRPr lang="en-US" sz="1350" dirty="0"/>
           </a:p>
         </p:txBody>
       </p:sp>
@@ -7229,6 +7392,918 @@
 <file path=ppt/slides/slide15.xml><?xml version="1.0" encoding="utf-8"?>
 <p:sld xmlns:a="http://schemas.openxmlformats.org/drawingml/2006/main" xmlns:r="http://schemas.openxmlformats.org/officeDocument/2006/relationships" xmlns:p="http://schemas.openxmlformats.org/presentationml/2006/main">
   <p:cSld name="Slide 15">
+    <p:bg>
+      <p:bgPr>
+        <a:solidFill>
+          <a:srgbClr val="FFFFFF"/>
+        </a:solidFill>
+      </p:bgPr>
+    </p:bg>
+    <p:spTree>
+      <p:nvGrpSpPr>
+        <p:cNvPr id="1" name=""/>
+        <p:cNvGrpSpPr/>
+        <p:nvPr/>
+      </p:nvGrpSpPr>
+      <p:grpSpPr>
+        <a:xfrm>
+          <a:off x="0" y="0"/>
+          <a:ext cx="0" cy="0"/>
+          <a:chOff x="0" y="0"/>
+          <a:chExt cx="0" cy="0"/>
+        </a:xfrm>
+      </p:grpSpPr>
+      <p:pic>
+        <p:nvPicPr>
+          <p:cNvPr id="2" name="Image 0" descr="/Users/danwahlin/.copilot/session-state/56a7a0da-def8-48d4-b5e8-0ac3878cb8dd/files/slides-build/img/grad-corner-pattern.png">    </p:cNvPr>
+          <p:cNvPicPr>
+            <a:picLocks noChangeAspect="1"/>
+          </p:cNvPicPr>
+          <p:nvPr/>
+        </p:nvPicPr>
+        <p:blipFill>
+          <a:blip r:embed="rId1"/>
+          <a:stretch>
+            <a:fillRect/>
+          </a:stretch>
+        </p:blipFill>
+        <p:spPr>
+          <a:xfrm>
+            <a:off x="6349901" y="0"/>
+            <a:ext cx="2793950" cy="1308050"/>
+          </a:xfrm>
+          <a:prstGeom prst="rect">
+            <a:avLst/>
+          </a:prstGeom>
+        </p:spPr>
+      </p:pic>
+      <p:sp>
+        <p:nvSpPr>
+          <p:cNvPr id="3" name="Text 0"/>
+          <p:cNvSpPr/>
+          <p:nvPr/>
+        </p:nvSpPr>
+        <p:spPr>
+          <a:xfrm>
+            <a:off x="7340501" y="177701"/>
+            <a:ext cx="1168301" cy="279350"/>
+          </a:xfrm>
+          <a:prstGeom prst="roundRect">
+            <a:avLst>
+              <a:gd name="adj" fmla="val 22731"/>
+            </a:avLst>
+          </a:prstGeom>
+          <a:solidFill>
+            <a:srgbClr val="1A7F37"/>
+          </a:solidFill>
+          <a:ln/>
+        </p:spPr>
+        <p:txBody>
+          <a:bodyPr wrap="square" rtlCol="0" anchor="ctr"/>
+          <a:lstStyle/>
+          <a:p>
+            <a:pPr indent="0" marL="0">
+              <a:buNone/>
+            </a:pPr>
+            <a:endParaRPr lang="en-US" dirty="0"/>
+          </a:p>
+        </p:txBody>
+      </p:sp>
+      <p:sp>
+        <p:nvSpPr>
+          <p:cNvPr id="4" name="Text 1"/>
+          <p:cNvSpPr/>
+          <p:nvPr/>
+        </p:nvSpPr>
+        <p:spPr>
+          <a:xfrm>
+            <a:off x="7461041" y="231577"/>
+            <a:ext cx="927071" cy="171450"/>
+          </a:xfrm>
+          <a:prstGeom prst="rect">
+            <a:avLst/>
+          </a:prstGeom>
+          <a:noFill/>
+          <a:ln/>
+        </p:spPr>
+        <p:txBody>
+          <a:bodyPr wrap="square" lIns="0" tIns="0" rIns="0" bIns="0" rtlCol="0" anchor="t"/>
+          <a:lstStyle/>
+          <a:p>
+            <a:pPr algn="ctr" indent="0" marL="0">
+              <a:buNone/>
+            </a:pPr>
+            <a:r>
+              <a:rPr lang="en-US" sz="1150" b="1" dirty="0">
+                <a:solidFill>
+                  <a:srgbClr val="FFFFFF"/>
+                </a:solidFill>
+                <a:latin typeface="Arial" pitchFamily="34" charset="0"/>
+                <a:ea typeface="Arial" pitchFamily="34" charset="-122"/>
+                <a:cs typeface="Arial" pitchFamily="34" charset="-120"/>
+              </a:rPr>
+              <a:t>CHAPTER 01</a:t>
+            </a:r>
+            <a:endParaRPr lang="en-US" sz="1150" dirty="0"/>
+          </a:p>
+        </p:txBody>
+      </p:sp>
+      <p:pic>
+        <p:nvPicPr>
+          <p:cNvPr id="5" name="Image 1" descr="/Users/danwahlin/.copilot/session-state/56a7a0da-def8-48d4-b5e8-0ac3878cb8dd/files/slides-build/icons/FaGithub-1F2328.png">
+            <a:hlinkClick r:id="rId3" tooltip="https://github.com/github/copilot-app-for-beginners/tree/main/01-tour-the-app"/>
+          </p:cNvPr>
+          <p:cNvPicPr>
+            <a:picLocks noChangeAspect="1"/>
+          </p:cNvPicPr>
+          <p:nvPr/>
+        </p:nvPicPr>
+        <p:blipFill>
+          <a:blip r:embed="rId2"/>
+          <a:stretch>
+            <a:fillRect/>
+          </a:stretch>
+        </p:blipFill>
+        <p:spPr>
+          <a:xfrm>
+            <a:off x="8610600" y="165050"/>
+            <a:ext cx="304800" cy="304800"/>
+          </a:xfrm>
+          <a:prstGeom prst="rect">
+            <a:avLst/>
+          </a:prstGeom>
+        </p:spPr>
+      </p:pic>
+      <p:sp>
+        <p:nvSpPr>
+          <p:cNvPr id="6" name="Text 2"/>
+          <p:cNvSpPr/>
+          <p:nvPr/>
+        </p:nvSpPr>
+        <p:spPr>
+          <a:xfrm>
+            <a:off x="507950" y="381000"/>
+            <a:ext cx="8161020" cy="190500"/>
+          </a:xfrm>
+          <a:prstGeom prst="rect">
+            <a:avLst/>
+          </a:prstGeom>
+          <a:noFill/>
+          <a:ln/>
+        </p:spPr>
+        <p:txBody>
+          <a:bodyPr wrap="square" lIns="0" tIns="0" rIns="0" bIns="0" rtlCol="0" anchor="t"/>
+          <a:lstStyle/>
+          <a:p>
+            <a:pPr algn="l" indent="0" marL="0">
+              <a:buNone/>
+            </a:pPr>
+            <a:r>
+              <a:rPr lang="en-US" sz="1250" b="1" dirty="0">
+                <a:solidFill>
+                  <a:srgbClr val="1A7F37"/>
+                </a:solidFill>
+                <a:latin typeface="Arial" pitchFamily="34" charset="0"/>
+                <a:ea typeface="Arial" pitchFamily="34" charset="-122"/>
+                <a:cs typeface="Arial" pitchFamily="34" charset="-120"/>
+              </a:rPr>
+              <a:t>PROMPT BOX SHORTCUTS</a:t>
+            </a:r>
+            <a:endParaRPr lang="en-US" sz="1250" dirty="0"/>
+          </a:p>
+        </p:txBody>
+      </p:sp>
+      <p:sp>
+        <p:nvSpPr>
+          <p:cNvPr id="7" name="Text 3"/>
+          <p:cNvSpPr/>
+          <p:nvPr/>
+        </p:nvSpPr>
+        <p:spPr>
+          <a:xfrm>
+            <a:off x="507950" y="622250"/>
+            <a:ext cx="8161020" cy="419100"/>
+          </a:xfrm>
+          <a:prstGeom prst="rect">
+            <a:avLst/>
+          </a:prstGeom>
+          <a:noFill/>
+          <a:ln/>
+        </p:spPr>
+        <p:txBody>
+          <a:bodyPr wrap="square" lIns="0" tIns="0" rIns="0" bIns="0" rtlCol="0" anchor="t"/>
+          <a:lstStyle/>
+          <a:p>
+            <a:pPr algn="l" indent="0" marL="0">
+              <a:lnSpc>
+                <a:spcPts val="3300"/>
+              </a:lnSpc>
+              <a:spcBef>
+                <a:spcPts val="400"/>
+              </a:spcBef>
+              <a:buNone/>
+            </a:pPr>
+            <a:r>
+              <a:rPr lang="en-US" sz="2800" b="1" dirty="0">
+                <a:solidFill>
+                  <a:srgbClr val="1F2328"/>
+                </a:solidFill>
+                <a:latin typeface="Arial" pitchFamily="34" charset="0"/>
+                <a:ea typeface="Arial" pitchFamily="34" charset="-122"/>
+                <a:cs typeface="Arial" pitchFamily="34" charset="-120"/>
+              </a:rPr>
+              <a:t>Work faster in the prompt box</a:t>
+            </a:r>
+            <a:endParaRPr lang="en-US" sz="2800" dirty="0"/>
+          </a:p>
+        </p:txBody>
+      </p:sp>
+      <p:sp>
+        <p:nvSpPr>
+          <p:cNvPr id="8" name="Text 4"/>
+          <p:cNvSpPr/>
+          <p:nvPr/>
+        </p:nvSpPr>
+        <p:spPr>
+          <a:xfrm>
+            <a:off x="507950" y="1104751"/>
+            <a:ext cx="8161020" cy="254050"/>
+          </a:xfrm>
+          <a:prstGeom prst="rect">
+            <a:avLst/>
+          </a:prstGeom>
+          <a:noFill/>
+          <a:ln/>
+        </p:spPr>
+        <p:txBody>
+          <a:bodyPr wrap="square" lIns="0" tIns="0" rIns="0" bIns="0" rtlCol="0" anchor="t"/>
+          <a:lstStyle/>
+          <a:p>
+            <a:pPr algn="l" indent="0" marL="0">
+              <a:lnSpc>
+                <a:spcPts val="2000"/>
+              </a:lnSpc>
+              <a:spcBef>
+                <a:spcPts val="500"/>
+              </a:spcBef>
+              <a:buNone/>
+            </a:pPr>
+            <a:r>
+              <a:rPr lang="en-US" sz="1650" dirty="0">
+                <a:solidFill>
+                  <a:srgbClr val="59636E"/>
+                </a:solidFill>
+                <a:latin typeface="Arial" pitchFamily="34" charset="0"/>
+                <a:ea typeface="Arial" pitchFamily="34" charset="-122"/>
+                <a:cs typeface="Arial" pitchFamily="34" charset="-120"/>
+              </a:rPr>
+              <a:t>Reuse what worked, and try again without retyping.</a:t>
+            </a:r>
+            <a:endParaRPr lang="en-US" sz="1650" dirty="0"/>
+          </a:p>
+        </p:txBody>
+      </p:sp>
+      <p:sp>
+        <p:nvSpPr>
+          <p:cNvPr id="9" name="Text 5"/>
+          <p:cNvSpPr/>
+          <p:nvPr/>
+        </p:nvSpPr>
+        <p:spPr>
+          <a:xfrm>
+            <a:off x="507950" y="2266355"/>
+            <a:ext cx="2590800" cy="1690092"/>
+          </a:xfrm>
+          <a:prstGeom prst="roundRect">
+            <a:avLst>
+              <a:gd name="adj" fmla="val 7514"/>
+            </a:avLst>
+          </a:prstGeom>
+          <a:solidFill>
+            <a:srgbClr val="FFFFFF"/>
+          </a:solidFill>
+          <a:ln w="9525">
+            <a:solidFill>
+              <a:srgbClr val="9CD7FF"/>
+            </a:solidFill>
+          </a:ln>
+        </p:spPr>
+        <p:txBody>
+          <a:bodyPr wrap="square" rtlCol="0" anchor="ctr"/>
+          <a:lstStyle/>
+          <a:p>
+            <a:pPr indent="0" marL="0">
+              <a:buNone/>
+            </a:pPr>
+            <a:endParaRPr lang="en-US" dirty="0"/>
+          </a:p>
+        </p:txBody>
+      </p:sp>
+      <p:sp>
+        <p:nvSpPr>
+          <p:cNvPr id="10" name="Text 6"/>
+          <p:cNvSpPr/>
+          <p:nvPr/>
+        </p:nvSpPr>
+        <p:spPr>
+          <a:xfrm>
+            <a:off x="695176" y="2453580"/>
+            <a:ext cx="381000" cy="381000"/>
+          </a:xfrm>
+          <a:prstGeom prst="roundRect">
+            <a:avLst>
+              <a:gd name="adj" fmla="val 23333"/>
+            </a:avLst>
+          </a:prstGeom>
+          <a:solidFill>
+            <a:srgbClr val="DDF4FF"/>
+          </a:solidFill>
+          <a:ln/>
+        </p:spPr>
+        <p:txBody>
+          <a:bodyPr wrap="square" rtlCol="0" anchor="ctr"/>
+          <a:lstStyle/>
+          <a:p>
+            <a:pPr indent="0" marL="0">
+              <a:buNone/>
+            </a:pPr>
+            <a:endParaRPr lang="en-US" dirty="0"/>
+          </a:p>
+        </p:txBody>
+      </p:sp>
+      <p:pic>
+        <p:nvPicPr>
+          <p:cNvPr id="11" name="Image 2" descr="/Users/danwahlin/.copilot/session-state/56a7a0da-def8-48d4-b5e8-0ac3878cb8dd/files/slides-build/icons/GoSync-0969DA.png">    </p:cNvPr>
+          <p:cNvPicPr>
+            <a:picLocks noChangeAspect="1"/>
+          </p:cNvPicPr>
+          <p:nvPr/>
+        </p:nvPicPr>
+        <p:blipFill>
+          <a:blip r:embed="rId4"/>
+          <a:stretch>
+            <a:fillRect/>
+          </a:stretch>
+        </p:blipFill>
+        <p:spPr>
+          <a:xfrm>
+            <a:off x="777776" y="2536180"/>
+            <a:ext cx="215801" cy="215801"/>
+          </a:xfrm>
+          <a:prstGeom prst="rect">
+            <a:avLst/>
+          </a:prstGeom>
+        </p:spPr>
+      </p:pic>
+      <p:sp>
+        <p:nvSpPr>
+          <p:cNvPr id="12" name="Text 7"/>
+          <p:cNvSpPr/>
+          <p:nvPr/>
+        </p:nvSpPr>
+        <p:spPr>
+          <a:xfrm>
+            <a:off x="1190476" y="2529780"/>
+            <a:ext cx="1734520" cy="228600"/>
+          </a:xfrm>
+          <a:prstGeom prst="rect">
+            <a:avLst/>
+          </a:prstGeom>
+          <a:noFill/>
+          <a:ln/>
+        </p:spPr>
+        <p:txBody>
+          <a:bodyPr wrap="square" lIns="0" tIns="0" rIns="0" bIns="0" rtlCol="0" anchor="t"/>
+          <a:lstStyle/>
+          <a:p>
+            <a:pPr algn="l" indent="0" marL="0">
+              <a:lnSpc>
+                <a:spcPts val="1800"/>
+              </a:lnSpc>
+              <a:buNone/>
+            </a:pPr>
+            <a:r>
+              <a:rPr lang="en-US" sz="1650" b="1" dirty="0">
+                <a:solidFill>
+                  <a:srgbClr val="1F2328"/>
+                </a:solidFill>
+                <a:latin typeface="Arial" pitchFamily="34" charset="0"/>
+                <a:ea typeface="Arial" pitchFamily="34" charset="-122"/>
+                <a:cs typeface="Arial" pitchFamily="34" charset="-120"/>
+              </a:rPr>
+              <a:t>Retry a response</a:t>
+            </a:r>
+            <a:endParaRPr lang="en-US" sz="1650" dirty="0"/>
+          </a:p>
+        </p:txBody>
+      </p:sp>
+      <p:sp>
+        <p:nvSpPr>
+          <p:cNvPr id="13" name="Text 8"/>
+          <p:cNvSpPr/>
+          <p:nvPr/>
+        </p:nvSpPr>
+        <p:spPr>
+          <a:xfrm>
+            <a:off x="695176" y="2910780"/>
+            <a:ext cx="2260675" cy="858441"/>
+          </a:xfrm>
+          <a:prstGeom prst="rect">
+            <a:avLst/>
+          </a:prstGeom>
+          <a:noFill/>
+          <a:ln/>
+        </p:spPr>
+        <p:txBody>
+          <a:bodyPr wrap="square" lIns="0" tIns="0" rIns="0" bIns="0" rtlCol="0" anchor="t"/>
+          <a:lstStyle/>
+          <a:p>
+            <a:pPr algn="l" indent="0" marL="0">
+              <a:lnSpc>
+                <a:spcPts val="1690"/>
+              </a:lnSpc>
+              <a:buNone/>
+            </a:pPr>
+            <a:r>
+              <a:rPr lang="en-US" sz="1400" dirty="0">
+                <a:solidFill>
+                  <a:srgbClr val="59636E"/>
+                </a:solidFill>
+                <a:latin typeface="Arial" pitchFamily="34" charset="0"/>
+                <a:ea typeface="Arial" pitchFamily="34" charset="-122"/>
+                <a:cs typeface="Arial" pitchFamily="34" charset="-120"/>
+              </a:rPr>
+              <a:t>Use </a:t>
+            </a:r>
+            <a:pPr algn="l" indent="0" marL="0">
+              <a:lnSpc>
+                <a:spcPts val="1690"/>
+              </a:lnSpc>
+              <a:buNone/>
+            </a:pPr>
+            <a:r>
+              <a:rPr lang="en-US" sz="1400" b="1" dirty="0">
+                <a:solidFill>
+                  <a:srgbClr val="59636E"/>
+                </a:solidFill>
+                <a:latin typeface="Arial" pitchFamily="34" charset="0"/>
+                <a:ea typeface="Arial" pitchFamily="34" charset="-122"/>
+                <a:cs typeface="Arial" pitchFamily="34" charset="-120"/>
+              </a:rPr>
+              <a:t>Retry</a:t>
+            </a:r>
+            <a:pPr algn="l" indent="0" marL="0">
+              <a:lnSpc>
+                <a:spcPts val="1690"/>
+              </a:lnSpc>
+              <a:buNone/>
+            </a:pPr>
+            <a:r>
+              <a:rPr lang="en-US" sz="1400" dirty="0">
+                <a:solidFill>
+                  <a:srgbClr val="59636E"/>
+                </a:solidFill>
+                <a:latin typeface="Arial" pitchFamily="34" charset="0"/>
+                <a:ea typeface="Arial" pitchFamily="34" charset="-122"/>
+                <a:cs typeface="Arial" pitchFamily="34" charset="-120"/>
+              </a:rPr>
+              <a:t> below a response to rerun it with a different model, effort, or context window.</a:t>
+            </a:r>
+            <a:endParaRPr lang="en-US" sz="1400" dirty="0"/>
+          </a:p>
+        </p:txBody>
+      </p:sp>
+      <p:sp>
+        <p:nvSpPr>
+          <p:cNvPr id="14" name="Text 9"/>
+          <p:cNvSpPr/>
+          <p:nvPr/>
+        </p:nvSpPr>
+        <p:spPr>
+          <a:xfrm>
+            <a:off x="3276451" y="2266355"/>
+            <a:ext cx="2590949" cy="1690092"/>
+          </a:xfrm>
+          <a:prstGeom prst="roundRect">
+            <a:avLst>
+              <a:gd name="adj" fmla="val 7514"/>
+            </a:avLst>
+          </a:prstGeom>
+          <a:solidFill>
+            <a:srgbClr val="FFFFFF"/>
+          </a:solidFill>
+          <a:ln w="9525">
+            <a:solidFill>
+              <a:srgbClr val="E0C5FF"/>
+            </a:solidFill>
+          </a:ln>
+        </p:spPr>
+        <p:txBody>
+          <a:bodyPr wrap="square" rtlCol="0" anchor="ctr"/>
+          <a:lstStyle/>
+          <a:p>
+            <a:pPr indent="0" marL="0">
+              <a:buNone/>
+            </a:pPr>
+            <a:endParaRPr lang="en-US" dirty="0"/>
+          </a:p>
+        </p:txBody>
+      </p:sp>
+      <p:sp>
+        <p:nvSpPr>
+          <p:cNvPr id="15" name="Text 10"/>
+          <p:cNvSpPr/>
+          <p:nvPr/>
+        </p:nvSpPr>
+        <p:spPr>
+          <a:xfrm>
+            <a:off x="3463677" y="2453580"/>
+            <a:ext cx="381000" cy="381000"/>
+          </a:xfrm>
+          <a:prstGeom prst="roundRect">
+            <a:avLst>
+              <a:gd name="adj" fmla="val 23333"/>
+            </a:avLst>
+          </a:prstGeom>
+          <a:solidFill>
+            <a:srgbClr val="FBEFFF"/>
+          </a:solidFill>
+          <a:ln/>
+        </p:spPr>
+        <p:txBody>
+          <a:bodyPr wrap="square" rtlCol="0" anchor="ctr"/>
+          <a:lstStyle/>
+          <a:p>
+            <a:pPr indent="0" marL="0">
+              <a:buNone/>
+            </a:pPr>
+            <a:endParaRPr lang="en-US" dirty="0"/>
+          </a:p>
+        </p:txBody>
+      </p:sp>
+      <p:pic>
+        <p:nvPicPr>
+          <p:cNvPr id="16" name="Image 3" descr="/Users/danwahlin/.copilot/session-state/56a7a0da-def8-48d4-b5e8-0ac3878cb8dd/files/slides-build/icons/GoHistory-8250DF.png">    </p:cNvPr>
+          <p:cNvPicPr>
+            <a:picLocks noChangeAspect="1"/>
+          </p:cNvPicPr>
+          <p:nvPr/>
+        </p:nvPicPr>
+        <p:blipFill>
+          <a:blip r:embed="rId5"/>
+          <a:stretch>
+            <a:fillRect/>
+          </a:stretch>
+        </p:blipFill>
+        <p:spPr>
+          <a:xfrm>
+            <a:off x="3546277" y="2536180"/>
+            <a:ext cx="215801" cy="215801"/>
+          </a:xfrm>
+          <a:prstGeom prst="rect">
+            <a:avLst/>
+          </a:prstGeom>
+        </p:spPr>
+      </p:pic>
+      <p:sp>
+        <p:nvSpPr>
+          <p:cNvPr id="17" name="Text 11"/>
+          <p:cNvSpPr/>
+          <p:nvPr/>
+        </p:nvSpPr>
+        <p:spPr>
+          <a:xfrm>
+            <a:off x="3958977" y="2529780"/>
+            <a:ext cx="1520172" cy="228600"/>
+          </a:xfrm>
+          <a:prstGeom prst="rect">
+            <a:avLst/>
+          </a:prstGeom>
+          <a:noFill/>
+          <a:ln/>
+        </p:spPr>
+        <p:txBody>
+          <a:bodyPr wrap="square" lIns="0" tIns="0" rIns="0" bIns="0" rtlCol="0" anchor="t"/>
+          <a:lstStyle/>
+          <a:p>
+            <a:pPr algn="l" indent="0" marL="0">
+              <a:lnSpc>
+                <a:spcPts val="1800"/>
+              </a:lnSpc>
+              <a:buNone/>
+            </a:pPr>
+            <a:r>
+              <a:rPr lang="en-US" sz="1650" b="1" dirty="0">
+                <a:solidFill>
+                  <a:srgbClr val="1F2328"/>
+                </a:solidFill>
+                <a:latin typeface="Arial" pitchFamily="34" charset="0"/>
+                <a:ea typeface="Arial" pitchFamily="34" charset="-122"/>
+                <a:cs typeface="Arial" pitchFamily="34" charset="-120"/>
+              </a:rPr>
+              <a:t>Prompt history</a:t>
+            </a:r>
+            <a:endParaRPr lang="en-US" sz="1650" dirty="0"/>
+          </a:p>
+        </p:txBody>
+      </p:sp>
+      <p:sp>
+        <p:nvSpPr>
+          <p:cNvPr id="18" name="Text 12"/>
+          <p:cNvSpPr/>
+          <p:nvPr/>
+        </p:nvSpPr>
+        <p:spPr>
+          <a:xfrm>
+            <a:off x="3463677" y="2910780"/>
+            <a:ext cx="2260827" cy="858441"/>
+          </a:xfrm>
+          <a:prstGeom prst="rect">
+            <a:avLst/>
+          </a:prstGeom>
+          <a:noFill/>
+          <a:ln/>
+        </p:spPr>
+        <p:txBody>
+          <a:bodyPr wrap="square" lIns="0" tIns="0" rIns="0" bIns="0" rtlCol="0" anchor="t"/>
+          <a:lstStyle/>
+          <a:p>
+            <a:pPr algn="l" indent="0" marL="0">
+              <a:lnSpc>
+                <a:spcPts val="1690"/>
+              </a:lnSpc>
+              <a:buNone/>
+            </a:pPr>
+            <a:r>
+              <a:rPr lang="en-US" sz="1400" dirty="0">
+                <a:solidFill>
+                  <a:srgbClr val="59636E"/>
+                </a:solidFill>
+                <a:latin typeface="Arial" pitchFamily="34" charset="0"/>
+                <a:ea typeface="Arial" pitchFamily="34" charset="-122"/>
+                <a:cs typeface="Arial" pitchFamily="34" charset="-120"/>
+              </a:rPr>
+              <a:t>Press </a:t>
+            </a:r>
+            <a:pPr algn="l" indent="0" marL="0">
+              <a:lnSpc>
+                <a:spcPts val="1690"/>
+              </a:lnSpc>
+              <a:buNone/>
+            </a:pPr>
+            <a:r>
+              <a:rPr lang="en-US" sz="1400" b="1" dirty="0">
+                <a:solidFill>
+                  <a:srgbClr val="59636E"/>
+                </a:solidFill>
+                <a:latin typeface="Arial" pitchFamily="34" charset="0"/>
+                <a:ea typeface="Arial" pitchFamily="34" charset="-122"/>
+                <a:cs typeface="Arial" pitchFamily="34" charset="-120"/>
+              </a:rPr>
+              <a:t>Ctrl+R</a:t>
+            </a:r>
+            <a:pPr algn="l" indent="0" marL="0">
+              <a:lnSpc>
+                <a:spcPts val="1690"/>
+              </a:lnSpc>
+              <a:buNone/>
+            </a:pPr>
+            <a:r>
+              <a:rPr lang="en-US" sz="1400" dirty="0">
+                <a:solidFill>
+                  <a:srgbClr val="59636E"/>
+                </a:solidFill>
+                <a:latin typeface="Arial" pitchFamily="34" charset="0"/>
+                <a:ea typeface="Arial" pitchFamily="34" charset="-122"/>
+                <a:cs typeface="Arial" pitchFamily="34" charset="-120"/>
+              </a:rPr>
+              <a:t> (</a:t>
+            </a:r>
+            <a:pPr algn="l" indent="0" marL="0">
+              <a:lnSpc>
+                <a:spcPts val="1690"/>
+              </a:lnSpc>
+              <a:buNone/>
+            </a:pPr>
+            <a:r>
+              <a:rPr lang="en-US" sz="1400" b="1" dirty="0">
+                <a:solidFill>
+                  <a:srgbClr val="59636E"/>
+                </a:solidFill>
+                <a:latin typeface="Arial" pitchFamily="34" charset="0"/>
+                <a:ea typeface="Arial" pitchFamily="34" charset="-122"/>
+                <a:cs typeface="Arial" pitchFamily="34" charset="-120"/>
+              </a:rPr>
+              <a:t>Cmd+R</a:t>
+            </a:r>
+            <a:pPr algn="l" indent="0" marL="0">
+              <a:lnSpc>
+                <a:spcPts val="1690"/>
+              </a:lnSpc>
+              <a:buNone/>
+            </a:pPr>
+            <a:r>
+              <a:rPr lang="en-US" sz="1400" dirty="0">
+                <a:solidFill>
+                  <a:srgbClr val="59636E"/>
+                </a:solidFill>
+                <a:latin typeface="Arial" pitchFamily="34" charset="0"/>
+                <a:ea typeface="Arial" pitchFamily="34" charset="-122"/>
+                <a:cs typeface="Arial" pitchFamily="34" charset="-120"/>
+              </a:rPr>
+              <a:t> on macOS) to search recent prompts from all sessions and reuse one.</a:t>
+            </a:r>
+            <a:endParaRPr lang="en-US" sz="1400" dirty="0"/>
+          </a:p>
+        </p:txBody>
+      </p:sp>
+      <p:sp>
+        <p:nvSpPr>
+          <p:cNvPr id="19" name="Text 13"/>
+          <p:cNvSpPr/>
+          <p:nvPr/>
+        </p:nvSpPr>
+        <p:spPr>
+          <a:xfrm>
+            <a:off x="6045101" y="2266355"/>
+            <a:ext cx="2590800" cy="1690092"/>
+          </a:xfrm>
+          <a:prstGeom prst="roundRect">
+            <a:avLst>
+              <a:gd name="adj" fmla="val 7514"/>
+            </a:avLst>
+          </a:prstGeom>
+          <a:solidFill>
+            <a:srgbClr val="FFFFFF"/>
+          </a:solidFill>
+          <a:ln w="9525">
+            <a:solidFill>
+              <a:srgbClr val="8CE7A5"/>
+            </a:solidFill>
+          </a:ln>
+        </p:spPr>
+        <p:txBody>
+          <a:bodyPr wrap="square" rtlCol="0" anchor="ctr"/>
+          <a:lstStyle/>
+          <a:p>
+            <a:pPr indent="0" marL="0">
+              <a:buNone/>
+            </a:pPr>
+            <a:endParaRPr lang="en-US" dirty="0"/>
+          </a:p>
+        </p:txBody>
+      </p:sp>
+      <p:sp>
+        <p:nvSpPr>
+          <p:cNvPr id="20" name="Text 14"/>
+          <p:cNvSpPr/>
+          <p:nvPr/>
+        </p:nvSpPr>
+        <p:spPr>
+          <a:xfrm>
+            <a:off x="6232327" y="2453580"/>
+            <a:ext cx="381000" cy="381000"/>
+          </a:xfrm>
+          <a:prstGeom prst="roundRect">
+            <a:avLst>
+              <a:gd name="adj" fmla="val 23333"/>
+            </a:avLst>
+          </a:prstGeom>
+          <a:solidFill>
+            <a:srgbClr val="DAFBE1"/>
+          </a:solidFill>
+          <a:ln/>
+        </p:spPr>
+        <p:txBody>
+          <a:bodyPr wrap="square" rtlCol="0" anchor="ctr"/>
+          <a:lstStyle/>
+          <a:p>
+            <a:pPr indent="0" marL="0">
+              <a:buNone/>
+            </a:pPr>
+            <a:endParaRPr lang="en-US" dirty="0"/>
+          </a:p>
+        </p:txBody>
+      </p:sp>
+      <p:pic>
+        <p:nvPicPr>
+          <p:cNvPr id="21" name="Image 4" descr="/Users/danwahlin/.copilot/session-state/56a7a0da-def8-48d4-b5e8-0ac3878cb8dd/files/slides-build/icons/GoUnmute-1A7F37.png">    </p:cNvPr>
+          <p:cNvPicPr>
+            <a:picLocks noChangeAspect="1"/>
+          </p:cNvPicPr>
+          <p:nvPr/>
+        </p:nvPicPr>
+        <p:blipFill>
+          <a:blip r:embed="rId6"/>
+          <a:stretch>
+            <a:fillRect/>
+          </a:stretch>
+        </p:blipFill>
+        <p:spPr>
+          <a:xfrm>
+            <a:off x="6314926" y="2536180"/>
+            <a:ext cx="215801" cy="215801"/>
+          </a:xfrm>
+          <a:prstGeom prst="rect">
+            <a:avLst/>
+          </a:prstGeom>
+        </p:spPr>
+      </p:pic>
+      <p:sp>
+        <p:nvSpPr>
+          <p:cNvPr id="22" name="Text 15"/>
+          <p:cNvSpPr/>
+          <p:nvPr/>
+        </p:nvSpPr>
+        <p:spPr>
+          <a:xfrm>
+            <a:off x="6727627" y="2529780"/>
+            <a:ext cx="1504384" cy="228600"/>
+          </a:xfrm>
+          <a:prstGeom prst="rect">
+            <a:avLst/>
+          </a:prstGeom>
+          <a:noFill/>
+          <a:ln/>
+        </p:spPr>
+        <p:txBody>
+          <a:bodyPr wrap="square" lIns="0" tIns="0" rIns="0" bIns="0" rtlCol="0" anchor="t"/>
+          <a:lstStyle/>
+          <a:p>
+            <a:pPr algn="l" indent="0" marL="0">
+              <a:lnSpc>
+                <a:spcPts val="1800"/>
+              </a:lnSpc>
+              <a:buNone/>
+            </a:pPr>
+            <a:r>
+              <a:rPr lang="en-US" sz="1650" b="1" dirty="0">
+                <a:solidFill>
+                  <a:srgbClr val="1F2328"/>
+                </a:solidFill>
+                <a:latin typeface="Arial" pitchFamily="34" charset="0"/>
+                <a:ea typeface="Arial" pitchFamily="34" charset="-122"/>
+                <a:cs typeface="Arial" pitchFamily="34" charset="-120"/>
+              </a:rPr>
+              <a:t>Voice dictation</a:t>
+            </a:r>
+            <a:endParaRPr lang="en-US" sz="1650" dirty="0"/>
+          </a:p>
+        </p:txBody>
+      </p:sp>
+      <p:sp>
+        <p:nvSpPr>
+          <p:cNvPr id="23" name="Text 16"/>
+          <p:cNvSpPr/>
+          <p:nvPr/>
+        </p:nvSpPr>
+        <p:spPr>
+          <a:xfrm>
+            <a:off x="6232327" y="2910780"/>
+            <a:ext cx="2260675" cy="643830"/>
+          </a:xfrm>
+          <a:prstGeom prst="rect">
+            <a:avLst/>
+          </a:prstGeom>
+          <a:noFill/>
+          <a:ln/>
+        </p:spPr>
+        <p:txBody>
+          <a:bodyPr wrap="square" lIns="0" tIns="0" rIns="0" bIns="0" rtlCol="0" anchor="t"/>
+          <a:lstStyle/>
+          <a:p>
+            <a:pPr algn="l" indent="0" marL="0">
+              <a:lnSpc>
+                <a:spcPts val="1690"/>
+              </a:lnSpc>
+              <a:buNone/>
+            </a:pPr>
+            <a:r>
+              <a:rPr lang="en-US" sz="1400" dirty="0">
+                <a:solidFill>
+                  <a:srgbClr val="59636E"/>
+                </a:solidFill>
+                <a:latin typeface="Arial" pitchFamily="34" charset="0"/>
+                <a:ea typeface="Arial" pitchFamily="34" charset="-122"/>
+                <a:cs typeface="Arial" pitchFamily="34" charset="-120"/>
+              </a:rPr>
+              <a:t>Speak a prompt, then edit the text before you send it. Optional.</a:t>
+            </a:r>
+            <a:endParaRPr lang="en-US" sz="1400" dirty="0"/>
+          </a:p>
+        </p:txBody>
+      </p:sp>
+    </p:spTree>
+  </p:cSld>
+  <p:clrMapOvr>
+    <a:masterClrMapping/>
+  </p:clrMapOvr>
+</p:sld>
+</file>
+
+<file path=ppt/slides/slide16.xml><?xml version="1.0" encoding="utf-8"?>
+<p:sld xmlns:a="http://schemas.openxmlformats.org/drawingml/2006/main" xmlns:r="http://schemas.openxmlformats.org/officeDocument/2006/relationships" xmlns:p="http://schemas.openxmlformats.org/presentationml/2006/main">
+  <p:cSld name="Slide 16">
     <p:bg>
       <p:bgPr>
         <a:solidFill>

--- a/slides/01-tour-the-app.pptx
+++ b/slides/01-tour-the-app.pptx
@@ -2212,7 +2212,13 @@
       </p:grpSpPr>
       <p:pic>
         <p:nvPicPr>
-          <p:cNvPr id="2" name="Image 0" descr="/Users/danwahlin/.copilot/session-state/56a7a0da-def8-48d4-b5e8-0ac3878cb8dd/files/slides-build/img/grad-title-pattern.jpg">    </p:cNvPr>
+          <p:cNvPr id="2" name="Image 0" descr="">
+            <a:extLst>
+              <a:ext uri="{C183D7F6-B498-43B3-948B-1728B52AA6E4}">
+                <adec:decorative xmlns:adec="http://schemas.microsoft.com/office/drawing/2017/decorative" val="1"/>
+              </a:ext>
+            </a:extLst>
+          </p:cNvPr>
           <p:cNvPicPr>
             <a:picLocks noChangeAspect="1"/>
           </p:cNvPicPr>
@@ -2236,7 +2242,7 @@
       </p:pic>
       <p:pic>
         <p:nvPicPr>
-          <p:cNvPr id="3" name="Image 1" descr="/Users/danwahlin/.copilot/session-state/56a7a0da-def8-48d4-b5e8-0ac3878cb8dd/files/slides-build/icons/FaGithub-1F2328.png">
+          <p:cNvPr id="3" name="Image 1" descr="Open this chapter on GitHub">
             <a:hlinkClick r:id="rId3" tooltip="https://github.com/github/copilot-app-for-beginners/tree/main/01-tour-the-app"/>
           </p:cNvPr>
           <p:cNvPicPr>
@@ -2420,7 +2426,13 @@
       </p:sp>
       <p:pic>
         <p:nvPicPr>
-          <p:cNvPr id="8" name="Image 2" descr="/Users/danwahlin/.copilot/session-state/56a7a0da-def8-48d4-b5e8-0ac3878cb8dd/files/slides-build/icons/FaGithub-0969DA.png">    </p:cNvPr>
+          <p:cNvPr id="8" name="Image 2" descr="">
+            <a:extLst>
+              <a:ext uri="{C183D7F6-B498-43B3-948B-1728B52AA6E4}">
+                <adec:decorative xmlns:adec="http://schemas.microsoft.com/office/drawing/2017/decorative" val="1"/>
+              </a:ext>
+            </a:extLst>
+          </p:cNvPr>
           <p:cNvPicPr>
             <a:picLocks noChangeAspect="1"/>
           </p:cNvPicPr>
@@ -2624,7 +2636,13 @@
       </p:sp>
       <p:pic>
         <p:nvPicPr>
-          <p:cNvPr id="5" name="Image 0" descr="/Users/danwahlin/.copilot/session-state/56a7a0da-def8-48d4-b5e8-0ac3878cb8dd/files/slides-build/img/grad-corner-pattern.png">    </p:cNvPr>
+          <p:cNvPr id="5" name="Image 0" descr="">
+            <a:extLst>
+              <a:ext uri="{C183D7F6-B498-43B3-948B-1728B52AA6E4}">
+                <adec:decorative xmlns:adec="http://schemas.microsoft.com/office/drawing/2017/decorative" val="1"/>
+              </a:ext>
+            </a:extLst>
+          </p:cNvPr>
           <p:cNvPicPr>
             <a:picLocks noChangeAspect="1"/>
           </p:cNvPicPr>
@@ -2719,7 +2737,7 @@
       </p:sp>
       <p:pic>
         <p:nvPicPr>
-          <p:cNvPr id="8" name="Image 1" descr="/Users/danwahlin/.copilot/session-state/56a7a0da-def8-48d4-b5e8-0ac3878cb8dd/files/slides-build/icons/FaGithub-1F2328.png">
+          <p:cNvPr id="8" name="Image 1" descr="Open this chapter on GitHub">
             <a:hlinkClick r:id="rId3" tooltip="https://github.com/github/copilot-app-for-beginners/tree/main/01-tour-the-app"/>
           </p:cNvPr>
           <p:cNvPicPr>
@@ -2935,7 +2953,13 @@
       </p:grpSpPr>
       <p:pic>
         <p:nvPicPr>
-          <p:cNvPr id="2" name="Image 0" descr="/Users/danwahlin/.copilot/session-state/56a7a0da-def8-48d4-b5e8-0ac3878cb8dd/files/slides-build/img/grad-corner-pattern.png">    </p:cNvPr>
+          <p:cNvPr id="2" name="Image 0" descr="">
+            <a:extLst>
+              <a:ext uri="{C183D7F6-B498-43B3-948B-1728B52AA6E4}">
+                <adec:decorative xmlns:adec="http://schemas.microsoft.com/office/drawing/2017/decorative" val="1"/>
+              </a:ext>
+            </a:extLst>
+          </p:cNvPr>
           <p:cNvPicPr>
             <a:picLocks noChangeAspect="1"/>
           </p:cNvPicPr>
@@ -3030,7 +3054,7 @@
       </p:sp>
       <p:pic>
         <p:nvPicPr>
-          <p:cNvPr id="5" name="Image 1" descr="/Users/danwahlin/.copilot/session-state/56a7a0da-def8-48d4-b5e8-0ac3878cb8dd/files/slides-build/icons/FaGithub-1F2328.png">
+          <p:cNvPr id="5" name="Image 1" descr="Open this chapter on GitHub">
             <a:hlinkClick r:id="rId3" tooltip="https://github.com/github/copilot-app-for-beginners/tree/main/01-tour-the-app"/>
           </p:cNvPr>
           <p:cNvPicPr>
@@ -3228,7 +3252,7 @@
       </p:sp>
       <p:pic>
         <p:nvPicPr>
-          <p:cNvPr id="10" name="Image 2" descr="/Users/danwahlin/.copilot/session-state/56a7a0da-def8-48d4-b5e8-0ac3878cb8dd/files/slides-build/img/01-producer-control-room-modes.jpg">    </p:cNvPr>
+          <p:cNvPr id="10" name="Image 2" descr="Producer's control room with a Chat Session and Project Session switch and Interactive, Plan, and Autopilot sections on the mixing desk">    </p:cNvPr>
           <p:cNvPicPr>
             <a:picLocks noChangeAspect="1"/>
           </p:cNvPicPr>
@@ -3284,7 +3308,13 @@
       </p:sp>
       <p:pic>
         <p:nvPicPr>
-          <p:cNvPr id="12" name="Image 3" descr="/Users/danwahlin/.copilot/session-state/56a7a0da-def8-48d4-b5e8-0ac3878cb8dd/files/slides-build/icons/GoCommentDiscussion-0969DA.png">    </p:cNvPr>
+          <p:cNvPr id="12" name="Image 3" descr="">
+            <a:extLst>
+              <a:ext uri="{C183D7F6-B498-43B3-948B-1728B52AA6E4}">
+                <adec:decorative xmlns:adec="http://schemas.microsoft.com/office/drawing/2017/decorative" val="1"/>
+              </a:ext>
+            </a:extLst>
+          </p:cNvPr>
           <p:cNvPicPr>
             <a:picLocks noChangeAspect="1"/>
           </p:cNvPicPr>
@@ -3421,7 +3451,13 @@
       </p:sp>
       <p:pic>
         <p:nvPicPr>
-          <p:cNvPr id="16" name="Image 4" descr="/Users/danwahlin/.copilot/session-state/56a7a0da-def8-48d4-b5e8-0ac3878cb8dd/files/slides-build/icons/GoPerson-8250DF.png">    </p:cNvPr>
+          <p:cNvPr id="16" name="Image 4" descr="">
+            <a:extLst>
+              <a:ext uri="{C183D7F6-B498-43B3-948B-1728B52AA6E4}">
+                <adec:decorative xmlns:adec="http://schemas.microsoft.com/office/drawing/2017/decorative" val="1"/>
+              </a:ext>
+            </a:extLst>
+          </p:cNvPr>
           <p:cNvPicPr>
             <a:picLocks noChangeAspect="1"/>
           </p:cNvPicPr>
@@ -3558,7 +3594,13 @@
       </p:sp>
       <p:pic>
         <p:nvPicPr>
-          <p:cNvPr id="20" name="Image 5" descr="/Users/danwahlin/.copilot/session-state/56a7a0da-def8-48d4-b5e8-0ac3878cb8dd/files/slides-build/icons/GoChecklist-1A7F37.png">    </p:cNvPr>
+          <p:cNvPr id="20" name="Image 5" descr="">
+            <a:extLst>
+              <a:ext uri="{C183D7F6-B498-43B3-948B-1728B52AA6E4}">
+                <adec:decorative xmlns:adec="http://schemas.microsoft.com/office/drawing/2017/decorative" val="1"/>
+              </a:ext>
+            </a:extLst>
+          </p:cNvPr>
           <p:cNvPicPr>
             <a:picLocks noChangeAspect="1"/>
           </p:cNvPicPr>
@@ -3695,7 +3737,13 @@
       </p:sp>
       <p:pic>
         <p:nvPicPr>
-          <p:cNvPr id="24" name="Image 6" descr="/Users/danwahlin/.copilot/session-state/56a7a0da-def8-48d4-b5e8-0ac3878cb8dd/files/slides-build/icons/GoRocket-BC4C00.png">    </p:cNvPr>
+          <p:cNvPr id="24" name="Image 6" descr="">
+            <a:extLst>
+              <a:ext uri="{C183D7F6-B498-43B3-948B-1728B52AA6E4}">
+                <adec:decorative xmlns:adec="http://schemas.microsoft.com/office/drawing/2017/decorative" val="1"/>
+              </a:ext>
+            </a:extLst>
+          </p:cNvPr>
           <p:cNvPicPr>
             <a:picLocks noChangeAspect="1"/>
           </p:cNvPicPr>
@@ -3832,7 +3880,13 @@
       </p:grpSpPr>
       <p:pic>
         <p:nvPicPr>
-          <p:cNvPr id="2" name="Image 0" descr="/Users/danwahlin/.copilot/session-state/56a7a0da-def8-48d4-b5e8-0ac3878cb8dd/files/slides-build/img/grad-corner-pattern.png">    </p:cNvPr>
+          <p:cNvPr id="2" name="Image 0" descr="">
+            <a:extLst>
+              <a:ext uri="{C183D7F6-B498-43B3-948B-1728B52AA6E4}">
+                <adec:decorative xmlns:adec="http://schemas.microsoft.com/office/drawing/2017/decorative" val="1"/>
+              </a:ext>
+            </a:extLst>
+          </p:cNvPr>
           <p:cNvPicPr>
             <a:picLocks noChangeAspect="1"/>
           </p:cNvPicPr>
@@ -3927,7 +3981,7 @@
       </p:sp>
       <p:pic>
         <p:nvPicPr>
-          <p:cNvPr id="5" name="Image 1" descr="/Users/danwahlin/.copilot/session-state/56a7a0da-def8-48d4-b5e8-0ac3878cb8dd/files/slides-build/icons/FaGithub-1F2328.png">
+          <p:cNvPr id="5" name="Image 1" descr="Open this chapter on GitHub">
             <a:hlinkClick r:id="rId3" tooltip="https://github.com/github/copilot-app-for-beginners/tree/main/01-tour-the-app"/>
           </p:cNvPr>
           <p:cNvPicPr>
@@ -4105,7 +4159,13 @@
       </p:sp>
       <p:pic>
         <p:nvPicPr>
-          <p:cNvPr id="10" name="Image 2" descr="/Users/danwahlin/.copilot/session-state/56a7a0da-def8-48d4-b5e8-0ac3878cb8dd/files/slides-build/icons/GoCommentDiscussion-0969DA.png">    </p:cNvPr>
+          <p:cNvPr id="10" name="Image 2" descr="">
+            <a:extLst>
+              <a:ext uri="{C183D7F6-B498-43B3-948B-1728B52AA6E4}">
+                <adec:decorative xmlns:adec="http://schemas.microsoft.com/office/drawing/2017/decorative" val="1"/>
+              </a:ext>
+            </a:extLst>
+          </p:cNvPr>
           <p:cNvPicPr>
             <a:picLocks noChangeAspect="1"/>
           </p:cNvPicPr>
@@ -4585,7 +4645,13 @@
       </p:sp>
       <p:pic>
         <p:nvPicPr>
-          <p:cNvPr id="23" name="Image 3" descr="/Users/danwahlin/.copilot/session-state/56a7a0da-def8-48d4-b5e8-0ac3878cb8dd/files/slides-build/icons/GoCopilot-0969DA.png">    </p:cNvPr>
+          <p:cNvPr id="23" name="Image 3" descr="">
+            <a:extLst>
+              <a:ext uri="{C183D7F6-B498-43B3-948B-1728B52AA6E4}">
+                <adec:decorative xmlns:adec="http://schemas.microsoft.com/office/drawing/2017/decorative" val="1"/>
+              </a:ext>
+            </a:extLst>
+          </p:cNvPr>
           <p:cNvPicPr>
             <a:picLocks noChangeAspect="1"/>
           </p:cNvPicPr>
@@ -4758,7 +4824,13 @@
       </p:sp>
       <p:pic>
         <p:nvPicPr>
-          <p:cNvPr id="28" name="Image 4" descr="/Users/danwahlin/.copilot/session-state/56a7a0da-def8-48d4-b5e8-0ac3878cb8dd/files/slides-build/icons/GoRepo-8250DF.png">    </p:cNvPr>
+          <p:cNvPr id="28" name="Image 4" descr="">
+            <a:extLst>
+              <a:ext uri="{C183D7F6-B498-43B3-948B-1728B52AA6E4}">
+                <adec:decorative xmlns:adec="http://schemas.microsoft.com/office/drawing/2017/decorative" val="1"/>
+              </a:ext>
+            </a:extLst>
+          </p:cNvPr>
           <p:cNvPicPr>
             <a:picLocks noChangeAspect="1"/>
           </p:cNvPicPr>
@@ -5221,7 +5293,13 @@
       </p:sp>
       <p:pic>
         <p:nvPicPr>
-          <p:cNvPr id="41" name="Image 5" descr="/Users/danwahlin/.copilot/session-state/56a7a0da-def8-48d4-b5e8-0ac3878cb8dd/files/slides-build/icons/GoCopilot-8250DF.png">    </p:cNvPr>
+          <p:cNvPr id="41" name="Image 5" descr="">
+            <a:extLst>
+              <a:ext uri="{C183D7F6-B498-43B3-948B-1728B52AA6E4}">
+                <adec:decorative xmlns:adec="http://schemas.microsoft.com/office/drawing/2017/decorative" val="1"/>
+              </a:ext>
+            </a:extLst>
+          </p:cNvPr>
           <p:cNvPicPr>
             <a:picLocks noChangeAspect="1"/>
           </p:cNvPicPr>
@@ -5358,7 +5436,13 @@
       </p:grpSpPr>
       <p:pic>
         <p:nvPicPr>
-          <p:cNvPr id="2" name="Image 0" descr="/Users/danwahlin/.copilot/session-state/56a7a0da-def8-48d4-b5e8-0ac3878cb8dd/files/slides-build/img/grad-corner-pattern.png">    </p:cNvPr>
+          <p:cNvPr id="2" name="Image 0" descr="">
+            <a:extLst>
+              <a:ext uri="{C183D7F6-B498-43B3-948B-1728B52AA6E4}">
+                <adec:decorative xmlns:adec="http://schemas.microsoft.com/office/drawing/2017/decorative" val="1"/>
+              </a:ext>
+            </a:extLst>
+          </p:cNvPr>
           <p:cNvPicPr>
             <a:picLocks noChangeAspect="1"/>
           </p:cNvPicPr>
@@ -5453,7 +5537,7 @@
       </p:sp>
       <p:pic>
         <p:nvPicPr>
-          <p:cNvPr id="5" name="Image 1" descr="/Users/danwahlin/.copilot/session-state/56a7a0da-def8-48d4-b5e8-0ac3878cb8dd/files/slides-build/icons/FaGithub-1F2328.png">
+          <p:cNvPr id="5" name="Image 1" descr="Open this chapter on GitHub">
             <a:hlinkClick r:id="rId3" tooltip="https://github.com/github/copilot-app-for-beginners/tree/main/01-tour-the-app"/>
           </p:cNvPr>
           <p:cNvPicPr>
@@ -5606,7 +5690,7 @@
       </p:sp>
       <p:pic>
         <p:nvPicPr>
-          <p:cNvPr id="9" name="Image 2" descr="/Users/danwahlin/.copilot/session-state/56a7a0da-def8-48d4-b5e8-0ac3878cb8dd/files/slides-build/img/01-session-mode-decision-ladder.jpg">    </p:cNvPr>
+          <p:cNvPr id="9" name="Image 2" descr="Session modes: Interactive, Plan, and Autopilot, with more autonomy from left to right. Pick the mode that fits the task.">    </p:cNvPr>
           <p:cNvPicPr>
             <a:picLocks noChangeAspect="1"/>
           </p:cNvPicPr>
@@ -5698,7 +5782,13 @@
       </p:sp>
       <p:pic>
         <p:nvPicPr>
-          <p:cNvPr id="12" name="Image 3" descr="/Users/danwahlin/.copilot/session-state/56a7a0da-def8-48d4-b5e8-0ac3878cb8dd/files/slides-build/icons/GoPerson-0969DA.png">    </p:cNvPr>
+          <p:cNvPr id="12" name="Image 3" descr="">
+            <a:extLst>
+              <a:ext uri="{C183D7F6-B498-43B3-948B-1728B52AA6E4}">
+                <adec:decorative xmlns:adec="http://schemas.microsoft.com/office/drawing/2017/decorative" val="1"/>
+              </a:ext>
+            </a:extLst>
+          </p:cNvPr>
           <p:cNvPicPr>
             <a:picLocks noChangeAspect="1"/>
           </p:cNvPicPr>
@@ -5874,7 +5964,13 @@
       </p:sp>
       <p:pic>
         <p:nvPicPr>
-          <p:cNvPr id="17" name="Image 4" descr="/Users/danwahlin/.copilot/session-state/56a7a0da-def8-48d4-b5e8-0ac3878cb8dd/files/slides-build/icons/GoChecklist-8250DF.png">    </p:cNvPr>
+          <p:cNvPr id="17" name="Image 4" descr="">
+            <a:extLst>
+              <a:ext uri="{C183D7F6-B498-43B3-948B-1728B52AA6E4}">
+                <adec:decorative xmlns:adec="http://schemas.microsoft.com/office/drawing/2017/decorative" val="1"/>
+              </a:ext>
+            </a:extLst>
+          </p:cNvPr>
           <p:cNvPicPr>
             <a:picLocks noChangeAspect="1"/>
           </p:cNvPicPr>
@@ -6050,7 +6146,13 @@
       </p:sp>
       <p:pic>
         <p:nvPicPr>
-          <p:cNvPr id="22" name="Image 5" descr="/Users/danwahlin/.copilot/session-state/56a7a0da-def8-48d4-b5e8-0ac3878cb8dd/files/slides-build/icons/GoRocket-1A7F37.png">    </p:cNvPr>
+          <p:cNvPr id="22" name="Image 5" descr="">
+            <a:extLst>
+              <a:ext uri="{C183D7F6-B498-43B3-948B-1728B52AA6E4}">
+                <adec:decorative xmlns:adec="http://schemas.microsoft.com/office/drawing/2017/decorative" val="1"/>
+              </a:ext>
+            </a:extLst>
+          </p:cNvPr>
           <p:cNvPicPr>
             <a:picLocks noChangeAspect="1"/>
           </p:cNvPicPr>
@@ -6194,7 +6296,13 @@
       </p:sp>
       <p:pic>
         <p:nvPicPr>
-          <p:cNvPr id="26" name="Image 6" descr="/Users/danwahlin/.copilot/session-state/56a7a0da-def8-48d4-b5e8-0ac3878cb8dd/files/slides-build/icons/GoShieldCheck-0969DA.png">    </p:cNvPr>
+          <p:cNvPr id="26" name="Image 6" descr="">
+            <a:extLst>
+              <a:ext uri="{C183D7F6-B498-43B3-948B-1728B52AA6E4}">
+                <adec:decorative xmlns:adec="http://schemas.microsoft.com/office/drawing/2017/decorative" val="1"/>
+              </a:ext>
+            </a:extLst>
+          </p:cNvPr>
           <p:cNvPicPr>
             <a:picLocks noChangeAspect="1"/>
           </p:cNvPicPr>
@@ -6309,7 +6417,13 @@
       </p:grpSpPr>
       <p:pic>
         <p:nvPicPr>
-          <p:cNvPr id="2" name="Image 0" descr="/Users/danwahlin/.copilot/session-state/56a7a0da-def8-48d4-b5e8-0ac3878cb8dd/files/slides-build/img/grad-corner-pattern.png">    </p:cNvPr>
+          <p:cNvPr id="2" name="Image 0" descr="">
+            <a:extLst>
+              <a:ext uri="{C183D7F6-B498-43B3-948B-1728B52AA6E4}">
+                <adec:decorative xmlns:adec="http://schemas.microsoft.com/office/drawing/2017/decorative" val="1"/>
+              </a:ext>
+            </a:extLst>
+          </p:cNvPr>
           <p:cNvPicPr>
             <a:picLocks noChangeAspect="1"/>
           </p:cNvPicPr>
@@ -6404,7 +6518,7 @@
       </p:sp>
       <p:pic>
         <p:nvPicPr>
-          <p:cNvPr id="5" name="Image 1" descr="/Users/danwahlin/.copilot/session-state/56a7a0da-def8-48d4-b5e8-0ac3878cb8dd/files/slides-build/icons/FaGithub-1F2328.png">
+          <p:cNvPr id="5" name="Image 1" descr="Open this chapter on GitHub">
             <a:hlinkClick r:id="rId3" tooltip="https://github.com/github/copilot-app-for-beginners/tree/main/01-tour-the-app"/>
           </p:cNvPr>
           <p:cNvPicPr>
@@ -6884,7 +6998,13 @@
       </p:sp>
       <p:pic>
         <p:nvPicPr>
-          <p:cNvPr id="18" name="Image 2" descr="/Users/danwahlin/.copilot/session-state/56a7a0da-def8-48d4-b5e8-0ac3878cb8dd/files/slides-build/icons/GoAlert-9A6700.png">    </p:cNvPr>
+          <p:cNvPr id="18" name="Image 2" descr="">
+            <a:extLst>
+              <a:ext uri="{C183D7F6-B498-43B3-948B-1728B52AA6E4}">
+                <adec:decorative xmlns:adec="http://schemas.microsoft.com/office/drawing/2017/decorative" val="1"/>
+              </a:ext>
+            </a:extLst>
+          </p:cNvPr>
           <p:cNvPicPr>
             <a:picLocks noChangeAspect="1"/>
           </p:cNvPicPr>
@@ -7125,7 +7245,13 @@
       </p:sp>
       <p:pic>
         <p:nvPicPr>
-          <p:cNvPr id="25" name="Image 3" descr="/Users/danwahlin/.copilot/session-state/56a7a0da-def8-48d4-b5e8-0ac3878cb8dd/files/slides-build/icons/GoCopilot-8250DF.png">    </p:cNvPr>
+          <p:cNvPr id="25" name="Image 3" descr="">
+            <a:extLst>
+              <a:ext uri="{C183D7F6-B498-43B3-948B-1728B52AA6E4}">
+                <adec:decorative xmlns:adec="http://schemas.microsoft.com/office/drawing/2017/decorative" val="1"/>
+              </a:ext>
+            </a:extLst>
+          </p:cNvPr>
           <p:cNvPicPr>
             <a:picLocks noChangeAspect="1"/>
           </p:cNvPicPr>
@@ -7266,7 +7392,13 @@
       </p:sp>
       <p:pic>
         <p:nvPicPr>
-          <p:cNvPr id="29" name="Image 4" descr="/Users/danwahlin/.copilot/session-state/56a7a0da-def8-48d4-b5e8-0ac3878cb8dd/files/slides-build/icons/GoCheckCircle-1A7F37.png">    </p:cNvPr>
+          <p:cNvPr id="29" name="Image 4" descr="">
+            <a:extLst>
+              <a:ext uri="{C183D7F6-B498-43B3-948B-1728B52AA6E4}">
+                <adec:decorative xmlns:adec="http://schemas.microsoft.com/office/drawing/2017/decorative" val="1"/>
+              </a:ext>
+            </a:extLst>
+          </p:cNvPr>
           <p:cNvPicPr>
             <a:picLocks noChangeAspect="1"/>
           </p:cNvPicPr>
@@ -7415,7 +7547,13 @@
       </p:grpSpPr>
       <p:pic>
         <p:nvPicPr>
-          <p:cNvPr id="2" name="Image 0" descr="/Users/danwahlin/.copilot/session-state/56a7a0da-def8-48d4-b5e8-0ac3878cb8dd/files/slides-build/img/grad-corner-pattern.png">    </p:cNvPr>
+          <p:cNvPr id="2" name="Image 0" descr="">
+            <a:extLst>
+              <a:ext uri="{C183D7F6-B498-43B3-948B-1728B52AA6E4}">
+                <adec:decorative xmlns:adec="http://schemas.microsoft.com/office/drawing/2017/decorative" val="1"/>
+              </a:ext>
+            </a:extLst>
+          </p:cNvPr>
           <p:cNvPicPr>
             <a:picLocks noChangeAspect="1"/>
           </p:cNvPicPr>
@@ -7510,7 +7648,7 @@
       </p:sp>
       <p:pic>
         <p:nvPicPr>
-          <p:cNvPr id="5" name="Image 1" descr="/Users/danwahlin/.copilot/session-state/56a7a0da-def8-48d4-b5e8-0ac3878cb8dd/files/slides-build/icons/FaGithub-1F2328.png">
+          <p:cNvPr id="5" name="Image 1" descr="Open this chapter on GitHub">
             <a:hlinkClick r:id="rId3" tooltip="https://github.com/github/copilot-app-for-beginners/tree/main/01-tour-the-app"/>
           </p:cNvPr>
           <p:cNvPicPr>
@@ -7733,7 +7871,13 @@
       </p:sp>
       <p:pic>
         <p:nvPicPr>
-          <p:cNvPr id="11" name="Image 2" descr="/Users/danwahlin/.copilot/session-state/56a7a0da-def8-48d4-b5e8-0ac3878cb8dd/files/slides-build/icons/GoSync-0969DA.png">    </p:cNvPr>
+          <p:cNvPr id="11" name="Image 2" descr="">
+            <a:extLst>
+              <a:ext uri="{C183D7F6-B498-43B3-948B-1728B52AA6E4}">
+                <adec:decorative xmlns:adec="http://schemas.microsoft.com/office/drawing/2017/decorative" val="1"/>
+              </a:ext>
+            </a:extLst>
+          </p:cNvPr>
           <p:cNvPicPr>
             <a:picLocks noChangeAspect="1"/>
           </p:cNvPicPr>
@@ -7943,7 +8087,13 @@
       </p:sp>
       <p:pic>
         <p:nvPicPr>
-          <p:cNvPr id="16" name="Image 3" descr="/Users/danwahlin/.copilot/session-state/56a7a0da-def8-48d4-b5e8-0ac3878cb8dd/files/slides-build/icons/GoHistory-8250DF.png">    </p:cNvPr>
+          <p:cNvPr id="16" name="Image 3" descr="">
+            <a:extLst>
+              <a:ext uri="{C183D7F6-B498-43B3-948B-1728B52AA6E4}">
+                <adec:decorative xmlns:adec="http://schemas.microsoft.com/office/drawing/2017/decorative" val="1"/>
+              </a:ext>
+            </a:extLst>
+          </p:cNvPr>
           <p:cNvPicPr>
             <a:picLocks noChangeAspect="1"/>
           </p:cNvPicPr>
@@ -8187,7 +8337,13 @@
       </p:sp>
       <p:pic>
         <p:nvPicPr>
-          <p:cNvPr id="21" name="Image 4" descr="/Users/danwahlin/.copilot/session-state/56a7a0da-def8-48d4-b5e8-0ac3878cb8dd/files/slides-build/icons/GoUnmute-1A7F37.png">    </p:cNvPr>
+          <p:cNvPr id="21" name="Image 4" descr="">
+            <a:extLst>
+              <a:ext uri="{C183D7F6-B498-43B3-948B-1728B52AA6E4}">
+                <adec:decorative xmlns:adec="http://schemas.microsoft.com/office/drawing/2017/decorative" val="1"/>
+              </a:ext>
+            </a:extLst>
+          </p:cNvPr>
           <p:cNvPicPr>
             <a:picLocks noChangeAspect="1"/>
           </p:cNvPicPr>
@@ -8327,7 +8483,13 @@
       </p:grpSpPr>
       <p:pic>
         <p:nvPicPr>
-          <p:cNvPr id="2" name="Image 0" descr="/Users/danwahlin/.copilot/session-state/56a7a0da-def8-48d4-b5e8-0ac3878cb8dd/files/slides-build/img/grad-corner-pattern.png">    </p:cNvPr>
+          <p:cNvPr id="2" name="Image 0" descr="">
+            <a:extLst>
+              <a:ext uri="{C183D7F6-B498-43B3-948B-1728B52AA6E4}">
+                <adec:decorative xmlns:adec="http://schemas.microsoft.com/office/drawing/2017/decorative" val="1"/>
+              </a:ext>
+            </a:extLst>
+          </p:cNvPr>
           <p:cNvPicPr>
             <a:picLocks noChangeAspect="1"/>
           </p:cNvPicPr>
@@ -8422,7 +8584,7 @@
       </p:sp>
       <p:pic>
         <p:nvPicPr>
-          <p:cNvPr id="5" name="Image 1" descr="/Users/danwahlin/.copilot/session-state/56a7a0da-def8-48d4-b5e8-0ac3878cb8dd/files/slides-build/icons/FaGithub-1F2328.png">
+          <p:cNvPr id="5" name="Image 1" descr="Open this chapter on GitHub">
             <a:hlinkClick r:id="rId3" tooltip="https://github.com/github/copilot-app-for-beginners/tree/main/01-tour-the-app"/>
           </p:cNvPr>
           <p:cNvPicPr>
@@ -9196,7 +9358,13 @@
       </p:sp>
       <p:pic>
         <p:nvPicPr>
-          <p:cNvPr id="26" name="Image 2" descr="/Users/danwahlin/.copilot/session-state/56a7a0da-def8-48d4-b5e8-0ac3878cb8dd/files/slides-build/icons/FaGithub-0969DA.png">    </p:cNvPr>
+          <p:cNvPr id="26" name="Image 2" descr="">
+            <a:extLst>
+              <a:ext uri="{C183D7F6-B498-43B3-948B-1728B52AA6E4}">
+                <adec:decorative xmlns:adec="http://schemas.microsoft.com/office/drawing/2017/decorative" val="1"/>
+              </a:ext>
+            </a:extLst>
+          </p:cNvPr>
           <p:cNvPicPr>
             <a:picLocks noChangeAspect="1"/>
           </p:cNvPicPr>
@@ -9422,7 +9590,13 @@
       </p:grpSpPr>
       <p:pic>
         <p:nvPicPr>
-          <p:cNvPr id="2" name="Image 0" descr="/Users/danwahlin/.copilot/session-state/56a7a0da-def8-48d4-b5e8-0ac3878cb8dd/files/slides-build/img/grad-corner-pattern.png">    </p:cNvPr>
+          <p:cNvPr id="2" name="Image 0" descr="">
+            <a:extLst>
+              <a:ext uri="{C183D7F6-B498-43B3-948B-1728B52AA6E4}">
+                <adec:decorative xmlns:adec="http://schemas.microsoft.com/office/drawing/2017/decorative" val="1"/>
+              </a:ext>
+            </a:extLst>
+          </p:cNvPr>
           <p:cNvPicPr>
             <a:picLocks noChangeAspect="1"/>
           </p:cNvPicPr>
@@ -9517,7 +9691,7 @@
       </p:sp>
       <p:pic>
         <p:nvPicPr>
-          <p:cNvPr id="5" name="Image 1" descr="/Users/danwahlin/.copilot/session-state/56a7a0da-def8-48d4-b5e8-0ac3878cb8dd/files/slides-build/icons/FaGithub-1F2328.png">
+          <p:cNvPr id="5" name="Image 1" descr="Open this chapter on GitHub">
             <a:hlinkClick r:id="rId3" tooltip="https://github.com/github/copilot-app-for-beginners/tree/main/01-tour-the-app"/>
           </p:cNvPr>
           <p:cNvPicPr>
@@ -10493,7 +10667,13 @@
       </p:sp>
       <p:pic>
         <p:nvPicPr>
-          <p:cNvPr id="5" name="Image 0" descr="/Users/danwahlin/.copilot/session-state/56a7a0da-def8-48d4-b5e8-0ac3878cb8dd/files/slides-build/img/grad-corner-pattern.png">    </p:cNvPr>
+          <p:cNvPr id="5" name="Image 0" descr="">
+            <a:extLst>
+              <a:ext uri="{C183D7F6-B498-43B3-948B-1728B52AA6E4}">
+                <adec:decorative xmlns:adec="http://schemas.microsoft.com/office/drawing/2017/decorative" val="1"/>
+              </a:ext>
+            </a:extLst>
+          </p:cNvPr>
           <p:cNvPicPr>
             <a:picLocks noChangeAspect="1"/>
           </p:cNvPicPr>
@@ -10588,7 +10768,7 @@
       </p:sp>
       <p:pic>
         <p:nvPicPr>
-          <p:cNvPr id="8" name="Image 1" descr="/Users/danwahlin/.copilot/session-state/56a7a0da-def8-48d4-b5e8-0ac3878cb8dd/files/slides-build/icons/FaGithub-1F2328.png">
+          <p:cNvPr id="8" name="Image 1" descr="Open this chapter on GitHub">
             <a:hlinkClick r:id="rId3" tooltip="https://github.com/github/copilot-app-for-beginners/tree/main/01-tour-the-app"/>
           </p:cNvPr>
           <p:cNvPicPr>
@@ -10804,7 +10984,13 @@
       </p:grpSpPr>
       <p:pic>
         <p:nvPicPr>
-          <p:cNvPr id="2" name="Image 0" descr="/Users/danwahlin/.copilot/session-state/56a7a0da-def8-48d4-b5e8-0ac3878cb8dd/files/slides-build/img/grad-corner-pattern.png">    </p:cNvPr>
+          <p:cNvPr id="2" name="Image 0" descr="">
+            <a:extLst>
+              <a:ext uri="{C183D7F6-B498-43B3-948B-1728B52AA6E4}">
+                <adec:decorative xmlns:adec="http://schemas.microsoft.com/office/drawing/2017/decorative" val="1"/>
+              </a:ext>
+            </a:extLst>
+          </p:cNvPr>
           <p:cNvPicPr>
             <a:picLocks noChangeAspect="1"/>
           </p:cNvPicPr>
@@ -10899,7 +11085,7 @@
       </p:sp>
       <p:pic>
         <p:nvPicPr>
-          <p:cNvPr id="5" name="Image 1" descr="/Users/danwahlin/.copilot/session-state/56a7a0da-def8-48d4-b5e8-0ac3878cb8dd/files/slides-build/icons/FaGithub-1F2328.png">
+          <p:cNvPr id="5" name="Image 1" descr="Open this chapter on GitHub">
             <a:hlinkClick r:id="rId3" tooltip="https://github.com/github/copilot-app-for-beginners/tree/main/01-tour-the-app"/>
           </p:cNvPr>
           <p:cNvPicPr>
@@ -11771,7 +11957,13 @@
       </p:grpSpPr>
       <p:pic>
         <p:nvPicPr>
-          <p:cNvPr id="2" name="Image 0" descr="/Users/danwahlin/.copilot/session-state/56a7a0da-def8-48d4-b5e8-0ac3878cb8dd/files/slides-build/img/grad-corner-pattern.png">    </p:cNvPr>
+          <p:cNvPr id="2" name="Image 0" descr="">
+            <a:extLst>
+              <a:ext uri="{C183D7F6-B498-43B3-948B-1728B52AA6E4}">
+                <adec:decorative xmlns:adec="http://schemas.microsoft.com/office/drawing/2017/decorative" val="1"/>
+              </a:ext>
+            </a:extLst>
+          </p:cNvPr>
           <p:cNvPicPr>
             <a:picLocks noChangeAspect="1"/>
           </p:cNvPicPr>
@@ -11866,7 +12058,7 @@
       </p:sp>
       <p:pic>
         <p:nvPicPr>
-          <p:cNvPr id="5" name="Image 1" descr="/Users/danwahlin/.copilot/session-state/56a7a0da-def8-48d4-b5e8-0ac3878cb8dd/files/slides-build/icons/FaGithub-1F2328.png">
+          <p:cNvPr id="5" name="Image 1" descr="Open this chapter on GitHub">
             <a:hlinkClick r:id="rId3" tooltip="https://github.com/github/copilot-app-for-beginners/tree/main/01-tour-the-app"/>
           </p:cNvPr>
           <p:cNvPicPr>
@@ -12019,7 +12211,7 @@
       </p:sp>
       <p:pic>
         <p:nvPicPr>
-          <p:cNvPr id="9" name="Image 2" descr="/Users/danwahlin/.copilot/session-state/56a7a0da-def8-48d4-b5e8-0ac3878cb8dd/files/slides-build/img/01-editor-vs-app.jpg">    </p:cNvPr>
+          <p:cNvPr id="9" name="Image 2" descr="Editor versus GitHub Copilot app">    </p:cNvPr>
           <p:cNvPicPr>
             <a:picLocks noChangeAspect="1"/>
           </p:cNvPicPr>
@@ -12111,7 +12303,13 @@
       </p:sp>
       <p:pic>
         <p:nvPicPr>
-          <p:cNvPr id="12" name="Image 3" descr="/Users/danwahlin/.copilot/session-state/56a7a0da-def8-48d4-b5e8-0ac3878cb8dd/files/slides-build/icons/GoCode-0969DA.png">    </p:cNvPr>
+          <p:cNvPr id="12" name="Image 3" descr="">
+            <a:extLst>
+              <a:ext uri="{C183D7F6-B498-43B3-948B-1728B52AA6E4}">
+                <adec:decorative xmlns:adec="http://schemas.microsoft.com/office/drawing/2017/decorative" val="1"/>
+              </a:ext>
+            </a:extLst>
+          </p:cNvPr>
           <p:cNvPicPr>
             <a:picLocks noChangeAspect="1"/>
           </p:cNvPicPr>
@@ -12284,7 +12482,13 @@
       </p:sp>
       <p:pic>
         <p:nvPicPr>
-          <p:cNvPr id="17" name="Image 4" descr="/Users/danwahlin/.copilot/session-state/56a7a0da-def8-48d4-b5e8-0ac3878cb8dd/files/slides-build/icons/GoCopilot-8250DF.png">    </p:cNvPr>
+          <p:cNvPr id="17" name="Image 4" descr="">
+            <a:extLst>
+              <a:ext uri="{C183D7F6-B498-43B3-948B-1728B52AA6E4}">
+                <adec:decorative xmlns:adec="http://schemas.microsoft.com/office/drawing/2017/decorative" val="1"/>
+              </a:ext>
+            </a:extLst>
+          </p:cNvPr>
           <p:cNvPicPr>
             <a:picLocks noChangeAspect="1"/>
           </p:cNvPicPr>
@@ -12457,7 +12661,13 @@
       </p:sp>
       <p:pic>
         <p:nvPicPr>
-          <p:cNvPr id="22" name="Image 5" descr="/Users/danwahlin/.copilot/session-state/56a7a0da-def8-48d4-b5e8-0ac3878cb8dd/files/slides-build/icons/GoLinkExternal-1A7F37.png">    </p:cNvPr>
+          <p:cNvPr id="22" name="Image 5" descr="">
+            <a:extLst>
+              <a:ext uri="{C183D7F6-B498-43B3-948B-1728B52AA6E4}">
+                <adec:decorative xmlns:adec="http://schemas.microsoft.com/office/drawing/2017/decorative" val="1"/>
+              </a:ext>
+            </a:extLst>
+          </p:cNvPr>
           <p:cNvPicPr>
             <a:picLocks noChangeAspect="1"/>
           </p:cNvPicPr>
@@ -12696,7 +12906,13 @@
       </p:sp>
       <p:pic>
         <p:nvPicPr>
-          <p:cNvPr id="5" name="Image 0" descr="/Users/danwahlin/.copilot/session-state/56a7a0da-def8-48d4-b5e8-0ac3878cb8dd/files/slides-build/img/grad-corner-pattern.png">    </p:cNvPr>
+          <p:cNvPr id="5" name="Image 0" descr="">
+            <a:extLst>
+              <a:ext uri="{C183D7F6-B498-43B3-948B-1728B52AA6E4}">
+                <adec:decorative xmlns:adec="http://schemas.microsoft.com/office/drawing/2017/decorative" val="1"/>
+              </a:ext>
+            </a:extLst>
+          </p:cNvPr>
           <p:cNvPicPr>
             <a:picLocks noChangeAspect="1"/>
           </p:cNvPicPr>
@@ -12791,7 +13007,7 @@
       </p:sp>
       <p:pic>
         <p:nvPicPr>
-          <p:cNvPr id="8" name="Image 1" descr="/Users/danwahlin/.copilot/session-state/56a7a0da-def8-48d4-b5e8-0ac3878cb8dd/files/slides-build/icons/FaGithub-1F2328.png">
+          <p:cNvPr id="8" name="Image 1" descr="Open this chapter on GitHub">
             <a:hlinkClick r:id="rId3" tooltip="https://github.com/github/copilot-app-for-beginners/tree/main/01-tour-the-app"/>
           </p:cNvPr>
           <p:cNvPicPr>
@@ -13007,7 +13223,13 @@
       </p:grpSpPr>
       <p:pic>
         <p:nvPicPr>
-          <p:cNvPr id="2" name="Image 0" descr="/Users/danwahlin/.copilot/session-state/56a7a0da-def8-48d4-b5e8-0ac3878cb8dd/files/slides-build/img/grad-corner-pattern.png">    </p:cNvPr>
+          <p:cNvPr id="2" name="Image 0" descr="">
+            <a:extLst>
+              <a:ext uri="{C183D7F6-B498-43B3-948B-1728B52AA6E4}">
+                <adec:decorative xmlns:adec="http://schemas.microsoft.com/office/drawing/2017/decorative" val="1"/>
+              </a:ext>
+            </a:extLst>
+          </p:cNvPr>
           <p:cNvPicPr>
             <a:picLocks noChangeAspect="1"/>
           </p:cNvPicPr>
@@ -13102,7 +13324,7 @@
       </p:sp>
       <p:pic>
         <p:nvPicPr>
-          <p:cNvPr id="5" name="Image 1" descr="/Users/danwahlin/.copilot/session-state/56a7a0da-def8-48d4-b5e8-0ac3878cb8dd/files/slides-build/icons/FaGithub-1F2328.png">
+          <p:cNvPr id="5" name="Image 1" descr="Open this chapter on GitHub">
             <a:hlinkClick r:id="rId3" tooltip="https://github.com/github/copilot-app-for-beginners/tree/main/01-tour-the-app"/>
           </p:cNvPr>
           <p:cNvPicPr>
@@ -13255,7 +13477,7 @@
       </p:sp>
       <p:pic>
         <p:nvPicPr>
-          <p:cNvPr id="9" name="Image 2" descr="/Users/danwahlin/.copilot/session-state/56a7a0da-def8-48d4-b5e8-0ac3878cb8dd/files/slides-build/img/01-sidebar-crop.png">    </p:cNvPr>
+          <p:cNvPr id="9" name="Image 2" descr="GitHub Copilot app sidebar with the main views and the Projects list">    </p:cNvPr>
           <p:cNvPicPr>
             <a:picLocks noChangeAspect="1"/>
           </p:cNvPicPr>
@@ -13311,7 +13533,13 @@
       </p:sp>
       <p:pic>
         <p:nvPicPr>
-          <p:cNvPr id="11" name="Image 3" descr="/Users/danwahlin/.copilot/session-state/56a7a0da-def8-48d4-b5e8-0ac3878cb8dd/files/slides-build/icons/GoPlus-0969DA.png">    </p:cNvPr>
+          <p:cNvPr id="11" name="Image 3" descr="">
+            <a:extLst>
+              <a:ext uri="{C183D7F6-B498-43B3-948B-1728B52AA6E4}">
+                <adec:decorative xmlns:adec="http://schemas.microsoft.com/office/drawing/2017/decorative" val="1"/>
+              </a:ext>
+            </a:extLst>
+          </p:cNvPr>
           <p:cNvPicPr>
             <a:picLocks noChangeAspect="1"/>
           </p:cNvPicPr>
@@ -13448,7 +13676,13 @@
       </p:sp>
       <p:pic>
         <p:nvPicPr>
-          <p:cNvPr id="15" name="Image 4" descr="/Users/danwahlin/.copilot/session-state/56a7a0da-def8-48d4-b5e8-0ac3878cb8dd/files/slides-build/icons/GoGitPullRequest-8250DF.png">    </p:cNvPr>
+          <p:cNvPr id="15" name="Image 4" descr="">
+            <a:extLst>
+              <a:ext uri="{C183D7F6-B498-43B3-948B-1728B52AA6E4}">
+                <adec:decorative xmlns:adec="http://schemas.microsoft.com/office/drawing/2017/decorative" val="1"/>
+              </a:ext>
+            </a:extLst>
+          </p:cNvPr>
           <p:cNvPicPr>
             <a:picLocks noChangeAspect="1"/>
           </p:cNvPicPr>
@@ -13585,7 +13819,13 @@
       </p:sp>
       <p:pic>
         <p:nvPicPr>
-          <p:cNvPr id="19" name="Image 5" descr="/Users/danwahlin/.copilot/session-state/56a7a0da-def8-48d4-b5e8-0ac3878cb8dd/files/slides-build/icons/GoClock-BC4C00.png">    </p:cNvPr>
+          <p:cNvPr id="19" name="Image 5" descr="">
+            <a:extLst>
+              <a:ext uri="{C183D7F6-B498-43B3-948B-1728B52AA6E4}">
+                <adec:decorative xmlns:adec="http://schemas.microsoft.com/office/drawing/2017/decorative" val="1"/>
+              </a:ext>
+            </a:extLst>
+          </p:cNvPr>
           <p:cNvPicPr>
             <a:picLocks noChangeAspect="1"/>
           </p:cNvPicPr>
@@ -13722,7 +13962,13 @@
       </p:sp>
       <p:pic>
         <p:nvPicPr>
-          <p:cNvPr id="23" name="Image 6" descr="/Users/danwahlin/.copilot/session-state/56a7a0da-def8-48d4-b5e8-0ac3878cb8dd/files/slides-build/icons/GoPlug-1A7F37.png">    </p:cNvPr>
+          <p:cNvPr id="23" name="Image 6" descr="">
+            <a:extLst>
+              <a:ext uri="{C183D7F6-B498-43B3-948B-1728B52AA6E4}">
+                <adec:decorative xmlns:adec="http://schemas.microsoft.com/office/drawing/2017/decorative" val="1"/>
+              </a:ext>
+            </a:extLst>
+          </p:cNvPr>
           <p:cNvPicPr>
             <a:picLocks noChangeAspect="1"/>
           </p:cNvPicPr>
@@ -13859,7 +14105,13 @@
       </p:sp>
       <p:pic>
         <p:nvPicPr>
-          <p:cNvPr id="27" name="Image 7" descr="/Users/danwahlin/.copilot/session-state/56a7a0da-def8-48d4-b5e8-0ac3878cb8dd/files/slides-build/icons/GoKebabHorizontal-59636E.png">    </p:cNvPr>
+          <p:cNvPr id="27" name="Image 7" descr="">
+            <a:extLst>
+              <a:ext uri="{C183D7F6-B498-43B3-948B-1728B52AA6E4}">
+                <adec:decorative xmlns:adec="http://schemas.microsoft.com/office/drawing/2017/decorative" val="1"/>
+              </a:ext>
+            </a:extLst>
+          </p:cNvPr>
           <p:cNvPicPr>
             <a:picLocks noChangeAspect="1"/>
           </p:cNvPicPr>
@@ -13996,7 +14248,13 @@
       </p:grpSpPr>
       <p:pic>
         <p:nvPicPr>
-          <p:cNvPr id="2" name="Image 0" descr="/Users/danwahlin/.copilot/session-state/56a7a0da-def8-48d4-b5e8-0ac3878cb8dd/files/slides-build/img/grad-corner-pattern.png">    </p:cNvPr>
+          <p:cNvPr id="2" name="Image 0" descr="">
+            <a:extLst>
+              <a:ext uri="{C183D7F6-B498-43B3-948B-1728B52AA6E4}">
+                <adec:decorative xmlns:adec="http://schemas.microsoft.com/office/drawing/2017/decorative" val="1"/>
+              </a:ext>
+            </a:extLst>
+          </p:cNvPr>
           <p:cNvPicPr>
             <a:picLocks noChangeAspect="1"/>
           </p:cNvPicPr>
@@ -14091,7 +14349,7 @@
       </p:sp>
       <p:pic>
         <p:nvPicPr>
-          <p:cNvPr id="5" name="Image 1" descr="/Users/danwahlin/.copilot/session-state/56a7a0da-def8-48d4-b5e8-0ac3878cb8dd/files/slides-build/icons/FaGithub-1F2328.png">
+          <p:cNvPr id="5" name="Image 1" descr="Open this chapter on GitHub">
             <a:hlinkClick r:id="rId3" tooltip="https://github.com/github/copilot-app-for-beginners/tree/main/01-tour-the-app"/>
           </p:cNvPr>
           <p:cNvPicPr>
@@ -14289,7 +14547,7 @@
       </p:sp>
       <p:pic>
         <p:nvPicPr>
-          <p:cNvPr id="10" name="Image 2" descr="/Users/danwahlin/.copilot/session-state/56a7a0da-def8-48d4-b5e8-0ac3878cb8dd/files/slides-build/img/01-pulls-crop.png">    </p:cNvPr>
+          <p:cNvPr id="10" name="Image 2" descr="Pull requests view">    </p:cNvPr>
           <p:cNvPicPr>
             <a:picLocks noChangeAspect="1"/>
           </p:cNvPicPr>
@@ -14345,7 +14603,13 @@
       </p:sp>
       <p:pic>
         <p:nvPicPr>
-          <p:cNvPr id="12" name="Image 3" descr="/Users/danwahlin/.copilot/session-state/56a7a0da-def8-48d4-b5e8-0ac3878cb8dd/files/slides-build/icons/GoGitPullRequest-0969DA.png">    </p:cNvPr>
+          <p:cNvPr id="12" name="Image 3" descr="">
+            <a:extLst>
+              <a:ext uri="{C183D7F6-B498-43B3-948B-1728B52AA6E4}">
+                <adec:decorative xmlns:adec="http://schemas.microsoft.com/office/drawing/2017/decorative" val="1"/>
+              </a:ext>
+            </a:extLst>
+          </p:cNvPr>
           <p:cNvPicPr>
             <a:picLocks noChangeAspect="1"/>
           </p:cNvPicPr>
@@ -14527,7 +14791,7 @@
       </p:sp>
       <p:pic>
         <p:nvPicPr>
-          <p:cNvPr id="16" name="Image 4" descr="/Users/danwahlin/.copilot/session-state/56a7a0da-def8-48d4-b5e8-0ac3878cb8dd/files/slides-build/img/01-issues-crop.png">    </p:cNvPr>
+          <p:cNvPr id="16" name="Image 4" descr="Issues view">    </p:cNvPr>
           <p:cNvPicPr>
             <a:picLocks noChangeAspect="1"/>
           </p:cNvPicPr>
@@ -14583,7 +14847,13 @@
       </p:sp>
       <p:pic>
         <p:nvPicPr>
-          <p:cNvPr id="18" name="Image 5" descr="/Users/danwahlin/.copilot/session-state/56a7a0da-def8-48d4-b5e8-0ac3878cb8dd/files/slides-build/icons/GoIssueOpened-8250DF.png">    </p:cNvPr>
+          <p:cNvPr id="18" name="Image 5" descr="">
+            <a:extLst>
+              <a:ext uri="{C183D7F6-B498-43B3-948B-1728B52AA6E4}">
+                <adec:decorative xmlns:adec="http://schemas.microsoft.com/office/drawing/2017/decorative" val="1"/>
+              </a:ext>
+            </a:extLst>
+          </p:cNvPr>
           <p:cNvPicPr>
             <a:picLocks noChangeAspect="1"/>
           </p:cNvPicPr>
@@ -14754,7 +15024,13 @@
       </p:grpSpPr>
       <p:pic>
         <p:nvPicPr>
-          <p:cNvPr id="2" name="Image 0" descr="/Users/danwahlin/.copilot/session-state/56a7a0da-def8-48d4-b5e8-0ac3878cb8dd/files/slides-build/img/grad-corner-pattern.png">    </p:cNvPr>
+          <p:cNvPr id="2" name="Image 0" descr="">
+            <a:extLst>
+              <a:ext uri="{C183D7F6-B498-43B3-948B-1728B52AA6E4}">
+                <adec:decorative xmlns:adec="http://schemas.microsoft.com/office/drawing/2017/decorative" val="1"/>
+              </a:ext>
+            </a:extLst>
+          </p:cNvPr>
           <p:cNvPicPr>
             <a:picLocks noChangeAspect="1"/>
           </p:cNvPicPr>
@@ -14849,7 +15125,7 @@
       </p:sp>
       <p:pic>
         <p:nvPicPr>
-          <p:cNvPr id="5" name="Image 1" descr="/Users/danwahlin/.copilot/session-state/56a7a0da-def8-48d4-b5e8-0ac3878cb8dd/files/slides-build/icons/FaGithub-1F2328.png">
+          <p:cNvPr id="5" name="Image 1" descr="Open this chapter on GitHub">
             <a:hlinkClick r:id="rId3" tooltip="https://github.com/github/copilot-app-for-beginners/tree/main/01-tour-the-app"/>
           </p:cNvPr>
           <p:cNvPicPr>
@@ -15002,7 +15278,7 @@
       </p:sp>
       <p:pic>
         <p:nvPicPr>
-          <p:cNvPr id="9" name="Image 2" descr="/Users/danwahlin/.copilot/session-state/56a7a0da-def8-48d4-b5e8-0ac3878cb8dd/files/slides-build/img/01-automations-crop.png">    </p:cNvPr>
+          <p:cNvPr id="9" name="Image 2" descr="Automations view">    </p:cNvPr>
           <p:cNvPicPr>
             <a:picLocks noChangeAspect="1"/>
           </p:cNvPicPr>
@@ -15094,7 +15370,13 @@
       </p:sp>
       <p:pic>
         <p:nvPicPr>
-          <p:cNvPr id="12" name="Image 3" descr="/Users/danwahlin/.copilot/session-state/56a7a0da-def8-48d4-b5e8-0ac3878cb8dd/files/slides-build/icons/GoClock-BC4C00.png">    </p:cNvPr>
+          <p:cNvPr id="12" name="Image 3" descr="">
+            <a:extLst>
+              <a:ext uri="{C183D7F6-B498-43B3-948B-1728B52AA6E4}">
+                <adec:decorative xmlns:adec="http://schemas.microsoft.com/office/drawing/2017/decorative" val="1"/>
+              </a:ext>
+            </a:extLst>
+          </p:cNvPr>
           <p:cNvPicPr>
             <a:picLocks noChangeAspect="1"/>
           </p:cNvPicPr>
@@ -15267,7 +15549,13 @@
       </p:sp>
       <p:pic>
         <p:nvPicPr>
-          <p:cNvPr id="17" name="Image 4" descr="/Users/danwahlin/.copilot/session-state/56a7a0da-def8-48d4-b5e8-0ac3878cb8dd/files/slides-build/icons/GoGear-1A7F37.png">    </p:cNvPr>
+          <p:cNvPr id="17" name="Image 4" descr="">
+            <a:extLst>
+              <a:ext uri="{C183D7F6-B498-43B3-948B-1728B52AA6E4}">
+                <adec:decorative xmlns:adec="http://schemas.microsoft.com/office/drawing/2017/decorative" val="1"/>
+              </a:ext>
+            </a:extLst>
+          </p:cNvPr>
           <p:cNvPicPr>
             <a:picLocks noChangeAspect="1"/>
           </p:cNvPicPr>
